--- a/course_data/presentations/practical_spring_boot_for_tdp.pptx
+++ b/course_data/presentations/practical_spring_boot_for_tdp.pptx
@@ -5,22 +5,25 @@
     <p:sldMasterId id="2147483797" r:id="rId4"/>
   </p:sldMasterIdLst>
   <p:notesMasterIdLst>
-    <p:notesMasterId r:id="rId18"/>
+    <p:notesMasterId r:id="rId21"/>
   </p:notesMasterIdLst>
   <p:sldIdLst>
     <p:sldId id="256" r:id="rId5"/>
     <p:sldId id="330" r:id="rId6"/>
     <p:sldId id="336" r:id="rId7"/>
-    <p:sldId id="337" r:id="rId8"/>
-    <p:sldId id="261" r:id="rId9"/>
-    <p:sldId id="335" r:id="rId10"/>
-    <p:sldId id="333" r:id="rId11"/>
-    <p:sldId id="334" r:id="rId12"/>
-    <p:sldId id="262" r:id="rId13"/>
-    <p:sldId id="264" r:id="rId14"/>
-    <p:sldId id="318" r:id="rId15"/>
-    <p:sldId id="319" r:id="rId16"/>
-    <p:sldId id="265" r:id="rId17"/>
+    <p:sldId id="339" r:id="rId8"/>
+    <p:sldId id="337" r:id="rId9"/>
+    <p:sldId id="338" r:id="rId10"/>
+    <p:sldId id="261" r:id="rId11"/>
+    <p:sldId id="335" r:id="rId12"/>
+    <p:sldId id="333" r:id="rId13"/>
+    <p:sldId id="334" r:id="rId14"/>
+    <p:sldId id="262" r:id="rId15"/>
+    <p:sldId id="264" r:id="rId16"/>
+    <p:sldId id="318" r:id="rId17"/>
+    <p:sldId id="319" r:id="rId18"/>
+    <p:sldId id="265" r:id="rId19"/>
+    <p:sldId id="340" r:id="rId20"/>
   </p:sldIdLst>
   <p:sldSz cx="12192000" cy="6858000"/>
   <p:notesSz cx="6858000" cy="9144000"/>
@@ -225,7 +228,7 @@
           <a:p>
             <a:fld id="{AD4DB1D7-A2E6-5540-AAB6-9A95390687AC}" type="datetimeFigureOut">
               <a:rPr lang="en-IL" smtClean="0"/>
-              <a:t>13/08/2024</a:t>
+              <a:t>12/09/2026</a:t>
             </a:fld>
             <a:endParaRPr lang="en-IL"/>
           </a:p>
@@ -537,7 +540,7 @@
           <a:bodyPr/>
           <a:lstStyle/>
           <a:p>
-            <a:endParaRPr lang="en-IL" dirty="0"/>
+            <a:endParaRPr lang="en-IL"/>
           </a:p>
         </p:txBody>
       </p:sp>
@@ -736,7 +739,7 @@
     </p:spTree>
     <p:extLst>
       <p:ext uri="{BB962C8B-B14F-4D97-AF65-F5344CB8AC3E}">
-        <p14:creationId xmlns:p14="http://schemas.microsoft.com/office/powerpoint/2010/main" val="3398802603"/>
+        <p14:creationId xmlns:p14="http://schemas.microsoft.com/office/powerpoint/2010/main" val="56390821"/>
       </p:ext>
     </p:extLst>
   </p:cSld>
@@ -811,7 +814,7 @@
           <a:p>
             <a:fld id="{B5FEB3D3-3C4F-5E4D-9290-0C0B5A2442F8}" type="slidenum">
               <a:rPr lang="en-IL" smtClean="0"/>
-              <a:t>6</a:t>
+              <a:t>7</a:t>
             </a:fld>
             <a:endParaRPr lang="en-IL"/>
           </a:p>
@@ -820,7 +823,7 @@
     </p:spTree>
     <p:extLst>
       <p:ext uri="{BB962C8B-B14F-4D97-AF65-F5344CB8AC3E}">
-        <p14:creationId xmlns:p14="http://schemas.microsoft.com/office/powerpoint/2010/main" val="4177350856"/>
+        <p14:creationId xmlns:p14="http://schemas.microsoft.com/office/powerpoint/2010/main" val="3398802603"/>
       </p:ext>
     </p:extLst>
   </p:cSld>
@@ -904,7 +907,7 @@
     </p:spTree>
     <p:extLst>
       <p:ext uri="{BB962C8B-B14F-4D97-AF65-F5344CB8AC3E}">
-        <p14:creationId xmlns:p14="http://schemas.microsoft.com/office/powerpoint/2010/main" val="1926990871"/>
+        <p14:creationId xmlns:p14="http://schemas.microsoft.com/office/powerpoint/2010/main" val="4177350856"/>
       </p:ext>
     </p:extLst>
   </p:cSld>
@@ -958,6 +961,90 @@
           <a:bodyPr/>
           <a:lstStyle/>
           <a:p>
+            <a:endParaRPr lang="en-IL" dirty="0"/>
+          </a:p>
+        </p:txBody>
+      </p:sp>
+      <p:sp>
+        <p:nvSpPr>
+          <p:cNvPr id="4" name="Slide Number Placeholder 3"/>
+          <p:cNvSpPr>
+            <a:spLocks noGrp="1"/>
+          </p:cNvSpPr>
+          <p:nvPr>
+            <p:ph type="sldNum" sz="quarter" idx="5"/>
+          </p:nvPr>
+        </p:nvSpPr>
+        <p:spPr/>
+        <p:txBody>
+          <a:bodyPr/>
+          <a:lstStyle/>
+          <a:p>
+            <a:fld id="{B5FEB3D3-3C4F-5E4D-9290-0C0B5A2442F8}" type="slidenum">
+              <a:rPr lang="en-IL" smtClean="0"/>
+              <a:t>10</a:t>
+            </a:fld>
+            <a:endParaRPr lang="en-IL"/>
+          </a:p>
+        </p:txBody>
+      </p:sp>
+    </p:spTree>
+    <p:extLst>
+      <p:ext uri="{BB962C8B-B14F-4D97-AF65-F5344CB8AC3E}">
+        <p14:creationId xmlns:p14="http://schemas.microsoft.com/office/powerpoint/2010/main" val="1926990871"/>
+      </p:ext>
+    </p:extLst>
+  </p:cSld>
+  <p:clrMapOvr>
+    <a:masterClrMapping/>
+  </p:clrMapOvr>
+</p:notes>
+</file>
+
+<file path=ppt/notesSlides/notesSlide7.xml><?xml version="1.0" encoding="utf-8"?>
+<p:notes xmlns:a="http://schemas.openxmlformats.org/drawingml/2006/main" xmlns:r="http://schemas.openxmlformats.org/officeDocument/2006/relationships" xmlns:p="http://schemas.openxmlformats.org/presentationml/2006/main">
+  <p:cSld>
+    <p:spTree>
+      <p:nvGrpSpPr>
+        <p:cNvPr id="1" name=""/>
+        <p:cNvGrpSpPr/>
+        <p:nvPr/>
+      </p:nvGrpSpPr>
+      <p:grpSpPr>
+        <a:xfrm>
+          <a:off x="0" y="0"/>
+          <a:ext cx="0" cy="0"/>
+          <a:chOff x="0" y="0"/>
+          <a:chExt cx="0" cy="0"/>
+        </a:xfrm>
+      </p:grpSpPr>
+      <p:sp>
+        <p:nvSpPr>
+          <p:cNvPr id="2" name="Slide Image Placeholder 1"/>
+          <p:cNvSpPr>
+            <a:spLocks noGrp="1" noRot="1" noChangeAspect="1"/>
+          </p:cNvSpPr>
+          <p:nvPr>
+            <p:ph type="sldImg"/>
+          </p:nvPr>
+        </p:nvSpPr>
+        <p:spPr/>
+      </p:sp>
+      <p:sp>
+        <p:nvSpPr>
+          <p:cNvPr id="3" name="Notes Placeholder 2"/>
+          <p:cNvSpPr>
+            <a:spLocks noGrp="1"/>
+          </p:cNvSpPr>
+          <p:nvPr>
+            <p:ph type="body" idx="1"/>
+          </p:nvPr>
+        </p:nvSpPr>
+        <p:spPr/>
+        <p:txBody>
+          <a:bodyPr/>
+          <a:lstStyle/>
+          <a:p>
             <a:pPr marL="0" marR="0" lvl="0" indent="0" algn="l" defTabSz="914400" rtl="0" eaLnBrk="1" fontAlgn="auto" latinLnBrk="0" hangingPunct="1">
               <a:lnSpc>
                 <a:spcPct val="100000"/>
@@ -1002,7 +1089,7 @@
           <a:p>
             <a:fld id="{B5FEB3D3-3C4F-5E4D-9290-0C0B5A2442F8}" type="slidenum">
               <a:rPr lang="en-IL" smtClean="0"/>
-              <a:t>12</a:t>
+              <a:t>14</a:t>
             </a:fld>
             <a:endParaRPr lang="en-IL"/>
           </a:p>
@@ -1190,6 +1277,13 @@
               <a:schemeClr val="lt1"/>
             </a:fontRef>
           </p:style>
+          <p:txBody>
+            <a:bodyPr/>
+            <a:lstStyle/>
+            <a:p>
+              <a:endParaRPr lang="en-IL"/>
+            </a:p>
+          </p:txBody>
         </p:sp>
         <p:sp>
           <p:nvSpPr>
@@ -1253,6 +1347,13 @@
               <a:schemeClr val="lt1"/>
             </a:fontRef>
           </p:style>
+          <p:txBody>
+            <a:bodyPr/>
+            <a:lstStyle/>
+            <a:p>
+              <a:endParaRPr lang="en-IL"/>
+            </a:p>
+          </p:txBody>
         </p:sp>
         <p:sp>
           <p:nvSpPr>
@@ -1294,6 +1395,13 @@
               <a:schemeClr val="lt1"/>
             </a:fontRef>
           </p:style>
+          <p:txBody>
+            <a:bodyPr/>
+            <a:lstStyle/>
+            <a:p>
+              <a:endParaRPr lang="en-IL"/>
+            </a:p>
+          </p:txBody>
         </p:sp>
         <p:sp>
           <p:nvSpPr>
@@ -1358,6 +1466,13 @@
               <a:schemeClr val="lt1"/>
             </a:fontRef>
           </p:style>
+          <p:txBody>
+            <a:bodyPr/>
+            <a:lstStyle/>
+            <a:p>
+              <a:endParaRPr lang="en-IL"/>
+            </a:p>
+          </p:txBody>
         </p:sp>
         <p:sp>
           <p:nvSpPr>
@@ -1423,6 +1538,13 @@
               <a:schemeClr val="lt1"/>
             </a:fontRef>
           </p:style>
+          <p:txBody>
+            <a:bodyPr/>
+            <a:lstStyle/>
+            <a:p>
+              <a:endParaRPr lang="en-IL"/>
+            </a:p>
+          </p:txBody>
         </p:sp>
         <p:sp>
           <p:nvSpPr>
@@ -1486,6 +1608,13 @@
               <a:schemeClr val="lt1"/>
             </a:fontRef>
           </p:style>
+          <p:txBody>
+            <a:bodyPr/>
+            <a:lstStyle/>
+            <a:p>
+              <a:endParaRPr lang="en-IL"/>
+            </a:p>
+          </p:txBody>
         </p:sp>
         <p:sp>
           <p:nvSpPr>
@@ -1527,6 +1656,13 @@
               <a:schemeClr val="lt1"/>
             </a:fontRef>
           </p:style>
+          <p:txBody>
+            <a:bodyPr/>
+            <a:lstStyle/>
+            <a:p>
+              <a:endParaRPr lang="en-IL"/>
+            </a:p>
+          </p:txBody>
         </p:sp>
         <p:sp>
           <p:nvSpPr>
@@ -1568,6 +1704,13 @@
               <a:schemeClr val="lt1"/>
             </a:fontRef>
           </p:style>
+          <p:txBody>
+            <a:bodyPr/>
+            <a:lstStyle/>
+            <a:p>
+              <a:endParaRPr lang="en-IL"/>
+            </a:p>
+          </p:txBody>
         </p:sp>
       </p:grpSp>
       <p:sp>
@@ -1746,7 +1889,7 @@
             <a:fld id="{B61BEF0D-F0BB-DE4B-95CE-6DB70DBA9567}" type="datetimeFigureOut">
               <a:rPr lang="en-US" smtClean="0"/>
               <a:pPr/>
-              <a:t>8/13/24</a:t>
+              <a:t>9/12/26</a:t>
             </a:fld>
             <a:endParaRPr lang="en-US" dirty="0"/>
           </a:p>
@@ -1999,7 +2142,7 @@
             <a:fld id="{B61BEF0D-F0BB-DE4B-95CE-6DB70DBA9567}" type="datetimeFigureOut">
               <a:rPr lang="en-US" smtClean="0"/>
               <a:pPr/>
-              <a:t>8/13/24</a:t>
+              <a:t>9/12/26</a:t>
             </a:fld>
             <a:endParaRPr lang="en-US" dirty="0"/>
           </a:p>
@@ -2315,7 +2458,7 @@
             <a:fld id="{B61BEF0D-F0BB-DE4B-95CE-6DB70DBA9567}" type="datetimeFigureOut">
               <a:rPr lang="en-US" smtClean="0"/>
               <a:pPr/>
-              <a:t>8/13/24</a:t>
+              <a:t>9/12/26</a:t>
             </a:fld>
             <a:endParaRPr lang="en-US" dirty="0"/>
           </a:p>
@@ -2644,7 +2787,7 @@
             <a:fld id="{B61BEF0D-F0BB-DE4B-95CE-6DB70DBA9567}" type="datetimeFigureOut">
               <a:rPr lang="en-US" smtClean="0"/>
               <a:pPr/>
-              <a:t>8/13/24</a:t>
+              <a:t>9/12/26</a:t>
             </a:fld>
             <a:endParaRPr lang="en-US" dirty="0"/>
           </a:p>
@@ -2960,7 +3103,7 @@
             <a:fld id="{B61BEF0D-F0BB-DE4B-95CE-6DB70DBA9567}" type="datetimeFigureOut">
               <a:rPr lang="en-US" smtClean="0"/>
               <a:pPr/>
-              <a:t>8/13/24</a:t>
+              <a:t>9/12/26</a:t>
             </a:fld>
             <a:endParaRPr lang="en-US" dirty="0"/>
           </a:p>
@@ -3349,7 +3492,7 @@
             <a:fld id="{B61BEF0D-F0BB-DE4B-95CE-6DB70DBA9567}" type="datetimeFigureOut">
               <a:rPr lang="en-US" smtClean="0"/>
               <a:pPr/>
-              <a:t>8/13/24</a:t>
+              <a:t>9/12/26</a:t>
             </a:fld>
             <a:endParaRPr lang="en-US" dirty="0"/>
           </a:p>
@@ -3520,7 +3663,7 @@
           <a:p>
             <a:fld id="{55C6B4A9-1611-4792-9094-5F34BCA07E0B}" type="datetimeFigureOut">
               <a:rPr lang="en-US" smtClean="0"/>
-              <a:t>8/13/24</a:t>
+              <a:t>9/12/26</a:t>
             </a:fld>
             <a:endParaRPr lang="en-US" dirty="0"/>
           </a:p>
@@ -3701,7 +3844,7 @@
             <a:fld id="{B61BEF0D-F0BB-DE4B-95CE-6DB70DBA9567}" type="datetimeFigureOut">
               <a:rPr lang="en-US" smtClean="0"/>
               <a:pPr/>
-              <a:t>8/13/24</a:t>
+              <a:t>9/12/26</a:t>
             </a:fld>
             <a:endParaRPr lang="en-US" dirty="0"/>
           </a:p>
@@ -3879,7 +4022,7 @@
             <a:fld id="{B61BEF0D-F0BB-DE4B-95CE-6DB70DBA9567}" type="datetimeFigureOut">
               <a:rPr lang="en-US" smtClean="0"/>
               <a:pPr/>
-              <a:t>8/13/24</a:t>
+              <a:t>9/12/26</a:t>
             </a:fld>
             <a:endParaRPr lang="en-US" dirty="0"/>
           </a:p>
@@ -4133,7 +4276,7 @@
             <a:fld id="{B61BEF0D-F0BB-DE4B-95CE-6DB70DBA9567}" type="datetimeFigureOut">
               <a:rPr lang="en-US" smtClean="0"/>
               <a:pPr/>
-              <a:t>8/13/24</a:t>
+              <a:t>9/12/26</a:t>
             </a:fld>
             <a:endParaRPr lang="en-US" dirty="0"/>
           </a:p>
@@ -4366,7 +4509,7 @@
           <a:p>
             <a:fld id="{EB712588-04B1-427B-82EE-E8DB90309F08}" type="datetimeFigureOut">
               <a:rPr lang="en-US" smtClean="0"/>
-              <a:t>8/13/24</a:t>
+              <a:t>9/12/26</a:t>
             </a:fld>
             <a:endParaRPr lang="en-US" dirty="0"/>
           </a:p>
@@ -4741,7 +4884,7 @@
             <a:fld id="{B61BEF0D-F0BB-DE4B-95CE-6DB70DBA9567}" type="datetimeFigureOut">
               <a:rPr lang="en-US" smtClean="0"/>
               <a:pPr/>
-              <a:t>8/13/24</a:t>
+              <a:t>9/12/26</a:t>
             </a:fld>
             <a:endParaRPr lang="en-US" dirty="0"/>
           </a:p>
@@ -4866,7 +5009,7 @@
             <a:fld id="{B61BEF0D-F0BB-DE4B-95CE-6DB70DBA9567}" type="datetimeFigureOut">
               <a:rPr lang="en-US" smtClean="0"/>
               <a:pPr/>
-              <a:t>8/13/24</a:t>
+              <a:t>9/12/26</a:t>
             </a:fld>
             <a:endParaRPr lang="en-US" dirty="0"/>
           </a:p>
@@ -4963,7 +5106,7 @@
             <a:fld id="{B61BEF0D-F0BB-DE4B-95CE-6DB70DBA9567}" type="datetimeFigureOut">
               <a:rPr lang="en-US" smtClean="0"/>
               <a:pPr/>
-              <a:t>8/13/24</a:t>
+              <a:t>9/12/26</a:t>
             </a:fld>
             <a:endParaRPr lang="en-US" dirty="0"/>
           </a:p>
@@ -5219,7 +5362,7 @@
           <a:p>
             <a:fld id="{42A54C80-263E-416B-A8E0-580EDEADCBDC}" type="datetimeFigureOut">
               <a:rPr lang="en-US" smtClean="0"/>
-              <a:t>8/13/24</a:t>
+              <a:t>9/12/26</a:t>
             </a:fld>
             <a:endParaRPr lang="en-US" dirty="0"/>
           </a:p>
@@ -5483,7 +5626,7 @@
             <a:fld id="{B61BEF0D-F0BB-DE4B-95CE-6DB70DBA9567}" type="datetimeFigureOut">
               <a:rPr lang="en-US" smtClean="0"/>
               <a:pPr/>
-              <a:t>8/13/24</a:t>
+              <a:t>9/12/26</a:t>
             </a:fld>
             <a:endParaRPr lang="en-US" dirty="0"/>
           </a:p>
@@ -5719,6 +5862,13 @@
               <a:schemeClr val="lt1"/>
             </a:fontRef>
           </p:style>
+          <p:txBody>
+            <a:bodyPr/>
+            <a:lstStyle/>
+            <a:p>
+              <a:endParaRPr lang="en-IL"/>
+            </a:p>
+          </p:txBody>
         </p:sp>
         <p:sp>
           <p:nvSpPr>
@@ -5782,6 +5932,13 @@
               <a:schemeClr val="lt1"/>
             </a:fontRef>
           </p:style>
+          <p:txBody>
+            <a:bodyPr/>
+            <a:lstStyle/>
+            <a:p>
+              <a:endParaRPr lang="en-IL"/>
+            </a:p>
+          </p:txBody>
         </p:sp>
         <p:sp>
           <p:nvSpPr>
@@ -5823,6 +5980,13 @@
               <a:schemeClr val="lt1"/>
             </a:fontRef>
           </p:style>
+          <p:txBody>
+            <a:bodyPr/>
+            <a:lstStyle/>
+            <a:p>
+              <a:endParaRPr lang="en-IL"/>
+            </a:p>
+          </p:txBody>
         </p:sp>
         <p:sp>
           <p:nvSpPr>
@@ -5887,6 +6051,13 @@
               <a:schemeClr val="lt1"/>
             </a:fontRef>
           </p:style>
+          <p:txBody>
+            <a:bodyPr/>
+            <a:lstStyle/>
+            <a:p>
+              <a:endParaRPr lang="en-IL"/>
+            </a:p>
+          </p:txBody>
         </p:sp>
         <p:sp>
           <p:nvSpPr>
@@ -5952,6 +6123,13 @@
               <a:schemeClr val="lt1"/>
             </a:fontRef>
           </p:style>
+          <p:txBody>
+            <a:bodyPr/>
+            <a:lstStyle/>
+            <a:p>
+              <a:endParaRPr lang="en-IL"/>
+            </a:p>
+          </p:txBody>
         </p:sp>
         <p:sp>
           <p:nvSpPr>
@@ -6015,6 +6193,13 @@
               <a:schemeClr val="lt1"/>
             </a:fontRef>
           </p:style>
+          <p:txBody>
+            <a:bodyPr/>
+            <a:lstStyle/>
+            <a:p>
+              <a:endParaRPr lang="en-IL"/>
+            </a:p>
+          </p:txBody>
         </p:sp>
         <p:sp>
           <p:nvSpPr>
@@ -6056,6 +6241,13 @@
               <a:schemeClr val="lt1"/>
             </a:fontRef>
           </p:style>
+          <p:txBody>
+            <a:bodyPr/>
+            <a:lstStyle/>
+            <a:p>
+              <a:endParaRPr lang="en-IL"/>
+            </a:p>
+          </p:txBody>
         </p:sp>
         <p:sp>
           <p:nvSpPr>
@@ -6097,6 +6289,13 @@
               <a:schemeClr val="lt1"/>
             </a:fontRef>
           </p:style>
+          <p:txBody>
+            <a:bodyPr/>
+            <a:lstStyle/>
+            <a:p>
+              <a:endParaRPr lang="en-IL"/>
+            </a:p>
+          </p:txBody>
         </p:sp>
       </p:grpSp>
       <p:sp>
@@ -6230,7 +6429,7 @@
             <a:fld id="{B61BEF0D-F0BB-DE4B-95CE-6DB70DBA9567}" type="datetimeFigureOut">
               <a:rPr lang="en-US" smtClean="0"/>
               <a:pPr/>
-              <a:t>8/13/24</a:t>
+              <a:t>9/12/26</a:t>
             </a:fld>
             <a:endParaRPr lang="en-US" dirty="0"/>
           </a:p>
@@ -6787,7 +6986,7 @@
         </p:spPr>
         <p:txBody>
           <a:bodyPr>
-            <a:normAutofit fontScale="90000"/>
+            <a:normAutofit/>
           </a:bodyPr>
           <a:lstStyle/>
           <a:p>
@@ -6843,7 +7042,16 @@
                 <a:latin typeface="ATT Aleck Sans" panose="020B0503020203020204" pitchFamily="34" charset="0"/>
                 <a:cs typeface="ATT Aleck Sans" panose="020B0503020203020204" pitchFamily="34" charset="0"/>
               </a:rPr>
-              <a:t>Idan Shalom, 2024</a:t>
+              <a:t>Idan Shalom, 2026</a:t>
+            </a:r>
+          </a:p>
+          <a:p>
+            <a:r>
+              <a:rPr lang="en-IL">
+                <a:latin typeface="ATT Aleck Sans" panose="020B0503020203020204" pitchFamily="34" charset="0"/>
+                <a:cs typeface="ATT Aleck Sans" panose="020B0503020203020204" pitchFamily="34" charset="0"/>
+              </a:rPr>
+              <a:t>Hands-on workshop</a:t>
             </a:r>
           </a:p>
         </p:txBody>
@@ -7059,6 +7267,52 @@
                                   </p:childTnLst>
                                 </p:cTn>
                               </p:par>
+                              <p:par>
+                                <p:cTn id="11" presetID="10" presetClass="entr" presetSubtype="0" fill="hold" grpId="0" nodeType="withEffect">
+                                  <p:stCondLst>
+                                    <p:cond delay="1500"/>
+                                  </p:stCondLst>
+                                  <p:iterate>
+                                    <p:tmPct val="10000"/>
+                                  </p:iterate>
+                                  <p:childTnLst>
+                                    <p:set>
+                                      <p:cBhvr>
+                                        <p:cTn id="12" dur="1" fill="hold">
+                                          <p:stCondLst>
+                                            <p:cond delay="0"/>
+                                          </p:stCondLst>
+                                        </p:cTn>
+                                        <p:tgtEl>
+                                          <p:spTgt spid="3">
+                                            <p:txEl>
+                                              <p:pRg st="1" end="1"/>
+                                            </p:txEl>
+                                          </p:spTgt>
+                                        </p:tgtEl>
+                                        <p:attrNameLst>
+                                          <p:attrName>style.visibility</p:attrName>
+                                        </p:attrNameLst>
+                                      </p:cBhvr>
+                                      <p:to>
+                                        <p:strVal val="visible"/>
+                                      </p:to>
+                                    </p:set>
+                                    <p:animEffect transition="in" filter="fade">
+                                      <p:cBhvr>
+                                        <p:cTn id="13" dur="700"/>
+                                        <p:tgtEl>
+                                          <p:spTgt spid="3">
+                                            <p:txEl>
+                                              <p:pRg st="1" end="1"/>
+                                            </p:txEl>
+                                          </p:spTgt>
+                                        </p:tgtEl>
+                                      </p:cBhvr>
+                                    </p:animEffect>
+                                  </p:childTnLst>
+                                </p:cTn>
+                              </p:par>
                             </p:childTnLst>
                           </p:cTn>
                         </p:par>
@@ -7097,6 +7351,14 @@
 <file path=ppt/slides/slide10.xml><?xml version="1.0" encoding="utf-8"?>
 <p:sld xmlns:a="http://schemas.openxmlformats.org/drawingml/2006/main" xmlns:r="http://schemas.openxmlformats.org/officeDocument/2006/relationships" xmlns:p="http://schemas.openxmlformats.org/presentationml/2006/main">
   <p:cSld>
+    <p:bg>
+      <p:bgPr>
+        <a:solidFill>
+          <a:schemeClr val="bg2"/>
+        </a:solidFill>
+        <a:effectLst/>
+      </p:bgPr>
+    </p:bg>
     <p:spTree>
       <p:nvGrpSpPr>
         <p:cNvPr id="1" name=""/>
@@ -7116,7 +7378,7 @@
           <p:cNvPr id="2" name="Title 1">
             <a:extLst>
               <a:ext uri="{FF2B5EF4-FFF2-40B4-BE49-F238E27FC236}">
-                <a16:creationId xmlns:a16="http://schemas.microsoft.com/office/drawing/2014/main" id="{4F6F5D9E-229E-E0D1-DCAC-8CEEA3631556}"/>
+                <a16:creationId xmlns:a16="http://schemas.microsoft.com/office/drawing/2014/main" id="{CC0DA605-5F54-5A7E-AFE2-FF24D8BBCE10}"/>
               </a:ext>
             </a:extLst>
           </p:cNvPr>
@@ -7127,14 +7389,11 @@
             <p:ph type="title"/>
           </p:nvPr>
         </p:nvSpPr>
-        <p:spPr>
-          <a:xfrm>
-            <a:off x="509169" y="199696"/>
-            <a:ext cx="8596668" cy="1320800"/>
-          </a:xfrm>
-        </p:spPr>
-        <p:txBody>
-          <a:bodyPr/>
+        <p:spPr/>
+        <p:txBody>
+          <a:bodyPr>
+            <a:normAutofit/>
+          </a:bodyPr>
           <a:lstStyle/>
           <a:p>
             <a:r>
@@ -7142,7 +7401,7 @@
                 <a:latin typeface="ATT Aleck Sans" panose="020B0503020203020204" pitchFamily="34" charset="0"/>
                 <a:cs typeface="ATT Aleck Sans" panose="020B0503020203020204" pitchFamily="34" charset="0"/>
               </a:rPr>
-              <a:t>What could be the problems with this implementation</a:t>
+              <a:t>Purposes of IoC</a:t>
             </a:r>
           </a:p>
         </p:txBody>
@@ -7152,7 +7411,7 @@
           <p:cNvPr id="3" name="Content Placeholder 2">
             <a:extLst>
               <a:ext uri="{FF2B5EF4-FFF2-40B4-BE49-F238E27FC236}">
-                <a16:creationId xmlns:a16="http://schemas.microsoft.com/office/drawing/2014/main" id="{3F6665E5-7BFC-8A6E-C923-33299B2CB606}"/>
+                <a16:creationId xmlns:a16="http://schemas.microsoft.com/office/drawing/2014/main" id="{BC5F8EC1-FE59-2C1C-561E-3C475AD57C09}"/>
               </a:ext>
             </a:extLst>
           </p:cNvPr>
@@ -7160,13 +7419,13 @@
             <a:spLocks noGrp="1"/>
           </p:cNvSpPr>
           <p:nvPr>
-            <p:ph sz="half" idx="1"/>
+            <p:ph idx="1"/>
           </p:nvPr>
         </p:nvSpPr>
         <p:spPr>
           <a:xfrm>
-            <a:off x="572230" y="1572010"/>
-            <a:ext cx="9296983" cy="3880772"/>
+            <a:off x="561720" y="1372313"/>
+            <a:ext cx="8596668" cy="3880773"/>
           </a:xfrm>
         </p:spPr>
         <p:txBody>
@@ -7177,163 +7436,599 @@
           <a:p>
             <a:pPr>
               <a:lnSpc>
-                <a:spcPct val="160000"/>
+                <a:spcPct val="150000"/>
               </a:lnSpc>
             </a:pPr>
             <a:r>
-              <a:rPr lang="en-IL" sz="2200" dirty="0">
+              <a:rPr lang="en-US" sz="2400" dirty="0">
                 <a:latin typeface="ATT Aleck Sans" panose="020B0503020203020204" pitchFamily="34" charset="0"/>
                 <a:cs typeface="ATT Aleck Sans" panose="020B0503020203020204" pitchFamily="34" charset="0"/>
               </a:rPr>
-              <a:t>Tight coupling between </a:t>
-            </a:r>
-            <a:r>
-              <a:rPr lang="en-IL" sz="2200" dirty="0">
-                <a:latin typeface="Consolas" panose="020B0609020204030204" pitchFamily="49" charset="0"/>
-                <a:cs typeface="Consolas" panose="020B0609020204030204" pitchFamily="49" charset="0"/>
-              </a:rPr>
-              <a:t>Computer</a:t>
-            </a:r>
-            <a:r>
-              <a:rPr lang="en-IL" sz="2200" dirty="0">
+              <a:t>Decouple </a:t>
+            </a:r>
+            <a:r>
+              <a:rPr lang="en-US" sz="2400">
                 <a:latin typeface="ATT Aleck Sans" panose="020B0503020203020204" pitchFamily="34" charset="0"/>
                 <a:cs typeface="ATT Aleck Sans" panose="020B0503020203020204" pitchFamily="34" charset="0"/>
               </a:rPr>
-              <a:t> and its components:</a:t>
-            </a:r>
-          </a:p>
-          <a:p>
-            <a:pPr lvl="1">
-              <a:lnSpc>
-                <a:spcPct val="160000"/>
-              </a:lnSpc>
-            </a:pPr>
-            <a:r>
-              <a:rPr lang="en-IL" sz="2200" dirty="0">
+              <a:t>what </a:t>
+            </a:r>
+            <a:r>
+              <a:rPr lang="en-US" sz="2400" dirty="0">
                 <a:latin typeface="ATT Aleck Sans" panose="020B0503020203020204" pitchFamily="34" charset="0"/>
                 <a:cs typeface="ATT Aleck Sans" panose="020B0503020203020204" pitchFamily="34" charset="0"/>
               </a:rPr>
-              <a:t>We </a:t>
-            </a:r>
-            <a:r>
-              <a:rPr lang="en-US" sz="2200" dirty="0">
+              <a:t>a </a:t>
+            </a:r>
+            <a:r>
+              <a:rPr lang="en-US" sz="2400">
                 <a:latin typeface="ATT Aleck Sans" panose="020B0503020203020204" pitchFamily="34" charset="0"/>
                 <a:cs typeface="ATT Aleck Sans" panose="020B0503020203020204" pitchFamily="34" charset="0"/>
               </a:rPr>
-              <a:t>must</a:t>
-            </a:r>
-            <a:r>
-              <a:rPr lang="en-IL" sz="2200" dirty="0">
+              <a:t>component does </a:t>
+            </a:r>
+            <a:r>
+              <a:rPr lang="en-US" sz="2400" dirty="0">
                 <a:latin typeface="ATT Aleck Sans" panose="020B0503020203020204" pitchFamily="34" charset="0"/>
                 <a:cs typeface="ATT Aleck Sans" panose="020B0503020203020204" pitchFamily="34" charset="0"/>
               </a:rPr>
-              <a:t> know how to create every component, and which parameters exactly should be used in the constructor.</a:t>
-            </a:r>
-          </a:p>
-          <a:p>
-            <a:pPr lvl="1">
-              <a:lnSpc>
-                <a:spcPct val="160000"/>
-              </a:lnSpc>
-            </a:pPr>
-            <a:r>
-              <a:rPr lang="en-IL" sz="2200" dirty="0">
+              <a:t>from </a:t>
+            </a:r>
+            <a:r>
+              <a:rPr lang="en-US" sz="2400">
                 <a:latin typeface="ATT Aleck Sans" panose="020B0503020203020204" pitchFamily="34" charset="0"/>
                 <a:cs typeface="ATT Aleck Sans" panose="020B0503020203020204" pitchFamily="34" charset="0"/>
               </a:rPr>
-              <a:t>If I’d like to create a </a:t>
-            </a:r>
-            <a:r>
-              <a:rPr lang="en-IL" sz="2200" dirty="0">
-                <a:latin typeface="Consolas" panose="020B0609020204030204" pitchFamily="49" charset="0"/>
-                <a:cs typeface="Consolas" panose="020B0609020204030204" pitchFamily="49" charset="0"/>
-              </a:rPr>
-              <a:t>Computer</a:t>
-            </a:r>
-            <a:r>
-              <a:rPr lang="en-IL" sz="2200" dirty="0">
+              <a:t>how </a:t>
+            </a:r>
+            <a:r>
+              <a:rPr lang="en-US" sz="2400" dirty="0">
                 <a:latin typeface="ATT Aleck Sans" panose="020B0503020203020204" pitchFamily="34" charset="0"/>
                 <a:cs typeface="ATT Aleck Sans" panose="020B0503020203020204" pitchFamily="34" charset="0"/>
               </a:rPr>
-              <a:t> with a different </a:t>
-            </a:r>
-            <a:r>
-              <a:rPr lang="en-IL" sz="2200" dirty="0">
-                <a:latin typeface="Consolas" panose="020B0609020204030204" pitchFamily="49" charset="0"/>
-                <a:cs typeface="Consolas" panose="020B0609020204030204" pitchFamily="49" charset="0"/>
-              </a:rPr>
-              <a:t>Processor</a:t>
-            </a:r>
-            <a:r>
-              <a:rPr lang="en-IL" sz="2200" dirty="0">
+              <a:t>its </a:t>
+            </a:r>
+            <a:r>
+              <a:rPr lang="en-US" sz="2400">
                 <a:latin typeface="ATT Aleck Sans" panose="020B0503020203020204" pitchFamily="34" charset="0"/>
                 <a:cs typeface="ATT Aleck Sans" panose="020B0503020203020204" pitchFamily="34" charset="0"/>
               </a:rPr>
-              <a:t>, I have to create another class for the Computer.</a:t>
-            </a:r>
-          </a:p>
-          <a:p>
-            <a:pPr lvl="1">
-              <a:lnSpc>
-                <a:spcPct val="160000"/>
-              </a:lnSpc>
-            </a:pPr>
-            <a:r>
-              <a:rPr lang="en-IL" sz="2200" dirty="0">
-                <a:latin typeface="ATT Aleck Sans" panose="020B0503020203020204" pitchFamily="34" charset="0"/>
-                <a:cs typeface="ATT Aleck Sans" panose="020B0503020203020204" pitchFamily="34" charset="0"/>
-              </a:rPr>
-              <a:t>How will I test my class? how will I inject mocks there?</a:t>
-            </a:r>
-          </a:p>
-          <a:p>
-            <a:pPr>
-              <a:lnSpc>
-                <a:spcPct val="160000"/>
-              </a:lnSpc>
-            </a:pPr>
-            <a:r>
-              <a:rPr lang="en-US" sz="2200" dirty="0">
-                <a:latin typeface="ATT Aleck Sans" panose="020B0503020203020204" pitchFamily="34" charset="0"/>
-                <a:cs typeface="ATT Aleck Sans" panose="020B0503020203020204" pitchFamily="34" charset="0"/>
-              </a:rPr>
-              <a:t>Poor polymorphism </a:t>
-            </a:r>
-            <a:endParaRPr lang="en-IL" sz="2200" dirty="0">
+              <a:t>dependencies are built</a:t>
+            </a:r>
+            <a:endParaRPr lang="en-US" sz="2400" dirty="0">
               <a:latin typeface="ATT Aleck Sans" panose="020B0503020203020204" pitchFamily="34" charset="0"/>
               <a:cs typeface="ATT Aleck Sans" panose="020B0503020203020204" pitchFamily="34" charset="0"/>
             </a:endParaRPr>
           </a:p>
           <a:p>
-            <a:pPr lvl="1">
+            <a:pPr>
               <a:lnSpc>
-                <a:spcPct val="160000"/>
+                <a:spcPct val="150000"/>
               </a:lnSpc>
             </a:pPr>
             <a:r>
-              <a:rPr lang="en-IL" sz="2200" dirty="0">
+              <a:rPr lang="en-US" sz="2400">
                 <a:latin typeface="ATT Aleck Sans" panose="020B0503020203020204" pitchFamily="34" charset="0"/>
                 <a:cs typeface="ATT Aleck Sans" panose="020B0503020203020204" pitchFamily="34" charset="0"/>
               </a:rPr>
-              <a:t>Leads to implementation-based design.</a:t>
-            </a:r>
+              <a:t>Greater </a:t>
+            </a:r>
+            <a:r>
+              <a:rPr lang="en-US" sz="2400" dirty="0">
+                <a:latin typeface="ATT Aleck Sans" panose="020B0503020203020204" pitchFamily="34" charset="0"/>
+                <a:cs typeface="ATT Aleck Sans" panose="020B0503020203020204" pitchFamily="34" charset="0"/>
+              </a:rPr>
+              <a:t>modularity </a:t>
+            </a:r>
+            <a:r>
+              <a:rPr lang="en-US" sz="2400">
+                <a:latin typeface="ATT Aleck Sans" panose="020B0503020203020204" pitchFamily="34" charset="0"/>
+                <a:cs typeface="ATT Aleck Sans" panose="020B0503020203020204" pitchFamily="34" charset="0"/>
+              </a:rPr>
+              <a:t>- a Computer need not know how </a:t>
+            </a:r>
+            <a:r>
+              <a:rPr lang="en-US" sz="2400" dirty="0">
+                <a:latin typeface="ATT Aleck Sans" panose="020B0503020203020204" pitchFamily="34" charset="0"/>
+                <a:cs typeface="ATT Aleck Sans" panose="020B0503020203020204" pitchFamily="34" charset="0"/>
+              </a:rPr>
+              <a:t>a </a:t>
+            </a:r>
+            <a:r>
+              <a:rPr lang="en-US" sz="2400">
+                <a:latin typeface="ATT Aleck Sans" panose="020B0503020203020204" pitchFamily="34" charset="0"/>
+                <a:cs typeface="ATT Aleck Sans" panose="020B0503020203020204" pitchFamily="34" charset="0"/>
+              </a:rPr>
+              <a:t>Processor is created</a:t>
+            </a:r>
+            <a:endParaRPr lang="en-US" sz="2400" dirty="0">
+              <a:latin typeface="ATT Aleck Sans" panose="020B0503020203020204" pitchFamily="34" charset="0"/>
+              <a:cs typeface="ATT Aleck Sans" panose="020B0503020203020204" pitchFamily="34" charset="0"/>
+            </a:endParaRPr>
+          </a:p>
+          <a:p>
+            <a:pPr>
+              <a:lnSpc>
+                <a:spcPct val="150000"/>
+              </a:lnSpc>
+            </a:pPr>
+            <a:r>
+              <a:rPr lang="en-US" sz="2400">
+                <a:latin typeface="ATT Aleck Sans" panose="020B0503020203020204" pitchFamily="34" charset="0"/>
+                <a:cs typeface="ATT Aleck Sans" panose="020B0503020203020204" pitchFamily="34" charset="0"/>
+              </a:rPr>
+              <a:t>Easier </a:t>
+            </a:r>
+            <a:r>
+              <a:rPr lang="en-US" sz="2400" dirty="0">
+                <a:latin typeface="ATT Aleck Sans" panose="020B0503020203020204" pitchFamily="34" charset="0"/>
+                <a:cs typeface="ATT Aleck Sans" panose="020B0503020203020204" pitchFamily="34" charset="0"/>
+              </a:rPr>
+              <a:t>testing </a:t>
+            </a:r>
+            <a:r>
+              <a:rPr lang="en-US" sz="2400">
+                <a:latin typeface="ATT Aleck Sans" panose="020B0503020203020204" pitchFamily="34" charset="0"/>
+                <a:cs typeface="ATT Aleck Sans" panose="020B0503020203020204" pitchFamily="34" charset="0"/>
+              </a:rPr>
+              <a:t>- isolate </a:t>
+            </a:r>
+            <a:r>
+              <a:rPr lang="en-US" sz="2400" dirty="0">
+                <a:latin typeface="ATT Aleck Sans" panose="020B0503020203020204" pitchFamily="34" charset="0"/>
+                <a:cs typeface="ATT Aleck Sans" panose="020B0503020203020204" pitchFamily="34" charset="0"/>
+              </a:rPr>
+              <a:t>components or </a:t>
+            </a:r>
+            <a:r>
+              <a:rPr lang="en-US" sz="2400">
+                <a:latin typeface="ATT Aleck Sans" panose="020B0503020203020204" pitchFamily="34" charset="0"/>
+                <a:cs typeface="ATT Aleck Sans" panose="020B0503020203020204" pitchFamily="34" charset="0"/>
+              </a:rPr>
+              <a:t>inject mocks instead of real ones</a:t>
+            </a:r>
+            <a:endParaRPr lang="en-US" sz="2400" dirty="0">
+              <a:latin typeface="ATT Aleck Sans" panose="020B0503020203020204" pitchFamily="34" charset="0"/>
+              <a:cs typeface="ATT Aleck Sans" panose="020B0503020203020204" pitchFamily="34" charset="0"/>
+            </a:endParaRPr>
           </a:p>
         </p:txBody>
       </p:sp>
     </p:spTree>
     <p:extLst>
       <p:ext uri="{BB962C8B-B14F-4D97-AF65-F5344CB8AC3E}">
-        <p14:creationId xmlns:p14="http://schemas.microsoft.com/office/powerpoint/2010/main" val="4238028326"/>
+        <p14:creationId xmlns:p14="http://schemas.microsoft.com/office/powerpoint/2010/main" val="1967367102"/>
       </p:ext>
     </p:extLst>
   </p:cSld>
   <p:clrMapOvr>
-    <a:masterClrMapping/>
+    <a:overrideClrMapping bg1="dk1" tx1="lt1" bg2="dk2" tx2="lt2" accent1="accent1" accent2="accent2" accent3="accent3" accent4="accent4" accent5="accent5" accent6="accent6" hlink="hlink" folHlink="folHlink"/>
   </p:clrMapOvr>
 </p:sld>
 </file>
 
 <file path=ppt/slides/slide11.xml><?xml version="1.0" encoding="utf-8"?>
+<p:sld xmlns:a="http://schemas.openxmlformats.org/drawingml/2006/main" xmlns:r="http://schemas.openxmlformats.org/officeDocument/2006/relationships" xmlns:p="http://schemas.openxmlformats.org/presentationml/2006/main">
+  <p:cSld>
+    <p:bg>
+      <p:bgRef idx="1001">
+        <a:schemeClr val="bg2"/>
+      </p:bgRef>
+    </p:bg>
+    <p:spTree>
+      <p:nvGrpSpPr>
+        <p:cNvPr id="1" name=""/>
+        <p:cNvGrpSpPr/>
+        <p:nvPr/>
+      </p:nvGrpSpPr>
+      <p:grpSpPr>
+        <a:xfrm>
+          <a:off x="0" y="0"/>
+          <a:ext cx="0" cy="0"/>
+          <a:chOff x="0" y="0"/>
+          <a:chExt cx="0" cy="0"/>
+        </a:xfrm>
+      </p:grpSpPr>
+      <p:sp>
+        <p:nvSpPr>
+          <p:cNvPr id="2" name="Title 1">
+            <a:extLst>
+              <a:ext uri="{FF2B5EF4-FFF2-40B4-BE49-F238E27FC236}">
+                <a16:creationId xmlns:a16="http://schemas.microsoft.com/office/drawing/2014/main" id="{33613CEB-B33C-5604-02BC-3036BDA84F19}"/>
+              </a:ext>
+            </a:extLst>
+          </p:cNvPr>
+          <p:cNvSpPr>
+            <a:spLocks noGrp="1"/>
+          </p:cNvSpPr>
+          <p:nvPr>
+            <p:ph type="title"/>
+          </p:nvPr>
+        </p:nvSpPr>
+        <p:spPr/>
+        <p:txBody>
+          <a:bodyPr vert="horz" lIns="91440" tIns="45720" rIns="91440" bIns="45720" rtlCol="0" anchor="t">
+            <a:normAutofit/>
+          </a:bodyPr>
+          <a:lstStyle/>
+          <a:p>
+            <a:r>
+              <a:rPr lang="en-US" b="1"/>
+              <a:t>The </a:t>
+            </a:r>
+            <a:r>
+              <a:rPr lang="en-US" b="1" dirty="0"/>
+              <a:t>traditional OOP approach</a:t>
+            </a:r>
+          </a:p>
+        </p:txBody>
+      </p:sp>
+      <p:sp>
+        <p:nvSpPr>
+          <p:cNvPr id="3" name="Content Placeholder 2">
+            <a:extLst>
+              <a:ext uri="{FF2B5EF4-FFF2-40B4-BE49-F238E27FC236}">
+                <a16:creationId xmlns:a16="http://schemas.microsoft.com/office/drawing/2014/main" id="{03CDAC2F-998A-9E7F-DD71-83F787124D43}"/>
+              </a:ext>
+            </a:extLst>
+          </p:cNvPr>
+          <p:cNvSpPr>
+            <a:spLocks noGrp="1"/>
+          </p:cNvSpPr>
+          <p:nvPr>
+            <p:ph sz="half" idx="1"/>
+          </p:nvPr>
+        </p:nvSpPr>
+        <p:spPr>
+          <a:xfrm>
+            <a:off x="714702" y="1954925"/>
+            <a:ext cx="9732581" cy="4086438"/>
+          </a:xfrm>
+        </p:spPr>
+        <p:txBody>
+          <a:bodyPr vert="horz" lIns="91440" tIns="45720" rIns="91440" bIns="45720" rtlCol="0">
+            <a:normAutofit/>
+          </a:bodyPr>
+          <a:lstStyle/>
+          <a:p>
+            <a:pPr marL="0" indent="0">
+              <a:buNone/>
+            </a:pPr>
+            <a:r>
+              <a:rPr lang="en-US" sz="2000" dirty="0">
+                <a:solidFill>
+                  <a:srgbClr val="FFFFFF"/>
+                </a:solidFill>
+                <a:latin typeface="ATT Aleck Sans" panose="020B0503020203020204" pitchFamily="34" charset="0"/>
+                <a:cs typeface="ATT Aleck Sans" panose="020B0503020203020204" pitchFamily="34" charset="0"/>
+              </a:rPr>
+              <a:t>In traditional OOP programming, when an object (e.g., a Computer) is created, it also instantiates its dependent classes (e.g., Processor, RAM instances):</a:t>
+            </a:r>
+          </a:p>
+          <a:p>
+            <a:pPr marL="0" indent="0"/>
+            <a:endParaRPr lang="en-US" sz="2000" dirty="0">
+              <a:solidFill>
+                <a:srgbClr val="FFFFFF"/>
+              </a:solidFill>
+              <a:latin typeface="ATT Aleck Sans" panose="020B0503020203020204" pitchFamily="34" charset="0"/>
+              <a:cs typeface="ATT Aleck Sans" panose="020B0503020203020204" pitchFamily="34" charset="0"/>
+            </a:endParaRPr>
+          </a:p>
+          <a:p>
+            <a:endParaRPr lang="en-US" sz="2000" dirty="0">
+              <a:solidFill>
+                <a:srgbClr val="FFFFFF"/>
+              </a:solidFill>
+              <a:latin typeface="ATT Aleck Sans" panose="020B0503020203020204" pitchFamily="34" charset="0"/>
+              <a:cs typeface="ATT Aleck Sans" panose="020B0503020203020204" pitchFamily="34" charset="0"/>
+            </a:endParaRPr>
+          </a:p>
+        </p:txBody>
+      </p:sp>
+      <p:sp>
+        <p:nvSpPr>
+          <p:cNvPr id="7" name="Content Placeholder 2">
+            <a:extLst>
+              <a:ext uri="{FF2B5EF4-FFF2-40B4-BE49-F238E27FC236}">
+                <a16:creationId xmlns:a16="http://schemas.microsoft.com/office/drawing/2014/main" id="{510CD3CA-7661-11B9-AF07-F39AF318C632}"/>
+              </a:ext>
+            </a:extLst>
+          </p:cNvPr>
+          <p:cNvSpPr txBox="1">
+            <a:spLocks/>
+          </p:cNvSpPr>
+          <p:nvPr/>
+        </p:nvSpPr>
+        <p:spPr>
+          <a:xfrm>
+            <a:off x="677333" y="2821899"/>
+            <a:ext cx="4184035" cy="974035"/>
+          </a:xfrm>
+          <a:prstGeom prst="rect">
+            <a:avLst/>
+          </a:prstGeom>
+        </p:spPr>
+        <p:txBody>
+          <a:bodyPr vert="horz" lIns="91440" tIns="45720" rIns="91440" bIns="45720" rtlCol="0">
+            <a:normAutofit/>
+          </a:bodyPr>
+          <a:lstStyle>
+            <a:lvl1pPr marL="342900" indent="-342900" algn="l" defTabSz="457200" rtl="0" eaLnBrk="1" latinLnBrk="0" hangingPunct="1">
+              <a:spcBef>
+                <a:spcPts val="1000"/>
+              </a:spcBef>
+              <a:spcAft>
+                <a:spcPts val="0"/>
+              </a:spcAft>
+              <a:buClr>
+                <a:schemeClr val="accent1"/>
+              </a:buClr>
+              <a:buSzPct val="80000"/>
+              <a:buFont typeface="Wingdings 3" charset="2"/>
+              <a:buChar char=""/>
+              <a:defRPr sz="1800" kern="1200">
+                <a:solidFill>
+                  <a:schemeClr val="tx1">
+                    <a:lumMod val="75000"/>
+                    <a:lumOff val="25000"/>
+                  </a:schemeClr>
+                </a:solidFill>
+                <a:latin typeface="+mn-lt"/>
+                <a:ea typeface="+mn-ea"/>
+                <a:cs typeface="+mn-cs"/>
+              </a:defRPr>
+            </a:lvl1pPr>
+            <a:lvl2pPr marL="742950" indent="-285750" algn="l" defTabSz="457200" rtl="0" eaLnBrk="1" latinLnBrk="0" hangingPunct="1">
+              <a:spcBef>
+                <a:spcPts val="1000"/>
+              </a:spcBef>
+              <a:spcAft>
+                <a:spcPts val="0"/>
+              </a:spcAft>
+              <a:buClr>
+                <a:schemeClr val="accent1"/>
+              </a:buClr>
+              <a:buSzPct val="80000"/>
+              <a:buFont typeface="Wingdings 3" charset="2"/>
+              <a:buChar char=""/>
+              <a:defRPr sz="1600" kern="1200">
+                <a:solidFill>
+                  <a:schemeClr val="tx1">
+                    <a:lumMod val="75000"/>
+                    <a:lumOff val="25000"/>
+                  </a:schemeClr>
+                </a:solidFill>
+                <a:latin typeface="+mn-lt"/>
+                <a:ea typeface="+mn-ea"/>
+                <a:cs typeface="+mn-cs"/>
+              </a:defRPr>
+            </a:lvl2pPr>
+            <a:lvl3pPr marL="1143000" indent="-228600" algn="l" defTabSz="457200" rtl="0" eaLnBrk="1" latinLnBrk="0" hangingPunct="1">
+              <a:spcBef>
+                <a:spcPts val="1000"/>
+              </a:spcBef>
+              <a:spcAft>
+                <a:spcPts val="0"/>
+              </a:spcAft>
+              <a:buClr>
+                <a:schemeClr val="accent1"/>
+              </a:buClr>
+              <a:buSzPct val="80000"/>
+              <a:buFont typeface="Wingdings 3" charset="2"/>
+              <a:buChar char=""/>
+              <a:defRPr sz="1400" kern="1200">
+                <a:solidFill>
+                  <a:schemeClr val="tx1">
+                    <a:lumMod val="75000"/>
+                    <a:lumOff val="25000"/>
+                  </a:schemeClr>
+                </a:solidFill>
+                <a:latin typeface="+mn-lt"/>
+                <a:ea typeface="+mn-ea"/>
+                <a:cs typeface="+mn-cs"/>
+              </a:defRPr>
+            </a:lvl3pPr>
+            <a:lvl4pPr marL="1600200" indent="-228600" algn="l" defTabSz="457200" rtl="0" eaLnBrk="1" latinLnBrk="0" hangingPunct="1">
+              <a:spcBef>
+                <a:spcPts val="1000"/>
+              </a:spcBef>
+              <a:spcAft>
+                <a:spcPts val="0"/>
+              </a:spcAft>
+              <a:buClr>
+                <a:schemeClr val="accent1"/>
+              </a:buClr>
+              <a:buSzPct val="80000"/>
+              <a:buFont typeface="Wingdings 3" charset="2"/>
+              <a:buChar char=""/>
+              <a:defRPr sz="1200" kern="1200">
+                <a:solidFill>
+                  <a:schemeClr val="tx1">
+                    <a:lumMod val="75000"/>
+                    <a:lumOff val="25000"/>
+                  </a:schemeClr>
+                </a:solidFill>
+                <a:latin typeface="+mn-lt"/>
+                <a:ea typeface="+mn-ea"/>
+                <a:cs typeface="+mn-cs"/>
+              </a:defRPr>
+            </a:lvl4pPr>
+            <a:lvl5pPr marL="2057400" indent="-228600" algn="l" defTabSz="457200" rtl="0" eaLnBrk="1" latinLnBrk="0" hangingPunct="1">
+              <a:spcBef>
+                <a:spcPts val="1000"/>
+              </a:spcBef>
+              <a:spcAft>
+                <a:spcPts val="0"/>
+              </a:spcAft>
+              <a:buClr>
+                <a:schemeClr val="accent1"/>
+              </a:buClr>
+              <a:buSzPct val="80000"/>
+              <a:buFont typeface="Wingdings 3" charset="2"/>
+              <a:buChar char=""/>
+              <a:defRPr sz="1200" kern="1200">
+                <a:solidFill>
+                  <a:schemeClr val="tx1">
+                    <a:lumMod val="75000"/>
+                    <a:lumOff val="25000"/>
+                  </a:schemeClr>
+                </a:solidFill>
+                <a:latin typeface="+mn-lt"/>
+                <a:ea typeface="+mn-ea"/>
+                <a:cs typeface="+mn-cs"/>
+              </a:defRPr>
+            </a:lvl5pPr>
+            <a:lvl6pPr marL="2514600" indent="-228600" algn="l" defTabSz="457200" rtl="0" eaLnBrk="1" latinLnBrk="0" hangingPunct="1">
+              <a:spcBef>
+                <a:spcPts val="1000"/>
+              </a:spcBef>
+              <a:spcAft>
+                <a:spcPts val="0"/>
+              </a:spcAft>
+              <a:buClr>
+                <a:schemeClr val="accent1"/>
+              </a:buClr>
+              <a:buSzPct val="80000"/>
+              <a:buFont typeface="Wingdings 3" charset="2"/>
+              <a:buChar char=""/>
+              <a:defRPr sz="1200" kern="1200">
+                <a:solidFill>
+                  <a:schemeClr val="tx1">
+                    <a:lumMod val="75000"/>
+                    <a:lumOff val="25000"/>
+                  </a:schemeClr>
+                </a:solidFill>
+                <a:latin typeface="+mn-lt"/>
+                <a:ea typeface="+mn-ea"/>
+                <a:cs typeface="+mn-cs"/>
+              </a:defRPr>
+            </a:lvl6pPr>
+            <a:lvl7pPr marL="2971800" indent="-228600" algn="l" defTabSz="457200" rtl="0" eaLnBrk="1" latinLnBrk="0" hangingPunct="1">
+              <a:spcBef>
+                <a:spcPts val="1000"/>
+              </a:spcBef>
+              <a:spcAft>
+                <a:spcPts val="0"/>
+              </a:spcAft>
+              <a:buClr>
+                <a:schemeClr val="accent1"/>
+              </a:buClr>
+              <a:buSzPct val="80000"/>
+              <a:buFont typeface="Wingdings 3" charset="2"/>
+              <a:buChar char=""/>
+              <a:defRPr sz="1200" kern="1200">
+                <a:solidFill>
+                  <a:schemeClr val="tx1">
+                    <a:lumMod val="75000"/>
+                    <a:lumOff val="25000"/>
+                  </a:schemeClr>
+                </a:solidFill>
+                <a:latin typeface="+mn-lt"/>
+                <a:ea typeface="+mn-ea"/>
+                <a:cs typeface="+mn-cs"/>
+              </a:defRPr>
+            </a:lvl7pPr>
+            <a:lvl8pPr marL="3429000" indent="-228600" algn="l" defTabSz="457200" rtl="0" eaLnBrk="1" latinLnBrk="0" hangingPunct="1">
+              <a:spcBef>
+                <a:spcPts val="1000"/>
+              </a:spcBef>
+              <a:spcAft>
+                <a:spcPts val="0"/>
+              </a:spcAft>
+              <a:buClr>
+                <a:schemeClr val="accent1"/>
+              </a:buClr>
+              <a:buSzPct val="80000"/>
+              <a:buFont typeface="Wingdings 3" charset="2"/>
+              <a:buChar char=""/>
+              <a:defRPr sz="1200" kern="1200">
+                <a:solidFill>
+                  <a:schemeClr val="tx1">
+                    <a:lumMod val="75000"/>
+                    <a:lumOff val="25000"/>
+                  </a:schemeClr>
+                </a:solidFill>
+                <a:latin typeface="+mn-lt"/>
+                <a:ea typeface="+mn-ea"/>
+                <a:cs typeface="+mn-cs"/>
+              </a:defRPr>
+            </a:lvl8pPr>
+            <a:lvl9pPr marL="3886200" indent="-228600" algn="l" defTabSz="457200" rtl="0" eaLnBrk="1" latinLnBrk="0" hangingPunct="1">
+              <a:spcBef>
+                <a:spcPts val="1000"/>
+              </a:spcBef>
+              <a:spcAft>
+                <a:spcPts val="0"/>
+              </a:spcAft>
+              <a:buClr>
+                <a:schemeClr val="accent1"/>
+              </a:buClr>
+              <a:buSzPct val="80000"/>
+              <a:buFont typeface="Wingdings 3" charset="2"/>
+              <a:buChar char=""/>
+              <a:defRPr sz="1200" kern="1200">
+                <a:solidFill>
+                  <a:schemeClr val="tx1">
+                    <a:lumMod val="75000"/>
+                    <a:lumOff val="25000"/>
+                  </a:schemeClr>
+                </a:solidFill>
+                <a:latin typeface="+mn-lt"/>
+                <a:ea typeface="+mn-ea"/>
+                <a:cs typeface="+mn-cs"/>
+              </a:defRPr>
+            </a:lvl9pPr>
+          </a:lstStyle>
+          <a:p>
+            <a:endParaRPr lang="en-IL" dirty="0"/>
+          </a:p>
+        </p:txBody>
+      </p:sp>
+      <p:pic>
+        <p:nvPicPr>
+          <p:cNvPr id="4" name="Picture 3">
+            <a:extLst>
+              <a:ext uri="{FF2B5EF4-FFF2-40B4-BE49-F238E27FC236}">
+                <a16:creationId xmlns:a16="http://schemas.microsoft.com/office/drawing/2014/main" id="{3C1C26D4-78CB-FC76-B716-3912090A6456}"/>
+              </a:ext>
+            </a:extLst>
+          </p:cNvPr>
+          <p:cNvPicPr>
+            <a:picLocks noChangeAspect="1"/>
+          </p:cNvPicPr>
+          <p:nvPr/>
+        </p:nvPicPr>
+        <p:blipFill>
+          <a:blip r:embed="rId2"/>
+          <a:stretch>
+            <a:fillRect/>
+          </a:stretch>
+        </p:blipFill>
+        <p:spPr>
+          <a:xfrm>
+            <a:off x="780392" y="2901832"/>
+            <a:ext cx="8962697" cy="3494348"/>
+          </a:xfrm>
+          <a:prstGeom prst="rect">
+            <a:avLst/>
+          </a:prstGeom>
+        </p:spPr>
+      </p:pic>
+    </p:spTree>
+    <p:extLst>
+      <p:ext uri="{BB962C8B-B14F-4D97-AF65-F5344CB8AC3E}">
+        <p14:creationId xmlns:p14="http://schemas.microsoft.com/office/powerpoint/2010/main" val="2255410467"/>
+      </p:ext>
+    </p:extLst>
+  </p:cSld>
+  <p:clrMapOvr>
+    <a:overrideClrMapping bg1="dk1" tx1="lt1" bg2="dk2" tx2="lt2" accent1="accent1" accent2="accent2" accent3="accent3" accent4="accent4" accent5="accent5" accent6="accent6" hlink="hlink" folHlink="folHlink"/>
+  </p:clrMapOvr>
+</p:sld>
+</file>
+
+<file path=ppt/slides/slide12.xml><?xml version="1.0" encoding="utf-8"?>
 <p:sld xmlns:a="http://schemas.openxmlformats.org/drawingml/2006/main" xmlns:r="http://schemas.openxmlformats.org/officeDocument/2006/relationships" xmlns:p="http://schemas.openxmlformats.org/presentationml/2006/main">
   <p:cSld>
     <p:spTree>
@@ -7355,6 +8050,306 @@
           <p:cNvPr id="2" name="Title 1">
             <a:extLst>
               <a:ext uri="{FF2B5EF4-FFF2-40B4-BE49-F238E27FC236}">
+                <a16:creationId xmlns:a16="http://schemas.microsoft.com/office/drawing/2014/main" id="{4F6F5D9E-229E-E0D1-DCAC-8CEEA3631556}"/>
+              </a:ext>
+            </a:extLst>
+          </p:cNvPr>
+          <p:cNvSpPr>
+            <a:spLocks noGrp="1"/>
+          </p:cNvSpPr>
+          <p:nvPr>
+            <p:ph type="title"/>
+          </p:nvPr>
+        </p:nvSpPr>
+        <p:spPr>
+          <a:xfrm>
+            <a:off x="509169" y="199696"/>
+            <a:ext cx="8596668" cy="1320800"/>
+          </a:xfrm>
+        </p:spPr>
+        <p:txBody>
+          <a:bodyPr/>
+          <a:lstStyle/>
+          <a:p>
+            <a:r>
+              <a:rPr lang="en-IL" b="1" dirty="0">
+                <a:latin typeface="ATT Aleck Sans" panose="020B0503020203020204" pitchFamily="34" charset="0"/>
+                <a:cs typeface="ATT Aleck Sans" panose="020B0503020203020204" pitchFamily="34" charset="0"/>
+              </a:rPr>
+              <a:t>What could be the problems with this implementation?</a:t>
+            </a:r>
+          </a:p>
+        </p:txBody>
+      </p:sp>
+      <p:sp>
+        <p:nvSpPr>
+          <p:cNvPr id="3" name="Content Placeholder 2">
+            <a:extLst>
+              <a:ext uri="{FF2B5EF4-FFF2-40B4-BE49-F238E27FC236}">
+                <a16:creationId xmlns:a16="http://schemas.microsoft.com/office/drawing/2014/main" id="{3F6665E5-7BFC-8A6E-C923-33299B2CB606}"/>
+              </a:ext>
+            </a:extLst>
+          </p:cNvPr>
+          <p:cNvSpPr>
+            <a:spLocks noGrp="1"/>
+          </p:cNvSpPr>
+          <p:nvPr>
+            <p:ph sz="half" idx="1"/>
+          </p:nvPr>
+        </p:nvSpPr>
+        <p:spPr>
+          <a:xfrm>
+            <a:off x="572230" y="1572010"/>
+            <a:ext cx="9296983" cy="3880772"/>
+          </a:xfrm>
+        </p:spPr>
+        <p:txBody>
+          <a:bodyPr>
+            <a:noAutofit/>
+          </a:bodyPr>
+          <a:lstStyle/>
+          <a:p>
+            <a:pPr>
+              <a:lnSpc>
+                <a:spcPct val="160000"/>
+              </a:lnSpc>
+            </a:pPr>
+            <a:r>
+              <a:rPr lang="en-IL" sz="2200" dirty="0">
+                <a:latin typeface="ATT Aleck Sans" panose="020B0503020203020204" pitchFamily="34" charset="0"/>
+                <a:cs typeface="ATT Aleck Sans" panose="020B0503020203020204" pitchFamily="34" charset="0"/>
+              </a:rPr>
+              <a:t>Tight coupling </a:t>
+            </a:r>
+            <a:r>
+              <a:rPr lang="en-IL" sz="2200">
+                <a:latin typeface="ATT Aleck Sans" panose="020B0503020203020204" pitchFamily="34" charset="0"/>
+                <a:cs typeface="ATT Aleck Sans" panose="020B0503020203020204" pitchFamily="34" charset="0"/>
+              </a:rPr>
+              <a:t>between Computer</a:t>
+            </a:r>
+            <a:r>
+              <a:rPr lang="en-IL" sz="2200" dirty="0">
+                <a:latin typeface="ATT Aleck Sans" panose="020B0503020203020204" pitchFamily="34" charset="0"/>
+                <a:cs typeface="ATT Aleck Sans" panose="020B0503020203020204" pitchFamily="34" charset="0"/>
+              </a:rPr>
+              <a:t> and its components:</a:t>
+            </a:r>
+          </a:p>
+          <a:p>
+            <a:pPr>
+              <a:lnSpc>
+                <a:spcPct val="160000"/>
+              </a:lnSpc>
+            </a:pPr>
+            <a:r>
+              <a:rPr lang="en-IL" sz="2200" dirty="0">
+                <a:latin typeface="ATT Aleck Sans" panose="020B0503020203020204" pitchFamily="34" charset="0"/>
+                <a:cs typeface="ATT Aleck Sans" panose="020B0503020203020204" pitchFamily="34" charset="0"/>
+              </a:rPr>
+              <a:t>We </a:t>
+            </a:r>
+            <a:r>
+              <a:rPr lang="en-IL" sz="2200">
+                <a:latin typeface="ATT Aleck Sans" panose="020B0503020203020204" pitchFamily="34" charset="0"/>
+                <a:cs typeface="ATT Aleck Sans" panose="020B0503020203020204" pitchFamily="34" charset="0"/>
+              </a:rPr>
+              <a:t>must</a:t>
+            </a:r>
+            <a:r>
+              <a:rPr lang="en-IL" sz="2200" dirty="0">
+                <a:latin typeface="ATT Aleck Sans" panose="020B0503020203020204" pitchFamily="34" charset="0"/>
+                <a:cs typeface="ATT Aleck Sans" panose="020B0503020203020204" pitchFamily="34" charset="0"/>
+              </a:rPr>
+              <a:t> know how to create every component and which </a:t>
+            </a:r>
+            <a:r>
+              <a:rPr lang="en-IL" sz="2200">
+                <a:latin typeface="ATT Aleck Sans" panose="020B0503020203020204" pitchFamily="34" charset="0"/>
+                <a:cs typeface="ATT Aleck Sans" panose="020B0503020203020204" pitchFamily="34" charset="0"/>
+              </a:rPr>
+              <a:t>constructor </a:t>
+            </a:r>
+            <a:r>
+              <a:rPr lang="en-IL" sz="2200" dirty="0">
+                <a:latin typeface="ATT Aleck Sans" panose="020B0503020203020204" pitchFamily="34" charset="0"/>
+                <a:cs typeface="ATT Aleck Sans" panose="020B0503020203020204" pitchFamily="34" charset="0"/>
+              </a:rPr>
+              <a:t>parameters to </a:t>
+            </a:r>
+            <a:r>
+              <a:rPr lang="en-IL" sz="2200">
+                <a:latin typeface="ATT Aleck Sans" panose="020B0503020203020204" pitchFamily="34" charset="0"/>
+                <a:cs typeface="ATT Aleck Sans" panose="020B0503020203020204" pitchFamily="34" charset="0"/>
+              </a:rPr>
+              <a:t>pass</a:t>
+            </a:r>
+            <a:r>
+              <a:rPr lang="en-IL" sz="2200" dirty="0">
+                <a:latin typeface="ATT Aleck Sans" panose="020B0503020203020204" pitchFamily="34" charset="0"/>
+                <a:cs typeface="ATT Aleck Sans" panose="020B0503020203020204" pitchFamily="34" charset="0"/>
+              </a:rPr>
+              <a:t>.</a:t>
+            </a:r>
+            <a:endParaRPr lang="en-IL" sz="2200">
+              <a:latin typeface="ATT Aleck Sans" panose="020B0503020203020204" pitchFamily="34" charset="0"/>
+              <a:cs typeface="ATT Aleck Sans" panose="020B0503020203020204" pitchFamily="34" charset="0"/>
+            </a:endParaRPr>
+          </a:p>
+          <a:p>
+            <a:pPr>
+              <a:lnSpc>
+                <a:spcPct val="160000"/>
+              </a:lnSpc>
+            </a:pPr>
+            <a:r>
+              <a:rPr lang="en-IL" sz="2200">
+                <a:latin typeface="ATT Aleck Sans" panose="020B0503020203020204" pitchFamily="34" charset="0"/>
+                <a:cs typeface="ATT Aleck Sans" panose="020B0503020203020204" pitchFamily="34" charset="0"/>
+              </a:rPr>
+              <a:t>A Computer</a:t>
+            </a:r>
+            <a:r>
+              <a:rPr lang="en-IL" sz="2200" dirty="0">
+                <a:latin typeface="ATT Aleck Sans" panose="020B0503020203020204" pitchFamily="34" charset="0"/>
+                <a:cs typeface="ATT Aleck Sans" panose="020B0503020203020204" pitchFamily="34" charset="0"/>
+              </a:rPr>
+              <a:t> with a different </a:t>
+            </a:r>
+            <a:r>
+              <a:rPr lang="en-IL" sz="2200">
+                <a:latin typeface="ATT Aleck Sans" panose="020B0503020203020204" pitchFamily="34" charset="0"/>
+                <a:cs typeface="ATT Aleck Sans" panose="020B0503020203020204" pitchFamily="34" charset="0"/>
+              </a:rPr>
+              <a:t>Processor requires yet </a:t>
+            </a:r>
+            <a:r>
+              <a:rPr lang="en-IL" sz="2200" dirty="0">
+                <a:latin typeface="ATT Aleck Sans" panose="020B0503020203020204" pitchFamily="34" charset="0"/>
+                <a:cs typeface="ATT Aleck Sans" panose="020B0503020203020204" pitchFamily="34" charset="0"/>
+              </a:rPr>
+              <a:t>another </a:t>
+            </a:r>
+            <a:r>
+              <a:rPr lang="en-IL" sz="2200">
+                <a:latin typeface="ATT Aleck Sans" panose="020B0503020203020204" pitchFamily="34" charset="0"/>
+                <a:cs typeface="ATT Aleck Sans" panose="020B0503020203020204" pitchFamily="34" charset="0"/>
+              </a:rPr>
+              <a:t>Computer </a:t>
+            </a:r>
+            <a:r>
+              <a:rPr lang="en-IL" sz="2200" dirty="0">
+                <a:latin typeface="ATT Aleck Sans" panose="020B0503020203020204" pitchFamily="34" charset="0"/>
+                <a:cs typeface="ATT Aleck Sans" panose="020B0503020203020204" pitchFamily="34" charset="0"/>
+              </a:rPr>
+              <a:t>class.</a:t>
+            </a:r>
+            <a:endParaRPr lang="en-IL" sz="2200">
+              <a:latin typeface="ATT Aleck Sans" panose="020B0503020203020204" pitchFamily="34" charset="0"/>
+              <a:cs typeface="ATT Aleck Sans" panose="020B0503020203020204" pitchFamily="34" charset="0"/>
+            </a:endParaRPr>
+          </a:p>
+          <a:p>
+            <a:pPr>
+              <a:lnSpc>
+                <a:spcPct val="160000"/>
+              </a:lnSpc>
+            </a:pPr>
+            <a:r>
+              <a:rPr lang="en-IL" sz="2200">
+                <a:latin typeface="ATT Aleck Sans" panose="020B0503020203020204" pitchFamily="34" charset="0"/>
+                <a:cs typeface="ATT Aleck Sans" panose="020B0503020203020204" pitchFamily="34" charset="0"/>
+              </a:rPr>
+              <a:t>Testing is hard - there is no way to </a:t>
+            </a:r>
+            <a:r>
+              <a:rPr lang="en-IL" sz="2200" dirty="0">
+                <a:latin typeface="ATT Aleck Sans" panose="020B0503020203020204" pitchFamily="34" charset="0"/>
+                <a:cs typeface="ATT Aleck Sans" panose="020B0503020203020204" pitchFamily="34" charset="0"/>
+              </a:rPr>
+              <a:t>inject mocks</a:t>
+            </a:r>
+            <a:r>
+              <a:rPr lang="en-IL" sz="2200">
+                <a:latin typeface="ATT Aleck Sans" panose="020B0503020203020204" pitchFamily="34" charset="0"/>
+                <a:cs typeface="ATT Aleck Sans" panose="020B0503020203020204" pitchFamily="34" charset="0"/>
+              </a:rPr>
+              <a:t>.</a:t>
+            </a:r>
+          </a:p>
+          <a:p>
+            <a:pPr>
+              <a:lnSpc>
+                <a:spcPct val="160000"/>
+              </a:lnSpc>
+            </a:pPr>
+            <a:r>
+              <a:rPr lang="en-IL" sz="2200">
+                <a:latin typeface="ATT Aleck Sans" panose="020B0503020203020204" pitchFamily="34" charset="0"/>
+                <a:cs typeface="ATT Aleck Sans" panose="020B0503020203020204" pitchFamily="34" charset="0"/>
+              </a:rPr>
+              <a:t>Poor polymorphism.</a:t>
+            </a:r>
+            <a:endParaRPr lang="en-IL" sz="2200" dirty="0">
+              <a:latin typeface="ATT Aleck Sans" panose="020B0503020203020204" pitchFamily="34" charset="0"/>
+              <a:cs typeface="ATT Aleck Sans" panose="020B0503020203020204" pitchFamily="34" charset="0"/>
+            </a:endParaRPr>
+          </a:p>
+          <a:p>
+            <a:pPr>
+              <a:lnSpc>
+                <a:spcPct val="160000"/>
+              </a:lnSpc>
+            </a:pPr>
+            <a:r>
+              <a:rPr lang="en-IL" sz="2200" dirty="0">
+                <a:latin typeface="ATT Aleck Sans" panose="020B0503020203020204" pitchFamily="34" charset="0"/>
+                <a:cs typeface="ATT Aleck Sans" panose="020B0503020203020204" pitchFamily="34" charset="0"/>
+              </a:rPr>
+              <a:t>Leads to implementation-based design.</a:t>
+            </a:r>
+            <a:endParaRPr lang="en-IL" sz="2200">
+              <a:latin typeface="ATT Aleck Sans" panose="020B0503020203020204" pitchFamily="34" charset="0"/>
+              <a:cs typeface="ATT Aleck Sans" panose="020B0503020203020204" pitchFamily="34" charset="0"/>
+            </a:endParaRPr>
+          </a:p>
+        </p:txBody>
+      </p:sp>
+    </p:spTree>
+    <p:extLst>
+      <p:ext uri="{BB962C8B-B14F-4D97-AF65-F5344CB8AC3E}">
+        <p14:creationId xmlns:p14="http://schemas.microsoft.com/office/powerpoint/2010/main" val="4238028326"/>
+      </p:ext>
+    </p:extLst>
+  </p:cSld>
+  <p:clrMapOvr>
+    <a:masterClrMapping/>
+  </p:clrMapOvr>
+</p:sld>
+</file>
+
+<file path=ppt/slides/slide13.xml><?xml version="1.0" encoding="utf-8"?>
+<p:sld xmlns:a="http://schemas.openxmlformats.org/drawingml/2006/main" xmlns:r="http://schemas.openxmlformats.org/officeDocument/2006/relationships" xmlns:p="http://schemas.openxmlformats.org/presentationml/2006/main">
+  <p:cSld>
+    <p:spTree>
+      <p:nvGrpSpPr>
+        <p:cNvPr id="1" name=""/>
+        <p:cNvGrpSpPr/>
+        <p:nvPr/>
+      </p:nvGrpSpPr>
+      <p:grpSpPr>
+        <a:xfrm>
+          <a:off x="0" y="0"/>
+          <a:ext cx="0" cy="0"/>
+          <a:chOff x="0" y="0"/>
+          <a:chExt cx="0" cy="0"/>
+        </a:xfrm>
+      </p:grpSpPr>
+      <p:sp>
+        <p:nvSpPr>
+          <p:cNvPr id="2" name="Title 1">
+            <a:extLst>
+              <a:ext uri="{FF2B5EF4-FFF2-40B4-BE49-F238E27FC236}">
                 <a16:creationId xmlns:a16="http://schemas.microsoft.com/office/drawing/2014/main" id="{CB5E4EF4-4CDB-B5BC-9E3C-1E76189F1E16}"/>
               </a:ext>
             </a:extLst>
@@ -7414,7 +8409,7 @@
         <p:spPr>
           <a:xfrm>
             <a:off x="675057" y="5470635"/>
-            <a:ext cx="8006488" cy="1387365"/>
+            <a:ext cx="8227205" cy="1387365"/>
           </a:xfrm>
         </p:spPr>
         <p:txBody>
@@ -7427,66 +8422,28 @@
               <a:buNone/>
             </a:pPr>
             <a:r>
-              <a:rPr lang="en-US" dirty="0">
+              <a:rPr lang="en-US">
                 <a:latin typeface="ATT Aleck Sans" panose="020B0503020203020204" pitchFamily="34" charset="0"/>
                 <a:cs typeface="ATT Aleck Sans" panose="020B0503020203020204" pitchFamily="34" charset="0"/>
               </a:rPr>
-              <a:t>We </a:t>
-            </a:r>
-            <a:r>
-              <a:rPr lang="en-IL" dirty="0">
+              <a:t>What we gained: control of creating dependent class objects is inverted to the Factory.</a:t>
+            </a:r>
+          </a:p>
+          <a:p>
+            <a:pPr marL="0" indent="0">
+              <a:buNone/>
+            </a:pPr>
+            <a:r>
+              <a:rPr lang="en-US">
                 <a:latin typeface="ATT Aleck Sans" panose="020B0503020203020204" pitchFamily="34" charset="0"/>
                 <a:cs typeface="ATT Aleck Sans" panose="020B0503020203020204" pitchFamily="34" charset="0"/>
               </a:rPr>
-              <a:t>have inverted the the control of creating an object of a dependent class to the Factory.</a:t>
-            </a:r>
-            <a:br>
-              <a:rPr lang="en-IL" dirty="0">
-                <a:latin typeface="ATT Aleck Sans" panose="020B0503020203020204" pitchFamily="34" charset="0"/>
-                <a:cs typeface="ATT Aleck Sans" panose="020B0503020203020204" pitchFamily="34" charset="0"/>
-              </a:rPr>
-            </a:br>
-            <a:r>
-              <a:rPr lang="en-IL" dirty="0">
-                <a:latin typeface="ATT Aleck Sans" panose="020B0503020203020204" pitchFamily="34" charset="0"/>
-                <a:cs typeface="ATT Aleck Sans" panose="020B0503020203020204" pitchFamily="34" charset="0"/>
-              </a:rPr>
-              <a:t>However, the </a:t>
-            </a:r>
-            <a:r>
-              <a:rPr lang="en-IL" dirty="0">
-                <a:solidFill>
-                  <a:srgbClr val="0000FF"/>
-                </a:solidFill>
-                <a:latin typeface="ATT Aleck Sans" panose="020B0503020203020204" pitchFamily="34" charset="0"/>
-                <a:cs typeface="ATT Aleck Sans" panose="020B0503020203020204" pitchFamily="34" charset="0"/>
-              </a:rPr>
-              <a:t>Computer</a:t>
-            </a:r>
-            <a:r>
-              <a:rPr lang="en-IL" dirty="0">
-                <a:latin typeface="ATT Aleck Sans" panose="020B0503020203020204" pitchFamily="34" charset="0"/>
-                <a:cs typeface="ATT Aleck Sans" panose="020B0503020203020204" pitchFamily="34" charset="0"/>
-              </a:rPr>
-              <a:t> class uses the concrete </a:t>
-            </a:r>
-            <a:r>
-              <a:rPr lang="en-IL" dirty="0">
-                <a:solidFill>
-                  <a:srgbClr val="0000FF"/>
-                </a:solidFill>
-                <a:latin typeface="ATT Aleck Sans" panose="020B0503020203020204" pitchFamily="34" charset="0"/>
-                <a:cs typeface="ATT Aleck Sans" panose="020B0503020203020204" pitchFamily="34" charset="0"/>
-              </a:rPr>
-              <a:t>GraphicCardFactory</a:t>
-            </a:r>
-            <a:r>
-              <a:rPr lang="en-IL" dirty="0">
-                <a:latin typeface="ATT Aleck Sans" panose="020B0503020203020204" pitchFamily="34" charset="0"/>
-                <a:cs typeface="ATT Aleck Sans" panose="020B0503020203020204" pitchFamily="34" charset="0"/>
-              </a:rPr>
-              <a:t> class. So – we have not achieved fully loosely coupled classes.</a:t>
-            </a:r>
+              <a:t>What's still wrong: Computer still uses the concrete GraphicCardFactory class, so the classes are not fully loosely coupled.</a:t>
+            </a:r>
+            <a:endParaRPr lang="en-IL" dirty="0">
+              <a:latin typeface="ATT Aleck Sans" panose="020B0503020203020204" pitchFamily="34" charset="0"/>
+              <a:cs typeface="ATT Aleck Sans" panose="020B0503020203020204" pitchFamily="34" charset="0"/>
+            </a:endParaRPr>
           </a:p>
         </p:txBody>
       </p:sp>
@@ -7533,7 +8490,7 @@
 </p:sld>
 </file>
 
-<file path=ppt/slides/slide12.xml><?xml version="1.0" encoding="utf-8"?>
+<file path=ppt/slides/slide14.xml><?xml version="1.0" encoding="utf-8"?>
 <p:sld xmlns:a="http://schemas.openxmlformats.org/drawingml/2006/main" xmlns:r="http://schemas.openxmlformats.org/officeDocument/2006/relationships" xmlns:p="http://schemas.openxmlformats.org/presentationml/2006/main">
   <p:cSld>
     <p:bg>
@@ -7630,7 +8587,7 @@
                 <a:latin typeface="ATT Aleck Sans" panose="020B0503020203020204" pitchFamily="34" charset="0"/>
                 <a:cs typeface="ATT Aleck Sans" panose="020B0503020203020204" pitchFamily="34" charset="0"/>
               </a:rPr>
-              <a:t>A design pattern used to manage dependencies between objects. </a:t>
+              <a:t>A design pattern used to manage dependencies between objects.</a:t>
             </a:r>
           </a:p>
           <a:p>
@@ -7645,7 +8602,21 @@
                 <a:latin typeface="ATT Aleck Sans" panose="020B0503020203020204" pitchFamily="34" charset="0"/>
                 <a:cs typeface="ATT Aleck Sans" panose="020B0503020203020204" pitchFamily="34" charset="0"/>
               </a:rPr>
-              <a:t>It allows an object to receive other objects that it depends on, rather than creating them itself. </a:t>
+              <a:t>It allows an object to receive </a:t>
+            </a:r>
+            <a:r>
+              <a:rPr lang="en-US" sz="2400">
+                <a:latin typeface="ATT Aleck Sans" panose="020B0503020203020204" pitchFamily="34" charset="0"/>
+                <a:cs typeface="ATT Aleck Sans" panose="020B0503020203020204" pitchFamily="34" charset="0"/>
+              </a:rPr>
+              <a:t>the </a:t>
+            </a:r>
+            <a:r>
+              <a:rPr lang="en-US" sz="2400" dirty="0">
+                <a:latin typeface="ATT Aleck Sans" panose="020B0503020203020204" pitchFamily="34" charset="0"/>
+                <a:cs typeface="ATT Aleck Sans" panose="020B0503020203020204" pitchFamily="34" charset="0"/>
+              </a:rPr>
+              <a:t>objects it depends on, rather than creating them itself.</a:t>
             </a:r>
           </a:p>
           <a:p>
@@ -7660,8 +8631,31 @@
                 <a:latin typeface="ATT Aleck Sans" panose="020B0503020203020204" pitchFamily="34" charset="0"/>
                 <a:cs typeface="ATT Aleck Sans" panose="020B0503020203020204" pitchFamily="34" charset="0"/>
               </a:rPr>
-              <a:t>This promotes a more modular, testable, and maintainable codebase. </a:t>
-            </a:r>
+              <a:t>This promotes a more modular, testable and maintainable codebase.</a:t>
+            </a:r>
+            <a:endParaRPr lang="en-US" sz="2400">
+              <a:latin typeface="ATT Aleck Sans" panose="020B0503020203020204" pitchFamily="34" charset="0"/>
+              <a:cs typeface="ATT Aleck Sans" panose="020B0503020203020204" pitchFamily="34" charset="0"/>
+            </a:endParaRPr>
+          </a:p>
+          <a:p>
+            <a:pPr marL="0" indent="0">
+              <a:lnSpc>
+                <a:spcPct val="150000"/>
+              </a:lnSpc>
+              <a:buNone/>
+            </a:pPr>
+            <a:r>
+              <a:rPr lang="en-US" sz="2400">
+                <a:latin typeface="ATT Aleck Sans" panose="020B0503020203020204" pitchFamily="34" charset="0"/>
+                <a:cs typeface="ATT Aleck Sans" panose="020B0503020203020204" pitchFamily="34" charset="0"/>
+              </a:rPr>
+              <a:t>DI is one of the SOLID object-oriented principles.</a:t>
+            </a:r>
+            <a:endParaRPr lang="en-US" sz="2400" dirty="0">
+              <a:latin typeface="ATT Aleck Sans" panose="020B0503020203020204" pitchFamily="34" charset="0"/>
+              <a:cs typeface="ATT Aleck Sans" panose="020B0503020203020204" pitchFamily="34" charset="0"/>
+            </a:endParaRPr>
           </a:p>
         </p:txBody>
       </p:sp>
@@ -7678,7 +8672,7 @@
 </p:sld>
 </file>
 
-<file path=ppt/slides/slide13.xml><?xml version="1.0" encoding="utf-8"?>
+<file path=ppt/slides/slide15.xml><?xml version="1.0" encoding="utf-8"?>
 <p:sld xmlns:a="http://schemas.openxmlformats.org/drawingml/2006/main" xmlns:r="http://schemas.openxmlformats.org/officeDocument/2006/relationships" xmlns:p="http://schemas.openxmlformats.org/presentationml/2006/main">
   <p:cSld>
     <p:spTree>
@@ -7724,12 +8718,16 @@
           <a:lstStyle/>
           <a:p>
             <a:r>
-              <a:rPr lang="en-IL" b="1" dirty="0">
+              <a:rPr lang="en-IL" b="1">
                 <a:latin typeface="ATT Aleck Sans" panose="020B0503020203020204" pitchFamily="34" charset="0"/>
                 <a:cs typeface="ATT Aleck Sans" panose="020B0503020203020204" pitchFamily="34" charset="0"/>
               </a:rPr>
-              <a:t>Dependency Injection</a:t>
-            </a:r>
+              <a:t>DI applied: the Computer example</a:t>
+            </a:r>
+            <a:endParaRPr lang="en-IL" b="1" dirty="0">
+              <a:latin typeface="ATT Aleck Sans" panose="020B0503020203020204" pitchFamily="34" charset="0"/>
+              <a:cs typeface="ATT Aleck Sans" panose="020B0503020203020204" pitchFamily="34" charset="0"/>
+            </a:endParaRPr>
           </a:p>
         </p:txBody>
       </p:sp>
@@ -7797,7 +8795,7 @@
                 <a:latin typeface="ATT Aleck Sans" panose="020B0503020203020204" pitchFamily="34" charset="0"/>
                 <a:cs typeface="ATT Aleck Sans" panose="020B0503020203020204" pitchFamily="34" charset="0"/>
               </a:rPr>
-              <a:t>control its dependencies (instantiated them), </a:t>
+              <a:t>control its dependencies (instantiate them), </a:t>
             </a:r>
             <a:br>
               <a:rPr lang="en-US" sz="1800" dirty="0">
@@ -7852,7 +8850,7 @@
                 <a:latin typeface="ATT Aleck Sans" panose="020B0503020203020204" pitchFamily="34" charset="0"/>
                 <a:cs typeface="ATT Aleck Sans" panose="020B0503020203020204" pitchFamily="34" charset="0"/>
               </a:rPr>
-              <a:t>By using DI, we can rewrite the example without specifying the implementation of the components that we want.</a:t>
+              <a:t>By using DI, we can rewrite the example without specifying the implementations of the components we want.</a:t>
             </a:r>
             <a:endParaRPr lang="en-IL" dirty="0">
               <a:latin typeface="ATT Aleck Sans" panose="020B0503020203020204" pitchFamily="34" charset="0"/>
@@ -7904,6 +8902,255 @@
 </p:sld>
 </file>
 
+<file path=ppt/slides/slide16.xml><?xml version="1.0" encoding="utf-8"?>
+<p:sld xmlns:a="http://schemas.openxmlformats.org/drawingml/2006/main" xmlns:r="http://schemas.openxmlformats.org/officeDocument/2006/relationships" xmlns:p="http://schemas.openxmlformats.org/presentationml/2006/main">
+  <p:cSld>
+    <p:spTree>
+      <p:nvGrpSpPr>
+        <p:cNvPr id="1" name=""/>
+        <p:cNvGrpSpPr/>
+        <p:nvPr/>
+      </p:nvGrpSpPr>
+      <p:grpSpPr>
+        <a:xfrm>
+          <a:off x="0" y="0"/>
+          <a:ext cx="0" cy="0"/>
+          <a:chOff x="0" y="0"/>
+          <a:chExt cx="0" cy="0"/>
+        </a:xfrm>
+      </p:grpSpPr>
+      <p:sp>
+        <p:nvSpPr>
+          <p:cNvPr id="2" name="Title 1"/>
+          <p:cNvSpPr>
+            <a:spLocks noGrp="1"/>
+          </p:cNvSpPr>
+          <p:nvPr>
+            <p:ph type="title"/>
+          </p:nvPr>
+        </p:nvSpPr>
+        <p:spPr>
+          <a:xfrm>
+            <a:off x="609600" y="365760"/>
+            <a:ext cx="10972800" cy="850000"/>
+          </a:xfrm>
+        </p:spPr>
+        <p:txBody>
+          <a:bodyPr>
+            <a:normAutofit/>
+          </a:bodyPr>
+          <a:lstStyle/>
+          <a:p>
+            <a:r>
+              <a:rPr lang="en-US" sz="3200" b="1"/>
+              <a:t>Next steps</a:t>
+            </a:r>
+          </a:p>
+        </p:txBody>
+      </p:sp>
+      <p:sp>
+        <p:nvSpPr>
+          <p:cNvPr id="30" name="Card Clone the repo"/>
+          <p:cNvSpPr/>
+          <p:nvPr/>
+        </p:nvSpPr>
+        <p:spPr>
+          <a:xfrm>
+            <a:off x="900000" y="2100000"/>
+            <a:ext cx="3400000" cy="2200000"/>
+          </a:xfrm>
+          <a:prstGeom prst="roundRect">
+            <a:avLst>
+              <a:gd name="adj" fmla="val 10000"/>
+            </a:avLst>
+          </a:prstGeom>
+          <a:solidFill>
+            <a:schemeClr val="bg1"/>
+          </a:solidFill>
+          <a:ln w="25400">
+            <a:solidFill>
+              <a:schemeClr val="accent1"/>
+            </a:solidFill>
+          </a:ln>
+        </p:spPr>
+        <p:txBody>
+          <a:bodyPr lIns="182880" tIns="91440" rIns="137160" bIns="91440" anchor="ctr">
+            <a:normAutofit/>
+          </a:bodyPr>
+          <a:lstStyle/>
+          <a:p>
+            <a:r>
+              <a:rPr lang="en-US" sz="1600" b="1">
+                <a:solidFill>
+                  <a:schemeClr val="accent1"/>
+                </a:solidFill>
+              </a:rPr>
+              <a:t>Clone the repo</a:t>
+            </a:r>
+          </a:p>
+          <a:p>
+            <a:r>
+              <a:rPr lang="en-US" sz="1200">
+                <a:solidFill>
+                  <a:schemeClr val="tx1"/>
+                </a:solidFill>
+              </a:rPr>
+              <a:t>The README drives the whole workshop - start there.</a:t>
+            </a:r>
+          </a:p>
+        </p:txBody>
+      </p:sp>
+      <p:sp>
+        <p:nvSpPr>
+          <p:cNvPr id="31" name="Card Work branch by branch"/>
+          <p:cNvSpPr/>
+          <p:nvPr/>
+        </p:nvSpPr>
+        <p:spPr>
+          <a:xfrm>
+            <a:off x="4600000" y="2100000"/>
+            <a:ext cx="3400000" cy="2200000"/>
+          </a:xfrm>
+          <a:prstGeom prst="roundRect">
+            <a:avLst>
+              <a:gd name="adj" fmla="val 10000"/>
+            </a:avLst>
+          </a:prstGeom>
+          <a:solidFill>
+            <a:schemeClr val="bg1"/>
+          </a:solidFill>
+          <a:ln w="25400">
+            <a:solidFill>
+              <a:schemeClr val="accent3"/>
+            </a:solidFill>
+          </a:ln>
+        </p:spPr>
+        <p:txBody>
+          <a:bodyPr lIns="182880" tIns="91440" rIns="137160" bIns="91440" anchor="ctr">
+            <a:normAutofit/>
+          </a:bodyPr>
+          <a:lstStyle/>
+          <a:p>
+            <a:r>
+              <a:rPr lang="en-US" sz="1600" b="1">
+                <a:solidFill>
+                  <a:schemeClr val="accent3"/>
+                </a:solidFill>
+              </a:rPr>
+              <a:t>Work branch by branch</a:t>
+            </a:r>
+          </a:p>
+          <a:p>
+            <a:r>
+              <a:rPr lang="en-US" sz="1200">
+                <a:solidFill>
+                  <a:schemeClr val="tx1"/>
+                </a:solidFill>
+              </a:rPr>
+              <a:t>Every topic has its own branch; use the repo as a reference later.</a:t>
+            </a:r>
+          </a:p>
+        </p:txBody>
+      </p:sp>
+      <p:sp>
+        <p:nvSpPr>
+          <p:cNvPr id="32" name="Card Join the support group"/>
+          <p:cNvSpPr/>
+          <p:nvPr/>
+        </p:nvSpPr>
+        <p:spPr>
+          <a:xfrm>
+            <a:off x="8300000" y="2100000"/>
+            <a:ext cx="3400000" cy="2200000"/>
+          </a:xfrm>
+          <a:prstGeom prst="roundRect">
+            <a:avLst>
+              <a:gd name="adj" fmla="val 10000"/>
+            </a:avLst>
+          </a:prstGeom>
+          <a:solidFill>
+            <a:schemeClr val="bg1"/>
+          </a:solidFill>
+          <a:ln w="25400">
+            <a:solidFill>
+              <a:schemeClr val="accent4"/>
+            </a:solidFill>
+          </a:ln>
+        </p:spPr>
+        <p:txBody>
+          <a:bodyPr lIns="182880" tIns="91440" rIns="137160" bIns="91440" anchor="ctr">
+            <a:normAutofit/>
+          </a:bodyPr>
+          <a:lstStyle/>
+          <a:p>
+            <a:r>
+              <a:rPr lang="en-US" sz="1600" b="1">
+                <a:solidFill>
+                  <a:schemeClr val="accent4"/>
+                </a:solidFill>
+              </a:rPr>
+              <a:t>Join the support group</a:t>
+            </a:r>
+          </a:p>
+          <a:p>
+            <a:r>
+              <a:rPr lang="en-US" sz="1200">
+                <a:solidFill>
+                  <a:schemeClr val="tx1"/>
+                </a:solidFill>
+              </a:rPr>
+              <a:t>Bring your questions after the workshop - the group stays open.</a:t>
+            </a:r>
+          </a:p>
+        </p:txBody>
+      </p:sp>
+      <p:sp>
+        <p:nvSpPr>
+          <p:cNvPr id="40" name="Thanks"/>
+          <p:cNvSpPr/>
+          <p:nvPr/>
+        </p:nvSpPr>
+        <p:spPr>
+          <a:xfrm>
+            <a:off x="900000" y="4900000"/>
+            <a:ext cx="10300000" cy="700000"/>
+          </a:xfrm>
+          <a:prstGeom prst="rect">
+            <a:avLst/>
+          </a:prstGeom>
+          <a:noFill/>
+        </p:spPr>
+        <p:txBody>
+          <a:bodyPr anchor="ctr">
+            <a:normAutofit/>
+          </a:bodyPr>
+          <a:lstStyle/>
+          <a:p>
+            <a:pPr algn="ctr"/>
+            <a:r>
+              <a:rPr lang="en-US" sz="2000" b="1">
+                <a:solidFill>
+                  <a:schemeClr val="accent1"/>
+                </a:solidFill>
+              </a:rPr>
+              <a:t>Thanks - questions?</a:t>
+            </a:r>
+          </a:p>
+        </p:txBody>
+      </p:sp>
+    </p:spTree>
+    <p:extLst>
+      <p:ext uri="{BB962C8B-B14F-4D97-AF65-F5344CB8AC3E}">
+        <p14:creationId xmlns:p14="http://schemas.microsoft.com/office/powerpoint/2010/main" val="1257414665"/>
+      </p:ext>
+    </p:extLst>
+  </p:cSld>
+  <p:clrMapOvr>
+    <a:masterClrMapping/>
+  </p:clrMapOvr>
+</p:sld>
+</file>
+
 <file path=ppt/slides/slide2.xml><?xml version="1.0" encoding="utf-8"?>
 <p:sld xmlns:a="http://schemas.openxmlformats.org/drawingml/2006/main" xmlns:r="http://schemas.openxmlformats.org/officeDocument/2006/relationships" xmlns:p="http://schemas.openxmlformats.org/presentationml/2006/main">
   <p:cSld>
@@ -7964,7 +9211,7 @@
               <a:buNone/>
             </a:pPr>
             <a:r>
-              <a:rPr lang="en-US" b="1" dirty="0">
+              <a:rPr lang="en-US" b="1">
                 <a:latin typeface="ATT Aleck Sans" panose="020B0503020203020204" pitchFamily="34" charset="0"/>
                 <a:cs typeface="ATT Aleck Sans" panose="020B0503020203020204" pitchFamily="34" charset="0"/>
               </a:rPr>
@@ -7995,13 +9242,13 @@
         </p:nvSpPr>
         <p:spPr>
           <a:xfrm>
-            <a:off x="1135118" y="1172617"/>
-            <a:ext cx="6520292" cy="3880773"/>
+            <a:off x="1135118" y="1238865"/>
+            <a:ext cx="5486400" cy="4611329"/>
           </a:xfrm>
         </p:spPr>
         <p:txBody>
           <a:bodyPr>
-            <a:normAutofit/>
+            <a:noAutofit/>
           </a:bodyPr>
           <a:lstStyle/>
           <a:p>
@@ -8011,15 +9258,12 @@
               </a:lnSpc>
             </a:pPr>
             <a:r>
-              <a:rPr lang="en-US" sz="2400" dirty="0">
+              <a:rPr lang="en-US" sz="2000" dirty="0">
                 <a:latin typeface="ATT Aleck Sans" panose="020B0503020203020204" pitchFamily="34" charset="0"/>
                 <a:cs typeface="ATT Aleck Sans" panose="020B0503020203020204" pitchFamily="34" charset="0"/>
               </a:rPr>
-              <a:t>Tech Lead | 7 years at AT&amp;T​</a:t>
-            </a:r>
-            <a:endParaRPr lang="he-IL" sz="2400" dirty="0">
-              <a:latin typeface="ATT Aleck Sans" panose="020B0503020203020204" pitchFamily="34" charset="0"/>
-            </a:endParaRPr>
+              <a:t>Tech Lead | 9 years at AT&amp;T</a:t>
+            </a:r>
           </a:p>
           <a:p>
             <a:pPr>
@@ -8028,24 +9272,11 @@
               </a:lnSpc>
             </a:pPr>
             <a:r>
-              <a:rPr lang="en-US" sz="2400" dirty="0">
+              <a:rPr lang="en-US" sz="2000" dirty="0">
                 <a:latin typeface="ATT Aleck Sans" panose="020B0503020203020204" pitchFamily="34" charset="0"/>
                 <a:cs typeface="ATT Aleck Sans" panose="020B0503020203020204" pitchFamily="34" charset="0"/>
               </a:rPr>
-              <a:t>Experienced: C#, Node.js, Java, Go, </a:t>
-            </a:r>
-            <a:br>
-              <a:rPr lang="en-US" sz="2400" dirty="0">
-                <a:latin typeface="ATT Aleck Sans" panose="020B0503020203020204" pitchFamily="34" charset="0"/>
-                <a:cs typeface="ATT Aleck Sans" panose="020B0503020203020204" pitchFamily="34" charset="0"/>
-              </a:rPr>
-            </a:br>
-            <a:r>
-              <a:rPr lang="en-US" sz="2400" dirty="0">
-                <a:latin typeface="ATT Aleck Sans" panose="020B0503020203020204" pitchFamily="34" charset="0"/>
-                <a:cs typeface="ATT Aleck Sans" panose="020B0503020203020204" pitchFamily="34" charset="0"/>
-              </a:rPr>
-              <a:t>Python, JavaScript</a:t>
+              <a:t>Experienced: Java, Go, Node.js, Python, JavaScript, C#</a:t>
             </a:r>
           </a:p>
           <a:p>
@@ -8055,7 +9286,7 @@
               </a:lnSpc>
             </a:pPr>
             <a:r>
-              <a:rPr lang="en-US" sz="2400" dirty="0">
+              <a:rPr lang="en-US" sz="2000" dirty="0">
                 <a:latin typeface="ATT Aleck Sans" panose="020B0503020203020204" pitchFamily="34" charset="0"/>
                 <a:cs typeface="ATT Aleck Sans" panose="020B0503020203020204" pitchFamily="34" charset="0"/>
               </a:rPr>
@@ -8073,7 +9304,7 @@
                 <a:latin typeface="ATT Aleck Sans" panose="020B0503020203020204" pitchFamily="34" charset="0"/>
                 <a:cs typeface="ATT Aleck Sans" panose="020B0503020203020204" pitchFamily="34" charset="0"/>
               </a:rPr>
-              <a:t>Music &amp; Movies</a:t>
+              <a:t>Tech (obviously)</a:t>
             </a:r>
           </a:p>
           <a:p>
@@ -8087,7 +9318,21 @@
                 <a:latin typeface="ATT Aleck Sans" panose="020B0503020203020204" pitchFamily="34" charset="0"/>
                 <a:cs typeface="ATT Aleck Sans" panose="020B0503020203020204" pitchFamily="34" charset="0"/>
               </a:rPr>
-              <a:t>Intermittent Fasting &amp; Keto</a:t>
+              <a:t>Music &amp; Movies</a:t>
+            </a:r>
+          </a:p>
+          <a:p>
+            <a:pPr lvl="1">
+              <a:lnSpc>
+                <a:spcPct val="150000"/>
+              </a:lnSpc>
+            </a:pPr>
+            <a:r>
+              <a:rPr lang="en-US" sz="2000" dirty="0">
+                <a:latin typeface="ATT Aleck Sans" panose="020B0503020203020204" pitchFamily="34" charset="0"/>
+                <a:cs typeface="ATT Aleck Sans" panose="020B0503020203020204" pitchFamily="34" charset="0"/>
+              </a:rPr>
+              <a:t>GYM &amp; Intermittent Fasting</a:t>
             </a:r>
           </a:p>
         </p:txBody>
@@ -8114,7 +9359,7 @@
         </p:blipFill>
         <p:spPr>
           <a:xfrm>
-            <a:off x="6739102" y="1887044"/>
+            <a:off x="6621518" y="2241550"/>
             <a:ext cx="2476500" cy="2374900"/>
           </a:xfrm>
           <a:prstGeom prst="rect">
@@ -8184,13 +9429,13 @@
           <a:lstStyle/>
           <a:p>
             <a:r>
-              <a:rPr lang="en-US" b="1" dirty="0">
+              <a:rPr lang="en-US" b="1">
                 <a:latin typeface="ATT Aleck Sans" panose="020B0503020203020204" pitchFamily="34" charset="0"/>
                 <a:cs typeface="ATT Aleck Sans" panose="020B0503020203020204" pitchFamily="34" charset="0"/>
               </a:rPr>
               <a:t>HIGHLIGHTS</a:t>
             </a:r>
-            <a:endParaRPr lang="en-IL" b="1" dirty="0">
+            <a:endParaRPr lang="en-IL" b="1">
               <a:latin typeface="ATT Aleck Sans" panose="020B0503020203020204" pitchFamily="34" charset="0"/>
               <a:cs typeface="ATT Aleck Sans" panose="020B0503020203020204" pitchFamily="34" charset="0"/>
             </a:endParaRPr>
@@ -8226,7 +9471,7 @@
           <a:lstStyle/>
           <a:p>
             <a:r>
-              <a:rPr lang="en-US" sz="3200" dirty="0">
+              <a:rPr lang="en-US" sz="3200">
                 <a:latin typeface="ATT Aleck Sans" panose="020B0503020203020204" pitchFamily="34" charset="0"/>
                 <a:cs typeface="ATT Aleck Sans" panose="020B0503020203020204" pitchFamily="34" charset="0"/>
               </a:rPr>
@@ -8235,7 +9480,7 @@
           </a:p>
           <a:p>
             <a:r>
-              <a:rPr lang="en-US" sz="3200" dirty="0">
+              <a:rPr lang="en-US" sz="3200">
                 <a:latin typeface="ATT Aleck Sans" panose="020B0503020203020204" pitchFamily="34" charset="0"/>
                 <a:cs typeface="ATT Aleck Sans" panose="020B0503020203020204" pitchFamily="34" charset="0"/>
               </a:rPr>
@@ -8244,7 +9489,7 @@
           </a:p>
           <a:p>
             <a:r>
-              <a:rPr lang="en-US" sz="3200" dirty="0">
+              <a:rPr lang="en-US" sz="3200">
                 <a:latin typeface="ATT Aleck Sans" panose="020B0503020203020204" pitchFamily="34" charset="0"/>
                 <a:cs typeface="ATT Aleck Sans" panose="020B0503020203020204" pitchFamily="34" charset="0"/>
               </a:rPr>
@@ -8253,7 +9498,7 @@
           </a:p>
           <a:p>
             <a:r>
-              <a:rPr lang="en-US" sz="3200" dirty="0">
+              <a:rPr lang="en-US" sz="3200">
                 <a:latin typeface="ATT Aleck Sans" panose="020B0503020203020204" pitchFamily="34" charset="0"/>
                 <a:cs typeface="ATT Aleck Sans" panose="020B0503020203020204" pitchFamily="34" charset="0"/>
               </a:rPr>
@@ -8262,7 +9507,7 @@
           </a:p>
           <a:p>
             <a:r>
-              <a:rPr lang="en-US" sz="3200" dirty="0">
+              <a:rPr lang="en-US" sz="3200">
                 <a:latin typeface="ATT Aleck Sans" panose="020B0503020203020204" pitchFamily="34" charset="0"/>
                 <a:cs typeface="ATT Aleck Sans" panose="020B0503020203020204" pitchFamily="34" charset="0"/>
               </a:rPr>
@@ -8271,7 +9516,7 @@
           </a:p>
           <a:p>
             <a:r>
-              <a:rPr lang="en-US" sz="3200" dirty="0">
+              <a:rPr lang="en-US" sz="3200">
                 <a:latin typeface="ATT Aleck Sans" panose="020B0503020203020204" pitchFamily="34" charset="0"/>
                 <a:cs typeface="ATT Aleck Sans" panose="020B0503020203020204" pitchFamily="34" charset="0"/>
               </a:rPr>
@@ -8280,15 +9525,13 @@
           </a:p>
           <a:p>
             <a:r>
-              <a:rPr lang="en-US" sz="3200" dirty="0">
+              <a:rPr lang="en-US" sz="3200">
                 <a:latin typeface="ATT Aleck Sans" panose="020B0503020203020204" pitchFamily="34" charset="0"/>
                 <a:cs typeface="ATT Aleck Sans" panose="020B0503020203020204" pitchFamily="34" charset="0"/>
               </a:rPr>
               <a:t>SUPPORT GROUP</a:t>
             </a:r>
-          </a:p>
-          <a:p>
-            <a:endParaRPr lang="en-IL" sz="3200" dirty="0">
+            <a:endParaRPr lang="en-IL" sz="3200">
               <a:latin typeface="ATT Aleck Sans" panose="020B0503020203020204" pitchFamily="34" charset="0"/>
               <a:cs typeface="ATT Aleck Sans" panose="020B0503020203020204" pitchFamily="34" charset="0"/>
             </a:endParaRPr>
@@ -8684,14 +9927,6 @@
 <file path=ppt/slides/slide4.xml><?xml version="1.0" encoding="utf-8"?>
 <p:sld xmlns:a="http://schemas.openxmlformats.org/drawingml/2006/main" xmlns:r="http://schemas.openxmlformats.org/officeDocument/2006/relationships" xmlns:p="http://schemas.openxmlformats.org/presentationml/2006/main">
   <p:cSld>
-    <p:bg>
-      <p:bgPr>
-        <a:solidFill>
-          <a:schemeClr val="bg2"/>
-        </a:solidFill>
-        <a:effectLst/>
-      </p:bgPr>
-    </p:bg>
     <p:spTree>
       <p:nvGrpSpPr>
         <p:cNvPr id="1" name=""/>
@@ -8708,24 +9943,18 @@
       </p:grpSpPr>
       <p:sp>
         <p:nvSpPr>
-          <p:cNvPr id="3" name="Content Placeholder 2">
-            <a:extLst>
-              <a:ext uri="{FF2B5EF4-FFF2-40B4-BE49-F238E27FC236}">
-                <a16:creationId xmlns:a16="http://schemas.microsoft.com/office/drawing/2014/main" id="{895ED2E3-DBE8-B2EF-8448-00600C561CAD}"/>
-              </a:ext>
-            </a:extLst>
-          </p:cNvPr>
-          <p:cNvSpPr>
-            <a:spLocks noGrp="1"/>
-          </p:cNvSpPr>
-          <p:nvPr>
-            <p:ph idx="1"/>
+          <p:cNvPr id="2" name="Title 1"/>
+          <p:cNvSpPr>
+            <a:spLocks noGrp="1"/>
+          </p:cNvSpPr>
+          <p:nvPr>
+            <p:ph type="title"/>
           </p:nvPr>
         </p:nvSpPr>
         <p:spPr>
           <a:xfrm>
-            <a:off x="1276423" y="2977227"/>
-            <a:ext cx="8596668" cy="3880773"/>
+            <a:off x="609600" y="365760"/>
+            <a:ext cx="10972800" cy="850000"/>
           </a:xfrm>
         </p:spPr>
         <p:txBody>
@@ -8734,15 +9963,419 @@
           </a:bodyPr>
           <a:lstStyle/>
           <a:p>
-            <a:pPr marL="0" indent="0">
-              <a:buNone/>
-            </a:pPr>
-            <a:r>
-              <a:rPr lang="en-IL" sz="9600" b="1" dirty="0">
-                <a:latin typeface="ATT Aleck Sans" panose="020B0503020203020204" pitchFamily="34" charset="0"/>
-                <a:cs typeface="ATT Aleck Sans" panose="020B0503020203020204" pitchFamily="34" charset="0"/>
-              </a:rPr>
-              <a:t>MOTIVATION</a:t>
+            <a:r>
+              <a:rPr lang="en-US" sz="3200" b="1"/>
+              <a:t>Agenda</a:t>
+            </a:r>
+          </a:p>
+        </p:txBody>
+      </p:sp>
+      <p:sp>
+        <p:nvSpPr>
+          <p:cNvPr id="11" name="Num 1"/>
+          <p:cNvSpPr/>
+          <p:nvPr/>
+        </p:nvSpPr>
+        <p:spPr>
+          <a:xfrm>
+            <a:off x="1200000" y="1500000"/>
+            <a:ext cx="700000" cy="700000"/>
+          </a:xfrm>
+          <a:prstGeom prst="ellipse">
+            <a:avLst/>
+          </a:prstGeom>
+          <a:solidFill>
+            <a:schemeClr val="accent1"/>
+          </a:solidFill>
+          <a:ln>
+            <a:noFill/>
+          </a:ln>
+        </p:spPr>
+        <p:txBody>
+          <a:bodyPr anchor="ctr">
+            <a:normAutofit/>
+          </a:bodyPr>
+          <a:lstStyle/>
+          <a:p>
+            <a:pPr algn="ctr"/>
+            <a:r>
+              <a:rPr lang="en-US" sz="1600" b="1">
+                <a:solidFill>
+                  <a:schemeClr val="tx2"/>
+                </a:solidFill>
+              </a:rPr>
+              <a:t>1</a:t>
+            </a:r>
+          </a:p>
+        </p:txBody>
+      </p:sp>
+      <p:sp>
+        <p:nvSpPr>
+          <p:cNvPr id="12" name="Row 1"/>
+          <p:cNvSpPr/>
+          <p:nvPr/>
+        </p:nvSpPr>
+        <p:spPr>
+          <a:xfrm>
+            <a:off x="2050000" y="1500000"/>
+            <a:ext cx="8900000" cy="700000"/>
+          </a:xfrm>
+          <a:prstGeom prst="rect">
+            <a:avLst/>
+          </a:prstGeom>
+          <a:noFill/>
+        </p:spPr>
+        <p:txBody>
+          <a:bodyPr lIns="0" anchor="ctr">
+            <a:normAutofit/>
+          </a:bodyPr>
+          <a:lstStyle/>
+          <a:p>
+            <a:r>
+              <a:rPr lang="en-US" sz="1600" b="1">
+                <a:solidFill>
+                  <a:schemeClr val="tx1"/>
+                </a:solidFill>
+              </a:rPr>
+              <a:t>Why a framework?</a:t>
+            </a:r>
+            <a:r>
+              <a:rPr lang="en-US" sz="1400">
+                <a:solidFill>
+                  <a:schemeClr val="tx1">
+                    <a:alpha val="70000"/>
+                  </a:schemeClr>
+                </a:solidFill>
+              </a:rPr>
+              <a:t>   Motivation for Spring Boot</a:t>
+            </a:r>
+          </a:p>
+        </p:txBody>
+      </p:sp>
+      <p:sp>
+        <p:nvSpPr>
+          <p:cNvPr id="13" name="Num 2"/>
+          <p:cNvSpPr/>
+          <p:nvPr/>
+        </p:nvSpPr>
+        <p:spPr>
+          <a:xfrm>
+            <a:off x="1200000" y="2400000"/>
+            <a:ext cx="700000" cy="700000"/>
+          </a:xfrm>
+          <a:prstGeom prst="ellipse">
+            <a:avLst/>
+          </a:prstGeom>
+          <a:solidFill>
+            <a:schemeClr val="accent2"/>
+          </a:solidFill>
+          <a:ln>
+            <a:noFill/>
+          </a:ln>
+        </p:spPr>
+        <p:txBody>
+          <a:bodyPr anchor="ctr">
+            <a:normAutofit/>
+          </a:bodyPr>
+          <a:lstStyle/>
+          <a:p>
+            <a:pPr algn="ctr"/>
+            <a:r>
+              <a:rPr lang="en-US" sz="1600" b="1">
+                <a:solidFill>
+                  <a:schemeClr val="tx2"/>
+                </a:solidFill>
+              </a:rPr>
+              <a:t>2</a:t>
+            </a:r>
+          </a:p>
+        </p:txBody>
+      </p:sp>
+      <p:sp>
+        <p:nvSpPr>
+          <p:cNvPr id="14" name="Row 2"/>
+          <p:cNvSpPr/>
+          <p:nvPr/>
+        </p:nvSpPr>
+        <p:spPr>
+          <a:xfrm>
+            <a:off x="2050000" y="2400000"/>
+            <a:ext cx="8900000" cy="700000"/>
+          </a:xfrm>
+          <a:prstGeom prst="rect">
+            <a:avLst/>
+          </a:prstGeom>
+          <a:noFill/>
+        </p:spPr>
+        <p:txBody>
+          <a:bodyPr lIns="0" anchor="ctr">
+            <a:normAutofit/>
+          </a:bodyPr>
+          <a:lstStyle/>
+          <a:p>
+            <a:r>
+              <a:rPr lang="en-US" sz="1600" b="1">
+                <a:solidFill>
+                  <a:schemeClr val="tx1"/>
+                </a:solidFill>
+              </a:rPr>
+              <a:t>Spring Boot essentials</a:t>
+            </a:r>
+            <a:r>
+              <a:rPr lang="en-US" sz="1400">
+                <a:solidFill>
+                  <a:schemeClr val="tx1">
+                    <a:alpha val="70000"/>
+                  </a:schemeClr>
+                </a:solidFill>
+              </a:rPr>
+              <a:t>   What it is and what you get</a:t>
+            </a:r>
+          </a:p>
+        </p:txBody>
+      </p:sp>
+      <p:sp>
+        <p:nvSpPr>
+          <p:cNvPr id="15" name="Num 3"/>
+          <p:cNvSpPr/>
+          <p:nvPr/>
+        </p:nvSpPr>
+        <p:spPr>
+          <a:xfrm>
+            <a:off x="1200000" y="3300000"/>
+            <a:ext cx="700000" cy="700000"/>
+          </a:xfrm>
+          <a:prstGeom prst="ellipse">
+            <a:avLst/>
+          </a:prstGeom>
+          <a:solidFill>
+            <a:schemeClr val="accent3"/>
+          </a:solidFill>
+          <a:ln>
+            <a:noFill/>
+          </a:ln>
+        </p:spPr>
+        <p:txBody>
+          <a:bodyPr anchor="ctr">
+            <a:normAutofit/>
+          </a:bodyPr>
+          <a:lstStyle/>
+          <a:p>
+            <a:pPr algn="ctr"/>
+            <a:r>
+              <a:rPr lang="en-US" sz="1600" b="1">
+                <a:solidFill>
+                  <a:schemeClr val="tx2"/>
+                </a:solidFill>
+              </a:rPr>
+              <a:t>3</a:t>
+            </a:r>
+          </a:p>
+        </p:txBody>
+      </p:sp>
+      <p:sp>
+        <p:nvSpPr>
+          <p:cNvPr id="16" name="Row 3"/>
+          <p:cNvSpPr/>
+          <p:nvPr/>
+        </p:nvSpPr>
+        <p:spPr>
+          <a:xfrm>
+            <a:off x="2050000" y="3300000"/>
+            <a:ext cx="8900000" cy="700000"/>
+          </a:xfrm>
+          <a:prstGeom prst="rect">
+            <a:avLst/>
+          </a:prstGeom>
+          <a:noFill/>
+        </p:spPr>
+        <p:txBody>
+          <a:bodyPr lIns="0" anchor="ctr">
+            <a:normAutofit/>
+          </a:bodyPr>
+          <a:lstStyle/>
+          <a:p>
+            <a:r>
+              <a:rPr lang="en-US" sz="1600" b="1">
+                <a:solidFill>
+                  <a:schemeClr val="tx1"/>
+                </a:solidFill>
+              </a:rPr>
+              <a:t>Inversion of Control</a:t>
+            </a:r>
+            <a:r>
+              <a:rPr lang="en-US" sz="1400">
+                <a:solidFill>
+                  <a:schemeClr val="tx1">
+                    <a:alpha val="70000"/>
+                  </a:schemeClr>
+                </a:solidFill>
+              </a:rPr>
+              <a:t>   The principle behind the container</a:t>
+            </a:r>
+          </a:p>
+        </p:txBody>
+      </p:sp>
+      <p:sp>
+        <p:nvSpPr>
+          <p:cNvPr id="17" name="Num 4"/>
+          <p:cNvSpPr/>
+          <p:nvPr/>
+        </p:nvSpPr>
+        <p:spPr>
+          <a:xfrm>
+            <a:off x="1200000" y="4200000"/>
+            <a:ext cx="700000" cy="700000"/>
+          </a:xfrm>
+          <a:prstGeom prst="ellipse">
+            <a:avLst/>
+          </a:prstGeom>
+          <a:solidFill>
+            <a:schemeClr val="accent4"/>
+          </a:solidFill>
+          <a:ln>
+            <a:noFill/>
+          </a:ln>
+        </p:spPr>
+        <p:txBody>
+          <a:bodyPr anchor="ctr">
+            <a:normAutofit/>
+          </a:bodyPr>
+          <a:lstStyle/>
+          <a:p>
+            <a:pPr algn="ctr"/>
+            <a:r>
+              <a:rPr lang="en-US" sz="1600" b="1">
+                <a:solidFill>
+                  <a:schemeClr val="tx2"/>
+                </a:solidFill>
+              </a:rPr>
+              <a:t>4</a:t>
+            </a:r>
+          </a:p>
+        </p:txBody>
+      </p:sp>
+      <p:sp>
+        <p:nvSpPr>
+          <p:cNvPr id="18" name="Row 4"/>
+          <p:cNvSpPr/>
+          <p:nvPr/>
+        </p:nvSpPr>
+        <p:spPr>
+          <a:xfrm>
+            <a:off x="2050000" y="4200000"/>
+            <a:ext cx="8900000" cy="700000"/>
+          </a:xfrm>
+          <a:prstGeom prst="rect">
+            <a:avLst/>
+          </a:prstGeom>
+          <a:noFill/>
+        </p:spPr>
+        <p:txBody>
+          <a:bodyPr lIns="0" anchor="ctr">
+            <a:normAutofit/>
+          </a:bodyPr>
+          <a:lstStyle/>
+          <a:p>
+            <a:r>
+              <a:rPr lang="en-US" sz="1600" b="1">
+                <a:solidFill>
+                  <a:schemeClr val="tx1"/>
+                </a:solidFill>
+              </a:rPr>
+              <a:t>Dependency Injection</a:t>
+            </a:r>
+            <a:r>
+              <a:rPr lang="en-US" sz="1400">
+                <a:solidFill>
+                  <a:schemeClr val="tx1">
+                    <a:alpha val="70000"/>
+                  </a:schemeClr>
+                </a:solidFill>
+              </a:rPr>
+              <a:t>   The pattern, applied to real code</a:t>
+            </a:r>
+          </a:p>
+        </p:txBody>
+      </p:sp>
+      <p:sp>
+        <p:nvSpPr>
+          <p:cNvPr id="19" name="Num 5"/>
+          <p:cNvSpPr/>
+          <p:nvPr/>
+        </p:nvSpPr>
+        <p:spPr>
+          <a:xfrm>
+            <a:off x="1200000" y="5100000"/>
+            <a:ext cx="700000" cy="700000"/>
+          </a:xfrm>
+          <a:prstGeom prst="ellipse">
+            <a:avLst/>
+          </a:prstGeom>
+          <a:solidFill>
+            <a:schemeClr val="accent6"/>
+          </a:solidFill>
+          <a:ln>
+            <a:noFill/>
+          </a:ln>
+        </p:spPr>
+        <p:txBody>
+          <a:bodyPr anchor="ctr">
+            <a:normAutofit/>
+          </a:bodyPr>
+          <a:lstStyle/>
+          <a:p>
+            <a:pPr algn="ctr"/>
+            <a:r>
+              <a:rPr lang="en-US" sz="1600" b="1">
+                <a:solidFill>
+                  <a:schemeClr val="tx2"/>
+                </a:solidFill>
+              </a:rPr>
+              <a:t>5</a:t>
+            </a:r>
+          </a:p>
+        </p:txBody>
+      </p:sp>
+      <p:sp>
+        <p:nvSpPr>
+          <p:cNvPr id="20" name="Row 5"/>
+          <p:cNvSpPr/>
+          <p:nvPr/>
+        </p:nvSpPr>
+        <p:spPr>
+          <a:xfrm>
+            <a:off x="2050000" y="5100000"/>
+            <a:ext cx="8900000" cy="700000"/>
+          </a:xfrm>
+          <a:prstGeom prst="rect">
+            <a:avLst/>
+          </a:prstGeom>
+          <a:noFill/>
+        </p:spPr>
+        <p:txBody>
+          <a:bodyPr lIns="0" anchor="ctr">
+            <a:normAutofit/>
+          </a:bodyPr>
+          <a:lstStyle/>
+          <a:p>
+            <a:r>
+              <a:rPr lang="en-US" sz="1600" b="1">
+                <a:solidFill>
+                  <a:schemeClr val="tx1"/>
+                </a:solidFill>
+              </a:rPr>
+              <a:t>Hands-on</a:t>
+            </a:r>
+            <a:r>
+              <a:rPr lang="en-US" sz="1400">
+                <a:solidFill>
+                  <a:schemeClr val="tx1">
+                    <a:alpha val="70000"/>
+                  </a:schemeClr>
+                </a:solidFill>
+              </a:rPr>
+              <a:t>   Work the repo branch by branch</a:t>
             </a:r>
           </a:p>
         </p:txBody>
@@ -8750,12 +10383,12 @@
     </p:spTree>
     <p:extLst>
       <p:ext uri="{BB962C8B-B14F-4D97-AF65-F5344CB8AC3E}">
-        <p14:creationId xmlns:p14="http://schemas.microsoft.com/office/powerpoint/2010/main" val="545037678"/>
+        <p14:creationId xmlns:p14="http://schemas.microsoft.com/office/powerpoint/2010/main" val="111224160"/>
       </p:ext>
     </p:extLst>
   </p:cSld>
   <p:clrMapOvr>
-    <a:overrideClrMapping bg1="dk1" tx1="lt1" bg2="dk2" tx2="lt2" accent1="accent1" accent2="accent2" accent3="accent3" accent4="accent4" accent5="accent5" accent6="accent6" hlink="hlink" folHlink="folHlink"/>
+    <a:masterClrMapping/>
   </p:clrMapOvr>
 </p:sld>
 </file>
@@ -8787,10 +10420,10 @@
       </p:grpSpPr>
       <p:sp>
         <p:nvSpPr>
-          <p:cNvPr id="2" name="Title 1">
+          <p:cNvPr id="3" name="Content Placeholder 2">
             <a:extLst>
               <a:ext uri="{FF2B5EF4-FFF2-40B4-BE49-F238E27FC236}">
-                <a16:creationId xmlns:a16="http://schemas.microsoft.com/office/drawing/2014/main" id="{8F5127E2-9264-E9CB-DD10-E00D462BFAF2}"/>
+                <a16:creationId xmlns:a16="http://schemas.microsoft.com/office/drawing/2014/main" id="{895ED2E3-DBE8-B2EF-8448-00600C561CAD}"/>
               </a:ext>
             </a:extLst>
           </p:cNvPr>
@@ -8798,112 +10431,38 @@
             <a:spLocks noGrp="1"/>
           </p:cNvSpPr>
           <p:nvPr>
-            <p:ph type="title"/>
-          </p:nvPr>
-        </p:nvSpPr>
-        <p:spPr/>
+            <p:ph idx="1"/>
+          </p:nvPr>
+        </p:nvSpPr>
+        <p:spPr>
+          <a:xfrm>
+            <a:off x="1276423" y="2977227"/>
+            <a:ext cx="8596668" cy="3880773"/>
+          </a:xfrm>
+        </p:spPr>
         <p:txBody>
           <a:bodyPr>
             <a:normAutofit/>
           </a:bodyPr>
           <a:lstStyle/>
           <a:p>
-            <a:r>
-              <a:rPr lang="en-IL" b="1" dirty="0">
+            <a:pPr marL="0" indent="0">
+              <a:buNone/>
+            </a:pPr>
+            <a:r>
+              <a:rPr lang="en-IL" sz="9600" b="1" dirty="0">
                 <a:latin typeface="ATT Aleck Sans" panose="020B0503020203020204" pitchFamily="34" charset="0"/>
                 <a:cs typeface="ATT Aleck Sans" panose="020B0503020203020204" pitchFamily="34" charset="0"/>
               </a:rPr>
-              <a:t>Spring Boot</a:t>
-            </a:r>
-          </a:p>
-        </p:txBody>
-      </p:sp>
-      <p:sp>
-        <p:nvSpPr>
-          <p:cNvPr id="3" name="Content Placeholder 2">
-            <a:extLst>
-              <a:ext uri="{FF2B5EF4-FFF2-40B4-BE49-F238E27FC236}">
-                <a16:creationId xmlns:a16="http://schemas.microsoft.com/office/drawing/2014/main" id="{D0BDD530-32D2-007A-86C5-1583B831586C}"/>
-              </a:ext>
-            </a:extLst>
-          </p:cNvPr>
-          <p:cNvSpPr>
-            <a:spLocks noGrp="1"/>
-          </p:cNvSpPr>
-          <p:nvPr>
-            <p:ph idx="1"/>
-          </p:nvPr>
-        </p:nvSpPr>
-        <p:spPr>
-          <a:xfrm>
-            <a:off x="603761" y="1435375"/>
-            <a:ext cx="8596668" cy="3880773"/>
-          </a:xfrm>
-        </p:spPr>
-        <p:txBody>
-          <a:bodyPr>
-            <a:noAutofit/>
-          </a:bodyPr>
-          <a:lstStyle/>
-          <a:p>
-            <a:pPr marL="400050"/>
-            <a:r>
-              <a:rPr lang="en-US" sz="2800" dirty="0">
-                <a:latin typeface="ATT Aleck Sans" panose="020B0503020203020204" pitchFamily="34" charset="0"/>
-                <a:cs typeface="ATT Aleck Sans" panose="020B0503020203020204" pitchFamily="34" charset="0"/>
-              </a:rPr>
-              <a:t>Spring is an umbrella of projects, that aim to solve and ease common problems in day-to-day development of enterprise applications.</a:t>
-            </a:r>
-            <a:br>
-              <a:rPr lang="en-US" sz="2800" dirty="0">
-                <a:latin typeface="ATT Aleck Sans" panose="020B0503020203020204" pitchFamily="34" charset="0"/>
-                <a:cs typeface="ATT Aleck Sans" panose="020B0503020203020204" pitchFamily="34" charset="0"/>
-              </a:rPr>
-            </a:br>
-            <a:endParaRPr lang="en-US" sz="2800" dirty="0">
-              <a:latin typeface="ATT Aleck Sans" panose="020B0503020203020204" pitchFamily="34" charset="0"/>
-              <a:cs typeface="ATT Aleck Sans" panose="020B0503020203020204" pitchFamily="34" charset="0"/>
-            </a:endParaRPr>
-          </a:p>
-          <a:p>
-            <a:pPr marL="400050"/>
-            <a:r>
-              <a:rPr lang="en-US" sz="2800" dirty="0">
-                <a:latin typeface="ATT Aleck Sans" panose="020B0503020203020204" pitchFamily="34" charset="0"/>
-                <a:cs typeface="ATT Aleck Sans" panose="020B0503020203020204" pitchFamily="34" charset="0"/>
-              </a:rPr>
-              <a:t>Spring Boot is a project that is built on top of the Spring Framework. It provides an easier and faster way to set up, configure, and run applications.</a:t>
-            </a:r>
-            <a:br>
-              <a:rPr lang="en-US" sz="2800" dirty="0">
-                <a:latin typeface="ATT Aleck Sans" panose="020B0503020203020204" pitchFamily="34" charset="0"/>
-                <a:cs typeface="ATT Aleck Sans" panose="020B0503020203020204" pitchFamily="34" charset="0"/>
-              </a:rPr>
-            </a:br>
-            <a:endParaRPr lang="en-US" sz="2800" dirty="0">
-              <a:latin typeface="ATT Aleck Sans" panose="020B0503020203020204" pitchFamily="34" charset="0"/>
-              <a:cs typeface="ATT Aleck Sans" panose="020B0503020203020204" pitchFamily="34" charset="0"/>
-            </a:endParaRPr>
-          </a:p>
-          <a:p>
-            <a:pPr marL="400050"/>
-            <a:r>
-              <a:rPr lang="en-US" sz="2800" dirty="0">
-                <a:latin typeface="ATT Aleck Sans" panose="020B0503020203020204" pitchFamily="34" charset="0"/>
-                <a:cs typeface="ATT Aleck Sans" panose="020B0503020203020204" pitchFamily="34" charset="0"/>
-              </a:rPr>
-              <a:t>Spring Boot is based on the best practices and covers most of the use cases.</a:t>
-            </a:r>
-            <a:endParaRPr lang="ru-RU" sz="2800" dirty="0">
-              <a:cs typeface="ATT Aleck Sans" panose="020B0503020203020204" pitchFamily="34" charset="0"/>
-            </a:endParaRPr>
+              <a:t>MOTIVATION</a:t>
+            </a:r>
           </a:p>
         </p:txBody>
       </p:sp>
     </p:spTree>
     <p:extLst>
       <p:ext uri="{BB962C8B-B14F-4D97-AF65-F5344CB8AC3E}">
-        <p14:creationId xmlns:p14="http://schemas.microsoft.com/office/powerpoint/2010/main" val="3747451504"/>
+        <p14:creationId xmlns:p14="http://schemas.microsoft.com/office/powerpoint/2010/main" val="545037678"/>
       </p:ext>
     </p:extLst>
   </p:cSld>
@@ -8916,14 +10475,6 @@
 <file path=ppt/slides/slide6.xml><?xml version="1.0" encoding="utf-8"?>
 <p:sld xmlns:a="http://schemas.openxmlformats.org/drawingml/2006/main" xmlns:r="http://schemas.openxmlformats.org/officeDocument/2006/relationships" xmlns:p="http://schemas.openxmlformats.org/presentationml/2006/main">
   <p:cSld>
-    <p:bg>
-      <p:bgPr>
-        <a:solidFill>
-          <a:schemeClr val="bg2"/>
-        </a:solidFill>
-        <a:effectLst/>
-      </p:bgPr>
-    </p:bg>
     <p:spTree>
       <p:nvGrpSpPr>
         <p:cNvPr id="1" name=""/>
@@ -8940,13 +10491,7 @@
       </p:grpSpPr>
       <p:sp>
         <p:nvSpPr>
-          <p:cNvPr id="2" name="Title 1">
-            <a:extLst>
-              <a:ext uri="{FF2B5EF4-FFF2-40B4-BE49-F238E27FC236}">
-                <a16:creationId xmlns:a16="http://schemas.microsoft.com/office/drawing/2014/main" id="{8F5127E2-9264-E9CB-DD10-E00D462BFAF2}"/>
-              </a:ext>
-            </a:extLst>
-          </p:cNvPr>
+          <p:cNvPr id="2" name="Title 1"/>
           <p:cNvSpPr>
             <a:spLocks noGrp="1"/>
           </p:cNvSpPr>
@@ -8954,7 +10499,12 @@
             <p:ph type="title"/>
           </p:nvPr>
         </p:nvSpPr>
-        <p:spPr/>
+        <p:spPr>
+          <a:xfrm>
+            <a:off x="609600" y="365760"/>
+            <a:ext cx="10972800" cy="900000"/>
+          </a:xfrm>
+        </p:spPr>
         <p:txBody>
           <a:bodyPr>
             <a:normAutofit/>
@@ -8962,108 +10512,646 @@
           <a:lstStyle/>
           <a:p>
             <a:r>
-              <a:rPr lang="en-IL" b="1" dirty="0">
-                <a:latin typeface="ATT Aleck Sans" panose="020B0503020203020204" pitchFamily="34" charset="0"/>
-                <a:cs typeface="ATT Aleck Sans" panose="020B0503020203020204" pitchFamily="34" charset="0"/>
-              </a:rPr>
-              <a:t>Spring Boot</a:t>
-            </a:r>
-          </a:p>
-        </p:txBody>
-      </p:sp>
-      <p:sp>
-        <p:nvSpPr>
-          <p:cNvPr id="3" name="Content Placeholder 2">
-            <a:extLst>
-              <a:ext uri="{FF2B5EF4-FFF2-40B4-BE49-F238E27FC236}">
-                <a16:creationId xmlns:a16="http://schemas.microsoft.com/office/drawing/2014/main" id="{D0BDD530-32D2-007A-86C5-1583B831586C}"/>
-              </a:ext>
-            </a:extLst>
-          </p:cNvPr>
-          <p:cNvSpPr>
-            <a:spLocks noGrp="1"/>
-          </p:cNvSpPr>
-          <p:nvPr>
-            <p:ph idx="1"/>
-          </p:nvPr>
-        </p:nvSpPr>
+              <a:rPr lang="en-US" sz="3200" b="1"/>
+              <a:t>Why use a web framework?</a:t>
+            </a:r>
+          </a:p>
+        </p:txBody>
+      </p:sp>
+      <p:cxnSp>
+        <p:nvCxnSpPr>
+          <p:cNvPr id="11" name="Connector 11"/>
+          <p:cNvCxnSpPr/>
+          <p:nvPr/>
+        </p:nvCxnSpPr>
         <p:spPr>
           <a:xfrm>
-            <a:off x="666823" y="1477417"/>
-            <a:ext cx="8596668" cy="3880773"/>
+            <a:off x="3809600" y="2150000"/>
+            <a:ext cx="990400" cy="1500000"/>
           </a:xfrm>
+          <a:prstGeom prst="line">
+            <a:avLst/>
+          </a:prstGeom>
+          <a:ln w="19050" cap="rnd">
+            <a:solidFill>
+              <a:schemeClr val="accent2">
+                <a:alpha val="70000"/>
+              </a:schemeClr>
+            </a:solidFill>
+            <a:prstDash val="sysDot"/>
+          </a:ln>
         </p:spPr>
-        <p:txBody>
-          <a:bodyPr>
-            <a:noAutofit/>
+        <p:style>
+          <a:lnRef idx="1">
+            <a:schemeClr val="accent1"/>
+          </a:lnRef>
+          <a:fillRef idx="0">
+            <a:schemeClr val="accent1"/>
+          </a:fillRef>
+          <a:effectRef idx="0">
+            <a:schemeClr val="accent1"/>
+          </a:effectRef>
+          <a:fontRef idx="minor">
+            <a:schemeClr val="tx1"/>
+          </a:fontRef>
+        </p:style>
+      </p:cxnSp>
+      <p:cxnSp>
+        <p:nvCxnSpPr>
+          <p:cNvPr id="12" name="Connector 12"/>
+          <p:cNvCxnSpPr/>
+          <p:nvPr/>
+        </p:nvCxnSpPr>
+        <p:spPr>
+          <a:xfrm>
+            <a:off x="3809600" y="3650000"/>
+            <a:ext cx="990400" cy="0"/>
+          </a:xfrm>
+          <a:prstGeom prst="line">
+            <a:avLst/>
+          </a:prstGeom>
+          <a:ln w="19050" cap="rnd">
+            <a:solidFill>
+              <a:schemeClr val="accent1">
+                <a:alpha val="70000"/>
+              </a:schemeClr>
+            </a:solidFill>
+            <a:prstDash val="sysDot"/>
+          </a:ln>
+        </p:spPr>
+        <p:style>
+          <a:lnRef idx="1">
+            <a:schemeClr val="accent1"/>
+          </a:lnRef>
+          <a:fillRef idx="0">
+            <a:schemeClr val="accent1"/>
+          </a:fillRef>
+          <a:effectRef idx="0">
+            <a:schemeClr val="accent1"/>
+          </a:effectRef>
+          <a:fontRef idx="minor">
+            <a:schemeClr val="tx1"/>
+          </a:fontRef>
+        </p:style>
+      </p:cxnSp>
+      <p:cxnSp>
+        <p:nvCxnSpPr>
+          <p:cNvPr id="13" name="Connector 13"/>
+          <p:cNvCxnSpPr/>
+          <p:nvPr/>
+        </p:nvCxnSpPr>
+        <p:spPr>
+          <a:xfrm flipV="1">
+            <a:off x="3809600" y="3650000"/>
+            <a:ext cx="990400" cy="1500000"/>
+          </a:xfrm>
+          <a:prstGeom prst="line">
+            <a:avLst/>
+          </a:prstGeom>
+          <a:ln w="19050" cap="rnd">
+            <a:solidFill>
+              <a:schemeClr val="accent3">
+                <a:alpha val="70000"/>
+              </a:schemeClr>
+            </a:solidFill>
+            <a:prstDash val="sysDot"/>
+          </a:ln>
+        </p:spPr>
+        <p:style>
+          <a:lnRef idx="1">
+            <a:schemeClr val="accent1"/>
+          </a:lnRef>
+          <a:fillRef idx="0">
+            <a:schemeClr val="accent1"/>
+          </a:fillRef>
+          <a:effectRef idx="0">
+            <a:schemeClr val="accent1"/>
+          </a:effectRef>
+          <a:fontRef idx="minor">
+            <a:schemeClr val="tx1"/>
+          </a:fontRef>
+        </p:style>
+      </p:cxnSp>
+      <p:cxnSp>
+        <p:nvCxnSpPr>
+          <p:cNvPr id="14" name="Connector 14"/>
+          <p:cNvCxnSpPr/>
+          <p:nvPr/>
+        </p:nvCxnSpPr>
+        <p:spPr>
+          <a:xfrm flipV="1">
+            <a:off x="7392000" y="2150000"/>
+            <a:ext cx="990000" cy="1500000"/>
+          </a:xfrm>
+          <a:prstGeom prst="line">
+            <a:avLst/>
+          </a:prstGeom>
+          <a:ln w="19050" cap="rnd">
+            <a:solidFill>
+              <a:schemeClr val="accent4">
+                <a:alpha val="70000"/>
+              </a:schemeClr>
+            </a:solidFill>
+            <a:prstDash val="sysDot"/>
+          </a:ln>
+        </p:spPr>
+        <p:style>
+          <a:lnRef idx="1">
+            <a:schemeClr val="accent1"/>
+          </a:lnRef>
+          <a:fillRef idx="0">
+            <a:schemeClr val="accent1"/>
+          </a:fillRef>
+          <a:effectRef idx="0">
+            <a:schemeClr val="accent1"/>
+          </a:effectRef>
+          <a:fontRef idx="minor">
+            <a:schemeClr val="tx1"/>
+          </a:fontRef>
+        </p:style>
+      </p:cxnSp>
+      <p:cxnSp>
+        <p:nvCxnSpPr>
+          <p:cNvPr id="15" name="Connector 15"/>
+          <p:cNvCxnSpPr/>
+          <p:nvPr/>
+        </p:nvCxnSpPr>
+        <p:spPr>
+          <a:xfrm>
+            <a:off x="7392000" y="3650000"/>
+            <a:ext cx="990000" cy="0"/>
+          </a:xfrm>
+          <a:prstGeom prst="line">
+            <a:avLst/>
+          </a:prstGeom>
+          <a:ln w="19050" cap="rnd">
+            <a:solidFill>
+              <a:schemeClr val="accent5">
+                <a:alpha val="70000"/>
+              </a:schemeClr>
+            </a:solidFill>
+            <a:prstDash val="sysDot"/>
+          </a:ln>
+        </p:spPr>
+        <p:style>
+          <a:lnRef idx="1">
+            <a:schemeClr val="accent1"/>
+          </a:lnRef>
+          <a:fillRef idx="0">
+            <a:schemeClr val="accent1"/>
+          </a:fillRef>
+          <a:effectRef idx="0">
+            <a:schemeClr val="accent1"/>
+          </a:effectRef>
+          <a:fontRef idx="minor">
+            <a:schemeClr val="tx1"/>
+          </a:fontRef>
+        </p:style>
+      </p:cxnSp>
+      <p:cxnSp>
+        <p:nvCxnSpPr>
+          <p:cNvPr id="16" name="Connector 16"/>
+          <p:cNvCxnSpPr/>
+          <p:nvPr/>
+        </p:nvCxnSpPr>
+        <p:spPr>
+          <a:xfrm>
+            <a:off x="7392000" y="3650000"/>
+            <a:ext cx="990000" cy="1500000"/>
+          </a:xfrm>
+          <a:prstGeom prst="line">
+            <a:avLst/>
+          </a:prstGeom>
+          <a:ln w="19050" cap="rnd">
+            <a:solidFill>
+              <a:schemeClr val="accent6">
+                <a:alpha val="70000"/>
+              </a:schemeClr>
+            </a:solidFill>
+            <a:prstDash val="sysDot"/>
+          </a:ln>
+        </p:spPr>
+        <p:style>
+          <a:lnRef idx="1">
+            <a:schemeClr val="accent1"/>
+          </a:lnRef>
+          <a:fillRef idx="0">
+            <a:schemeClr val="accent1"/>
+          </a:fillRef>
+          <a:effectRef idx="0">
+            <a:schemeClr val="accent1"/>
+          </a:effectRef>
+          <a:fontRef idx="minor">
+            <a:schemeClr val="tx1"/>
+          </a:fontRef>
+        </p:style>
+      </p:cxnSp>
+      <p:sp>
+        <p:nvSpPr>
+          <p:cNvPr id="17" name="Hub"/>
+          <p:cNvSpPr/>
+          <p:nvPr/>
+        </p:nvSpPr>
+        <p:spPr>
+          <a:xfrm>
+            <a:off x="4800000" y="2900000"/>
+            <a:ext cx="2592000" cy="1500000"/>
+          </a:xfrm>
+          <a:prstGeom prst="roundRect">
+            <a:avLst>
+              <a:gd name="adj" fmla="val 20000"/>
+            </a:avLst>
+          </a:prstGeom>
+          <a:solidFill>
+            <a:schemeClr val="tx2"/>
+          </a:solidFill>
+          <a:ln w="28575">
+            <a:solidFill>
+              <a:schemeClr val="accent1"/>
+            </a:solidFill>
+          </a:ln>
+        </p:spPr>
+        <p:txBody>
+          <a:bodyPr lIns="91440" rIns="91440" anchor="ctr">
+            <a:normAutofit/>
           </a:bodyPr>
           <a:lstStyle/>
           <a:p>
-            <a:pPr marL="57150" indent="0">
-              <a:buNone/>
-            </a:pPr>
-            <a:r>
-              <a:rPr lang="en-US" sz="2800" dirty="0">
-                <a:latin typeface="ATT Aleck Sans" panose="020B0503020203020204" pitchFamily="34" charset="0"/>
-                <a:cs typeface="ATT Aleck Sans" panose="020B0503020203020204" pitchFamily="34" charset="0"/>
-              </a:rPr>
-              <a:t>Spring Boot is used for creating a stand-alone </a:t>
-            </a:r>
-            <a:br>
-              <a:rPr lang="en-US" sz="2800" dirty="0">
-                <a:latin typeface="ATT Aleck Sans" panose="020B0503020203020204" pitchFamily="34" charset="0"/>
-                <a:cs typeface="ATT Aleck Sans" panose="020B0503020203020204" pitchFamily="34" charset="0"/>
-              </a:rPr>
-            </a:br>
-            <a:r>
-              <a:rPr lang="en-US" sz="2800" dirty="0">
-                <a:latin typeface="ATT Aleck Sans" panose="020B0503020203020204" pitchFamily="34" charset="0"/>
-                <a:cs typeface="ATT Aleck Sans" panose="020B0503020203020204" pitchFamily="34" charset="0"/>
-              </a:rPr>
-              <a:t>Spring-based application that you can just run because it needs minimal Spring configuration.</a:t>
-            </a:r>
-          </a:p>
-          <a:p>
-            <a:pPr lvl="2"/>
-            <a:r>
-              <a:rPr lang="en-US" sz="2400" dirty="0">
-                <a:latin typeface="ATT Aleck Sans" panose="020B0503020203020204" pitchFamily="34" charset="0"/>
-                <a:cs typeface="ATT Aleck Sans" panose="020B0503020203020204" pitchFamily="34" charset="0"/>
-              </a:rPr>
-              <a:t> No need for web servlets, it has Tomcat inside;</a:t>
-            </a:r>
-          </a:p>
-          <a:p>
-            <a:pPr lvl="2"/>
-            <a:r>
-              <a:rPr lang="en-US" sz="2400" dirty="0">
-                <a:latin typeface="ATT Aleck Sans" panose="020B0503020203020204" pitchFamily="34" charset="0"/>
-                <a:cs typeface="ATT Aleck Sans" panose="020B0503020203020204" pitchFamily="34" charset="0"/>
-              </a:rPr>
-              <a:t> Configurations are packed inside;</a:t>
-            </a:r>
-          </a:p>
-          <a:p>
-            <a:pPr lvl="2"/>
-            <a:r>
-              <a:rPr lang="en-US" sz="2400" dirty="0">
-                <a:latin typeface="ATT Aleck Sans" panose="020B0503020203020204" pitchFamily="34" charset="0"/>
-                <a:cs typeface="ATT Aleck Sans" panose="020B0503020203020204" pitchFamily="34" charset="0"/>
-              </a:rPr>
-              <a:t> Just run, and you have a Server on air.</a:t>
+            <a:pPr algn="ctr"/>
+            <a:r>
+              <a:rPr lang="en-US" sz="1800" b="1">
+                <a:solidFill>
+                  <a:schemeClr val="bg1"/>
+                </a:solidFill>
+              </a:rPr>
+              <a:t>Web Framework</a:t>
+            </a:r>
+          </a:p>
+          <a:p>
+            <a:pPr algn="ctr"/>
+            <a:r>
+              <a:rPr lang="en-US" sz="1200">
+                <a:solidFill>
+                  <a:schemeClr val="accent1"/>
+                </a:solidFill>
+              </a:rPr>
+              <a:t>(Spring Boot)</a:t>
+            </a:r>
+          </a:p>
+        </p:txBody>
+      </p:sp>
+      <p:sp>
+        <p:nvSpPr>
+          <p:cNvPr id="18" name="Card Routing"/>
+          <p:cNvSpPr/>
+          <p:nvPr/>
+        </p:nvSpPr>
+        <p:spPr>
+          <a:xfrm>
+            <a:off x="609600" y="1550000"/>
+            <a:ext cx="3200000" cy="1200000"/>
+          </a:xfrm>
+          <a:prstGeom prst="roundRect">
+            <a:avLst>
+              <a:gd name="adj" fmla="val 12000"/>
+            </a:avLst>
+          </a:prstGeom>
+          <a:solidFill>
+            <a:schemeClr val="bg1"/>
+          </a:solidFill>
+          <a:ln w="25400">
+            <a:solidFill>
+              <a:schemeClr val="accent2"/>
+            </a:solidFill>
+          </a:ln>
+        </p:spPr>
+        <p:txBody>
+          <a:bodyPr lIns="182880" tIns="91440" rIns="137160" bIns="91440" anchor="ctr">
+            <a:normAutofit/>
+          </a:bodyPr>
+          <a:lstStyle/>
+          <a:p>
+            <a:r>
+              <a:rPr lang="en-US" sz="1400" b="1">
+                <a:solidFill>
+                  <a:schemeClr val="accent2"/>
+                </a:solidFill>
+              </a:rPr>
+              <a:t>Routing</a:t>
+            </a:r>
+          </a:p>
+          <a:p>
+            <a:r>
+              <a:rPr lang="en-US" sz="1050">
+                <a:solidFill>
+                  <a:schemeClr val="tx1"/>
+                </a:solidFill>
+              </a:rPr>
+              <a:t>Map URLs to handlers — no servlet plumbing</a:t>
+            </a:r>
+          </a:p>
+        </p:txBody>
+      </p:sp>
+      <p:sp>
+        <p:nvSpPr>
+          <p:cNvPr id="19" name="Card Dependency Injection"/>
+          <p:cNvSpPr/>
+          <p:nvPr/>
+        </p:nvSpPr>
+        <p:spPr>
+          <a:xfrm>
+            <a:off x="609600" y="3050000"/>
+            <a:ext cx="3200000" cy="1200000"/>
+          </a:xfrm>
+          <a:prstGeom prst="roundRect">
+            <a:avLst>
+              <a:gd name="adj" fmla="val 12000"/>
+            </a:avLst>
+          </a:prstGeom>
+          <a:solidFill>
+            <a:schemeClr val="bg1"/>
+          </a:solidFill>
+          <a:ln w="25400">
+            <a:solidFill>
+              <a:schemeClr val="accent1"/>
+            </a:solidFill>
+          </a:ln>
+        </p:spPr>
+        <p:txBody>
+          <a:bodyPr lIns="182880" tIns="91440" rIns="137160" bIns="91440" anchor="ctr">
+            <a:normAutofit/>
+          </a:bodyPr>
+          <a:lstStyle/>
+          <a:p>
+            <a:r>
+              <a:rPr lang="en-US" sz="1400" b="1">
+                <a:solidFill>
+                  <a:schemeClr val="accent1"/>
+                </a:solidFill>
+              </a:rPr>
+              <a:t>Dependency Injection</a:t>
+            </a:r>
+          </a:p>
+          <a:p>
+            <a:r>
+              <a:rPr lang="en-US" sz="1050">
+                <a:solidFill>
+                  <a:schemeClr val="tx1"/>
+                </a:solidFill>
+              </a:rPr>
+              <a:t>Wire components by contract, not by new()</a:t>
+            </a:r>
+          </a:p>
+        </p:txBody>
+      </p:sp>
+      <p:sp>
+        <p:nvSpPr>
+          <p:cNvPr id="20" name="Card Error Handling"/>
+          <p:cNvSpPr/>
+          <p:nvPr/>
+        </p:nvSpPr>
+        <p:spPr>
+          <a:xfrm>
+            <a:off x="609600" y="4550000"/>
+            <a:ext cx="3200000" cy="1200000"/>
+          </a:xfrm>
+          <a:prstGeom prst="roundRect">
+            <a:avLst>
+              <a:gd name="adj" fmla="val 12000"/>
+            </a:avLst>
+          </a:prstGeom>
+          <a:solidFill>
+            <a:schemeClr val="bg1"/>
+          </a:solidFill>
+          <a:ln w="25400">
+            <a:solidFill>
+              <a:schemeClr val="accent3"/>
+            </a:solidFill>
+          </a:ln>
+        </p:spPr>
+        <p:txBody>
+          <a:bodyPr lIns="182880" tIns="91440" rIns="137160" bIns="91440" anchor="ctr">
+            <a:normAutofit/>
+          </a:bodyPr>
+          <a:lstStyle/>
+          <a:p>
+            <a:r>
+              <a:rPr lang="en-US" sz="1400" b="1">
+                <a:solidFill>
+                  <a:schemeClr val="accent3"/>
+                </a:solidFill>
+              </a:rPr>
+              <a:t>Error Handling</a:t>
+            </a:r>
+          </a:p>
+          <a:p>
+            <a:r>
+              <a:rPr lang="en-US" sz="1050">
+                <a:solidFill>
+                  <a:schemeClr val="tx1"/>
+                </a:solidFill>
+              </a:rPr>
+              <a:t>One place for exceptions and HTTP responses</a:t>
+            </a:r>
+          </a:p>
+        </p:txBody>
+      </p:sp>
+      <p:sp>
+        <p:nvSpPr>
+          <p:cNvPr id="21" name="Card Configuration"/>
+          <p:cNvSpPr/>
+          <p:nvPr/>
+        </p:nvSpPr>
+        <p:spPr>
+          <a:xfrm>
+            <a:off x="8382000" y="1550000"/>
+            <a:ext cx="3200000" cy="1200000"/>
+          </a:xfrm>
+          <a:prstGeom prst="roundRect">
+            <a:avLst>
+              <a:gd name="adj" fmla="val 12000"/>
+            </a:avLst>
+          </a:prstGeom>
+          <a:solidFill>
+            <a:schemeClr val="bg1"/>
+          </a:solidFill>
+          <a:ln w="25400">
+            <a:solidFill>
+              <a:schemeClr val="accent4"/>
+            </a:solidFill>
+          </a:ln>
+        </p:spPr>
+        <p:txBody>
+          <a:bodyPr lIns="182880" tIns="91440" rIns="137160" bIns="91440" anchor="ctr">
+            <a:normAutofit/>
+          </a:bodyPr>
+          <a:lstStyle/>
+          <a:p>
+            <a:r>
+              <a:rPr lang="en-US" sz="1400" b="1">
+                <a:solidFill>
+                  <a:schemeClr val="accent4"/>
+                </a:solidFill>
+              </a:rPr>
+              <a:t>Configuration</a:t>
+            </a:r>
+          </a:p>
+          <a:p>
+            <a:r>
+              <a:rPr lang="en-US" sz="1050">
+                <a:solidFill>
+                  <a:schemeClr val="tx1"/>
+                </a:solidFill>
+              </a:rPr>
+              <a:t>Externalized settings and profiles per env</a:t>
+            </a:r>
+          </a:p>
+        </p:txBody>
+      </p:sp>
+      <p:sp>
+        <p:nvSpPr>
+          <p:cNvPr id="22" name="Card Security"/>
+          <p:cNvSpPr/>
+          <p:nvPr/>
+        </p:nvSpPr>
+        <p:spPr>
+          <a:xfrm>
+            <a:off x="8382000" y="3050000"/>
+            <a:ext cx="3200000" cy="1200000"/>
+          </a:xfrm>
+          <a:prstGeom prst="roundRect">
+            <a:avLst>
+              <a:gd name="adj" fmla="val 12000"/>
+            </a:avLst>
+          </a:prstGeom>
+          <a:solidFill>
+            <a:schemeClr val="bg1"/>
+          </a:solidFill>
+          <a:ln w="25400">
+            <a:solidFill>
+              <a:schemeClr val="accent5"/>
+            </a:solidFill>
+          </a:ln>
+        </p:spPr>
+        <p:txBody>
+          <a:bodyPr lIns="182880" tIns="91440" rIns="137160" bIns="91440" anchor="ctr">
+            <a:normAutofit/>
+          </a:bodyPr>
+          <a:lstStyle/>
+          <a:p>
+            <a:r>
+              <a:rPr lang="en-US" sz="1400" b="1">
+                <a:solidFill>
+                  <a:schemeClr val="accent5"/>
+                </a:solidFill>
+              </a:rPr>
+              <a:t>Security</a:t>
+            </a:r>
+          </a:p>
+          <a:p>
+            <a:r>
+              <a:rPr lang="en-US" sz="1050">
+                <a:solidFill>
+                  <a:schemeClr val="tx1"/>
+                </a:solidFill>
+              </a:rPr>
+              <a:t>Auth, roles and CSRF protection built in</a:t>
+            </a:r>
+          </a:p>
+        </p:txBody>
+      </p:sp>
+      <p:sp>
+        <p:nvSpPr>
+          <p:cNvPr id="23" name="Card Data &amp; Testing"/>
+          <p:cNvSpPr/>
+          <p:nvPr/>
+        </p:nvSpPr>
+        <p:spPr>
+          <a:xfrm>
+            <a:off x="8382000" y="4550000"/>
+            <a:ext cx="3200000" cy="1200000"/>
+          </a:xfrm>
+          <a:prstGeom prst="roundRect">
+            <a:avLst>
+              <a:gd name="adj" fmla="val 12000"/>
+            </a:avLst>
+          </a:prstGeom>
+          <a:solidFill>
+            <a:schemeClr val="bg1"/>
+          </a:solidFill>
+          <a:ln w="25400">
+            <a:solidFill>
+              <a:schemeClr val="accent6"/>
+            </a:solidFill>
+          </a:ln>
+        </p:spPr>
+        <p:txBody>
+          <a:bodyPr lIns="182880" tIns="91440" rIns="137160" bIns="91440" anchor="ctr">
+            <a:normAutofit/>
+          </a:bodyPr>
+          <a:lstStyle/>
+          <a:p>
+            <a:r>
+              <a:rPr lang="en-US" sz="1400" b="1">
+                <a:solidFill>
+                  <a:schemeClr val="accent6"/>
+                </a:solidFill>
+              </a:rPr>
+              <a:t>Data &amp; Testing</a:t>
+            </a:r>
+          </a:p>
+          <a:p>
+            <a:r>
+              <a:rPr lang="en-US" sz="1050">
+                <a:solidFill>
+                  <a:schemeClr val="tx1"/>
+                </a:solidFill>
+              </a:rPr>
+              <a:t>Repositories, transactions, test slices</a:t>
+            </a:r>
+          </a:p>
+        </p:txBody>
+      </p:sp>
+      <p:sp>
+        <p:nvSpPr>
+          <p:cNvPr id="90" name="Footnote"/>
+          <p:cNvSpPr/>
+          <p:nvPr/>
+        </p:nvSpPr>
+        <p:spPr>
+          <a:xfrm>
+            <a:off x="609600" y="6050000"/>
+            <a:ext cx="10972800" cy="400000"/>
+          </a:xfrm>
+          <a:prstGeom prst="rect">
+            <a:avLst/>
+          </a:prstGeom>
+          <a:noFill/>
+        </p:spPr>
+        <p:txBody>
+          <a:bodyPr anchor="ctr">
+            <a:normAutofit/>
+          </a:bodyPr>
+          <a:lstStyle/>
+          <a:p>
+            <a:pPr algn="ctr"/>
+            <a:r>
+              <a:rPr lang="en-US" sz="1200" i="1">
+                <a:solidFill>
+                  <a:schemeClr val="tx1">
+                    <a:alpha val="75000"/>
+                  </a:schemeClr>
+                </a:solidFill>
+              </a:rPr>
+              <a:t>Solved once by the framework - so you write business logic, not plumbing.</a:t>
             </a:r>
           </a:p>
         </p:txBody>
       </p:sp>
     </p:spTree>
-    <p:extLst>
-      <p:ext uri="{BB962C8B-B14F-4D97-AF65-F5344CB8AC3E}">
-        <p14:creationId xmlns:p14="http://schemas.microsoft.com/office/powerpoint/2010/main" val="2701054565"/>
-      </p:ext>
-    </p:extLst>
   </p:cSld>
   <p:clrMapOvr>
-    <a:overrideClrMapping bg1="dk1" tx1="lt1" bg2="dk2" tx2="lt2" accent1="accent1" accent2="accent2" accent3="accent3" accent4="accent4" accent5="accent5" accent6="accent6" hlink="hlink" folHlink="folHlink"/>
+    <a:masterClrMapping/>
   </p:clrMapOvr>
 </p:sld>
 </file>
@@ -9098,7 +11186,7 @@
           <p:cNvPr id="2" name="Title 1">
             <a:extLst>
               <a:ext uri="{FF2B5EF4-FFF2-40B4-BE49-F238E27FC236}">
-                <a16:creationId xmlns:a16="http://schemas.microsoft.com/office/drawing/2014/main" id="{3D818256-1F68-1CA5-64C3-132D1FE721A4}"/>
+                <a16:creationId xmlns:a16="http://schemas.microsoft.com/office/drawing/2014/main" id="{8F5127E2-9264-E9CB-DD10-E00D462BFAF2}"/>
               </a:ext>
             </a:extLst>
           </p:cNvPr>
@@ -9121,8 +11209,26 @@
                 <a:latin typeface="ATT Aleck Sans" panose="020B0503020203020204" pitchFamily="34" charset="0"/>
                 <a:cs typeface="ATT Aleck Sans" panose="020B0503020203020204" pitchFamily="34" charset="0"/>
               </a:rPr>
-              <a:t>Inversion of Control (IoC)</a:t>
-            </a:r>
+              <a:t>What is </a:t>
+            </a:r>
+            <a:r>
+              <a:rPr lang="en-IL" b="1" dirty="0">
+                <a:latin typeface="ATT Aleck Sans" panose="020B0503020203020204" pitchFamily="34" charset="0"/>
+                <a:cs typeface="ATT Aleck Sans" panose="020B0503020203020204" pitchFamily="34" charset="0"/>
+              </a:rPr>
+              <a:t>Spring Boot</a:t>
+            </a:r>
+            <a:r>
+              <a:rPr lang="en-IL" b="1">
+                <a:latin typeface="ATT Aleck Sans" panose="020B0503020203020204" pitchFamily="34" charset="0"/>
+                <a:cs typeface="ATT Aleck Sans" panose="020B0503020203020204" pitchFamily="34" charset="0"/>
+              </a:rPr>
+              <a:t>?</a:t>
+            </a:r>
+            <a:endParaRPr lang="en-IL" b="1" dirty="0">
+              <a:latin typeface="ATT Aleck Sans" panose="020B0503020203020204" pitchFamily="34" charset="0"/>
+              <a:cs typeface="ATT Aleck Sans" panose="020B0503020203020204" pitchFamily="34" charset="0"/>
+            </a:endParaRPr>
           </a:p>
         </p:txBody>
       </p:sp>
@@ -9131,7 +11237,7 @@
           <p:cNvPr id="3" name="Content Placeholder 2">
             <a:extLst>
               <a:ext uri="{FF2B5EF4-FFF2-40B4-BE49-F238E27FC236}">
-                <a16:creationId xmlns:a16="http://schemas.microsoft.com/office/drawing/2014/main" id="{99E34243-09E5-8F02-1D25-313D3FFD8913}"/>
+                <a16:creationId xmlns:a16="http://schemas.microsoft.com/office/drawing/2014/main" id="{D0BDD530-32D2-007A-86C5-1583B831586C}"/>
               </a:ext>
             </a:extLst>
           </p:cNvPr>
@@ -9144,36 +11250,82 @@
         </p:nvSpPr>
         <p:spPr>
           <a:xfrm>
-            <a:off x="246410" y="1445886"/>
+            <a:off x="603761" y="1435375"/>
             <a:ext cx="8596668" cy="3880773"/>
           </a:xfrm>
         </p:spPr>
         <p:txBody>
           <a:bodyPr>
-            <a:normAutofit/>
+            <a:noAutofit/>
           </a:bodyPr>
           <a:lstStyle/>
           <a:p>
-            <a:pPr marL="457200" lvl="1" indent="0">
-              <a:lnSpc>
-                <a:spcPct val="150000"/>
-              </a:lnSpc>
-              <a:buNone/>
-            </a:pPr>
-            <a:r>
-              <a:rPr lang="en-US" sz="2800" dirty="0">
+            <a:pPr marL="400050"/>
+            <a:r>
+              <a:rPr lang="en-US" sz="2800" i="1" dirty="0">
                 <a:latin typeface="ATT Aleck Sans" panose="020B0503020203020204" pitchFamily="34" charset="0"/>
                 <a:cs typeface="ATT Aleck Sans" panose="020B0503020203020204" pitchFamily="34" charset="0"/>
               </a:rPr>
-              <a:t>Inversion of Control (IoC) is a design principle where the control of object creation and lifecycle management is transferred from the application code to a container or framework.</a:t>
-            </a:r>
+              <a:t>Spring</a:t>
+            </a:r>
+            <a:r>
+              <a:rPr lang="en-US" sz="2800" i="1">
+                <a:latin typeface="ATT Aleck Sans" panose="020B0503020203020204" pitchFamily="34" charset="0"/>
+                <a:cs typeface="ATT Aleck Sans" panose="020B0503020203020204" pitchFamily="34" charset="0"/>
+              </a:rPr>
+              <a:t> - an umbrella of projects that simplify common problems in day-to-day enterprise development.</a:t>
+            </a:r>
+          </a:p>
+          <a:p>
+            <a:pPr marL="400050"/>
+            <a:r>
+              <a:rPr lang="en-US" sz="2800" i="1" dirty="0">
+                <a:latin typeface="ATT Aleck Sans" panose="020B0503020203020204" pitchFamily="34" charset="0"/>
+                <a:cs typeface="ATT Aleck Sans" panose="020B0503020203020204" pitchFamily="34" charset="0"/>
+              </a:rPr>
+              <a:t>Spring Boot </a:t>
+            </a:r>
+            <a:r>
+              <a:rPr lang="en-US" sz="2800" i="1">
+                <a:latin typeface="ATT Aleck Sans" panose="020B0503020203020204" pitchFamily="34" charset="0"/>
+                <a:cs typeface="ATT Aleck Sans" panose="020B0503020203020204" pitchFamily="34" charset="0"/>
+              </a:rPr>
+              <a:t>- built on top of </a:t>
+            </a:r>
+            <a:r>
+              <a:rPr lang="en-US" sz="2800" i="1" dirty="0">
+                <a:latin typeface="ATT Aleck Sans" panose="020B0503020203020204" pitchFamily="34" charset="0"/>
+                <a:cs typeface="ATT Aleck Sans" panose="020B0503020203020204" pitchFamily="34" charset="0"/>
+              </a:rPr>
+              <a:t>Spring</a:t>
+            </a:r>
+            <a:r>
+              <a:rPr lang="en-US" sz="2800" i="1">
+                <a:latin typeface="ATT Aleck Sans" panose="020B0503020203020204" pitchFamily="34" charset="0"/>
+                <a:cs typeface="ATT Aleck Sans" panose="020B0503020203020204" pitchFamily="34" charset="0"/>
+              </a:rPr>
+              <a:t>: a faster, easier way to set up, configure and run applications.</a:t>
+            </a:r>
+          </a:p>
+          <a:p>
+            <a:pPr marL="400050"/>
+            <a:r>
+              <a:rPr lang="en-US" sz="2800" i="1">
+                <a:latin typeface="ATT Aleck Sans" panose="020B0503020203020204" pitchFamily="34" charset="0"/>
+                <a:cs typeface="ATT Aleck Sans" panose="020B0503020203020204" pitchFamily="34" charset="0"/>
+              </a:rPr>
+              <a:t>Opinionated by design: best practices baked in, covering most use cases.</a:t>
+            </a:r>
+            <a:endParaRPr lang="ru-RU" sz="2800" dirty="0">
+              <a:cs typeface="ATT Aleck Sans" panose="020B0503020203020204" pitchFamily="34" charset="0"/>
+            </a:endParaRPr>
           </a:p>
         </p:txBody>
       </p:sp>
     </p:spTree>
     <p:extLst>
       <p:ext uri="{BB962C8B-B14F-4D97-AF65-F5344CB8AC3E}">
-        <p14:creationId xmlns:p14="http://schemas.microsoft.com/office/powerpoint/2010/main" val="732303042"/>
+        <p14:creationId xmlns:p14="http://schemas.microsoft.com/office/powerpoint/2010/main" val="3747451504"/>
       </p:ext>
     </p:extLst>
   </p:cSld>
@@ -9213,7 +11365,7 @@
           <p:cNvPr id="2" name="Title 1">
             <a:extLst>
               <a:ext uri="{FF2B5EF4-FFF2-40B4-BE49-F238E27FC236}">
-                <a16:creationId xmlns:a16="http://schemas.microsoft.com/office/drawing/2014/main" id="{CC0DA605-5F54-5A7E-AFE2-FF24D8BBCE10}"/>
+                <a16:creationId xmlns:a16="http://schemas.microsoft.com/office/drawing/2014/main" id="{8F5127E2-9264-E9CB-DD10-E00D462BFAF2}"/>
               </a:ext>
             </a:extLst>
           </p:cNvPr>
@@ -9232,12 +11384,16 @@
           <a:lstStyle/>
           <a:p>
             <a:r>
-              <a:rPr lang="en-IL" b="1" dirty="0">
+              <a:rPr lang="en-IL" b="1">
                 <a:latin typeface="ATT Aleck Sans" panose="020B0503020203020204" pitchFamily="34" charset="0"/>
                 <a:cs typeface="ATT Aleck Sans" panose="020B0503020203020204" pitchFamily="34" charset="0"/>
               </a:rPr>
-              <a:t>Purposes of IoC</a:t>
-            </a:r>
+              <a:t>What you get out of the box</a:t>
+            </a:r>
+            <a:endParaRPr lang="en-IL" b="1" dirty="0">
+              <a:latin typeface="ATT Aleck Sans" panose="020B0503020203020204" pitchFamily="34" charset="0"/>
+              <a:cs typeface="ATT Aleck Sans" panose="020B0503020203020204" pitchFamily="34" charset="0"/>
+            </a:endParaRPr>
           </a:p>
         </p:txBody>
       </p:sp>
@@ -9246,7 +11402,7 @@
           <p:cNvPr id="3" name="Content Placeholder 2">
             <a:extLst>
               <a:ext uri="{FF2B5EF4-FFF2-40B4-BE49-F238E27FC236}">
-                <a16:creationId xmlns:a16="http://schemas.microsoft.com/office/drawing/2014/main" id="{BC5F8EC1-FE59-2C1C-561E-3C475AD57C09}"/>
+                <a16:creationId xmlns:a16="http://schemas.microsoft.com/office/drawing/2014/main" id="{D0BDD530-32D2-007A-86C5-1583B831586C}"/>
               </a:ext>
             </a:extLst>
           </p:cNvPr>
@@ -9259,7 +11415,7 @@
         </p:nvSpPr>
         <p:spPr>
           <a:xfrm>
-            <a:off x="561720" y="1372313"/>
+            <a:off x="666823" y="1477417"/>
             <a:ext cx="8596668" cy="3880773"/>
           </a:xfrm>
         </p:spPr>
@@ -9269,81 +11425,91 @@
           </a:bodyPr>
           <a:lstStyle/>
           <a:p>
-            <a:pPr>
-              <a:lnSpc>
-                <a:spcPct val="150000"/>
-              </a:lnSpc>
+            <a:pPr marL="57150" indent="0">
+              <a:buNone/>
             </a:pPr>
+            <a:r>
+              <a:rPr lang="en-US" sz="2800" i="1" dirty="0">
+                <a:latin typeface="ATT Aleck Sans" panose="020B0503020203020204" pitchFamily="34" charset="0"/>
+                <a:cs typeface="ATT Aleck Sans" panose="020B0503020203020204" pitchFamily="34" charset="0"/>
+              </a:rPr>
+              <a:t>Spring Boot </a:t>
+            </a:r>
+            <a:r>
+              <a:rPr lang="en-US" sz="2800" dirty="0">
+                <a:latin typeface="ATT Aleck Sans" panose="020B0503020203020204" pitchFamily="34" charset="0"/>
+                <a:cs typeface="ATT Aleck Sans" panose="020B0503020203020204" pitchFamily="34" charset="0"/>
+              </a:rPr>
+              <a:t>is used for creating a stand-alone </a:t>
+            </a:r>
+            <a:br>
+              <a:rPr lang="en-US" sz="2800" dirty="0">
+                <a:latin typeface="ATT Aleck Sans" panose="020B0503020203020204" pitchFamily="34" charset="0"/>
+                <a:cs typeface="ATT Aleck Sans" panose="020B0503020203020204" pitchFamily="34" charset="0"/>
+              </a:rPr>
+            </a:br>
+            <a:r>
+              <a:rPr lang="en-US" sz="2800" i="1" dirty="0">
+                <a:latin typeface="ATT Aleck Sans" panose="020B0503020203020204" pitchFamily="34" charset="0"/>
+                <a:cs typeface="ATT Aleck Sans" panose="020B0503020203020204" pitchFamily="34" charset="0"/>
+              </a:rPr>
+              <a:t>Spring</a:t>
+            </a:r>
+            <a:r>
+              <a:rPr lang="en-US" sz="2800" dirty="0">
+                <a:latin typeface="ATT Aleck Sans" panose="020B0503020203020204" pitchFamily="34" charset="0"/>
+                <a:cs typeface="ATT Aleck Sans" panose="020B0503020203020204" pitchFamily="34" charset="0"/>
+              </a:rPr>
+              <a:t>-based application that you can run easily because it requires minimal Spring configuration.</a:t>
+            </a:r>
+          </a:p>
+          <a:p>
+            <a:pPr lvl="2"/>
             <a:r>
               <a:rPr lang="en-US" sz="2400" dirty="0">
                 <a:latin typeface="ATT Aleck Sans" panose="020B0503020203020204" pitchFamily="34" charset="0"/>
                 <a:cs typeface="ATT Aleck Sans" panose="020B0503020203020204" pitchFamily="34" charset="0"/>
               </a:rPr>
-              <a:t>To focus a module on the task it is designed for</a:t>
-            </a:r>
-          </a:p>
-          <a:p>
-            <a:pPr>
-              <a:lnSpc>
-                <a:spcPct val="150000"/>
-              </a:lnSpc>
-            </a:pPr>
+              <a:t> No need for web servlets; it has Tomcat embedded.</a:t>
+            </a:r>
+          </a:p>
+          <a:p>
+            <a:pPr lvl="2"/>
             <a:r>
               <a:rPr lang="en-US" sz="2400" dirty="0">
                 <a:latin typeface="ATT Aleck Sans" panose="020B0503020203020204" pitchFamily="34" charset="0"/>
                 <a:cs typeface="ATT Aleck Sans" panose="020B0503020203020204" pitchFamily="34" charset="0"/>
               </a:rPr>
-              <a:t>To free modules from assumptions about how other systems do what they do, rely on contracts.</a:t>
-            </a:r>
-          </a:p>
-          <a:p>
-            <a:pPr>
-              <a:lnSpc>
-                <a:spcPct val="150000"/>
-              </a:lnSpc>
-            </a:pPr>
+              <a:t> Configurations are pre-packaged;</a:t>
+            </a:r>
+          </a:p>
+          <a:p>
+            <a:pPr lvl="2"/>
             <a:r>
               <a:rPr lang="en-US" sz="2400" dirty="0">
                 <a:latin typeface="ATT Aleck Sans" panose="020B0503020203020204" pitchFamily="34" charset="0"/>
                 <a:cs typeface="ATT Aleck Sans" panose="020B0503020203020204" pitchFamily="34" charset="0"/>
               </a:rPr>
-              <a:t>To decouple the execution of a task from its implementation</a:t>
-            </a:r>
-          </a:p>
-          <a:p>
-            <a:pPr>
-              <a:lnSpc>
-                <a:spcPct val="150000"/>
-              </a:lnSpc>
-            </a:pPr>
-            <a:r>
-              <a:rPr lang="en-US" sz="2400" dirty="0">
+              <a:t> Just run it, and you have a server up </a:t>
+            </a:r>
+            <a:r>
+              <a:rPr lang="en-US" sz="2400">
                 <a:latin typeface="ATT Aleck Sans" panose="020B0503020203020204" pitchFamily="34" charset="0"/>
                 <a:cs typeface="ATT Aleck Sans" panose="020B0503020203020204" pitchFamily="34" charset="0"/>
               </a:rPr>
-              <a:t>Greater modularity of a program</a:t>
-            </a:r>
-          </a:p>
-          <a:p>
-            <a:pPr>
-              <a:lnSpc>
-                <a:spcPct val="150000"/>
-              </a:lnSpc>
-            </a:pPr>
-            <a:r>
-              <a:rPr lang="en-US" sz="2400" dirty="0">
-                <a:latin typeface="ATT Aleck Sans" panose="020B0503020203020204" pitchFamily="34" charset="0"/>
-                <a:cs typeface="ATT Aleck Sans" panose="020B0503020203020204" pitchFamily="34" charset="0"/>
-              </a:rPr>
-              <a:t>Greater ease in testing a program by isolating a component or mocking its dependencies</a:t>
-            </a:r>
+              <a:t>and running.</a:t>
+            </a:r>
+            <a:endParaRPr lang="en-US" sz="2400" dirty="0">
+              <a:latin typeface="ATT Aleck Sans" panose="020B0503020203020204" pitchFamily="34" charset="0"/>
+              <a:cs typeface="ATT Aleck Sans" panose="020B0503020203020204" pitchFamily="34" charset="0"/>
+            </a:endParaRPr>
           </a:p>
         </p:txBody>
       </p:sp>
     </p:spTree>
     <p:extLst>
       <p:ext uri="{BB962C8B-B14F-4D97-AF65-F5344CB8AC3E}">
-        <p14:creationId xmlns:p14="http://schemas.microsoft.com/office/powerpoint/2010/main" val="1967367102"/>
+        <p14:creationId xmlns:p14="http://schemas.microsoft.com/office/powerpoint/2010/main" val="2701054565"/>
       </p:ext>
     </p:extLst>
   </p:cSld>
@@ -9357,9 +11523,12 @@
 <p:sld xmlns:a="http://schemas.openxmlformats.org/drawingml/2006/main" xmlns:r="http://schemas.openxmlformats.org/officeDocument/2006/relationships" xmlns:p="http://schemas.openxmlformats.org/presentationml/2006/main">
   <p:cSld>
     <p:bg>
-      <p:bgRef idx="1001">
-        <a:schemeClr val="bg2"/>
-      </p:bgRef>
+      <p:bgPr>
+        <a:solidFill>
+          <a:schemeClr val="bg2"/>
+        </a:solidFill>
+        <a:effectLst/>
+      </p:bgPr>
     </p:bg>
     <p:spTree>
       <p:nvGrpSpPr>
@@ -9380,7 +11549,7 @@
           <p:cNvPr id="2" name="Title 1">
             <a:extLst>
               <a:ext uri="{FF2B5EF4-FFF2-40B4-BE49-F238E27FC236}">
-                <a16:creationId xmlns:a16="http://schemas.microsoft.com/office/drawing/2014/main" id="{33613CEB-B33C-5604-02BC-3036BDA84F19}"/>
+                <a16:creationId xmlns:a16="http://schemas.microsoft.com/office/drawing/2014/main" id="{3D818256-1F68-1CA5-64C3-132D1FE721A4}"/>
               </a:ext>
             </a:extLst>
           </p:cNvPr>
@@ -9393,14 +11562,17 @@
         </p:nvSpPr>
         <p:spPr/>
         <p:txBody>
-          <a:bodyPr vert="horz" lIns="91440" tIns="45720" rIns="91440" bIns="45720" rtlCol="0" anchor="t">
+          <a:bodyPr>
             <a:normAutofit/>
           </a:bodyPr>
           <a:lstStyle/>
           <a:p>
             <a:r>
-              <a:rPr lang="en-US" b="1" dirty="0"/>
-              <a:t>Let’s create a class using traditional OOP programming approach</a:t>
+              <a:rPr lang="en-IL" b="1">
+                <a:latin typeface="ATT Aleck Sans" panose="020B0503020203020204" pitchFamily="34" charset="0"/>
+                <a:cs typeface="ATT Aleck Sans" panose="020B0503020203020204" pitchFamily="34" charset="0"/>
+              </a:rPr>
+              <a:t>Inversion of Control (IoC)</a:t>
             </a:r>
           </a:p>
         </p:txBody>
@@ -9410,7 +11582,7 @@
           <p:cNvPr id="3" name="Content Placeholder 2">
             <a:extLst>
               <a:ext uri="{FF2B5EF4-FFF2-40B4-BE49-F238E27FC236}">
-                <a16:creationId xmlns:a16="http://schemas.microsoft.com/office/drawing/2014/main" id="{03CDAC2F-998A-9E7F-DD71-83F787124D43}"/>
+                <a16:creationId xmlns:a16="http://schemas.microsoft.com/office/drawing/2014/main" id="{99E34243-09E5-8F02-1D25-313D3FFD8913}"/>
               </a:ext>
             </a:extLst>
           </p:cNvPr>
@@ -9418,369 +11590,174 @@
             <a:spLocks noGrp="1"/>
           </p:cNvSpPr>
           <p:nvPr>
-            <p:ph sz="half" idx="1"/>
+            <p:ph idx="1"/>
           </p:nvPr>
         </p:nvSpPr>
         <p:spPr>
           <a:xfrm>
-            <a:off x="714702" y="1954925"/>
-            <a:ext cx="9732581" cy="4086438"/>
+            <a:off x="246410" y="1445886"/>
+            <a:ext cx="8596668" cy="2377440"/>
           </a:xfrm>
         </p:spPr>
         <p:txBody>
-          <a:bodyPr vert="horz" lIns="91440" tIns="45720" rIns="91440" bIns="45720" rtlCol="0">
+          <a:bodyPr>
+            <a:normAutofit fontScale="92500" lnSpcReduction="10000"/>
+          </a:bodyPr>
+          <a:lstStyle/>
+          <a:p>
+            <a:pPr marL="457200" lvl="1" indent="0">
+              <a:lnSpc>
+                <a:spcPct val="150000"/>
+              </a:lnSpc>
+              <a:buNone/>
+            </a:pPr>
+            <a:r>
+              <a:rPr lang="en-US" sz="2800" dirty="0">
+                <a:latin typeface="ATT Aleck Sans" panose="020B0503020203020204" pitchFamily="34" charset="0"/>
+                <a:cs typeface="ATT Aleck Sans" panose="020B0503020203020204" pitchFamily="34" charset="0"/>
+              </a:rPr>
+              <a:t>Inversion of Control (IoC) is a design principle where the control of object creation and lifecycle management is transferred from the application code to a container or framework.</a:t>
+            </a:r>
+          </a:p>
+        </p:txBody>
+      </p:sp>
+      <p:sp>
+        <p:nvSpPr>
+          <p:cNvPr id="60" name="Without IoC"/>
+          <p:cNvSpPr/>
+          <p:nvPr/>
+        </p:nvSpPr>
+        <p:spPr>
+          <a:xfrm>
+            <a:off x="1200000" y="4250000"/>
+            <a:ext cx="3800000" cy="1600000"/>
+          </a:xfrm>
+          <a:prstGeom prst="roundRect">
+            <a:avLst>
+              <a:gd name="adj" fmla="val 10000"/>
+            </a:avLst>
+          </a:prstGeom>
+          <a:solidFill>
+            <a:schemeClr val="bg1"/>
+          </a:solidFill>
+          <a:ln w="25400">
+            <a:solidFill>
+              <a:schemeClr val="accent5"/>
+            </a:solidFill>
+          </a:ln>
+        </p:spPr>
+        <p:txBody>
+          <a:bodyPr lIns="182880" tIns="91440" rIns="137160" bIns="91440" anchor="ctr">
             <a:normAutofit/>
           </a:bodyPr>
           <a:lstStyle/>
           <a:p>
-            <a:pPr marL="0" indent="0">
-              <a:buNone/>
-            </a:pPr>
-            <a:r>
-              <a:rPr lang="en-US" sz="2000" dirty="0">
+            <a:r>
+              <a:rPr lang="en-US" sz="1500" b="1">
                 <a:solidFill>
-                  <a:srgbClr val="FFFFFF"/>
+                  <a:schemeClr val="accent5"/>
                 </a:solidFill>
-                <a:latin typeface="ATT Aleck Sans" panose="020B0503020203020204" pitchFamily="34" charset="0"/>
-                <a:cs typeface="ATT Aleck Sans" panose="020B0503020203020204" pitchFamily="34" charset="0"/>
-              </a:rPr>
-              <a:t>In traditional OOP programming, upon creation of the object (e.g., Computer), it will also create (</a:t>
-            </a:r>
-            <a:r>
-              <a:rPr lang="en-US" sz="2000" i="1" dirty="0">
+              </a:rPr>
+              <a:t>Without IoC</a:t>
+            </a:r>
+          </a:p>
+          <a:p>
+            <a:r>
+              <a:rPr lang="en-US" sz="1100">
                 <a:solidFill>
-                  <a:srgbClr val="FFFFFF"/>
+                  <a:schemeClr val="tx1"/>
                 </a:solidFill>
-                <a:latin typeface="ATT Aleck Sans" panose="020B0503020203020204" pitchFamily="34" charset="0"/>
-                <a:cs typeface="ATT Aleck Sans" panose="020B0503020203020204" pitchFamily="34" charset="0"/>
-              </a:rPr>
-              <a:t>new</a:t>
-            </a:r>
-            <a:r>
-              <a:rPr lang="en-US" sz="2000" dirty="0">
-                <a:solidFill>
-                  <a:srgbClr val="FFFFFF"/>
-                </a:solidFill>
-                <a:latin typeface="ATT Aleck Sans" panose="020B0503020203020204" pitchFamily="34" charset="0"/>
-                <a:cs typeface="ATT Aleck Sans" panose="020B0503020203020204" pitchFamily="34" charset="0"/>
-              </a:rPr>
-              <a:t>) its dependent classes (e.g., Processor, RAM instances):</a:t>
-            </a:r>
-          </a:p>
-          <a:p>
-            <a:pPr marL="0" indent="0"/>
-            <a:endParaRPr lang="en-US" sz="2000" dirty="0">
-              <a:solidFill>
-                <a:srgbClr val="FFFFFF"/>
-              </a:solidFill>
-              <a:latin typeface="ATT Aleck Sans" panose="020B0503020203020204" pitchFamily="34" charset="0"/>
-              <a:cs typeface="ATT Aleck Sans" panose="020B0503020203020204" pitchFamily="34" charset="0"/>
-            </a:endParaRPr>
-          </a:p>
-          <a:p>
-            <a:endParaRPr lang="en-US" sz="2000" dirty="0">
-              <a:solidFill>
-                <a:srgbClr val="FFFFFF"/>
-              </a:solidFill>
-              <a:latin typeface="ATT Aleck Sans" panose="020B0503020203020204" pitchFamily="34" charset="0"/>
-              <a:cs typeface="ATT Aleck Sans" panose="020B0503020203020204" pitchFamily="34" charset="0"/>
-            </a:endParaRPr>
-          </a:p>
-        </p:txBody>
-      </p:sp>
-      <p:sp>
-        <p:nvSpPr>
-          <p:cNvPr id="7" name="Content Placeholder 2">
-            <a:extLst>
-              <a:ext uri="{FF2B5EF4-FFF2-40B4-BE49-F238E27FC236}">
-                <a16:creationId xmlns:a16="http://schemas.microsoft.com/office/drawing/2014/main" id="{510CD3CA-7661-11B9-AF07-F39AF318C632}"/>
-              </a:ext>
-            </a:extLst>
-          </p:cNvPr>
-          <p:cNvSpPr txBox="1">
-            <a:spLocks/>
-          </p:cNvSpPr>
+              </a:rPr>
+              <a:t>Your code creates and owns its dependencies (new Processor(...)).</a:t>
+            </a:r>
+          </a:p>
+        </p:txBody>
+      </p:sp>
+      <p:sp>
+        <p:nvSpPr>
+          <p:cNvPr id="61" name="With IoC"/>
+          <p:cNvSpPr/>
           <p:nvPr/>
         </p:nvSpPr>
         <p:spPr>
           <a:xfrm>
-            <a:off x="677333" y="2821899"/>
-            <a:ext cx="4184035" cy="974035"/>
+            <a:off x="7100000" y="4250000"/>
+            <a:ext cx="3800000" cy="1600000"/>
           </a:xfrm>
-          <a:prstGeom prst="rect">
+          <a:prstGeom prst="roundRect">
+            <a:avLst>
+              <a:gd name="adj" fmla="val 10000"/>
+            </a:avLst>
+          </a:prstGeom>
+          <a:solidFill>
+            <a:schemeClr val="bg1"/>
+          </a:solidFill>
+          <a:ln w="25400">
+            <a:solidFill>
+              <a:schemeClr val="accent1"/>
+            </a:solidFill>
+          </a:ln>
+        </p:spPr>
+        <p:txBody>
+          <a:bodyPr lIns="182880" tIns="91440" rIns="137160" bIns="91440" anchor="ctr">
+            <a:normAutofit/>
+          </a:bodyPr>
+          <a:lstStyle/>
+          <a:p>
+            <a:r>
+              <a:rPr lang="en-US" sz="1500" b="1">
+                <a:solidFill>
+                  <a:schemeClr val="accent1"/>
+                </a:solidFill>
+              </a:rPr>
+              <a:t>With IoC</a:t>
+            </a:r>
+          </a:p>
+          <a:p>
+            <a:r>
+              <a:rPr lang="en-US" sz="1100">
+                <a:solidFill>
+                  <a:schemeClr val="tx1"/>
+                </a:solidFill>
+              </a:rPr>
+              <a:t>A container creates the objects and hands them to your code.</a:t>
+            </a:r>
+          </a:p>
+        </p:txBody>
+      </p:sp>
+      <p:sp>
+        <p:nvSpPr>
+          <p:cNvPr id="62" name="Arrow"/>
+          <p:cNvSpPr/>
+          <p:nvPr/>
+        </p:nvSpPr>
+        <p:spPr>
+          <a:xfrm>
+            <a:off x="5250000" y="4850000"/>
+            <a:ext cx="1600000" cy="400000"/>
+          </a:xfrm>
+          <a:prstGeom prst="rightArrow">
             <a:avLst/>
           </a:prstGeom>
+          <a:solidFill>
+            <a:schemeClr val="accent1"/>
+          </a:solidFill>
+          <a:ln>
+            <a:noFill/>
+          </a:ln>
         </p:spPr>
         <p:txBody>
-          <a:bodyPr vert="horz" lIns="91440" tIns="45720" rIns="91440" bIns="45720" rtlCol="0">
-            <a:normAutofit/>
-          </a:bodyPr>
-          <a:lstStyle>
-            <a:lvl1pPr marL="342900" indent="-342900" algn="l" defTabSz="457200" rtl="0" eaLnBrk="1" latinLnBrk="0" hangingPunct="1">
-              <a:spcBef>
-                <a:spcPts val="1000"/>
-              </a:spcBef>
-              <a:spcAft>
-                <a:spcPts val="0"/>
-              </a:spcAft>
-              <a:buClr>
-                <a:schemeClr val="accent1"/>
-              </a:buClr>
-              <a:buSzPct val="80000"/>
-              <a:buFont typeface="Wingdings 3" charset="2"/>
-              <a:buChar char=""/>
-              <a:defRPr sz="1800" kern="1200">
-                <a:solidFill>
-                  <a:schemeClr val="tx1">
-                    <a:lumMod val="75000"/>
-                    <a:lumOff val="25000"/>
-                  </a:schemeClr>
-                </a:solidFill>
-                <a:latin typeface="+mn-lt"/>
-                <a:ea typeface="+mn-ea"/>
-                <a:cs typeface="+mn-cs"/>
-              </a:defRPr>
-            </a:lvl1pPr>
-            <a:lvl2pPr marL="742950" indent="-285750" algn="l" defTabSz="457200" rtl="0" eaLnBrk="1" latinLnBrk="0" hangingPunct="1">
-              <a:spcBef>
-                <a:spcPts val="1000"/>
-              </a:spcBef>
-              <a:spcAft>
-                <a:spcPts val="0"/>
-              </a:spcAft>
-              <a:buClr>
-                <a:schemeClr val="accent1"/>
-              </a:buClr>
-              <a:buSzPct val="80000"/>
-              <a:buFont typeface="Wingdings 3" charset="2"/>
-              <a:buChar char=""/>
-              <a:defRPr sz="1600" kern="1200">
-                <a:solidFill>
-                  <a:schemeClr val="tx1">
-                    <a:lumMod val="75000"/>
-                    <a:lumOff val="25000"/>
-                  </a:schemeClr>
-                </a:solidFill>
-                <a:latin typeface="+mn-lt"/>
-                <a:ea typeface="+mn-ea"/>
-                <a:cs typeface="+mn-cs"/>
-              </a:defRPr>
-            </a:lvl2pPr>
-            <a:lvl3pPr marL="1143000" indent="-228600" algn="l" defTabSz="457200" rtl="0" eaLnBrk="1" latinLnBrk="0" hangingPunct="1">
-              <a:spcBef>
-                <a:spcPts val="1000"/>
-              </a:spcBef>
-              <a:spcAft>
-                <a:spcPts val="0"/>
-              </a:spcAft>
-              <a:buClr>
-                <a:schemeClr val="accent1"/>
-              </a:buClr>
-              <a:buSzPct val="80000"/>
-              <a:buFont typeface="Wingdings 3" charset="2"/>
-              <a:buChar char=""/>
-              <a:defRPr sz="1400" kern="1200">
-                <a:solidFill>
-                  <a:schemeClr val="tx1">
-                    <a:lumMod val="75000"/>
-                    <a:lumOff val="25000"/>
-                  </a:schemeClr>
-                </a:solidFill>
-                <a:latin typeface="+mn-lt"/>
-                <a:ea typeface="+mn-ea"/>
-                <a:cs typeface="+mn-cs"/>
-              </a:defRPr>
-            </a:lvl3pPr>
-            <a:lvl4pPr marL="1600200" indent="-228600" algn="l" defTabSz="457200" rtl="0" eaLnBrk="1" latinLnBrk="0" hangingPunct="1">
-              <a:spcBef>
-                <a:spcPts val="1000"/>
-              </a:spcBef>
-              <a:spcAft>
-                <a:spcPts val="0"/>
-              </a:spcAft>
-              <a:buClr>
-                <a:schemeClr val="accent1"/>
-              </a:buClr>
-              <a:buSzPct val="80000"/>
-              <a:buFont typeface="Wingdings 3" charset="2"/>
-              <a:buChar char=""/>
-              <a:defRPr sz="1200" kern="1200">
-                <a:solidFill>
-                  <a:schemeClr val="tx1">
-                    <a:lumMod val="75000"/>
-                    <a:lumOff val="25000"/>
-                  </a:schemeClr>
-                </a:solidFill>
-                <a:latin typeface="+mn-lt"/>
-                <a:ea typeface="+mn-ea"/>
-                <a:cs typeface="+mn-cs"/>
-              </a:defRPr>
-            </a:lvl4pPr>
-            <a:lvl5pPr marL="2057400" indent="-228600" algn="l" defTabSz="457200" rtl="0" eaLnBrk="1" latinLnBrk="0" hangingPunct="1">
-              <a:spcBef>
-                <a:spcPts val="1000"/>
-              </a:spcBef>
-              <a:spcAft>
-                <a:spcPts val="0"/>
-              </a:spcAft>
-              <a:buClr>
-                <a:schemeClr val="accent1"/>
-              </a:buClr>
-              <a:buSzPct val="80000"/>
-              <a:buFont typeface="Wingdings 3" charset="2"/>
-              <a:buChar char=""/>
-              <a:defRPr sz="1200" kern="1200">
-                <a:solidFill>
-                  <a:schemeClr val="tx1">
-                    <a:lumMod val="75000"/>
-                    <a:lumOff val="25000"/>
-                  </a:schemeClr>
-                </a:solidFill>
-                <a:latin typeface="+mn-lt"/>
-                <a:ea typeface="+mn-ea"/>
-                <a:cs typeface="+mn-cs"/>
-              </a:defRPr>
-            </a:lvl5pPr>
-            <a:lvl6pPr marL="2514600" indent="-228600" algn="l" defTabSz="457200" rtl="0" eaLnBrk="1" latinLnBrk="0" hangingPunct="1">
-              <a:spcBef>
-                <a:spcPts val="1000"/>
-              </a:spcBef>
-              <a:spcAft>
-                <a:spcPts val="0"/>
-              </a:spcAft>
-              <a:buClr>
-                <a:schemeClr val="accent1"/>
-              </a:buClr>
-              <a:buSzPct val="80000"/>
-              <a:buFont typeface="Wingdings 3" charset="2"/>
-              <a:buChar char=""/>
-              <a:defRPr sz="1200" kern="1200">
-                <a:solidFill>
-                  <a:schemeClr val="tx1">
-                    <a:lumMod val="75000"/>
-                    <a:lumOff val="25000"/>
-                  </a:schemeClr>
-                </a:solidFill>
-                <a:latin typeface="+mn-lt"/>
-                <a:ea typeface="+mn-ea"/>
-                <a:cs typeface="+mn-cs"/>
-              </a:defRPr>
-            </a:lvl6pPr>
-            <a:lvl7pPr marL="2971800" indent="-228600" algn="l" defTabSz="457200" rtl="0" eaLnBrk="1" latinLnBrk="0" hangingPunct="1">
-              <a:spcBef>
-                <a:spcPts val="1000"/>
-              </a:spcBef>
-              <a:spcAft>
-                <a:spcPts val="0"/>
-              </a:spcAft>
-              <a:buClr>
-                <a:schemeClr val="accent1"/>
-              </a:buClr>
-              <a:buSzPct val="80000"/>
-              <a:buFont typeface="Wingdings 3" charset="2"/>
-              <a:buChar char=""/>
-              <a:defRPr sz="1200" kern="1200">
-                <a:solidFill>
-                  <a:schemeClr val="tx1">
-                    <a:lumMod val="75000"/>
-                    <a:lumOff val="25000"/>
-                  </a:schemeClr>
-                </a:solidFill>
-                <a:latin typeface="+mn-lt"/>
-                <a:ea typeface="+mn-ea"/>
-                <a:cs typeface="+mn-cs"/>
-              </a:defRPr>
-            </a:lvl7pPr>
-            <a:lvl8pPr marL="3429000" indent="-228600" algn="l" defTabSz="457200" rtl="0" eaLnBrk="1" latinLnBrk="0" hangingPunct="1">
-              <a:spcBef>
-                <a:spcPts val="1000"/>
-              </a:spcBef>
-              <a:spcAft>
-                <a:spcPts val="0"/>
-              </a:spcAft>
-              <a:buClr>
-                <a:schemeClr val="accent1"/>
-              </a:buClr>
-              <a:buSzPct val="80000"/>
-              <a:buFont typeface="Wingdings 3" charset="2"/>
-              <a:buChar char=""/>
-              <a:defRPr sz="1200" kern="1200">
-                <a:solidFill>
-                  <a:schemeClr val="tx1">
-                    <a:lumMod val="75000"/>
-                    <a:lumOff val="25000"/>
-                  </a:schemeClr>
-                </a:solidFill>
-                <a:latin typeface="+mn-lt"/>
-                <a:ea typeface="+mn-ea"/>
-                <a:cs typeface="+mn-cs"/>
-              </a:defRPr>
-            </a:lvl8pPr>
-            <a:lvl9pPr marL="3886200" indent="-228600" algn="l" defTabSz="457200" rtl="0" eaLnBrk="1" latinLnBrk="0" hangingPunct="1">
-              <a:spcBef>
-                <a:spcPts val="1000"/>
-              </a:spcBef>
-              <a:spcAft>
-                <a:spcPts val="0"/>
-              </a:spcAft>
-              <a:buClr>
-                <a:schemeClr val="accent1"/>
-              </a:buClr>
-              <a:buSzPct val="80000"/>
-              <a:buFont typeface="Wingdings 3" charset="2"/>
-              <a:buChar char=""/>
-              <a:defRPr sz="1200" kern="1200">
-                <a:solidFill>
-                  <a:schemeClr val="tx1">
-                    <a:lumMod val="75000"/>
-                    <a:lumOff val="25000"/>
-                  </a:schemeClr>
-                </a:solidFill>
-                <a:latin typeface="+mn-lt"/>
-                <a:ea typeface="+mn-ea"/>
-                <a:cs typeface="+mn-cs"/>
-              </a:defRPr>
-            </a:lvl9pPr>
-          </a:lstStyle>
-          <a:p>
-            <a:endParaRPr lang="en-IL" dirty="0"/>
-          </a:p>
-        </p:txBody>
-      </p:sp>
-      <p:pic>
-        <p:nvPicPr>
-          <p:cNvPr id="4" name="Picture 3">
-            <a:extLst>
-              <a:ext uri="{FF2B5EF4-FFF2-40B4-BE49-F238E27FC236}">
-                <a16:creationId xmlns:a16="http://schemas.microsoft.com/office/drawing/2014/main" id="{3C1C26D4-78CB-FC76-B716-3912090A6456}"/>
-              </a:ext>
-            </a:extLst>
-          </p:cNvPr>
-          <p:cNvPicPr>
-            <a:picLocks noChangeAspect="1"/>
-          </p:cNvPicPr>
-          <p:nvPr/>
-        </p:nvPicPr>
-        <p:blipFill>
-          <a:blip r:embed="rId2"/>
-          <a:stretch>
-            <a:fillRect/>
-          </a:stretch>
-        </p:blipFill>
-        <p:spPr>
-          <a:xfrm>
-            <a:off x="780392" y="2901832"/>
-            <a:ext cx="8962697" cy="3494348"/>
-          </a:xfrm>
-          <a:prstGeom prst="rect">
-            <a:avLst/>
-          </a:prstGeom>
-        </p:spPr>
-      </p:pic>
+          <a:bodyPr anchor="ctr"/>
+          <a:lstStyle/>
+          <a:p>
+            <a:endParaRPr lang="en-US"/>
+          </a:p>
+        </p:txBody>
+      </p:sp>
     </p:spTree>
     <p:extLst>
       <p:ext uri="{BB962C8B-B14F-4D97-AF65-F5344CB8AC3E}">
-        <p14:creationId xmlns:p14="http://schemas.microsoft.com/office/powerpoint/2010/main" val="2255410467"/>
+        <p14:creationId xmlns:p14="http://schemas.microsoft.com/office/powerpoint/2010/main" val="732303042"/>
       </p:ext>
     </p:extLst>
   </p:cSld>
@@ -10343,6 +12320,15 @@
 </file>
 
 <file path=customXml/item1.xml><?xml version="1.0" encoding="utf-8"?>
+<?mso-contentType ?>
+<FormTemplates xmlns="http://schemas.microsoft.com/sharepoint/v3/contenttype/forms">
+  <Display>DocumentLibraryForm</Display>
+  <Edit>DocumentLibraryForm</Edit>
+  <New>DocumentLibraryForm</New>
+</FormTemplates>
+</file>
+
+<file path=customXml/item2.xml><?xml version="1.0" encoding="utf-8"?>
 <p:properties xmlns:p="http://schemas.microsoft.com/office/2006/metadata/properties" xmlns:xsi="http://www.w3.org/2001/XMLSchema-instance" xmlns:pc="http://schemas.microsoft.com/office/infopath/2007/PartnerControls">
   <documentManagement>
     <lcf76f155ced4ddcb4097134ff3c332f xmlns="858d5390-0f7b-4213-8bcd-0cd5cf778ba6">
@@ -10351,15 +12337,6 @@
     <TaxCatchAll xmlns="e5f39eeb-dc9c-40bf-a733-e74d7baf73b9" xsi:nil="true"/>
   </documentManagement>
 </p:properties>
-</file>
-
-<file path=customXml/item2.xml><?xml version="1.0" encoding="utf-8"?>
-<?mso-contentType ?>
-<FormTemplates xmlns="http://schemas.microsoft.com/sharepoint/v3/contenttype/forms">
-  <Display>DocumentLibraryForm</Display>
-  <Edit>DocumentLibraryForm</Edit>
-  <New>DocumentLibraryForm</New>
-</FormTemplates>
 </file>
 
 <file path=customXml/item3.xml><?xml version="1.0" encoding="utf-8"?>
@@ -10611,20 +12588,20 @@
 </file>
 
 <file path=customXml/itemProps1.xml><?xml version="1.0" encoding="utf-8"?>
+<ds:datastoreItem xmlns:ds="http://schemas.openxmlformats.org/officeDocument/2006/customXml" ds:itemID="{CAAF7FB3-E9ED-4EED-B8B3-D582CBAD96FA}">
+  <ds:schemaRefs>
+    <ds:schemaRef ds:uri="http://schemas.microsoft.com/sharepoint/v3/contenttype/forms"/>
+  </ds:schemaRefs>
+</ds:datastoreItem>
+</file>
+
+<file path=customXml/itemProps2.xml><?xml version="1.0" encoding="utf-8"?>
 <ds:datastoreItem xmlns:ds="http://schemas.openxmlformats.org/officeDocument/2006/customXml" ds:itemID="{2B532926-D782-41F9-BAB4-3CFD211C0FE2}">
   <ds:schemaRefs>
     <ds:schemaRef ds:uri="http://schemas.microsoft.com/office/2006/metadata/properties"/>
     <ds:schemaRef ds:uri="http://schemas.microsoft.com/office/infopath/2007/PartnerControls"/>
     <ds:schemaRef ds:uri="858d5390-0f7b-4213-8bcd-0cd5cf778ba6"/>
     <ds:schemaRef ds:uri="e5f39eeb-dc9c-40bf-a733-e74d7baf73b9"/>
-  </ds:schemaRefs>
-</ds:datastoreItem>
-</file>
-
-<file path=customXml/itemProps2.xml><?xml version="1.0" encoding="utf-8"?>
-<ds:datastoreItem xmlns:ds="http://schemas.openxmlformats.org/officeDocument/2006/customXml" ds:itemID="{CAAF7FB3-E9ED-4EED-B8B3-D582CBAD96FA}">
-  <ds:schemaRefs>
-    <ds:schemaRef ds:uri="http://schemas.microsoft.com/sharepoint/v3/contenttype/forms"/>
   </ds:schemaRefs>
 </ds:datastoreItem>
 </file>

--- a/course_data/presentations/practical_spring_boot_for_tdp.pptx
+++ b/course_data/presentations/practical_spring_boot_for_tdp.pptx
@@ -5,22 +5,25 @@
     <p:sldMasterId id="2147483797" r:id="rId4"/>
   </p:sldMasterIdLst>
   <p:notesMasterIdLst>
-    <p:notesMasterId r:id="rId18"/>
+    <p:notesMasterId r:id="rId21"/>
   </p:notesMasterIdLst>
   <p:sldIdLst>
     <p:sldId id="256" r:id="rId5"/>
     <p:sldId id="330" r:id="rId6"/>
     <p:sldId id="336" r:id="rId7"/>
-    <p:sldId id="337" r:id="rId8"/>
-    <p:sldId id="261" r:id="rId9"/>
-    <p:sldId id="335" r:id="rId10"/>
-    <p:sldId id="333" r:id="rId11"/>
-    <p:sldId id="334" r:id="rId12"/>
-    <p:sldId id="262" r:id="rId13"/>
-    <p:sldId id="264" r:id="rId14"/>
-    <p:sldId id="318" r:id="rId15"/>
-    <p:sldId id="319" r:id="rId16"/>
-    <p:sldId id="265" r:id="rId17"/>
+    <p:sldId id="339" r:id="rId8"/>
+    <p:sldId id="337" r:id="rId9"/>
+    <p:sldId id="338" r:id="rId10"/>
+    <p:sldId id="261" r:id="rId11"/>
+    <p:sldId id="335" r:id="rId12"/>
+    <p:sldId id="333" r:id="rId13"/>
+    <p:sldId id="334" r:id="rId14"/>
+    <p:sldId id="262" r:id="rId15"/>
+    <p:sldId id="264" r:id="rId16"/>
+    <p:sldId id="318" r:id="rId17"/>
+    <p:sldId id="319" r:id="rId18"/>
+    <p:sldId id="265" r:id="rId19"/>
+    <p:sldId id="340" r:id="rId20"/>
   </p:sldIdLst>
   <p:sldSz cx="12192000" cy="6858000"/>
   <p:notesSz cx="6858000" cy="9144000"/>
@@ -225,7 +228,7 @@
           <a:p>
             <a:fld id="{AD4DB1D7-A2E6-5540-AAB6-9A95390687AC}" type="datetimeFigureOut">
               <a:rPr lang="en-IL" smtClean="0"/>
-              <a:t>21/07/2025</a:t>
+              <a:t>12/09/2026</a:t>
             </a:fld>
             <a:endParaRPr lang="en-IL"/>
           </a:p>
@@ -537,7 +540,7 @@
           <a:bodyPr/>
           <a:lstStyle/>
           <a:p>
-            <a:endParaRPr lang="en-IL" dirty="0"/>
+            <a:endParaRPr lang="en-IL"/>
           </a:p>
         </p:txBody>
       </p:sp>
@@ -727,7 +730,7 @@
           <a:p>
             <a:fld id="{B5FEB3D3-3C4F-5E4D-9290-0C0B5A2442F8}" type="slidenum">
               <a:rPr lang="en-IL" smtClean="0"/>
-              <a:t>4</a:t>
+              <a:t>5</a:t>
             </a:fld>
             <a:endParaRPr lang="en-IL"/>
           </a:p>
@@ -811,7 +814,7 @@
           <a:p>
             <a:fld id="{B5FEB3D3-3C4F-5E4D-9290-0C0B5A2442F8}" type="slidenum">
               <a:rPr lang="en-IL" smtClean="0"/>
-              <a:t>5</a:t>
+              <a:t>7</a:t>
             </a:fld>
             <a:endParaRPr lang="en-IL"/>
           </a:p>
@@ -895,7 +898,7 @@
           <a:p>
             <a:fld id="{B5FEB3D3-3C4F-5E4D-9290-0C0B5A2442F8}" type="slidenum">
               <a:rPr lang="en-IL" smtClean="0"/>
-              <a:t>6</a:t>
+              <a:t>8</a:t>
             </a:fld>
             <a:endParaRPr lang="en-IL"/>
           </a:p>
@@ -979,7 +982,7 @@
           <a:p>
             <a:fld id="{B5FEB3D3-3C4F-5E4D-9290-0C0B5A2442F8}" type="slidenum">
               <a:rPr lang="en-IL" smtClean="0"/>
-              <a:t>8</a:t>
+              <a:t>10</a:t>
             </a:fld>
             <a:endParaRPr lang="en-IL"/>
           </a:p>
@@ -1086,7 +1089,7 @@
           <a:p>
             <a:fld id="{B5FEB3D3-3C4F-5E4D-9290-0C0B5A2442F8}" type="slidenum">
               <a:rPr lang="en-IL" smtClean="0"/>
-              <a:t>12</a:t>
+              <a:t>14</a:t>
             </a:fld>
             <a:endParaRPr lang="en-IL"/>
           </a:p>
@@ -1274,6 +1277,13 @@
               <a:schemeClr val="lt1"/>
             </a:fontRef>
           </p:style>
+          <p:txBody>
+            <a:bodyPr/>
+            <a:lstStyle/>
+            <a:p>
+              <a:endParaRPr lang="en-IL"/>
+            </a:p>
+          </p:txBody>
         </p:sp>
         <p:sp>
           <p:nvSpPr>
@@ -1337,6 +1347,13 @@
               <a:schemeClr val="lt1"/>
             </a:fontRef>
           </p:style>
+          <p:txBody>
+            <a:bodyPr/>
+            <a:lstStyle/>
+            <a:p>
+              <a:endParaRPr lang="en-IL"/>
+            </a:p>
+          </p:txBody>
         </p:sp>
         <p:sp>
           <p:nvSpPr>
@@ -1378,6 +1395,13 @@
               <a:schemeClr val="lt1"/>
             </a:fontRef>
           </p:style>
+          <p:txBody>
+            <a:bodyPr/>
+            <a:lstStyle/>
+            <a:p>
+              <a:endParaRPr lang="en-IL"/>
+            </a:p>
+          </p:txBody>
         </p:sp>
         <p:sp>
           <p:nvSpPr>
@@ -1442,6 +1466,13 @@
               <a:schemeClr val="lt1"/>
             </a:fontRef>
           </p:style>
+          <p:txBody>
+            <a:bodyPr/>
+            <a:lstStyle/>
+            <a:p>
+              <a:endParaRPr lang="en-IL"/>
+            </a:p>
+          </p:txBody>
         </p:sp>
         <p:sp>
           <p:nvSpPr>
@@ -1507,6 +1538,13 @@
               <a:schemeClr val="lt1"/>
             </a:fontRef>
           </p:style>
+          <p:txBody>
+            <a:bodyPr/>
+            <a:lstStyle/>
+            <a:p>
+              <a:endParaRPr lang="en-IL"/>
+            </a:p>
+          </p:txBody>
         </p:sp>
         <p:sp>
           <p:nvSpPr>
@@ -1570,6 +1608,13 @@
               <a:schemeClr val="lt1"/>
             </a:fontRef>
           </p:style>
+          <p:txBody>
+            <a:bodyPr/>
+            <a:lstStyle/>
+            <a:p>
+              <a:endParaRPr lang="en-IL"/>
+            </a:p>
+          </p:txBody>
         </p:sp>
         <p:sp>
           <p:nvSpPr>
@@ -1611,6 +1656,13 @@
               <a:schemeClr val="lt1"/>
             </a:fontRef>
           </p:style>
+          <p:txBody>
+            <a:bodyPr/>
+            <a:lstStyle/>
+            <a:p>
+              <a:endParaRPr lang="en-IL"/>
+            </a:p>
+          </p:txBody>
         </p:sp>
         <p:sp>
           <p:nvSpPr>
@@ -1652,6 +1704,13 @@
               <a:schemeClr val="lt1"/>
             </a:fontRef>
           </p:style>
+          <p:txBody>
+            <a:bodyPr/>
+            <a:lstStyle/>
+            <a:p>
+              <a:endParaRPr lang="en-IL"/>
+            </a:p>
+          </p:txBody>
         </p:sp>
       </p:grpSp>
       <p:sp>
@@ -1830,7 +1889,7 @@
             <a:fld id="{B61BEF0D-F0BB-DE4B-95CE-6DB70DBA9567}" type="datetimeFigureOut">
               <a:rPr lang="en-US" smtClean="0"/>
               <a:pPr/>
-              <a:t>7/21/25</a:t>
+              <a:t>9/12/26</a:t>
             </a:fld>
             <a:endParaRPr lang="en-US" dirty="0"/>
           </a:p>
@@ -2083,7 +2142,7 @@
             <a:fld id="{B61BEF0D-F0BB-DE4B-95CE-6DB70DBA9567}" type="datetimeFigureOut">
               <a:rPr lang="en-US" smtClean="0"/>
               <a:pPr/>
-              <a:t>7/21/25</a:t>
+              <a:t>9/12/26</a:t>
             </a:fld>
             <a:endParaRPr lang="en-US" dirty="0"/>
           </a:p>
@@ -2399,7 +2458,7 @@
             <a:fld id="{B61BEF0D-F0BB-DE4B-95CE-6DB70DBA9567}" type="datetimeFigureOut">
               <a:rPr lang="en-US" smtClean="0"/>
               <a:pPr/>
-              <a:t>7/21/25</a:t>
+              <a:t>9/12/26</a:t>
             </a:fld>
             <a:endParaRPr lang="en-US" dirty="0"/>
           </a:p>
@@ -2728,7 +2787,7 @@
             <a:fld id="{B61BEF0D-F0BB-DE4B-95CE-6DB70DBA9567}" type="datetimeFigureOut">
               <a:rPr lang="en-US" smtClean="0"/>
               <a:pPr/>
-              <a:t>7/21/25</a:t>
+              <a:t>9/12/26</a:t>
             </a:fld>
             <a:endParaRPr lang="en-US" dirty="0"/>
           </a:p>
@@ -3044,7 +3103,7 @@
             <a:fld id="{B61BEF0D-F0BB-DE4B-95CE-6DB70DBA9567}" type="datetimeFigureOut">
               <a:rPr lang="en-US" smtClean="0"/>
               <a:pPr/>
-              <a:t>7/21/25</a:t>
+              <a:t>9/12/26</a:t>
             </a:fld>
             <a:endParaRPr lang="en-US" dirty="0"/>
           </a:p>
@@ -3433,7 +3492,7 @@
             <a:fld id="{B61BEF0D-F0BB-DE4B-95CE-6DB70DBA9567}" type="datetimeFigureOut">
               <a:rPr lang="en-US" smtClean="0"/>
               <a:pPr/>
-              <a:t>7/21/25</a:t>
+              <a:t>9/12/26</a:t>
             </a:fld>
             <a:endParaRPr lang="en-US" dirty="0"/>
           </a:p>
@@ -3604,7 +3663,7 @@
           <a:p>
             <a:fld id="{55C6B4A9-1611-4792-9094-5F34BCA07E0B}" type="datetimeFigureOut">
               <a:rPr lang="en-US" smtClean="0"/>
-              <a:t>7/21/25</a:t>
+              <a:t>9/12/26</a:t>
             </a:fld>
             <a:endParaRPr lang="en-US" dirty="0"/>
           </a:p>
@@ -3785,7 +3844,7 @@
             <a:fld id="{B61BEF0D-F0BB-DE4B-95CE-6DB70DBA9567}" type="datetimeFigureOut">
               <a:rPr lang="en-US" smtClean="0"/>
               <a:pPr/>
-              <a:t>7/21/25</a:t>
+              <a:t>9/12/26</a:t>
             </a:fld>
             <a:endParaRPr lang="en-US" dirty="0"/>
           </a:p>
@@ -3963,7 +4022,7 @@
             <a:fld id="{B61BEF0D-F0BB-DE4B-95CE-6DB70DBA9567}" type="datetimeFigureOut">
               <a:rPr lang="en-US" smtClean="0"/>
               <a:pPr/>
-              <a:t>7/21/25</a:t>
+              <a:t>9/12/26</a:t>
             </a:fld>
             <a:endParaRPr lang="en-US" dirty="0"/>
           </a:p>
@@ -4217,7 +4276,7 @@
             <a:fld id="{B61BEF0D-F0BB-DE4B-95CE-6DB70DBA9567}" type="datetimeFigureOut">
               <a:rPr lang="en-US" smtClean="0"/>
               <a:pPr/>
-              <a:t>7/21/25</a:t>
+              <a:t>9/12/26</a:t>
             </a:fld>
             <a:endParaRPr lang="en-US" dirty="0"/>
           </a:p>
@@ -4450,7 +4509,7 @@
           <a:p>
             <a:fld id="{EB712588-04B1-427B-82EE-E8DB90309F08}" type="datetimeFigureOut">
               <a:rPr lang="en-US" smtClean="0"/>
-              <a:t>7/21/25</a:t>
+              <a:t>9/12/26</a:t>
             </a:fld>
             <a:endParaRPr lang="en-US" dirty="0"/>
           </a:p>
@@ -4825,7 +4884,7 @@
             <a:fld id="{B61BEF0D-F0BB-DE4B-95CE-6DB70DBA9567}" type="datetimeFigureOut">
               <a:rPr lang="en-US" smtClean="0"/>
               <a:pPr/>
-              <a:t>7/21/25</a:t>
+              <a:t>9/12/26</a:t>
             </a:fld>
             <a:endParaRPr lang="en-US" dirty="0"/>
           </a:p>
@@ -4950,7 +5009,7 @@
             <a:fld id="{B61BEF0D-F0BB-DE4B-95CE-6DB70DBA9567}" type="datetimeFigureOut">
               <a:rPr lang="en-US" smtClean="0"/>
               <a:pPr/>
-              <a:t>7/21/25</a:t>
+              <a:t>9/12/26</a:t>
             </a:fld>
             <a:endParaRPr lang="en-US" dirty="0"/>
           </a:p>
@@ -5047,7 +5106,7 @@
             <a:fld id="{B61BEF0D-F0BB-DE4B-95CE-6DB70DBA9567}" type="datetimeFigureOut">
               <a:rPr lang="en-US" smtClean="0"/>
               <a:pPr/>
-              <a:t>7/21/25</a:t>
+              <a:t>9/12/26</a:t>
             </a:fld>
             <a:endParaRPr lang="en-US" dirty="0"/>
           </a:p>
@@ -5303,7 +5362,7 @@
           <a:p>
             <a:fld id="{42A54C80-263E-416B-A8E0-580EDEADCBDC}" type="datetimeFigureOut">
               <a:rPr lang="en-US" smtClean="0"/>
-              <a:t>7/21/25</a:t>
+              <a:t>9/12/26</a:t>
             </a:fld>
             <a:endParaRPr lang="en-US" dirty="0"/>
           </a:p>
@@ -5567,7 +5626,7 @@
             <a:fld id="{B61BEF0D-F0BB-DE4B-95CE-6DB70DBA9567}" type="datetimeFigureOut">
               <a:rPr lang="en-US" smtClean="0"/>
               <a:pPr/>
-              <a:t>7/21/25</a:t>
+              <a:t>9/12/26</a:t>
             </a:fld>
             <a:endParaRPr lang="en-US" dirty="0"/>
           </a:p>
@@ -5803,6 +5862,13 @@
               <a:schemeClr val="lt1"/>
             </a:fontRef>
           </p:style>
+          <p:txBody>
+            <a:bodyPr/>
+            <a:lstStyle/>
+            <a:p>
+              <a:endParaRPr lang="en-IL"/>
+            </a:p>
+          </p:txBody>
         </p:sp>
         <p:sp>
           <p:nvSpPr>
@@ -5866,6 +5932,13 @@
               <a:schemeClr val="lt1"/>
             </a:fontRef>
           </p:style>
+          <p:txBody>
+            <a:bodyPr/>
+            <a:lstStyle/>
+            <a:p>
+              <a:endParaRPr lang="en-IL"/>
+            </a:p>
+          </p:txBody>
         </p:sp>
         <p:sp>
           <p:nvSpPr>
@@ -5907,6 +5980,13 @@
               <a:schemeClr val="lt1"/>
             </a:fontRef>
           </p:style>
+          <p:txBody>
+            <a:bodyPr/>
+            <a:lstStyle/>
+            <a:p>
+              <a:endParaRPr lang="en-IL"/>
+            </a:p>
+          </p:txBody>
         </p:sp>
         <p:sp>
           <p:nvSpPr>
@@ -5971,6 +6051,13 @@
               <a:schemeClr val="lt1"/>
             </a:fontRef>
           </p:style>
+          <p:txBody>
+            <a:bodyPr/>
+            <a:lstStyle/>
+            <a:p>
+              <a:endParaRPr lang="en-IL"/>
+            </a:p>
+          </p:txBody>
         </p:sp>
         <p:sp>
           <p:nvSpPr>
@@ -6036,6 +6123,13 @@
               <a:schemeClr val="lt1"/>
             </a:fontRef>
           </p:style>
+          <p:txBody>
+            <a:bodyPr/>
+            <a:lstStyle/>
+            <a:p>
+              <a:endParaRPr lang="en-IL"/>
+            </a:p>
+          </p:txBody>
         </p:sp>
         <p:sp>
           <p:nvSpPr>
@@ -6099,6 +6193,13 @@
               <a:schemeClr val="lt1"/>
             </a:fontRef>
           </p:style>
+          <p:txBody>
+            <a:bodyPr/>
+            <a:lstStyle/>
+            <a:p>
+              <a:endParaRPr lang="en-IL"/>
+            </a:p>
+          </p:txBody>
         </p:sp>
         <p:sp>
           <p:nvSpPr>
@@ -6140,6 +6241,13 @@
               <a:schemeClr val="lt1"/>
             </a:fontRef>
           </p:style>
+          <p:txBody>
+            <a:bodyPr/>
+            <a:lstStyle/>
+            <a:p>
+              <a:endParaRPr lang="en-IL"/>
+            </a:p>
+          </p:txBody>
         </p:sp>
         <p:sp>
           <p:nvSpPr>
@@ -6181,6 +6289,13 @@
               <a:schemeClr val="lt1"/>
             </a:fontRef>
           </p:style>
+          <p:txBody>
+            <a:bodyPr/>
+            <a:lstStyle/>
+            <a:p>
+              <a:endParaRPr lang="en-IL"/>
+            </a:p>
+          </p:txBody>
         </p:sp>
       </p:grpSp>
       <p:sp>
@@ -6314,7 +6429,7 @@
             <a:fld id="{B61BEF0D-F0BB-DE4B-95CE-6DB70DBA9567}" type="datetimeFigureOut">
               <a:rPr lang="en-US" smtClean="0"/>
               <a:pPr/>
-              <a:t>7/21/25</a:t>
+              <a:t>9/12/26</a:t>
             </a:fld>
             <a:endParaRPr lang="en-US" dirty="0"/>
           </a:p>
@@ -6871,7 +6986,7 @@
         </p:spPr>
         <p:txBody>
           <a:bodyPr>
-            <a:normAutofit fontScale="90000"/>
+            <a:normAutofit/>
           </a:bodyPr>
           <a:lstStyle/>
           <a:p>
@@ -6881,13 +6996,13 @@
               </a:lnSpc>
             </a:pPr>
             <a:r>
-              <a:rPr lang="en-US" sz="4600" b="1" dirty="0">
+              <a:rPr lang="en-US" sz="4600" b="1">
                 <a:latin typeface="ATT Aleck Sans" panose="020B0503020203020204" pitchFamily="34" charset="0"/>
                 <a:cs typeface="ATT Aleck Sans" panose="020B0503020203020204" pitchFamily="34" charset="0"/>
               </a:rPr>
               <a:t>Practical Spring Boot For TDP</a:t>
             </a:r>
-            <a:endParaRPr lang="en-IL" sz="4600" b="1" dirty="0">
+            <a:endParaRPr lang="en-IL" sz="4600" b="1">
               <a:latin typeface="ATT Aleck Sans" panose="020B0503020203020204" pitchFamily="34" charset="0"/>
               <a:cs typeface="ATT Aleck Sans" panose="020B0503020203020204" pitchFamily="34" charset="0"/>
             </a:endParaRPr>
@@ -6923,11 +7038,20 @@
           <a:lstStyle/>
           <a:p>
             <a:r>
-              <a:rPr lang="en-IL" dirty="0">
+              <a:rPr lang="en-IL">
                 <a:latin typeface="ATT Aleck Sans" panose="020B0503020203020204" pitchFamily="34" charset="0"/>
                 <a:cs typeface="ATT Aleck Sans" panose="020B0503020203020204" pitchFamily="34" charset="0"/>
               </a:rPr>
-              <a:t>Idan Shalom, 2025</a:t>
+              <a:t>Idan Shalom, 2026</a:t>
+            </a:r>
+          </a:p>
+          <a:p>
+            <a:r>
+              <a:rPr lang="en-IL">
+                <a:latin typeface="ATT Aleck Sans" panose="020B0503020203020204" pitchFamily="34" charset="0"/>
+                <a:cs typeface="ATT Aleck Sans" panose="020B0503020203020204" pitchFamily="34" charset="0"/>
+              </a:rPr>
+              <a:t>Hands-on workshop</a:t>
             </a:r>
           </a:p>
         </p:txBody>
@@ -7143,6 +7267,52 @@
                                   </p:childTnLst>
                                 </p:cTn>
                               </p:par>
+                              <p:par>
+                                <p:cTn id="11" presetID="10" presetClass="entr" presetSubtype="0" fill="hold" grpId="0" nodeType="withEffect">
+                                  <p:stCondLst>
+                                    <p:cond delay="1500"/>
+                                  </p:stCondLst>
+                                  <p:iterate>
+                                    <p:tmPct val="10000"/>
+                                  </p:iterate>
+                                  <p:childTnLst>
+                                    <p:set>
+                                      <p:cBhvr>
+                                        <p:cTn id="12" dur="1" fill="hold">
+                                          <p:stCondLst>
+                                            <p:cond delay="0"/>
+                                          </p:stCondLst>
+                                        </p:cTn>
+                                        <p:tgtEl>
+                                          <p:spTgt spid="3">
+                                            <p:txEl>
+                                              <p:pRg st="1" end="1"/>
+                                            </p:txEl>
+                                          </p:spTgt>
+                                        </p:tgtEl>
+                                        <p:attrNameLst>
+                                          <p:attrName>style.visibility</p:attrName>
+                                        </p:attrNameLst>
+                                      </p:cBhvr>
+                                      <p:to>
+                                        <p:strVal val="visible"/>
+                                      </p:to>
+                                    </p:set>
+                                    <p:animEffect transition="in" filter="fade">
+                                      <p:cBhvr>
+                                        <p:cTn id="13" dur="700"/>
+                                        <p:tgtEl>
+                                          <p:spTgt spid="3">
+                                            <p:txEl>
+                                              <p:pRg st="1" end="1"/>
+                                            </p:txEl>
+                                          </p:spTgt>
+                                        </p:tgtEl>
+                                      </p:cBhvr>
+                                    </p:animEffect>
+                                  </p:childTnLst>
+                                </p:cTn>
+                              </p:par>
                             </p:childTnLst>
                           </p:cTn>
                         </p:par>
@@ -7181,6 +7351,14 @@
 <file path=ppt/slides/slide10.xml><?xml version="1.0" encoding="utf-8"?>
 <p:sld xmlns:a="http://schemas.openxmlformats.org/drawingml/2006/main" xmlns:r="http://schemas.openxmlformats.org/officeDocument/2006/relationships" xmlns:p="http://schemas.openxmlformats.org/presentationml/2006/main">
   <p:cSld>
+    <p:bg>
+      <p:bgPr>
+        <a:solidFill>
+          <a:schemeClr val="bg2"/>
+        </a:solidFill>
+        <a:effectLst/>
+      </p:bgPr>
+    </p:bg>
     <p:spTree>
       <p:nvGrpSpPr>
         <p:cNvPr id="1" name=""/>
@@ -7200,7 +7378,7 @@
           <p:cNvPr id="2" name="Title 1">
             <a:extLst>
               <a:ext uri="{FF2B5EF4-FFF2-40B4-BE49-F238E27FC236}">
-                <a16:creationId xmlns:a16="http://schemas.microsoft.com/office/drawing/2014/main" id="{4F6F5D9E-229E-E0D1-DCAC-8CEEA3631556}"/>
+                <a16:creationId xmlns:a16="http://schemas.microsoft.com/office/drawing/2014/main" id="{CC0DA605-5F54-5A7E-AFE2-FF24D8BBCE10}"/>
               </a:ext>
             </a:extLst>
           </p:cNvPr>
@@ -7211,14 +7389,11 @@
             <p:ph type="title"/>
           </p:nvPr>
         </p:nvSpPr>
-        <p:spPr>
-          <a:xfrm>
-            <a:off x="509169" y="199696"/>
-            <a:ext cx="8596668" cy="1320800"/>
-          </a:xfrm>
-        </p:spPr>
-        <p:txBody>
-          <a:bodyPr/>
+        <p:spPr/>
+        <p:txBody>
+          <a:bodyPr>
+            <a:normAutofit/>
+          </a:bodyPr>
           <a:lstStyle/>
           <a:p>
             <a:r>
@@ -7226,7 +7401,7 @@
                 <a:latin typeface="ATT Aleck Sans" panose="020B0503020203020204" pitchFamily="34" charset="0"/>
                 <a:cs typeface="ATT Aleck Sans" panose="020B0503020203020204" pitchFamily="34" charset="0"/>
               </a:rPr>
-              <a:t>What could be the problems with this implementation?</a:t>
+              <a:t>Purposes of IoC</a:t>
             </a:r>
           </a:p>
         </p:txBody>
@@ -7236,7 +7411,7 @@
           <p:cNvPr id="3" name="Content Placeholder 2">
             <a:extLst>
               <a:ext uri="{FF2B5EF4-FFF2-40B4-BE49-F238E27FC236}">
-                <a16:creationId xmlns:a16="http://schemas.microsoft.com/office/drawing/2014/main" id="{3F6665E5-7BFC-8A6E-C923-33299B2CB606}"/>
+                <a16:creationId xmlns:a16="http://schemas.microsoft.com/office/drawing/2014/main" id="{BC5F8EC1-FE59-2C1C-561E-3C475AD57C09}"/>
               </a:ext>
             </a:extLst>
           </p:cNvPr>
@@ -7244,13 +7419,13 @@
             <a:spLocks noGrp="1"/>
           </p:cNvSpPr>
           <p:nvPr>
-            <p:ph sz="half" idx="1"/>
+            <p:ph idx="1"/>
           </p:nvPr>
         </p:nvSpPr>
         <p:spPr>
           <a:xfrm>
-            <a:off x="572230" y="1572010"/>
-            <a:ext cx="9296983" cy="3880772"/>
+            <a:off x="561720" y="1372313"/>
+            <a:ext cx="8596668" cy="3880773"/>
           </a:xfrm>
         </p:spPr>
         <p:txBody>
@@ -7261,163 +7436,599 @@
           <a:p>
             <a:pPr>
               <a:lnSpc>
-                <a:spcPct val="160000"/>
+                <a:spcPct val="150000"/>
               </a:lnSpc>
             </a:pPr>
             <a:r>
-              <a:rPr lang="en-IL" sz="2200" dirty="0">
+              <a:rPr lang="en-US" sz="2400" dirty="0">
                 <a:latin typeface="ATT Aleck Sans" panose="020B0503020203020204" pitchFamily="34" charset="0"/>
                 <a:cs typeface="ATT Aleck Sans" panose="020B0503020203020204" pitchFamily="34" charset="0"/>
               </a:rPr>
-              <a:t>Tight coupling </a:t>
-            </a:r>
-            <a:r>
-              <a:rPr lang="en-IL" sz="2200" dirty="0">
-                <a:latin typeface="Consolas" panose="020B0609020204030204" pitchFamily="49" charset="0"/>
-                <a:cs typeface="Consolas" panose="020B0609020204030204" pitchFamily="49" charset="0"/>
-              </a:rPr>
-              <a:t>Computer</a:t>
-            </a:r>
-            <a:r>
-              <a:rPr lang="en-IL" sz="2200" dirty="0">
+              <a:t>Decouple </a:t>
+            </a:r>
+            <a:r>
+              <a:rPr lang="en-US" sz="2400">
                 <a:latin typeface="ATT Aleck Sans" panose="020B0503020203020204" pitchFamily="34" charset="0"/>
                 <a:cs typeface="ATT Aleck Sans" panose="020B0503020203020204" pitchFamily="34" charset="0"/>
               </a:rPr>
-              <a:t> and its components:</a:t>
-            </a:r>
-          </a:p>
-          <a:p>
-            <a:pPr lvl="1">
-              <a:lnSpc>
-                <a:spcPct val="160000"/>
-              </a:lnSpc>
-            </a:pPr>
-            <a:r>
-              <a:rPr lang="en-IL" sz="2200" dirty="0">
+              <a:t>what </a:t>
+            </a:r>
+            <a:r>
+              <a:rPr lang="en-US" sz="2400" dirty="0">
                 <a:latin typeface="ATT Aleck Sans" panose="020B0503020203020204" pitchFamily="34" charset="0"/>
                 <a:cs typeface="ATT Aleck Sans" panose="020B0503020203020204" pitchFamily="34" charset="0"/>
               </a:rPr>
-              <a:t>We </a:t>
-            </a:r>
-            <a:r>
-              <a:rPr lang="en-US" sz="2200" dirty="0">
+              <a:t>a </a:t>
+            </a:r>
+            <a:r>
+              <a:rPr lang="en-US" sz="2400">
                 <a:latin typeface="ATT Aleck Sans" panose="020B0503020203020204" pitchFamily="34" charset="0"/>
                 <a:cs typeface="ATT Aleck Sans" panose="020B0503020203020204" pitchFamily="34" charset="0"/>
               </a:rPr>
-              <a:t>must</a:t>
-            </a:r>
-            <a:r>
-              <a:rPr lang="en-IL" sz="2200" dirty="0">
+              <a:t>component does </a:t>
+            </a:r>
+            <a:r>
+              <a:rPr lang="en-US" sz="2400" dirty="0">
                 <a:latin typeface="ATT Aleck Sans" panose="020B0503020203020204" pitchFamily="34" charset="0"/>
                 <a:cs typeface="ATT Aleck Sans" panose="020B0503020203020204" pitchFamily="34" charset="0"/>
               </a:rPr>
-              <a:t> know how to create every component and which parameters to use exactly in the constructor.</a:t>
-            </a:r>
-          </a:p>
-          <a:p>
-            <a:pPr lvl="1">
-              <a:lnSpc>
-                <a:spcPct val="160000"/>
-              </a:lnSpc>
-            </a:pPr>
-            <a:r>
-              <a:rPr lang="en-IL" sz="2200" dirty="0">
+              <a:t>from </a:t>
+            </a:r>
+            <a:r>
+              <a:rPr lang="en-US" sz="2400">
                 <a:latin typeface="ATT Aleck Sans" panose="020B0503020203020204" pitchFamily="34" charset="0"/>
                 <a:cs typeface="ATT Aleck Sans" panose="020B0503020203020204" pitchFamily="34" charset="0"/>
               </a:rPr>
-              <a:t>If I’d like to create a </a:t>
-            </a:r>
-            <a:r>
-              <a:rPr lang="en-IL" sz="2200" dirty="0">
-                <a:latin typeface="Consolas" panose="020B0609020204030204" pitchFamily="49" charset="0"/>
-                <a:cs typeface="Consolas" panose="020B0609020204030204" pitchFamily="49" charset="0"/>
-              </a:rPr>
-              <a:t>Computer</a:t>
-            </a:r>
-            <a:r>
-              <a:rPr lang="en-IL" sz="2200" dirty="0">
+              <a:t>how </a:t>
+            </a:r>
+            <a:r>
+              <a:rPr lang="en-US" sz="2400" dirty="0">
                 <a:latin typeface="ATT Aleck Sans" panose="020B0503020203020204" pitchFamily="34" charset="0"/>
                 <a:cs typeface="ATT Aleck Sans" panose="020B0503020203020204" pitchFamily="34" charset="0"/>
               </a:rPr>
-              <a:t> with a different </a:t>
-            </a:r>
-            <a:r>
-              <a:rPr lang="en-IL" sz="2200" dirty="0">
-                <a:latin typeface="Consolas" panose="020B0609020204030204" pitchFamily="49" charset="0"/>
-                <a:cs typeface="Consolas" panose="020B0609020204030204" pitchFamily="49" charset="0"/>
-              </a:rPr>
-              <a:t>Processor</a:t>
-            </a:r>
-            <a:r>
-              <a:rPr lang="en-IL" sz="2200" dirty="0">
+              <a:t>its </a:t>
+            </a:r>
+            <a:r>
+              <a:rPr lang="en-US" sz="2400">
                 <a:latin typeface="ATT Aleck Sans" panose="020B0503020203020204" pitchFamily="34" charset="0"/>
                 <a:cs typeface="ATT Aleck Sans" panose="020B0503020203020204" pitchFamily="34" charset="0"/>
               </a:rPr>
-              <a:t>, I have to create another class for the Computer.</a:t>
-            </a:r>
-          </a:p>
-          <a:p>
-            <a:pPr lvl="1">
-              <a:lnSpc>
-                <a:spcPct val="160000"/>
-              </a:lnSpc>
-            </a:pPr>
-            <a:r>
-              <a:rPr lang="en-IL" sz="2200" dirty="0">
-                <a:latin typeface="ATT Aleck Sans" panose="020B0503020203020204" pitchFamily="34" charset="0"/>
-                <a:cs typeface="ATT Aleck Sans" panose="020B0503020203020204" pitchFamily="34" charset="0"/>
-              </a:rPr>
-              <a:t>How can I test my class? how can I inject mocks?</a:t>
-            </a:r>
-          </a:p>
-          <a:p>
-            <a:pPr>
-              <a:lnSpc>
-                <a:spcPct val="160000"/>
-              </a:lnSpc>
-            </a:pPr>
-            <a:r>
-              <a:rPr lang="en-US" sz="2200" dirty="0">
-                <a:latin typeface="ATT Aleck Sans" panose="020B0503020203020204" pitchFamily="34" charset="0"/>
-                <a:cs typeface="ATT Aleck Sans" panose="020B0503020203020204" pitchFamily="34" charset="0"/>
-              </a:rPr>
-              <a:t>Poor polymorphism </a:t>
-            </a:r>
-            <a:endParaRPr lang="en-IL" sz="2200" dirty="0">
+              <a:t>dependencies are built</a:t>
+            </a:r>
+            <a:endParaRPr lang="en-US" sz="2400" dirty="0">
               <a:latin typeface="ATT Aleck Sans" panose="020B0503020203020204" pitchFamily="34" charset="0"/>
               <a:cs typeface="ATT Aleck Sans" panose="020B0503020203020204" pitchFamily="34" charset="0"/>
             </a:endParaRPr>
           </a:p>
           <a:p>
-            <a:pPr lvl="1">
+            <a:pPr>
               <a:lnSpc>
-                <a:spcPct val="160000"/>
+                <a:spcPct val="150000"/>
               </a:lnSpc>
             </a:pPr>
             <a:r>
-              <a:rPr lang="en-IL" sz="2200" dirty="0">
+              <a:rPr lang="en-US" sz="2400">
                 <a:latin typeface="ATT Aleck Sans" panose="020B0503020203020204" pitchFamily="34" charset="0"/>
                 <a:cs typeface="ATT Aleck Sans" panose="020B0503020203020204" pitchFamily="34" charset="0"/>
               </a:rPr>
-              <a:t>Leads to implementation-based design.</a:t>
-            </a:r>
+              <a:t>Greater </a:t>
+            </a:r>
+            <a:r>
+              <a:rPr lang="en-US" sz="2400" dirty="0">
+                <a:latin typeface="ATT Aleck Sans" panose="020B0503020203020204" pitchFamily="34" charset="0"/>
+                <a:cs typeface="ATT Aleck Sans" panose="020B0503020203020204" pitchFamily="34" charset="0"/>
+              </a:rPr>
+              <a:t>modularity </a:t>
+            </a:r>
+            <a:r>
+              <a:rPr lang="en-US" sz="2400">
+                <a:latin typeface="ATT Aleck Sans" panose="020B0503020203020204" pitchFamily="34" charset="0"/>
+                <a:cs typeface="ATT Aleck Sans" panose="020B0503020203020204" pitchFamily="34" charset="0"/>
+              </a:rPr>
+              <a:t>- a Computer need not know how </a:t>
+            </a:r>
+            <a:r>
+              <a:rPr lang="en-US" sz="2400" dirty="0">
+                <a:latin typeface="ATT Aleck Sans" panose="020B0503020203020204" pitchFamily="34" charset="0"/>
+                <a:cs typeface="ATT Aleck Sans" panose="020B0503020203020204" pitchFamily="34" charset="0"/>
+              </a:rPr>
+              <a:t>a </a:t>
+            </a:r>
+            <a:r>
+              <a:rPr lang="en-US" sz="2400">
+                <a:latin typeface="ATT Aleck Sans" panose="020B0503020203020204" pitchFamily="34" charset="0"/>
+                <a:cs typeface="ATT Aleck Sans" panose="020B0503020203020204" pitchFamily="34" charset="0"/>
+              </a:rPr>
+              <a:t>Processor is created</a:t>
+            </a:r>
+            <a:endParaRPr lang="en-US" sz="2400" dirty="0">
+              <a:latin typeface="ATT Aleck Sans" panose="020B0503020203020204" pitchFamily="34" charset="0"/>
+              <a:cs typeface="ATT Aleck Sans" panose="020B0503020203020204" pitchFamily="34" charset="0"/>
+            </a:endParaRPr>
+          </a:p>
+          <a:p>
+            <a:pPr>
+              <a:lnSpc>
+                <a:spcPct val="150000"/>
+              </a:lnSpc>
+            </a:pPr>
+            <a:r>
+              <a:rPr lang="en-US" sz="2400">
+                <a:latin typeface="ATT Aleck Sans" panose="020B0503020203020204" pitchFamily="34" charset="0"/>
+                <a:cs typeface="ATT Aleck Sans" panose="020B0503020203020204" pitchFamily="34" charset="0"/>
+              </a:rPr>
+              <a:t>Easier </a:t>
+            </a:r>
+            <a:r>
+              <a:rPr lang="en-US" sz="2400" dirty="0">
+                <a:latin typeface="ATT Aleck Sans" panose="020B0503020203020204" pitchFamily="34" charset="0"/>
+                <a:cs typeface="ATT Aleck Sans" panose="020B0503020203020204" pitchFamily="34" charset="0"/>
+              </a:rPr>
+              <a:t>testing </a:t>
+            </a:r>
+            <a:r>
+              <a:rPr lang="en-US" sz="2400">
+                <a:latin typeface="ATT Aleck Sans" panose="020B0503020203020204" pitchFamily="34" charset="0"/>
+                <a:cs typeface="ATT Aleck Sans" panose="020B0503020203020204" pitchFamily="34" charset="0"/>
+              </a:rPr>
+              <a:t>- isolate </a:t>
+            </a:r>
+            <a:r>
+              <a:rPr lang="en-US" sz="2400" dirty="0">
+                <a:latin typeface="ATT Aleck Sans" panose="020B0503020203020204" pitchFamily="34" charset="0"/>
+                <a:cs typeface="ATT Aleck Sans" panose="020B0503020203020204" pitchFamily="34" charset="0"/>
+              </a:rPr>
+              <a:t>components or </a:t>
+            </a:r>
+            <a:r>
+              <a:rPr lang="en-US" sz="2400">
+                <a:latin typeface="ATT Aleck Sans" panose="020B0503020203020204" pitchFamily="34" charset="0"/>
+                <a:cs typeface="ATT Aleck Sans" panose="020B0503020203020204" pitchFamily="34" charset="0"/>
+              </a:rPr>
+              <a:t>inject mocks instead of real ones</a:t>
+            </a:r>
+            <a:endParaRPr lang="en-US" sz="2400" dirty="0">
+              <a:latin typeface="ATT Aleck Sans" panose="020B0503020203020204" pitchFamily="34" charset="0"/>
+              <a:cs typeface="ATT Aleck Sans" panose="020B0503020203020204" pitchFamily="34" charset="0"/>
+            </a:endParaRPr>
           </a:p>
         </p:txBody>
       </p:sp>
     </p:spTree>
     <p:extLst>
       <p:ext uri="{BB962C8B-B14F-4D97-AF65-F5344CB8AC3E}">
-        <p14:creationId xmlns:p14="http://schemas.microsoft.com/office/powerpoint/2010/main" val="4238028326"/>
+        <p14:creationId xmlns:p14="http://schemas.microsoft.com/office/powerpoint/2010/main" val="1967367102"/>
       </p:ext>
     </p:extLst>
   </p:cSld>
   <p:clrMapOvr>
-    <a:masterClrMapping/>
+    <a:overrideClrMapping bg1="dk1" tx1="lt1" bg2="dk2" tx2="lt2" accent1="accent1" accent2="accent2" accent3="accent3" accent4="accent4" accent5="accent5" accent6="accent6" hlink="hlink" folHlink="folHlink"/>
   </p:clrMapOvr>
 </p:sld>
 </file>
 
 <file path=ppt/slides/slide11.xml><?xml version="1.0" encoding="utf-8"?>
+<p:sld xmlns:a="http://schemas.openxmlformats.org/drawingml/2006/main" xmlns:r="http://schemas.openxmlformats.org/officeDocument/2006/relationships" xmlns:p="http://schemas.openxmlformats.org/presentationml/2006/main">
+  <p:cSld>
+    <p:bg>
+      <p:bgRef idx="1001">
+        <a:schemeClr val="bg2"/>
+      </p:bgRef>
+    </p:bg>
+    <p:spTree>
+      <p:nvGrpSpPr>
+        <p:cNvPr id="1" name=""/>
+        <p:cNvGrpSpPr/>
+        <p:nvPr/>
+      </p:nvGrpSpPr>
+      <p:grpSpPr>
+        <a:xfrm>
+          <a:off x="0" y="0"/>
+          <a:ext cx="0" cy="0"/>
+          <a:chOff x="0" y="0"/>
+          <a:chExt cx="0" cy="0"/>
+        </a:xfrm>
+      </p:grpSpPr>
+      <p:sp>
+        <p:nvSpPr>
+          <p:cNvPr id="2" name="Title 1">
+            <a:extLst>
+              <a:ext uri="{FF2B5EF4-FFF2-40B4-BE49-F238E27FC236}">
+                <a16:creationId xmlns:a16="http://schemas.microsoft.com/office/drawing/2014/main" id="{33613CEB-B33C-5604-02BC-3036BDA84F19}"/>
+              </a:ext>
+            </a:extLst>
+          </p:cNvPr>
+          <p:cNvSpPr>
+            <a:spLocks noGrp="1"/>
+          </p:cNvSpPr>
+          <p:nvPr>
+            <p:ph type="title"/>
+          </p:nvPr>
+        </p:nvSpPr>
+        <p:spPr/>
+        <p:txBody>
+          <a:bodyPr vert="horz" lIns="91440" tIns="45720" rIns="91440" bIns="45720" rtlCol="0" anchor="t">
+            <a:normAutofit/>
+          </a:bodyPr>
+          <a:lstStyle/>
+          <a:p>
+            <a:r>
+              <a:rPr lang="en-US" b="1"/>
+              <a:t>The </a:t>
+            </a:r>
+            <a:r>
+              <a:rPr lang="en-US" b="1" dirty="0"/>
+              <a:t>traditional OOP approach</a:t>
+            </a:r>
+          </a:p>
+        </p:txBody>
+      </p:sp>
+      <p:sp>
+        <p:nvSpPr>
+          <p:cNvPr id="3" name="Content Placeholder 2">
+            <a:extLst>
+              <a:ext uri="{FF2B5EF4-FFF2-40B4-BE49-F238E27FC236}">
+                <a16:creationId xmlns:a16="http://schemas.microsoft.com/office/drawing/2014/main" id="{03CDAC2F-998A-9E7F-DD71-83F787124D43}"/>
+              </a:ext>
+            </a:extLst>
+          </p:cNvPr>
+          <p:cNvSpPr>
+            <a:spLocks noGrp="1"/>
+          </p:cNvSpPr>
+          <p:nvPr>
+            <p:ph sz="half" idx="1"/>
+          </p:nvPr>
+        </p:nvSpPr>
+        <p:spPr>
+          <a:xfrm>
+            <a:off x="714702" y="1954925"/>
+            <a:ext cx="9732581" cy="4086438"/>
+          </a:xfrm>
+        </p:spPr>
+        <p:txBody>
+          <a:bodyPr vert="horz" lIns="91440" tIns="45720" rIns="91440" bIns="45720" rtlCol="0">
+            <a:normAutofit/>
+          </a:bodyPr>
+          <a:lstStyle/>
+          <a:p>
+            <a:pPr marL="0" indent="0">
+              <a:buNone/>
+            </a:pPr>
+            <a:r>
+              <a:rPr lang="en-US" sz="2000" dirty="0">
+                <a:solidFill>
+                  <a:srgbClr val="FFFFFF"/>
+                </a:solidFill>
+                <a:latin typeface="ATT Aleck Sans" panose="020B0503020203020204" pitchFamily="34" charset="0"/>
+                <a:cs typeface="ATT Aleck Sans" panose="020B0503020203020204" pitchFamily="34" charset="0"/>
+              </a:rPr>
+              <a:t>In traditional OOP programming, when an object (e.g., a Computer) is created, it also instantiates its dependent classes (e.g., Processor, RAM instances):</a:t>
+            </a:r>
+          </a:p>
+          <a:p>
+            <a:pPr marL="0" indent="0"/>
+            <a:endParaRPr lang="en-US" sz="2000" dirty="0">
+              <a:solidFill>
+                <a:srgbClr val="FFFFFF"/>
+              </a:solidFill>
+              <a:latin typeface="ATT Aleck Sans" panose="020B0503020203020204" pitchFamily="34" charset="0"/>
+              <a:cs typeface="ATT Aleck Sans" panose="020B0503020203020204" pitchFamily="34" charset="0"/>
+            </a:endParaRPr>
+          </a:p>
+          <a:p>
+            <a:endParaRPr lang="en-US" sz="2000" dirty="0">
+              <a:solidFill>
+                <a:srgbClr val="FFFFFF"/>
+              </a:solidFill>
+              <a:latin typeface="ATT Aleck Sans" panose="020B0503020203020204" pitchFamily="34" charset="0"/>
+              <a:cs typeface="ATT Aleck Sans" panose="020B0503020203020204" pitchFamily="34" charset="0"/>
+            </a:endParaRPr>
+          </a:p>
+        </p:txBody>
+      </p:sp>
+      <p:sp>
+        <p:nvSpPr>
+          <p:cNvPr id="7" name="Content Placeholder 2">
+            <a:extLst>
+              <a:ext uri="{FF2B5EF4-FFF2-40B4-BE49-F238E27FC236}">
+                <a16:creationId xmlns:a16="http://schemas.microsoft.com/office/drawing/2014/main" id="{510CD3CA-7661-11B9-AF07-F39AF318C632}"/>
+              </a:ext>
+            </a:extLst>
+          </p:cNvPr>
+          <p:cNvSpPr txBox="1">
+            <a:spLocks/>
+          </p:cNvSpPr>
+          <p:nvPr/>
+        </p:nvSpPr>
+        <p:spPr>
+          <a:xfrm>
+            <a:off x="677333" y="2821899"/>
+            <a:ext cx="4184035" cy="974035"/>
+          </a:xfrm>
+          <a:prstGeom prst="rect">
+            <a:avLst/>
+          </a:prstGeom>
+        </p:spPr>
+        <p:txBody>
+          <a:bodyPr vert="horz" lIns="91440" tIns="45720" rIns="91440" bIns="45720" rtlCol="0">
+            <a:normAutofit/>
+          </a:bodyPr>
+          <a:lstStyle>
+            <a:lvl1pPr marL="342900" indent="-342900" algn="l" defTabSz="457200" rtl="0" eaLnBrk="1" latinLnBrk="0" hangingPunct="1">
+              <a:spcBef>
+                <a:spcPts val="1000"/>
+              </a:spcBef>
+              <a:spcAft>
+                <a:spcPts val="0"/>
+              </a:spcAft>
+              <a:buClr>
+                <a:schemeClr val="accent1"/>
+              </a:buClr>
+              <a:buSzPct val="80000"/>
+              <a:buFont typeface="Wingdings 3" charset="2"/>
+              <a:buChar char=""/>
+              <a:defRPr sz="1800" kern="1200">
+                <a:solidFill>
+                  <a:schemeClr val="tx1">
+                    <a:lumMod val="75000"/>
+                    <a:lumOff val="25000"/>
+                  </a:schemeClr>
+                </a:solidFill>
+                <a:latin typeface="+mn-lt"/>
+                <a:ea typeface="+mn-ea"/>
+                <a:cs typeface="+mn-cs"/>
+              </a:defRPr>
+            </a:lvl1pPr>
+            <a:lvl2pPr marL="742950" indent="-285750" algn="l" defTabSz="457200" rtl="0" eaLnBrk="1" latinLnBrk="0" hangingPunct="1">
+              <a:spcBef>
+                <a:spcPts val="1000"/>
+              </a:spcBef>
+              <a:spcAft>
+                <a:spcPts val="0"/>
+              </a:spcAft>
+              <a:buClr>
+                <a:schemeClr val="accent1"/>
+              </a:buClr>
+              <a:buSzPct val="80000"/>
+              <a:buFont typeface="Wingdings 3" charset="2"/>
+              <a:buChar char=""/>
+              <a:defRPr sz="1600" kern="1200">
+                <a:solidFill>
+                  <a:schemeClr val="tx1">
+                    <a:lumMod val="75000"/>
+                    <a:lumOff val="25000"/>
+                  </a:schemeClr>
+                </a:solidFill>
+                <a:latin typeface="+mn-lt"/>
+                <a:ea typeface="+mn-ea"/>
+                <a:cs typeface="+mn-cs"/>
+              </a:defRPr>
+            </a:lvl2pPr>
+            <a:lvl3pPr marL="1143000" indent="-228600" algn="l" defTabSz="457200" rtl="0" eaLnBrk="1" latinLnBrk="0" hangingPunct="1">
+              <a:spcBef>
+                <a:spcPts val="1000"/>
+              </a:spcBef>
+              <a:spcAft>
+                <a:spcPts val="0"/>
+              </a:spcAft>
+              <a:buClr>
+                <a:schemeClr val="accent1"/>
+              </a:buClr>
+              <a:buSzPct val="80000"/>
+              <a:buFont typeface="Wingdings 3" charset="2"/>
+              <a:buChar char=""/>
+              <a:defRPr sz="1400" kern="1200">
+                <a:solidFill>
+                  <a:schemeClr val="tx1">
+                    <a:lumMod val="75000"/>
+                    <a:lumOff val="25000"/>
+                  </a:schemeClr>
+                </a:solidFill>
+                <a:latin typeface="+mn-lt"/>
+                <a:ea typeface="+mn-ea"/>
+                <a:cs typeface="+mn-cs"/>
+              </a:defRPr>
+            </a:lvl3pPr>
+            <a:lvl4pPr marL="1600200" indent="-228600" algn="l" defTabSz="457200" rtl="0" eaLnBrk="1" latinLnBrk="0" hangingPunct="1">
+              <a:spcBef>
+                <a:spcPts val="1000"/>
+              </a:spcBef>
+              <a:spcAft>
+                <a:spcPts val="0"/>
+              </a:spcAft>
+              <a:buClr>
+                <a:schemeClr val="accent1"/>
+              </a:buClr>
+              <a:buSzPct val="80000"/>
+              <a:buFont typeface="Wingdings 3" charset="2"/>
+              <a:buChar char=""/>
+              <a:defRPr sz="1200" kern="1200">
+                <a:solidFill>
+                  <a:schemeClr val="tx1">
+                    <a:lumMod val="75000"/>
+                    <a:lumOff val="25000"/>
+                  </a:schemeClr>
+                </a:solidFill>
+                <a:latin typeface="+mn-lt"/>
+                <a:ea typeface="+mn-ea"/>
+                <a:cs typeface="+mn-cs"/>
+              </a:defRPr>
+            </a:lvl4pPr>
+            <a:lvl5pPr marL="2057400" indent="-228600" algn="l" defTabSz="457200" rtl="0" eaLnBrk="1" latinLnBrk="0" hangingPunct="1">
+              <a:spcBef>
+                <a:spcPts val="1000"/>
+              </a:spcBef>
+              <a:spcAft>
+                <a:spcPts val="0"/>
+              </a:spcAft>
+              <a:buClr>
+                <a:schemeClr val="accent1"/>
+              </a:buClr>
+              <a:buSzPct val="80000"/>
+              <a:buFont typeface="Wingdings 3" charset="2"/>
+              <a:buChar char=""/>
+              <a:defRPr sz="1200" kern="1200">
+                <a:solidFill>
+                  <a:schemeClr val="tx1">
+                    <a:lumMod val="75000"/>
+                    <a:lumOff val="25000"/>
+                  </a:schemeClr>
+                </a:solidFill>
+                <a:latin typeface="+mn-lt"/>
+                <a:ea typeface="+mn-ea"/>
+                <a:cs typeface="+mn-cs"/>
+              </a:defRPr>
+            </a:lvl5pPr>
+            <a:lvl6pPr marL="2514600" indent="-228600" algn="l" defTabSz="457200" rtl="0" eaLnBrk="1" latinLnBrk="0" hangingPunct="1">
+              <a:spcBef>
+                <a:spcPts val="1000"/>
+              </a:spcBef>
+              <a:spcAft>
+                <a:spcPts val="0"/>
+              </a:spcAft>
+              <a:buClr>
+                <a:schemeClr val="accent1"/>
+              </a:buClr>
+              <a:buSzPct val="80000"/>
+              <a:buFont typeface="Wingdings 3" charset="2"/>
+              <a:buChar char=""/>
+              <a:defRPr sz="1200" kern="1200">
+                <a:solidFill>
+                  <a:schemeClr val="tx1">
+                    <a:lumMod val="75000"/>
+                    <a:lumOff val="25000"/>
+                  </a:schemeClr>
+                </a:solidFill>
+                <a:latin typeface="+mn-lt"/>
+                <a:ea typeface="+mn-ea"/>
+                <a:cs typeface="+mn-cs"/>
+              </a:defRPr>
+            </a:lvl6pPr>
+            <a:lvl7pPr marL="2971800" indent="-228600" algn="l" defTabSz="457200" rtl="0" eaLnBrk="1" latinLnBrk="0" hangingPunct="1">
+              <a:spcBef>
+                <a:spcPts val="1000"/>
+              </a:spcBef>
+              <a:spcAft>
+                <a:spcPts val="0"/>
+              </a:spcAft>
+              <a:buClr>
+                <a:schemeClr val="accent1"/>
+              </a:buClr>
+              <a:buSzPct val="80000"/>
+              <a:buFont typeface="Wingdings 3" charset="2"/>
+              <a:buChar char=""/>
+              <a:defRPr sz="1200" kern="1200">
+                <a:solidFill>
+                  <a:schemeClr val="tx1">
+                    <a:lumMod val="75000"/>
+                    <a:lumOff val="25000"/>
+                  </a:schemeClr>
+                </a:solidFill>
+                <a:latin typeface="+mn-lt"/>
+                <a:ea typeface="+mn-ea"/>
+                <a:cs typeface="+mn-cs"/>
+              </a:defRPr>
+            </a:lvl7pPr>
+            <a:lvl8pPr marL="3429000" indent="-228600" algn="l" defTabSz="457200" rtl="0" eaLnBrk="1" latinLnBrk="0" hangingPunct="1">
+              <a:spcBef>
+                <a:spcPts val="1000"/>
+              </a:spcBef>
+              <a:spcAft>
+                <a:spcPts val="0"/>
+              </a:spcAft>
+              <a:buClr>
+                <a:schemeClr val="accent1"/>
+              </a:buClr>
+              <a:buSzPct val="80000"/>
+              <a:buFont typeface="Wingdings 3" charset="2"/>
+              <a:buChar char=""/>
+              <a:defRPr sz="1200" kern="1200">
+                <a:solidFill>
+                  <a:schemeClr val="tx1">
+                    <a:lumMod val="75000"/>
+                    <a:lumOff val="25000"/>
+                  </a:schemeClr>
+                </a:solidFill>
+                <a:latin typeface="+mn-lt"/>
+                <a:ea typeface="+mn-ea"/>
+                <a:cs typeface="+mn-cs"/>
+              </a:defRPr>
+            </a:lvl8pPr>
+            <a:lvl9pPr marL="3886200" indent="-228600" algn="l" defTabSz="457200" rtl="0" eaLnBrk="1" latinLnBrk="0" hangingPunct="1">
+              <a:spcBef>
+                <a:spcPts val="1000"/>
+              </a:spcBef>
+              <a:spcAft>
+                <a:spcPts val="0"/>
+              </a:spcAft>
+              <a:buClr>
+                <a:schemeClr val="accent1"/>
+              </a:buClr>
+              <a:buSzPct val="80000"/>
+              <a:buFont typeface="Wingdings 3" charset="2"/>
+              <a:buChar char=""/>
+              <a:defRPr sz="1200" kern="1200">
+                <a:solidFill>
+                  <a:schemeClr val="tx1">
+                    <a:lumMod val="75000"/>
+                    <a:lumOff val="25000"/>
+                  </a:schemeClr>
+                </a:solidFill>
+                <a:latin typeface="+mn-lt"/>
+                <a:ea typeface="+mn-ea"/>
+                <a:cs typeface="+mn-cs"/>
+              </a:defRPr>
+            </a:lvl9pPr>
+          </a:lstStyle>
+          <a:p>
+            <a:endParaRPr lang="en-IL" dirty="0"/>
+          </a:p>
+        </p:txBody>
+      </p:sp>
+      <p:pic>
+        <p:nvPicPr>
+          <p:cNvPr id="4" name="Picture 3">
+            <a:extLst>
+              <a:ext uri="{FF2B5EF4-FFF2-40B4-BE49-F238E27FC236}">
+                <a16:creationId xmlns:a16="http://schemas.microsoft.com/office/drawing/2014/main" id="{3C1C26D4-78CB-FC76-B716-3912090A6456}"/>
+              </a:ext>
+            </a:extLst>
+          </p:cNvPr>
+          <p:cNvPicPr>
+            <a:picLocks noChangeAspect="1"/>
+          </p:cNvPicPr>
+          <p:nvPr/>
+        </p:nvPicPr>
+        <p:blipFill>
+          <a:blip r:embed="rId2"/>
+          <a:stretch>
+            <a:fillRect/>
+          </a:stretch>
+        </p:blipFill>
+        <p:spPr>
+          <a:xfrm>
+            <a:off x="780392" y="2901832"/>
+            <a:ext cx="8962697" cy="3494348"/>
+          </a:xfrm>
+          <a:prstGeom prst="rect">
+            <a:avLst/>
+          </a:prstGeom>
+        </p:spPr>
+      </p:pic>
+    </p:spTree>
+    <p:extLst>
+      <p:ext uri="{BB962C8B-B14F-4D97-AF65-F5344CB8AC3E}">
+        <p14:creationId xmlns:p14="http://schemas.microsoft.com/office/powerpoint/2010/main" val="2255410467"/>
+      </p:ext>
+    </p:extLst>
+  </p:cSld>
+  <p:clrMapOvr>
+    <a:overrideClrMapping bg1="dk1" tx1="lt1" bg2="dk2" tx2="lt2" accent1="accent1" accent2="accent2" accent3="accent3" accent4="accent4" accent5="accent5" accent6="accent6" hlink="hlink" folHlink="folHlink"/>
+  </p:clrMapOvr>
+</p:sld>
+</file>
+
+<file path=ppt/slides/slide12.xml><?xml version="1.0" encoding="utf-8"?>
 <p:sld xmlns:a="http://schemas.openxmlformats.org/drawingml/2006/main" xmlns:r="http://schemas.openxmlformats.org/officeDocument/2006/relationships" xmlns:p="http://schemas.openxmlformats.org/presentationml/2006/main">
   <p:cSld>
     <p:spTree>
@@ -7439,6 +8050,306 @@
           <p:cNvPr id="2" name="Title 1">
             <a:extLst>
               <a:ext uri="{FF2B5EF4-FFF2-40B4-BE49-F238E27FC236}">
+                <a16:creationId xmlns:a16="http://schemas.microsoft.com/office/drawing/2014/main" id="{4F6F5D9E-229E-E0D1-DCAC-8CEEA3631556}"/>
+              </a:ext>
+            </a:extLst>
+          </p:cNvPr>
+          <p:cNvSpPr>
+            <a:spLocks noGrp="1"/>
+          </p:cNvSpPr>
+          <p:nvPr>
+            <p:ph type="title"/>
+          </p:nvPr>
+        </p:nvSpPr>
+        <p:spPr>
+          <a:xfrm>
+            <a:off x="509169" y="199696"/>
+            <a:ext cx="8596668" cy="1320800"/>
+          </a:xfrm>
+        </p:spPr>
+        <p:txBody>
+          <a:bodyPr/>
+          <a:lstStyle/>
+          <a:p>
+            <a:r>
+              <a:rPr lang="en-IL" b="1" dirty="0">
+                <a:latin typeface="ATT Aleck Sans" panose="020B0503020203020204" pitchFamily="34" charset="0"/>
+                <a:cs typeface="ATT Aleck Sans" panose="020B0503020203020204" pitchFamily="34" charset="0"/>
+              </a:rPr>
+              <a:t>What could be the problems with this implementation?</a:t>
+            </a:r>
+          </a:p>
+        </p:txBody>
+      </p:sp>
+      <p:sp>
+        <p:nvSpPr>
+          <p:cNvPr id="3" name="Content Placeholder 2">
+            <a:extLst>
+              <a:ext uri="{FF2B5EF4-FFF2-40B4-BE49-F238E27FC236}">
+                <a16:creationId xmlns:a16="http://schemas.microsoft.com/office/drawing/2014/main" id="{3F6665E5-7BFC-8A6E-C923-33299B2CB606}"/>
+              </a:ext>
+            </a:extLst>
+          </p:cNvPr>
+          <p:cNvSpPr>
+            <a:spLocks noGrp="1"/>
+          </p:cNvSpPr>
+          <p:nvPr>
+            <p:ph sz="half" idx="1"/>
+          </p:nvPr>
+        </p:nvSpPr>
+        <p:spPr>
+          <a:xfrm>
+            <a:off x="572230" y="1572010"/>
+            <a:ext cx="9296983" cy="3880772"/>
+          </a:xfrm>
+        </p:spPr>
+        <p:txBody>
+          <a:bodyPr>
+            <a:noAutofit/>
+          </a:bodyPr>
+          <a:lstStyle/>
+          <a:p>
+            <a:pPr>
+              <a:lnSpc>
+                <a:spcPct val="160000"/>
+              </a:lnSpc>
+            </a:pPr>
+            <a:r>
+              <a:rPr lang="en-IL" sz="2200" dirty="0">
+                <a:latin typeface="ATT Aleck Sans" panose="020B0503020203020204" pitchFamily="34" charset="0"/>
+                <a:cs typeface="ATT Aleck Sans" panose="020B0503020203020204" pitchFamily="34" charset="0"/>
+              </a:rPr>
+              <a:t>Tight coupling </a:t>
+            </a:r>
+            <a:r>
+              <a:rPr lang="en-IL" sz="2200">
+                <a:latin typeface="ATT Aleck Sans" panose="020B0503020203020204" pitchFamily="34" charset="0"/>
+                <a:cs typeface="ATT Aleck Sans" panose="020B0503020203020204" pitchFamily="34" charset="0"/>
+              </a:rPr>
+              <a:t>between Computer</a:t>
+            </a:r>
+            <a:r>
+              <a:rPr lang="en-IL" sz="2200" dirty="0">
+                <a:latin typeface="ATT Aleck Sans" panose="020B0503020203020204" pitchFamily="34" charset="0"/>
+                <a:cs typeface="ATT Aleck Sans" panose="020B0503020203020204" pitchFamily="34" charset="0"/>
+              </a:rPr>
+              <a:t> and its components:</a:t>
+            </a:r>
+          </a:p>
+          <a:p>
+            <a:pPr>
+              <a:lnSpc>
+                <a:spcPct val="160000"/>
+              </a:lnSpc>
+            </a:pPr>
+            <a:r>
+              <a:rPr lang="en-IL" sz="2200" dirty="0">
+                <a:latin typeface="ATT Aleck Sans" panose="020B0503020203020204" pitchFamily="34" charset="0"/>
+                <a:cs typeface="ATT Aleck Sans" panose="020B0503020203020204" pitchFamily="34" charset="0"/>
+              </a:rPr>
+              <a:t>We </a:t>
+            </a:r>
+            <a:r>
+              <a:rPr lang="en-IL" sz="2200">
+                <a:latin typeface="ATT Aleck Sans" panose="020B0503020203020204" pitchFamily="34" charset="0"/>
+                <a:cs typeface="ATT Aleck Sans" panose="020B0503020203020204" pitchFamily="34" charset="0"/>
+              </a:rPr>
+              <a:t>must</a:t>
+            </a:r>
+            <a:r>
+              <a:rPr lang="en-IL" sz="2200" dirty="0">
+                <a:latin typeface="ATT Aleck Sans" panose="020B0503020203020204" pitchFamily="34" charset="0"/>
+                <a:cs typeface="ATT Aleck Sans" panose="020B0503020203020204" pitchFamily="34" charset="0"/>
+              </a:rPr>
+              <a:t> know how to create every component and which </a:t>
+            </a:r>
+            <a:r>
+              <a:rPr lang="en-IL" sz="2200">
+                <a:latin typeface="ATT Aleck Sans" panose="020B0503020203020204" pitchFamily="34" charset="0"/>
+                <a:cs typeface="ATT Aleck Sans" panose="020B0503020203020204" pitchFamily="34" charset="0"/>
+              </a:rPr>
+              <a:t>constructor </a:t>
+            </a:r>
+            <a:r>
+              <a:rPr lang="en-IL" sz="2200" dirty="0">
+                <a:latin typeface="ATT Aleck Sans" panose="020B0503020203020204" pitchFamily="34" charset="0"/>
+                <a:cs typeface="ATT Aleck Sans" panose="020B0503020203020204" pitchFamily="34" charset="0"/>
+              </a:rPr>
+              <a:t>parameters to </a:t>
+            </a:r>
+            <a:r>
+              <a:rPr lang="en-IL" sz="2200">
+                <a:latin typeface="ATT Aleck Sans" panose="020B0503020203020204" pitchFamily="34" charset="0"/>
+                <a:cs typeface="ATT Aleck Sans" panose="020B0503020203020204" pitchFamily="34" charset="0"/>
+              </a:rPr>
+              <a:t>pass</a:t>
+            </a:r>
+            <a:r>
+              <a:rPr lang="en-IL" sz="2200" dirty="0">
+                <a:latin typeface="ATT Aleck Sans" panose="020B0503020203020204" pitchFamily="34" charset="0"/>
+                <a:cs typeface="ATT Aleck Sans" panose="020B0503020203020204" pitchFamily="34" charset="0"/>
+              </a:rPr>
+              <a:t>.</a:t>
+            </a:r>
+            <a:endParaRPr lang="en-IL" sz="2200">
+              <a:latin typeface="ATT Aleck Sans" panose="020B0503020203020204" pitchFamily="34" charset="0"/>
+              <a:cs typeface="ATT Aleck Sans" panose="020B0503020203020204" pitchFamily="34" charset="0"/>
+            </a:endParaRPr>
+          </a:p>
+          <a:p>
+            <a:pPr>
+              <a:lnSpc>
+                <a:spcPct val="160000"/>
+              </a:lnSpc>
+            </a:pPr>
+            <a:r>
+              <a:rPr lang="en-IL" sz="2200">
+                <a:latin typeface="ATT Aleck Sans" panose="020B0503020203020204" pitchFamily="34" charset="0"/>
+                <a:cs typeface="ATT Aleck Sans" panose="020B0503020203020204" pitchFamily="34" charset="0"/>
+              </a:rPr>
+              <a:t>A Computer</a:t>
+            </a:r>
+            <a:r>
+              <a:rPr lang="en-IL" sz="2200" dirty="0">
+                <a:latin typeface="ATT Aleck Sans" panose="020B0503020203020204" pitchFamily="34" charset="0"/>
+                <a:cs typeface="ATT Aleck Sans" panose="020B0503020203020204" pitchFamily="34" charset="0"/>
+              </a:rPr>
+              <a:t> with a different </a:t>
+            </a:r>
+            <a:r>
+              <a:rPr lang="en-IL" sz="2200">
+                <a:latin typeface="ATT Aleck Sans" panose="020B0503020203020204" pitchFamily="34" charset="0"/>
+                <a:cs typeface="ATT Aleck Sans" panose="020B0503020203020204" pitchFamily="34" charset="0"/>
+              </a:rPr>
+              <a:t>Processor requires yet </a:t>
+            </a:r>
+            <a:r>
+              <a:rPr lang="en-IL" sz="2200" dirty="0">
+                <a:latin typeface="ATT Aleck Sans" panose="020B0503020203020204" pitchFamily="34" charset="0"/>
+                <a:cs typeface="ATT Aleck Sans" panose="020B0503020203020204" pitchFamily="34" charset="0"/>
+              </a:rPr>
+              <a:t>another </a:t>
+            </a:r>
+            <a:r>
+              <a:rPr lang="en-IL" sz="2200">
+                <a:latin typeface="ATT Aleck Sans" panose="020B0503020203020204" pitchFamily="34" charset="0"/>
+                <a:cs typeface="ATT Aleck Sans" panose="020B0503020203020204" pitchFamily="34" charset="0"/>
+              </a:rPr>
+              <a:t>Computer </a:t>
+            </a:r>
+            <a:r>
+              <a:rPr lang="en-IL" sz="2200" dirty="0">
+                <a:latin typeface="ATT Aleck Sans" panose="020B0503020203020204" pitchFamily="34" charset="0"/>
+                <a:cs typeface="ATT Aleck Sans" panose="020B0503020203020204" pitchFamily="34" charset="0"/>
+              </a:rPr>
+              <a:t>class.</a:t>
+            </a:r>
+            <a:endParaRPr lang="en-IL" sz="2200">
+              <a:latin typeface="ATT Aleck Sans" panose="020B0503020203020204" pitchFamily="34" charset="0"/>
+              <a:cs typeface="ATT Aleck Sans" panose="020B0503020203020204" pitchFamily="34" charset="0"/>
+            </a:endParaRPr>
+          </a:p>
+          <a:p>
+            <a:pPr>
+              <a:lnSpc>
+                <a:spcPct val="160000"/>
+              </a:lnSpc>
+            </a:pPr>
+            <a:r>
+              <a:rPr lang="en-IL" sz="2200">
+                <a:latin typeface="ATT Aleck Sans" panose="020B0503020203020204" pitchFamily="34" charset="0"/>
+                <a:cs typeface="ATT Aleck Sans" panose="020B0503020203020204" pitchFamily="34" charset="0"/>
+              </a:rPr>
+              <a:t>Testing is hard - there is no way to </a:t>
+            </a:r>
+            <a:r>
+              <a:rPr lang="en-IL" sz="2200" dirty="0">
+                <a:latin typeface="ATT Aleck Sans" panose="020B0503020203020204" pitchFamily="34" charset="0"/>
+                <a:cs typeface="ATT Aleck Sans" panose="020B0503020203020204" pitchFamily="34" charset="0"/>
+              </a:rPr>
+              <a:t>inject mocks</a:t>
+            </a:r>
+            <a:r>
+              <a:rPr lang="en-IL" sz="2200">
+                <a:latin typeface="ATT Aleck Sans" panose="020B0503020203020204" pitchFamily="34" charset="0"/>
+                <a:cs typeface="ATT Aleck Sans" panose="020B0503020203020204" pitchFamily="34" charset="0"/>
+              </a:rPr>
+              <a:t>.</a:t>
+            </a:r>
+          </a:p>
+          <a:p>
+            <a:pPr>
+              <a:lnSpc>
+                <a:spcPct val="160000"/>
+              </a:lnSpc>
+            </a:pPr>
+            <a:r>
+              <a:rPr lang="en-IL" sz="2200">
+                <a:latin typeface="ATT Aleck Sans" panose="020B0503020203020204" pitchFamily="34" charset="0"/>
+                <a:cs typeface="ATT Aleck Sans" panose="020B0503020203020204" pitchFamily="34" charset="0"/>
+              </a:rPr>
+              <a:t>Poor polymorphism.</a:t>
+            </a:r>
+            <a:endParaRPr lang="en-IL" sz="2200" dirty="0">
+              <a:latin typeface="ATT Aleck Sans" panose="020B0503020203020204" pitchFamily="34" charset="0"/>
+              <a:cs typeface="ATT Aleck Sans" panose="020B0503020203020204" pitchFamily="34" charset="0"/>
+            </a:endParaRPr>
+          </a:p>
+          <a:p>
+            <a:pPr>
+              <a:lnSpc>
+                <a:spcPct val="160000"/>
+              </a:lnSpc>
+            </a:pPr>
+            <a:r>
+              <a:rPr lang="en-IL" sz="2200" dirty="0">
+                <a:latin typeface="ATT Aleck Sans" panose="020B0503020203020204" pitchFamily="34" charset="0"/>
+                <a:cs typeface="ATT Aleck Sans" panose="020B0503020203020204" pitchFamily="34" charset="0"/>
+              </a:rPr>
+              <a:t>Leads to implementation-based design.</a:t>
+            </a:r>
+            <a:endParaRPr lang="en-IL" sz="2200">
+              <a:latin typeface="ATT Aleck Sans" panose="020B0503020203020204" pitchFamily="34" charset="0"/>
+              <a:cs typeface="ATT Aleck Sans" panose="020B0503020203020204" pitchFamily="34" charset="0"/>
+            </a:endParaRPr>
+          </a:p>
+        </p:txBody>
+      </p:sp>
+    </p:spTree>
+    <p:extLst>
+      <p:ext uri="{BB962C8B-B14F-4D97-AF65-F5344CB8AC3E}">
+        <p14:creationId xmlns:p14="http://schemas.microsoft.com/office/powerpoint/2010/main" val="4238028326"/>
+      </p:ext>
+    </p:extLst>
+  </p:cSld>
+  <p:clrMapOvr>
+    <a:masterClrMapping/>
+  </p:clrMapOvr>
+</p:sld>
+</file>
+
+<file path=ppt/slides/slide13.xml><?xml version="1.0" encoding="utf-8"?>
+<p:sld xmlns:a="http://schemas.openxmlformats.org/drawingml/2006/main" xmlns:r="http://schemas.openxmlformats.org/officeDocument/2006/relationships" xmlns:p="http://schemas.openxmlformats.org/presentationml/2006/main">
+  <p:cSld>
+    <p:spTree>
+      <p:nvGrpSpPr>
+        <p:cNvPr id="1" name=""/>
+        <p:cNvGrpSpPr/>
+        <p:nvPr/>
+      </p:nvGrpSpPr>
+      <p:grpSpPr>
+        <a:xfrm>
+          <a:off x="0" y="0"/>
+          <a:ext cx="0" cy="0"/>
+          <a:chOff x="0" y="0"/>
+          <a:chExt cx="0" cy="0"/>
+        </a:xfrm>
+      </p:grpSpPr>
+      <p:sp>
+        <p:nvSpPr>
+          <p:cNvPr id="2" name="Title 1">
+            <a:extLst>
+              <a:ext uri="{FF2B5EF4-FFF2-40B4-BE49-F238E27FC236}">
                 <a16:creationId xmlns:a16="http://schemas.microsoft.com/office/drawing/2014/main" id="{CB5E4EF4-4CDB-B5BC-9E3C-1E76189F1E16}"/>
               </a:ext>
             </a:extLst>
@@ -7511,60 +8422,28 @@
               <a:buNone/>
             </a:pPr>
             <a:r>
-              <a:rPr lang="en-US" dirty="0">
+              <a:rPr lang="en-US">
                 <a:latin typeface="ATT Aleck Sans" panose="020B0503020203020204" pitchFamily="34" charset="0"/>
                 <a:cs typeface="ATT Aleck Sans" panose="020B0503020203020204" pitchFamily="34" charset="0"/>
               </a:rPr>
-              <a:t>We </a:t>
-            </a:r>
-            <a:r>
-              <a:rPr lang="en-IL" dirty="0">
+              <a:t>What we gained: control of creating dependent class objects is inverted to the Factory.</a:t>
+            </a:r>
+          </a:p>
+          <a:p>
+            <a:pPr marL="0" indent="0">
+              <a:buNone/>
+            </a:pPr>
+            <a:r>
+              <a:rPr lang="en-US">
                 <a:latin typeface="ATT Aleck Sans" panose="020B0503020203020204" pitchFamily="34" charset="0"/>
                 <a:cs typeface="ATT Aleck Sans" panose="020B0503020203020204" pitchFamily="34" charset="0"/>
               </a:rPr>
-              <a:t>have inverted the control of creating dependent classs objects to the Factory.</a:t>
-            </a:r>
-            <a:br>
-              <a:rPr lang="en-IL" dirty="0">
-                <a:latin typeface="ATT Aleck Sans" panose="020B0503020203020204" pitchFamily="34" charset="0"/>
-                <a:cs typeface="ATT Aleck Sans" panose="020B0503020203020204" pitchFamily="34" charset="0"/>
-              </a:rPr>
-            </a:br>
-            <a:r>
-              <a:rPr lang="en-IL" dirty="0">
-                <a:latin typeface="ATT Aleck Sans" panose="020B0503020203020204" pitchFamily="34" charset="0"/>
-                <a:cs typeface="ATT Aleck Sans" panose="020B0503020203020204" pitchFamily="34" charset="0"/>
-              </a:rPr>
-              <a:t>However, the </a:t>
-            </a:r>
-            <a:r>
-              <a:rPr lang="en-IL" dirty="0">
-                <a:latin typeface="Consolas" panose="020B0609020204030204" pitchFamily="49" charset="0"/>
-                <a:cs typeface="Consolas" panose="020B0609020204030204" pitchFamily="49" charset="0"/>
-              </a:rPr>
-              <a:t>Computer</a:t>
-            </a:r>
-            <a:r>
-              <a:rPr lang="en-IL" dirty="0">
-                <a:latin typeface="ATT Aleck Sans" panose="020B0503020203020204" pitchFamily="34" charset="0"/>
-                <a:cs typeface="ATT Aleck Sans" panose="020B0503020203020204" pitchFamily="34" charset="0"/>
-              </a:rPr>
-              <a:t> class uses the concrete </a:t>
-            </a:r>
-            <a:r>
-              <a:rPr lang="en-IL" dirty="0">
-                <a:latin typeface="Consolas" panose="020B0609020204030204" pitchFamily="49" charset="0"/>
-                <a:cs typeface="Consolas" panose="020B0609020204030204" pitchFamily="49" charset="0"/>
-              </a:rPr>
-              <a:t>GraphicCardFactory</a:t>
-            </a:r>
-            <a:r>
-              <a:rPr lang="en-IL" dirty="0">
-                <a:latin typeface="ATT Aleck Sans" panose="020B0503020203020204" pitchFamily="34" charset="0"/>
-                <a:cs typeface="ATT Aleck Sans" panose="020B0503020203020204" pitchFamily="34" charset="0"/>
-              </a:rPr>
-              <a:t> class, so we have not achieved fully loosely coupled classes.</a:t>
-            </a:r>
+              <a:t>What's still wrong: Computer still uses the concrete GraphicCardFactory class, so the classes are not fully loosely coupled.</a:t>
+            </a:r>
+            <a:endParaRPr lang="en-IL" dirty="0">
+              <a:latin typeface="ATT Aleck Sans" panose="020B0503020203020204" pitchFamily="34" charset="0"/>
+              <a:cs typeface="ATT Aleck Sans" panose="020B0503020203020204" pitchFamily="34" charset="0"/>
+            </a:endParaRPr>
           </a:p>
         </p:txBody>
       </p:sp>
@@ -7611,7 +8490,7 @@
 </p:sld>
 </file>
 
-<file path=ppt/slides/slide12.xml><?xml version="1.0" encoding="utf-8"?>
+<file path=ppt/slides/slide14.xml><?xml version="1.0" encoding="utf-8"?>
 <p:sld xmlns:a="http://schemas.openxmlformats.org/drawingml/2006/main" xmlns:r="http://schemas.openxmlformats.org/officeDocument/2006/relationships" xmlns:p="http://schemas.openxmlformats.org/presentationml/2006/main">
   <p:cSld>
     <p:bg>
@@ -7708,7 +8587,7 @@
                 <a:latin typeface="ATT Aleck Sans" panose="020B0503020203020204" pitchFamily="34" charset="0"/>
                 <a:cs typeface="ATT Aleck Sans" panose="020B0503020203020204" pitchFamily="34" charset="0"/>
               </a:rPr>
-              <a:t>A design pattern used to manage dependencies between objects. </a:t>
+              <a:t>A design pattern used to manage dependencies between objects.</a:t>
             </a:r>
           </a:p>
           <a:p>
@@ -7723,7 +8602,21 @@
                 <a:latin typeface="ATT Aleck Sans" panose="020B0503020203020204" pitchFamily="34" charset="0"/>
                 <a:cs typeface="ATT Aleck Sans" panose="020B0503020203020204" pitchFamily="34" charset="0"/>
               </a:rPr>
-              <a:t>It allows an object to receive other objects that it depends on, rather than creating them itself. </a:t>
+              <a:t>It allows an object to receive </a:t>
+            </a:r>
+            <a:r>
+              <a:rPr lang="en-US" sz="2400">
+                <a:latin typeface="ATT Aleck Sans" panose="020B0503020203020204" pitchFamily="34" charset="0"/>
+                <a:cs typeface="ATT Aleck Sans" panose="020B0503020203020204" pitchFamily="34" charset="0"/>
+              </a:rPr>
+              <a:t>the </a:t>
+            </a:r>
+            <a:r>
+              <a:rPr lang="en-US" sz="2400" dirty="0">
+                <a:latin typeface="ATT Aleck Sans" panose="020B0503020203020204" pitchFamily="34" charset="0"/>
+                <a:cs typeface="ATT Aleck Sans" panose="020B0503020203020204" pitchFamily="34" charset="0"/>
+              </a:rPr>
+              <a:t>objects it depends on, rather than creating them itself.</a:t>
             </a:r>
           </a:p>
           <a:p>
@@ -7738,8 +8631,31 @@
                 <a:latin typeface="ATT Aleck Sans" panose="020B0503020203020204" pitchFamily="34" charset="0"/>
                 <a:cs typeface="ATT Aleck Sans" panose="020B0503020203020204" pitchFamily="34" charset="0"/>
               </a:rPr>
-              <a:t>This promotes a more modular, testable, and maintainable codebase. </a:t>
-            </a:r>
+              <a:t>This promotes a more modular, testable and maintainable codebase.</a:t>
+            </a:r>
+            <a:endParaRPr lang="en-US" sz="2400">
+              <a:latin typeface="ATT Aleck Sans" panose="020B0503020203020204" pitchFamily="34" charset="0"/>
+              <a:cs typeface="ATT Aleck Sans" panose="020B0503020203020204" pitchFamily="34" charset="0"/>
+            </a:endParaRPr>
+          </a:p>
+          <a:p>
+            <a:pPr marL="0" indent="0">
+              <a:lnSpc>
+                <a:spcPct val="150000"/>
+              </a:lnSpc>
+              <a:buNone/>
+            </a:pPr>
+            <a:r>
+              <a:rPr lang="en-US" sz="2400">
+                <a:latin typeface="ATT Aleck Sans" panose="020B0503020203020204" pitchFamily="34" charset="0"/>
+                <a:cs typeface="ATT Aleck Sans" panose="020B0503020203020204" pitchFamily="34" charset="0"/>
+              </a:rPr>
+              <a:t>DI is one of the SOLID object-oriented principles.</a:t>
+            </a:r>
+            <a:endParaRPr lang="en-US" sz="2400" dirty="0">
+              <a:latin typeface="ATT Aleck Sans" panose="020B0503020203020204" pitchFamily="34" charset="0"/>
+              <a:cs typeface="ATT Aleck Sans" panose="020B0503020203020204" pitchFamily="34" charset="0"/>
+            </a:endParaRPr>
           </a:p>
         </p:txBody>
       </p:sp>
@@ -7756,7 +8672,7 @@
 </p:sld>
 </file>
 
-<file path=ppt/slides/slide13.xml><?xml version="1.0" encoding="utf-8"?>
+<file path=ppt/slides/slide15.xml><?xml version="1.0" encoding="utf-8"?>
 <p:sld xmlns:a="http://schemas.openxmlformats.org/drawingml/2006/main" xmlns:r="http://schemas.openxmlformats.org/officeDocument/2006/relationships" xmlns:p="http://schemas.openxmlformats.org/presentationml/2006/main">
   <p:cSld>
     <p:spTree>
@@ -7802,12 +8718,16 @@
           <a:lstStyle/>
           <a:p>
             <a:r>
-              <a:rPr lang="en-IL" b="1" dirty="0">
+              <a:rPr lang="en-IL" b="1">
                 <a:latin typeface="ATT Aleck Sans" panose="020B0503020203020204" pitchFamily="34" charset="0"/>
                 <a:cs typeface="ATT Aleck Sans" panose="020B0503020203020204" pitchFamily="34" charset="0"/>
               </a:rPr>
-              <a:t>Dependency Injection</a:t>
-            </a:r>
+              <a:t>DI applied: the Computer example</a:t>
+            </a:r>
+            <a:endParaRPr lang="en-IL" b="1" dirty="0">
+              <a:latin typeface="ATT Aleck Sans" panose="020B0503020203020204" pitchFamily="34" charset="0"/>
+              <a:cs typeface="ATT Aleck Sans" panose="020B0503020203020204" pitchFamily="34" charset="0"/>
+            </a:endParaRPr>
           </a:p>
         </p:txBody>
       </p:sp>
@@ -7982,6 +8902,255 @@
 </p:sld>
 </file>
 
+<file path=ppt/slides/slide16.xml><?xml version="1.0" encoding="utf-8"?>
+<p:sld xmlns:a="http://schemas.openxmlformats.org/drawingml/2006/main" xmlns:r="http://schemas.openxmlformats.org/officeDocument/2006/relationships" xmlns:p="http://schemas.openxmlformats.org/presentationml/2006/main">
+  <p:cSld>
+    <p:spTree>
+      <p:nvGrpSpPr>
+        <p:cNvPr id="1" name=""/>
+        <p:cNvGrpSpPr/>
+        <p:nvPr/>
+      </p:nvGrpSpPr>
+      <p:grpSpPr>
+        <a:xfrm>
+          <a:off x="0" y="0"/>
+          <a:ext cx="0" cy="0"/>
+          <a:chOff x="0" y="0"/>
+          <a:chExt cx="0" cy="0"/>
+        </a:xfrm>
+      </p:grpSpPr>
+      <p:sp>
+        <p:nvSpPr>
+          <p:cNvPr id="2" name="Title 1"/>
+          <p:cNvSpPr>
+            <a:spLocks noGrp="1"/>
+          </p:cNvSpPr>
+          <p:nvPr>
+            <p:ph type="title"/>
+          </p:nvPr>
+        </p:nvSpPr>
+        <p:spPr>
+          <a:xfrm>
+            <a:off x="609600" y="365760"/>
+            <a:ext cx="10972800" cy="850000"/>
+          </a:xfrm>
+        </p:spPr>
+        <p:txBody>
+          <a:bodyPr>
+            <a:normAutofit/>
+          </a:bodyPr>
+          <a:lstStyle/>
+          <a:p>
+            <a:r>
+              <a:rPr lang="en-US" sz="3200" b="1"/>
+              <a:t>Next steps</a:t>
+            </a:r>
+          </a:p>
+        </p:txBody>
+      </p:sp>
+      <p:sp>
+        <p:nvSpPr>
+          <p:cNvPr id="30" name="Card Clone the repo"/>
+          <p:cNvSpPr/>
+          <p:nvPr/>
+        </p:nvSpPr>
+        <p:spPr>
+          <a:xfrm>
+            <a:off x="900000" y="2100000"/>
+            <a:ext cx="3400000" cy="2200000"/>
+          </a:xfrm>
+          <a:prstGeom prst="roundRect">
+            <a:avLst>
+              <a:gd name="adj" fmla="val 10000"/>
+            </a:avLst>
+          </a:prstGeom>
+          <a:solidFill>
+            <a:schemeClr val="bg1"/>
+          </a:solidFill>
+          <a:ln w="25400">
+            <a:solidFill>
+              <a:schemeClr val="accent1"/>
+            </a:solidFill>
+          </a:ln>
+        </p:spPr>
+        <p:txBody>
+          <a:bodyPr lIns="182880" tIns="91440" rIns="137160" bIns="91440" anchor="ctr">
+            <a:normAutofit/>
+          </a:bodyPr>
+          <a:lstStyle/>
+          <a:p>
+            <a:r>
+              <a:rPr lang="en-US" sz="1600" b="1">
+                <a:solidFill>
+                  <a:schemeClr val="accent1"/>
+                </a:solidFill>
+              </a:rPr>
+              <a:t>Clone the repo</a:t>
+            </a:r>
+          </a:p>
+          <a:p>
+            <a:r>
+              <a:rPr lang="en-US" sz="1200">
+                <a:solidFill>
+                  <a:schemeClr val="tx1"/>
+                </a:solidFill>
+              </a:rPr>
+              <a:t>The README drives the whole workshop - start there.</a:t>
+            </a:r>
+          </a:p>
+        </p:txBody>
+      </p:sp>
+      <p:sp>
+        <p:nvSpPr>
+          <p:cNvPr id="31" name="Card Work branch by branch"/>
+          <p:cNvSpPr/>
+          <p:nvPr/>
+        </p:nvSpPr>
+        <p:spPr>
+          <a:xfrm>
+            <a:off x="4600000" y="2100000"/>
+            <a:ext cx="3400000" cy="2200000"/>
+          </a:xfrm>
+          <a:prstGeom prst="roundRect">
+            <a:avLst>
+              <a:gd name="adj" fmla="val 10000"/>
+            </a:avLst>
+          </a:prstGeom>
+          <a:solidFill>
+            <a:schemeClr val="bg1"/>
+          </a:solidFill>
+          <a:ln w="25400">
+            <a:solidFill>
+              <a:schemeClr val="accent3"/>
+            </a:solidFill>
+          </a:ln>
+        </p:spPr>
+        <p:txBody>
+          <a:bodyPr lIns="182880" tIns="91440" rIns="137160" bIns="91440" anchor="ctr">
+            <a:normAutofit/>
+          </a:bodyPr>
+          <a:lstStyle/>
+          <a:p>
+            <a:r>
+              <a:rPr lang="en-US" sz="1600" b="1">
+                <a:solidFill>
+                  <a:schemeClr val="accent3"/>
+                </a:solidFill>
+              </a:rPr>
+              <a:t>Work branch by branch</a:t>
+            </a:r>
+          </a:p>
+          <a:p>
+            <a:r>
+              <a:rPr lang="en-US" sz="1200">
+                <a:solidFill>
+                  <a:schemeClr val="tx1"/>
+                </a:solidFill>
+              </a:rPr>
+              <a:t>Every topic has its own branch; use the repo as a reference later.</a:t>
+            </a:r>
+          </a:p>
+        </p:txBody>
+      </p:sp>
+      <p:sp>
+        <p:nvSpPr>
+          <p:cNvPr id="32" name="Card Join the support group"/>
+          <p:cNvSpPr/>
+          <p:nvPr/>
+        </p:nvSpPr>
+        <p:spPr>
+          <a:xfrm>
+            <a:off x="8300000" y="2100000"/>
+            <a:ext cx="3400000" cy="2200000"/>
+          </a:xfrm>
+          <a:prstGeom prst="roundRect">
+            <a:avLst>
+              <a:gd name="adj" fmla="val 10000"/>
+            </a:avLst>
+          </a:prstGeom>
+          <a:solidFill>
+            <a:schemeClr val="bg1"/>
+          </a:solidFill>
+          <a:ln w="25400">
+            <a:solidFill>
+              <a:schemeClr val="accent4"/>
+            </a:solidFill>
+          </a:ln>
+        </p:spPr>
+        <p:txBody>
+          <a:bodyPr lIns="182880" tIns="91440" rIns="137160" bIns="91440" anchor="ctr">
+            <a:normAutofit/>
+          </a:bodyPr>
+          <a:lstStyle/>
+          <a:p>
+            <a:r>
+              <a:rPr lang="en-US" sz="1600" b="1">
+                <a:solidFill>
+                  <a:schemeClr val="accent4"/>
+                </a:solidFill>
+              </a:rPr>
+              <a:t>Join the support group</a:t>
+            </a:r>
+          </a:p>
+          <a:p>
+            <a:r>
+              <a:rPr lang="en-US" sz="1200">
+                <a:solidFill>
+                  <a:schemeClr val="tx1"/>
+                </a:solidFill>
+              </a:rPr>
+              <a:t>Bring your questions after the workshop - the group stays open.</a:t>
+            </a:r>
+          </a:p>
+        </p:txBody>
+      </p:sp>
+      <p:sp>
+        <p:nvSpPr>
+          <p:cNvPr id="40" name="Thanks"/>
+          <p:cNvSpPr/>
+          <p:nvPr/>
+        </p:nvSpPr>
+        <p:spPr>
+          <a:xfrm>
+            <a:off x="900000" y="4900000"/>
+            <a:ext cx="10300000" cy="700000"/>
+          </a:xfrm>
+          <a:prstGeom prst="rect">
+            <a:avLst/>
+          </a:prstGeom>
+          <a:noFill/>
+        </p:spPr>
+        <p:txBody>
+          <a:bodyPr anchor="ctr">
+            <a:normAutofit/>
+          </a:bodyPr>
+          <a:lstStyle/>
+          <a:p>
+            <a:pPr algn="ctr"/>
+            <a:r>
+              <a:rPr lang="en-US" sz="2000" b="1">
+                <a:solidFill>
+                  <a:schemeClr val="accent1"/>
+                </a:solidFill>
+              </a:rPr>
+              <a:t>Thanks - questions?</a:t>
+            </a:r>
+          </a:p>
+        </p:txBody>
+      </p:sp>
+    </p:spTree>
+    <p:extLst>
+      <p:ext uri="{BB962C8B-B14F-4D97-AF65-F5344CB8AC3E}">
+        <p14:creationId xmlns:p14="http://schemas.microsoft.com/office/powerpoint/2010/main" val="1257414665"/>
+      </p:ext>
+    </p:extLst>
+  </p:cSld>
+  <p:clrMapOvr>
+    <a:masterClrMapping/>
+  </p:clrMapOvr>
+</p:sld>
+</file>
+
 <file path=ppt/slides/slide2.xml><?xml version="1.0" encoding="utf-8"?>
 <p:sld xmlns:a="http://schemas.openxmlformats.org/drawingml/2006/main" xmlns:r="http://schemas.openxmlformats.org/officeDocument/2006/relationships" xmlns:p="http://schemas.openxmlformats.org/presentationml/2006/main">
   <p:cSld>
@@ -8042,7 +9211,7 @@
               <a:buNone/>
             </a:pPr>
             <a:r>
-              <a:rPr lang="en-US" b="1" dirty="0">
+              <a:rPr lang="en-US" b="1">
                 <a:latin typeface="ATT Aleck Sans" panose="020B0503020203020204" pitchFamily="34" charset="0"/>
                 <a:cs typeface="ATT Aleck Sans" panose="020B0503020203020204" pitchFamily="34" charset="0"/>
               </a:rPr>
@@ -8073,13 +9242,13 @@
         </p:nvSpPr>
         <p:spPr>
           <a:xfrm>
-            <a:off x="1135118" y="1172617"/>
-            <a:ext cx="6520292" cy="3880773"/>
+            <a:off x="1135118" y="1238865"/>
+            <a:ext cx="5486400" cy="4611329"/>
           </a:xfrm>
         </p:spPr>
         <p:txBody>
           <a:bodyPr>
-            <a:normAutofit/>
+            <a:noAutofit/>
           </a:bodyPr>
           <a:lstStyle/>
           <a:p>
@@ -8089,15 +9258,12 @@
               </a:lnSpc>
             </a:pPr>
             <a:r>
-              <a:rPr lang="en-US" sz="2400" dirty="0">
+              <a:rPr lang="en-US" sz="2000" dirty="0">
                 <a:latin typeface="ATT Aleck Sans" panose="020B0503020203020204" pitchFamily="34" charset="0"/>
                 <a:cs typeface="ATT Aleck Sans" panose="020B0503020203020204" pitchFamily="34" charset="0"/>
               </a:rPr>
-              <a:t>Tech Lead | 8 years at AT&amp;T​</a:t>
-            </a:r>
-            <a:endParaRPr lang="he-IL" sz="2400" dirty="0">
-              <a:latin typeface="ATT Aleck Sans" panose="020B0503020203020204" pitchFamily="34" charset="0"/>
-            </a:endParaRPr>
+              <a:t>Tech Lead | 9 years at AT&amp;T</a:t>
+            </a:r>
           </a:p>
           <a:p>
             <a:pPr>
@@ -8106,94 +9272,11 @@
               </a:lnSpc>
             </a:pPr>
             <a:r>
-              <a:rPr lang="en-US" sz="2400" dirty="0">
+              <a:rPr lang="en-US" sz="2000" dirty="0">
                 <a:latin typeface="ATT Aleck Sans" panose="020B0503020203020204" pitchFamily="34" charset="0"/>
                 <a:cs typeface="ATT Aleck Sans" panose="020B0503020203020204" pitchFamily="34" charset="0"/>
               </a:rPr>
-              <a:t>Experienced: </a:t>
-            </a:r>
-            <a:r>
-              <a:rPr lang="en-US" sz="2400" i="1" dirty="0">
-                <a:latin typeface="ATT Aleck Sans" panose="020B0503020203020204" pitchFamily="34" charset="0"/>
-                <a:cs typeface="ATT Aleck Sans" panose="020B0503020203020204" pitchFamily="34" charset="0"/>
-              </a:rPr>
-              <a:t>Java</a:t>
-            </a:r>
-            <a:r>
-              <a:rPr lang="en-US" sz="2400" dirty="0">
-                <a:latin typeface="ATT Aleck Sans" panose="020B0503020203020204" pitchFamily="34" charset="0"/>
-                <a:cs typeface="ATT Aleck Sans" panose="020B0503020203020204" pitchFamily="34" charset="0"/>
-              </a:rPr>
-              <a:t>, </a:t>
-            </a:r>
-            <a:r>
-              <a:rPr lang="en-US" sz="2400" i="1" dirty="0">
-                <a:latin typeface="ATT Aleck Sans" panose="020B0503020203020204" pitchFamily="34" charset="0"/>
-                <a:cs typeface="ATT Aleck Sans" panose="020B0503020203020204" pitchFamily="34" charset="0"/>
-              </a:rPr>
-              <a:t>Go</a:t>
-            </a:r>
-            <a:r>
-              <a:rPr lang="en-US" sz="2400" dirty="0">
-                <a:latin typeface="ATT Aleck Sans" panose="020B0503020203020204" pitchFamily="34" charset="0"/>
-                <a:cs typeface="ATT Aleck Sans" panose="020B0503020203020204" pitchFamily="34" charset="0"/>
-              </a:rPr>
-              <a:t>, </a:t>
-            </a:r>
-            <a:br>
-              <a:rPr lang="en-US" sz="2400" dirty="0">
-                <a:latin typeface="ATT Aleck Sans" panose="020B0503020203020204" pitchFamily="34" charset="0"/>
-                <a:cs typeface="ATT Aleck Sans" panose="020B0503020203020204" pitchFamily="34" charset="0"/>
-              </a:rPr>
-            </a:br>
-            <a:r>
-              <a:rPr lang="en-US" sz="2400" i="1" dirty="0">
-                <a:latin typeface="ATT Aleck Sans" panose="020B0503020203020204" pitchFamily="34" charset="0"/>
-                <a:cs typeface="ATT Aleck Sans" panose="020B0503020203020204" pitchFamily="34" charset="0"/>
-              </a:rPr>
-              <a:t>Node.js</a:t>
-            </a:r>
-            <a:r>
-              <a:rPr lang="en-US" sz="2400" dirty="0">
-                <a:latin typeface="ATT Aleck Sans" panose="020B0503020203020204" pitchFamily="34" charset="0"/>
-                <a:cs typeface="ATT Aleck Sans" panose="020B0503020203020204" pitchFamily="34" charset="0"/>
-              </a:rPr>
-              <a:t>, </a:t>
-            </a:r>
-            <a:r>
-              <a:rPr lang="en-US" sz="2400" i="1" dirty="0">
-                <a:latin typeface="ATT Aleck Sans" panose="020B0503020203020204" pitchFamily="34" charset="0"/>
-                <a:cs typeface="ATT Aleck Sans" panose="020B0503020203020204" pitchFamily="34" charset="0"/>
-              </a:rPr>
-              <a:t>Python</a:t>
-            </a:r>
-            <a:r>
-              <a:rPr lang="en-US" sz="2400" dirty="0">
-                <a:latin typeface="ATT Aleck Sans" panose="020B0503020203020204" pitchFamily="34" charset="0"/>
-                <a:cs typeface="ATT Aleck Sans" panose="020B0503020203020204" pitchFamily="34" charset="0"/>
-              </a:rPr>
-              <a:t>, </a:t>
-            </a:r>
-            <a:r>
-              <a:rPr lang="en-US" sz="2400" i="1" dirty="0">
-                <a:latin typeface="ATT Aleck Sans" panose="020B0503020203020204" pitchFamily="34" charset="0"/>
-                <a:cs typeface="ATT Aleck Sans" panose="020B0503020203020204" pitchFamily="34" charset="0"/>
-              </a:rPr>
-              <a:t>JavaScript</a:t>
-            </a:r>
-            <a:r>
-              <a:rPr lang="en-US" sz="2400" dirty="0">
-                <a:latin typeface="ATT Aleck Sans" panose="020B0503020203020204" pitchFamily="34" charset="0"/>
-                <a:cs typeface="ATT Aleck Sans" panose="020B0503020203020204" pitchFamily="34" charset="0"/>
-              </a:rPr>
-              <a:t>, </a:t>
-            </a:r>
-            <a:r>
-              <a:rPr lang="en-US" sz="2400" i="1" dirty="0">
-                <a:latin typeface="ATT Aleck Sans" panose="020B0503020203020204" pitchFamily="34" charset="0"/>
-                <a:cs typeface="ATT Aleck Sans" panose="020B0503020203020204" pitchFamily="34" charset="0"/>
-              </a:rPr>
-              <a:t>C#</a:t>
+              <a:t>Experienced: Java, Go, Node.js, Python, JavaScript, C#</a:t>
             </a:r>
           </a:p>
           <a:p>
@@ -8203,7 +9286,7 @@
               </a:lnSpc>
             </a:pPr>
             <a:r>
-              <a:rPr lang="en-US" sz="2400" dirty="0">
+              <a:rPr lang="en-US" sz="2000" dirty="0">
                 <a:latin typeface="ATT Aleck Sans" panose="020B0503020203020204" pitchFamily="34" charset="0"/>
                 <a:cs typeface="ATT Aleck Sans" panose="020B0503020203020204" pitchFamily="34" charset="0"/>
               </a:rPr>
@@ -8221,7 +9304,7 @@
                 <a:latin typeface="ATT Aleck Sans" panose="020B0503020203020204" pitchFamily="34" charset="0"/>
                 <a:cs typeface="ATT Aleck Sans" panose="020B0503020203020204" pitchFamily="34" charset="0"/>
               </a:rPr>
-              <a:t>Music &amp; Movies</a:t>
+              <a:t>Tech (obviously)</a:t>
             </a:r>
           </a:p>
           <a:p>
@@ -8235,7 +9318,21 @@
                 <a:latin typeface="ATT Aleck Sans" panose="020B0503020203020204" pitchFamily="34" charset="0"/>
                 <a:cs typeface="ATT Aleck Sans" panose="020B0503020203020204" pitchFamily="34" charset="0"/>
               </a:rPr>
-              <a:t>Intermittent Fasting &amp; Keto</a:t>
+              <a:t>Music &amp; Movies</a:t>
+            </a:r>
+          </a:p>
+          <a:p>
+            <a:pPr lvl="1">
+              <a:lnSpc>
+                <a:spcPct val="150000"/>
+              </a:lnSpc>
+            </a:pPr>
+            <a:r>
+              <a:rPr lang="en-US" sz="2000" dirty="0">
+                <a:latin typeface="ATT Aleck Sans" panose="020B0503020203020204" pitchFamily="34" charset="0"/>
+                <a:cs typeface="ATT Aleck Sans" panose="020B0503020203020204" pitchFamily="34" charset="0"/>
+              </a:rPr>
+              <a:t>GYM &amp; Intermittent Fasting</a:t>
             </a:r>
           </a:p>
         </p:txBody>
@@ -8262,7 +9359,7 @@
         </p:blipFill>
         <p:spPr>
           <a:xfrm>
-            <a:off x="6739102" y="1887044"/>
+            <a:off x="6621518" y="2241550"/>
             <a:ext cx="2476500" cy="2374900"/>
           </a:xfrm>
           <a:prstGeom prst="rect">
@@ -8332,13 +9429,13 @@
           <a:lstStyle/>
           <a:p>
             <a:r>
-              <a:rPr lang="en-US" b="1" dirty="0">
+              <a:rPr lang="en-US" b="1">
                 <a:latin typeface="ATT Aleck Sans" panose="020B0503020203020204" pitchFamily="34" charset="0"/>
                 <a:cs typeface="ATT Aleck Sans" panose="020B0503020203020204" pitchFamily="34" charset="0"/>
               </a:rPr>
               <a:t>HIGHLIGHTS</a:t>
             </a:r>
-            <a:endParaRPr lang="en-IL" b="1" dirty="0">
+            <a:endParaRPr lang="en-IL" b="1">
               <a:latin typeface="ATT Aleck Sans" panose="020B0503020203020204" pitchFamily="34" charset="0"/>
               <a:cs typeface="ATT Aleck Sans" panose="020B0503020203020204" pitchFamily="34" charset="0"/>
             </a:endParaRPr>
@@ -8374,7 +9471,7 @@
           <a:lstStyle/>
           <a:p>
             <a:r>
-              <a:rPr lang="en-US" sz="3200" dirty="0">
+              <a:rPr lang="en-US" sz="3200">
                 <a:latin typeface="ATT Aleck Sans" panose="020B0503020203020204" pitchFamily="34" charset="0"/>
                 <a:cs typeface="ATT Aleck Sans" panose="020B0503020203020204" pitchFamily="34" charset="0"/>
               </a:rPr>
@@ -8383,7 +9480,7 @@
           </a:p>
           <a:p>
             <a:r>
-              <a:rPr lang="en-US" sz="3200" dirty="0">
+              <a:rPr lang="en-US" sz="3200">
                 <a:latin typeface="ATT Aleck Sans" panose="020B0503020203020204" pitchFamily="34" charset="0"/>
                 <a:cs typeface="ATT Aleck Sans" panose="020B0503020203020204" pitchFamily="34" charset="0"/>
               </a:rPr>
@@ -8392,7 +9489,7 @@
           </a:p>
           <a:p>
             <a:r>
-              <a:rPr lang="en-US" sz="3200" dirty="0">
+              <a:rPr lang="en-US" sz="3200">
                 <a:latin typeface="ATT Aleck Sans" panose="020B0503020203020204" pitchFamily="34" charset="0"/>
                 <a:cs typeface="ATT Aleck Sans" panose="020B0503020203020204" pitchFamily="34" charset="0"/>
               </a:rPr>
@@ -8401,7 +9498,7 @@
           </a:p>
           <a:p>
             <a:r>
-              <a:rPr lang="en-US" sz="3200" dirty="0">
+              <a:rPr lang="en-US" sz="3200">
                 <a:latin typeface="ATT Aleck Sans" panose="020B0503020203020204" pitchFamily="34" charset="0"/>
                 <a:cs typeface="ATT Aleck Sans" panose="020B0503020203020204" pitchFamily="34" charset="0"/>
               </a:rPr>
@@ -8410,7 +9507,7 @@
           </a:p>
           <a:p>
             <a:r>
-              <a:rPr lang="en-US" sz="3200" dirty="0">
+              <a:rPr lang="en-US" sz="3200">
                 <a:latin typeface="ATT Aleck Sans" panose="020B0503020203020204" pitchFamily="34" charset="0"/>
                 <a:cs typeface="ATT Aleck Sans" panose="020B0503020203020204" pitchFamily="34" charset="0"/>
               </a:rPr>
@@ -8419,7 +9516,7 @@
           </a:p>
           <a:p>
             <a:r>
-              <a:rPr lang="en-US" sz="3200" dirty="0">
+              <a:rPr lang="en-US" sz="3200">
                 <a:latin typeface="ATT Aleck Sans" panose="020B0503020203020204" pitchFamily="34" charset="0"/>
                 <a:cs typeface="ATT Aleck Sans" panose="020B0503020203020204" pitchFamily="34" charset="0"/>
               </a:rPr>
@@ -8428,15 +9525,13 @@
           </a:p>
           <a:p>
             <a:r>
-              <a:rPr lang="en-US" sz="3200" dirty="0">
+              <a:rPr lang="en-US" sz="3200">
                 <a:latin typeface="ATT Aleck Sans" panose="020B0503020203020204" pitchFamily="34" charset="0"/>
                 <a:cs typeface="ATT Aleck Sans" panose="020B0503020203020204" pitchFamily="34" charset="0"/>
               </a:rPr>
               <a:t>SUPPORT GROUP</a:t>
             </a:r>
-          </a:p>
-          <a:p>
-            <a:endParaRPr lang="en-IL" sz="3200" dirty="0">
+            <a:endParaRPr lang="en-IL" sz="3200">
               <a:latin typeface="ATT Aleck Sans" panose="020B0503020203020204" pitchFamily="34" charset="0"/>
               <a:cs typeface="ATT Aleck Sans" panose="020B0503020203020204" pitchFamily="34" charset="0"/>
             </a:endParaRPr>
@@ -8832,14 +9927,6 @@
 <file path=ppt/slides/slide4.xml><?xml version="1.0" encoding="utf-8"?>
 <p:sld xmlns:a="http://schemas.openxmlformats.org/drawingml/2006/main" xmlns:r="http://schemas.openxmlformats.org/officeDocument/2006/relationships" xmlns:p="http://schemas.openxmlformats.org/presentationml/2006/main">
   <p:cSld>
-    <p:bg>
-      <p:bgPr>
-        <a:solidFill>
-          <a:schemeClr val="bg2"/>
-        </a:solidFill>
-        <a:effectLst/>
-      </p:bgPr>
-    </p:bg>
     <p:spTree>
       <p:nvGrpSpPr>
         <p:cNvPr id="1" name=""/>
@@ -8856,24 +9943,18 @@
       </p:grpSpPr>
       <p:sp>
         <p:nvSpPr>
-          <p:cNvPr id="3" name="Content Placeholder 2">
-            <a:extLst>
-              <a:ext uri="{FF2B5EF4-FFF2-40B4-BE49-F238E27FC236}">
-                <a16:creationId xmlns:a16="http://schemas.microsoft.com/office/drawing/2014/main" id="{895ED2E3-DBE8-B2EF-8448-00600C561CAD}"/>
-              </a:ext>
-            </a:extLst>
-          </p:cNvPr>
-          <p:cNvSpPr>
-            <a:spLocks noGrp="1"/>
-          </p:cNvSpPr>
-          <p:nvPr>
-            <p:ph idx="1"/>
+          <p:cNvPr id="2" name="Title 1"/>
+          <p:cNvSpPr>
+            <a:spLocks noGrp="1"/>
+          </p:cNvSpPr>
+          <p:nvPr>
+            <p:ph type="title"/>
           </p:nvPr>
         </p:nvSpPr>
         <p:spPr>
           <a:xfrm>
-            <a:off x="1276423" y="2977227"/>
-            <a:ext cx="8596668" cy="3880773"/>
+            <a:off x="609600" y="365760"/>
+            <a:ext cx="10972800" cy="850000"/>
           </a:xfrm>
         </p:spPr>
         <p:txBody>
@@ -8882,15 +9963,419 @@
           </a:bodyPr>
           <a:lstStyle/>
           <a:p>
-            <a:pPr marL="0" indent="0">
-              <a:buNone/>
-            </a:pPr>
-            <a:r>
-              <a:rPr lang="en-IL" sz="9600" b="1" dirty="0">
-                <a:latin typeface="ATT Aleck Sans" panose="020B0503020203020204" pitchFamily="34" charset="0"/>
-                <a:cs typeface="ATT Aleck Sans" panose="020B0503020203020204" pitchFamily="34" charset="0"/>
-              </a:rPr>
-              <a:t>MOTIVATION</a:t>
+            <a:r>
+              <a:rPr lang="en-US" sz="3200" b="1"/>
+              <a:t>Agenda</a:t>
+            </a:r>
+          </a:p>
+        </p:txBody>
+      </p:sp>
+      <p:sp>
+        <p:nvSpPr>
+          <p:cNvPr id="11" name="Num 1"/>
+          <p:cNvSpPr/>
+          <p:nvPr/>
+        </p:nvSpPr>
+        <p:spPr>
+          <a:xfrm>
+            <a:off x="1200000" y="1500000"/>
+            <a:ext cx="700000" cy="700000"/>
+          </a:xfrm>
+          <a:prstGeom prst="ellipse">
+            <a:avLst/>
+          </a:prstGeom>
+          <a:solidFill>
+            <a:schemeClr val="accent1"/>
+          </a:solidFill>
+          <a:ln>
+            <a:noFill/>
+          </a:ln>
+        </p:spPr>
+        <p:txBody>
+          <a:bodyPr anchor="ctr">
+            <a:normAutofit/>
+          </a:bodyPr>
+          <a:lstStyle/>
+          <a:p>
+            <a:pPr algn="ctr"/>
+            <a:r>
+              <a:rPr lang="en-US" sz="1600" b="1">
+                <a:solidFill>
+                  <a:schemeClr val="tx2"/>
+                </a:solidFill>
+              </a:rPr>
+              <a:t>1</a:t>
+            </a:r>
+          </a:p>
+        </p:txBody>
+      </p:sp>
+      <p:sp>
+        <p:nvSpPr>
+          <p:cNvPr id="12" name="Row 1"/>
+          <p:cNvSpPr/>
+          <p:nvPr/>
+        </p:nvSpPr>
+        <p:spPr>
+          <a:xfrm>
+            <a:off x="2050000" y="1500000"/>
+            <a:ext cx="8900000" cy="700000"/>
+          </a:xfrm>
+          <a:prstGeom prst="rect">
+            <a:avLst/>
+          </a:prstGeom>
+          <a:noFill/>
+        </p:spPr>
+        <p:txBody>
+          <a:bodyPr lIns="0" anchor="ctr">
+            <a:normAutofit/>
+          </a:bodyPr>
+          <a:lstStyle/>
+          <a:p>
+            <a:r>
+              <a:rPr lang="en-US" sz="1600" b="1">
+                <a:solidFill>
+                  <a:schemeClr val="tx1"/>
+                </a:solidFill>
+              </a:rPr>
+              <a:t>Why a framework?</a:t>
+            </a:r>
+            <a:r>
+              <a:rPr lang="en-US" sz="1400">
+                <a:solidFill>
+                  <a:schemeClr val="tx1">
+                    <a:alpha val="70000"/>
+                  </a:schemeClr>
+                </a:solidFill>
+              </a:rPr>
+              <a:t>   Motivation for Spring Boot</a:t>
+            </a:r>
+          </a:p>
+        </p:txBody>
+      </p:sp>
+      <p:sp>
+        <p:nvSpPr>
+          <p:cNvPr id="13" name="Num 2"/>
+          <p:cNvSpPr/>
+          <p:nvPr/>
+        </p:nvSpPr>
+        <p:spPr>
+          <a:xfrm>
+            <a:off x="1200000" y="2400000"/>
+            <a:ext cx="700000" cy="700000"/>
+          </a:xfrm>
+          <a:prstGeom prst="ellipse">
+            <a:avLst/>
+          </a:prstGeom>
+          <a:solidFill>
+            <a:schemeClr val="accent2"/>
+          </a:solidFill>
+          <a:ln>
+            <a:noFill/>
+          </a:ln>
+        </p:spPr>
+        <p:txBody>
+          <a:bodyPr anchor="ctr">
+            <a:normAutofit/>
+          </a:bodyPr>
+          <a:lstStyle/>
+          <a:p>
+            <a:pPr algn="ctr"/>
+            <a:r>
+              <a:rPr lang="en-US" sz="1600" b="1">
+                <a:solidFill>
+                  <a:schemeClr val="tx2"/>
+                </a:solidFill>
+              </a:rPr>
+              <a:t>2</a:t>
+            </a:r>
+          </a:p>
+        </p:txBody>
+      </p:sp>
+      <p:sp>
+        <p:nvSpPr>
+          <p:cNvPr id="14" name="Row 2"/>
+          <p:cNvSpPr/>
+          <p:nvPr/>
+        </p:nvSpPr>
+        <p:spPr>
+          <a:xfrm>
+            <a:off x="2050000" y="2400000"/>
+            <a:ext cx="8900000" cy="700000"/>
+          </a:xfrm>
+          <a:prstGeom prst="rect">
+            <a:avLst/>
+          </a:prstGeom>
+          <a:noFill/>
+        </p:spPr>
+        <p:txBody>
+          <a:bodyPr lIns="0" anchor="ctr">
+            <a:normAutofit/>
+          </a:bodyPr>
+          <a:lstStyle/>
+          <a:p>
+            <a:r>
+              <a:rPr lang="en-US" sz="1600" b="1">
+                <a:solidFill>
+                  <a:schemeClr val="tx1"/>
+                </a:solidFill>
+              </a:rPr>
+              <a:t>Spring Boot essentials</a:t>
+            </a:r>
+            <a:r>
+              <a:rPr lang="en-US" sz="1400">
+                <a:solidFill>
+                  <a:schemeClr val="tx1">
+                    <a:alpha val="70000"/>
+                  </a:schemeClr>
+                </a:solidFill>
+              </a:rPr>
+              <a:t>   What it is and what you get</a:t>
+            </a:r>
+          </a:p>
+        </p:txBody>
+      </p:sp>
+      <p:sp>
+        <p:nvSpPr>
+          <p:cNvPr id="15" name="Num 3"/>
+          <p:cNvSpPr/>
+          <p:nvPr/>
+        </p:nvSpPr>
+        <p:spPr>
+          <a:xfrm>
+            <a:off x="1200000" y="3300000"/>
+            <a:ext cx="700000" cy="700000"/>
+          </a:xfrm>
+          <a:prstGeom prst="ellipse">
+            <a:avLst/>
+          </a:prstGeom>
+          <a:solidFill>
+            <a:schemeClr val="accent3"/>
+          </a:solidFill>
+          <a:ln>
+            <a:noFill/>
+          </a:ln>
+        </p:spPr>
+        <p:txBody>
+          <a:bodyPr anchor="ctr">
+            <a:normAutofit/>
+          </a:bodyPr>
+          <a:lstStyle/>
+          <a:p>
+            <a:pPr algn="ctr"/>
+            <a:r>
+              <a:rPr lang="en-US" sz="1600" b="1">
+                <a:solidFill>
+                  <a:schemeClr val="tx2"/>
+                </a:solidFill>
+              </a:rPr>
+              <a:t>3</a:t>
+            </a:r>
+          </a:p>
+        </p:txBody>
+      </p:sp>
+      <p:sp>
+        <p:nvSpPr>
+          <p:cNvPr id="16" name="Row 3"/>
+          <p:cNvSpPr/>
+          <p:nvPr/>
+        </p:nvSpPr>
+        <p:spPr>
+          <a:xfrm>
+            <a:off x="2050000" y="3300000"/>
+            <a:ext cx="8900000" cy="700000"/>
+          </a:xfrm>
+          <a:prstGeom prst="rect">
+            <a:avLst/>
+          </a:prstGeom>
+          <a:noFill/>
+        </p:spPr>
+        <p:txBody>
+          <a:bodyPr lIns="0" anchor="ctr">
+            <a:normAutofit/>
+          </a:bodyPr>
+          <a:lstStyle/>
+          <a:p>
+            <a:r>
+              <a:rPr lang="en-US" sz="1600" b="1">
+                <a:solidFill>
+                  <a:schemeClr val="tx1"/>
+                </a:solidFill>
+              </a:rPr>
+              <a:t>Inversion of Control</a:t>
+            </a:r>
+            <a:r>
+              <a:rPr lang="en-US" sz="1400">
+                <a:solidFill>
+                  <a:schemeClr val="tx1">
+                    <a:alpha val="70000"/>
+                  </a:schemeClr>
+                </a:solidFill>
+              </a:rPr>
+              <a:t>   The principle behind the container</a:t>
+            </a:r>
+          </a:p>
+        </p:txBody>
+      </p:sp>
+      <p:sp>
+        <p:nvSpPr>
+          <p:cNvPr id="17" name="Num 4"/>
+          <p:cNvSpPr/>
+          <p:nvPr/>
+        </p:nvSpPr>
+        <p:spPr>
+          <a:xfrm>
+            <a:off x="1200000" y="4200000"/>
+            <a:ext cx="700000" cy="700000"/>
+          </a:xfrm>
+          <a:prstGeom prst="ellipse">
+            <a:avLst/>
+          </a:prstGeom>
+          <a:solidFill>
+            <a:schemeClr val="accent4"/>
+          </a:solidFill>
+          <a:ln>
+            <a:noFill/>
+          </a:ln>
+        </p:spPr>
+        <p:txBody>
+          <a:bodyPr anchor="ctr">
+            <a:normAutofit/>
+          </a:bodyPr>
+          <a:lstStyle/>
+          <a:p>
+            <a:pPr algn="ctr"/>
+            <a:r>
+              <a:rPr lang="en-US" sz="1600" b="1">
+                <a:solidFill>
+                  <a:schemeClr val="tx2"/>
+                </a:solidFill>
+              </a:rPr>
+              <a:t>4</a:t>
+            </a:r>
+          </a:p>
+        </p:txBody>
+      </p:sp>
+      <p:sp>
+        <p:nvSpPr>
+          <p:cNvPr id="18" name="Row 4"/>
+          <p:cNvSpPr/>
+          <p:nvPr/>
+        </p:nvSpPr>
+        <p:spPr>
+          <a:xfrm>
+            <a:off x="2050000" y="4200000"/>
+            <a:ext cx="8900000" cy="700000"/>
+          </a:xfrm>
+          <a:prstGeom prst="rect">
+            <a:avLst/>
+          </a:prstGeom>
+          <a:noFill/>
+        </p:spPr>
+        <p:txBody>
+          <a:bodyPr lIns="0" anchor="ctr">
+            <a:normAutofit/>
+          </a:bodyPr>
+          <a:lstStyle/>
+          <a:p>
+            <a:r>
+              <a:rPr lang="en-US" sz="1600" b="1">
+                <a:solidFill>
+                  <a:schemeClr val="tx1"/>
+                </a:solidFill>
+              </a:rPr>
+              <a:t>Dependency Injection</a:t>
+            </a:r>
+            <a:r>
+              <a:rPr lang="en-US" sz="1400">
+                <a:solidFill>
+                  <a:schemeClr val="tx1">
+                    <a:alpha val="70000"/>
+                  </a:schemeClr>
+                </a:solidFill>
+              </a:rPr>
+              <a:t>   The pattern, applied to real code</a:t>
+            </a:r>
+          </a:p>
+        </p:txBody>
+      </p:sp>
+      <p:sp>
+        <p:nvSpPr>
+          <p:cNvPr id="19" name="Num 5"/>
+          <p:cNvSpPr/>
+          <p:nvPr/>
+        </p:nvSpPr>
+        <p:spPr>
+          <a:xfrm>
+            <a:off x="1200000" y="5100000"/>
+            <a:ext cx="700000" cy="700000"/>
+          </a:xfrm>
+          <a:prstGeom prst="ellipse">
+            <a:avLst/>
+          </a:prstGeom>
+          <a:solidFill>
+            <a:schemeClr val="accent6"/>
+          </a:solidFill>
+          <a:ln>
+            <a:noFill/>
+          </a:ln>
+        </p:spPr>
+        <p:txBody>
+          <a:bodyPr anchor="ctr">
+            <a:normAutofit/>
+          </a:bodyPr>
+          <a:lstStyle/>
+          <a:p>
+            <a:pPr algn="ctr"/>
+            <a:r>
+              <a:rPr lang="en-US" sz="1600" b="1">
+                <a:solidFill>
+                  <a:schemeClr val="tx2"/>
+                </a:solidFill>
+              </a:rPr>
+              <a:t>5</a:t>
+            </a:r>
+          </a:p>
+        </p:txBody>
+      </p:sp>
+      <p:sp>
+        <p:nvSpPr>
+          <p:cNvPr id="20" name="Row 5"/>
+          <p:cNvSpPr/>
+          <p:nvPr/>
+        </p:nvSpPr>
+        <p:spPr>
+          <a:xfrm>
+            <a:off x="2050000" y="5100000"/>
+            <a:ext cx="8900000" cy="700000"/>
+          </a:xfrm>
+          <a:prstGeom prst="rect">
+            <a:avLst/>
+          </a:prstGeom>
+          <a:noFill/>
+        </p:spPr>
+        <p:txBody>
+          <a:bodyPr lIns="0" anchor="ctr">
+            <a:normAutofit/>
+          </a:bodyPr>
+          <a:lstStyle/>
+          <a:p>
+            <a:r>
+              <a:rPr lang="en-US" sz="1600" b="1">
+                <a:solidFill>
+                  <a:schemeClr val="tx1"/>
+                </a:solidFill>
+              </a:rPr>
+              <a:t>Hands-on</a:t>
+            </a:r>
+            <a:r>
+              <a:rPr lang="en-US" sz="1400">
+                <a:solidFill>
+                  <a:schemeClr val="tx1">
+                    <a:alpha val="70000"/>
+                  </a:schemeClr>
+                </a:solidFill>
+              </a:rPr>
+              <a:t>   Work the repo branch by branch</a:t>
             </a:r>
           </a:p>
         </p:txBody>
@@ -8898,12 +10383,12 @@
     </p:spTree>
     <p:extLst>
       <p:ext uri="{BB962C8B-B14F-4D97-AF65-F5344CB8AC3E}">
-        <p14:creationId xmlns:p14="http://schemas.microsoft.com/office/powerpoint/2010/main" val="545037678"/>
+        <p14:creationId xmlns:p14="http://schemas.microsoft.com/office/powerpoint/2010/main" val="111224160"/>
       </p:ext>
     </p:extLst>
   </p:cSld>
   <p:clrMapOvr>
-    <a:overrideClrMapping bg1="dk1" tx1="lt1" bg2="dk2" tx2="lt2" accent1="accent1" accent2="accent2" accent3="accent3" accent4="accent4" accent5="accent5" accent6="accent6" hlink="hlink" folHlink="folHlink"/>
+    <a:masterClrMapping/>
   </p:clrMapOvr>
 </p:sld>
 </file>
@@ -8935,10 +10420,10 @@
       </p:grpSpPr>
       <p:sp>
         <p:nvSpPr>
-          <p:cNvPr id="2" name="Title 1">
+          <p:cNvPr id="3" name="Content Placeholder 2">
             <a:extLst>
               <a:ext uri="{FF2B5EF4-FFF2-40B4-BE49-F238E27FC236}">
-                <a16:creationId xmlns:a16="http://schemas.microsoft.com/office/drawing/2014/main" id="{8F5127E2-9264-E9CB-DD10-E00D462BFAF2}"/>
+                <a16:creationId xmlns:a16="http://schemas.microsoft.com/office/drawing/2014/main" id="{895ED2E3-DBE8-B2EF-8448-00600C561CAD}"/>
               </a:ext>
             </a:extLst>
           </p:cNvPr>
@@ -8946,140 +10431,38 @@
             <a:spLocks noGrp="1"/>
           </p:cNvSpPr>
           <p:nvPr>
-            <p:ph type="title"/>
-          </p:nvPr>
-        </p:nvSpPr>
-        <p:spPr/>
+            <p:ph idx="1"/>
+          </p:nvPr>
+        </p:nvSpPr>
+        <p:spPr>
+          <a:xfrm>
+            <a:off x="1276423" y="2977227"/>
+            <a:ext cx="8596668" cy="3880773"/>
+          </a:xfrm>
+        </p:spPr>
         <p:txBody>
           <a:bodyPr>
             <a:normAutofit/>
           </a:bodyPr>
           <a:lstStyle/>
           <a:p>
-            <a:r>
-              <a:rPr lang="en-IL" b="1" dirty="0">
+            <a:pPr marL="0" indent="0">
+              <a:buNone/>
+            </a:pPr>
+            <a:r>
+              <a:rPr lang="en-IL" sz="9600" b="1" dirty="0">
                 <a:latin typeface="ATT Aleck Sans" panose="020B0503020203020204" pitchFamily="34" charset="0"/>
                 <a:cs typeface="ATT Aleck Sans" panose="020B0503020203020204" pitchFamily="34" charset="0"/>
               </a:rPr>
-              <a:t>Spring Boot</a:t>
-            </a:r>
-          </a:p>
-        </p:txBody>
-      </p:sp>
-      <p:sp>
-        <p:nvSpPr>
-          <p:cNvPr id="3" name="Content Placeholder 2">
-            <a:extLst>
-              <a:ext uri="{FF2B5EF4-FFF2-40B4-BE49-F238E27FC236}">
-                <a16:creationId xmlns:a16="http://schemas.microsoft.com/office/drawing/2014/main" id="{D0BDD530-32D2-007A-86C5-1583B831586C}"/>
-              </a:ext>
-            </a:extLst>
-          </p:cNvPr>
-          <p:cNvSpPr>
-            <a:spLocks noGrp="1"/>
-          </p:cNvSpPr>
-          <p:nvPr>
-            <p:ph idx="1"/>
-          </p:nvPr>
-        </p:nvSpPr>
-        <p:spPr>
-          <a:xfrm>
-            <a:off x="603761" y="1435375"/>
-            <a:ext cx="8596668" cy="3880773"/>
-          </a:xfrm>
-        </p:spPr>
-        <p:txBody>
-          <a:bodyPr>
-            <a:noAutofit/>
-          </a:bodyPr>
-          <a:lstStyle/>
-          <a:p>
-            <a:pPr marL="400050"/>
-            <a:r>
-              <a:rPr lang="en-US" sz="2800" i="1" dirty="0">
-                <a:latin typeface="ATT Aleck Sans" panose="020B0503020203020204" pitchFamily="34" charset="0"/>
-                <a:cs typeface="ATT Aleck Sans" panose="020B0503020203020204" pitchFamily="34" charset="0"/>
-              </a:rPr>
-              <a:t>Spring</a:t>
-            </a:r>
-            <a:r>
-              <a:rPr lang="en-US" sz="2800" dirty="0">
-                <a:latin typeface="ATT Aleck Sans" panose="020B0503020203020204" pitchFamily="34" charset="0"/>
-                <a:cs typeface="ATT Aleck Sans" panose="020B0503020203020204" pitchFamily="34" charset="0"/>
-              </a:rPr>
-              <a:t> is an umbrella of projects that aim to solve and simplify common problems in the day-to-day development of enterprise applications.</a:t>
-            </a:r>
-            <a:br>
-              <a:rPr lang="en-US" sz="2800" dirty="0">
-                <a:latin typeface="ATT Aleck Sans" panose="020B0503020203020204" pitchFamily="34" charset="0"/>
-                <a:cs typeface="ATT Aleck Sans" panose="020B0503020203020204" pitchFamily="34" charset="0"/>
-              </a:rPr>
-            </a:br>
-            <a:endParaRPr lang="en-US" sz="2800" dirty="0">
-              <a:latin typeface="ATT Aleck Sans" panose="020B0503020203020204" pitchFamily="34" charset="0"/>
-              <a:cs typeface="ATT Aleck Sans" panose="020B0503020203020204" pitchFamily="34" charset="0"/>
-            </a:endParaRPr>
-          </a:p>
-          <a:p>
-            <a:pPr marL="400050"/>
-            <a:r>
-              <a:rPr lang="en-US" sz="2800" i="1" dirty="0">
-                <a:latin typeface="ATT Aleck Sans" panose="020B0503020203020204" pitchFamily="34" charset="0"/>
-                <a:cs typeface="ATT Aleck Sans" panose="020B0503020203020204" pitchFamily="34" charset="0"/>
-              </a:rPr>
-              <a:t>Spring Boot </a:t>
-            </a:r>
-            <a:r>
-              <a:rPr lang="en-US" sz="2800" dirty="0">
-                <a:latin typeface="ATT Aleck Sans" panose="020B0503020203020204" pitchFamily="34" charset="0"/>
-                <a:cs typeface="ATT Aleck Sans" panose="020B0503020203020204" pitchFamily="34" charset="0"/>
-              </a:rPr>
-              <a:t>is a project built on top of the </a:t>
-            </a:r>
-            <a:r>
-              <a:rPr lang="en-US" sz="2800" i="1" dirty="0">
-                <a:latin typeface="ATT Aleck Sans" panose="020B0503020203020204" pitchFamily="34" charset="0"/>
-                <a:cs typeface="ATT Aleck Sans" panose="020B0503020203020204" pitchFamily="34" charset="0"/>
-              </a:rPr>
-              <a:t>Spring</a:t>
-            </a:r>
-            <a:r>
-              <a:rPr lang="en-US" sz="2800" dirty="0">
-                <a:latin typeface="ATT Aleck Sans" panose="020B0503020203020204" pitchFamily="34" charset="0"/>
-                <a:cs typeface="ATT Aleck Sans" panose="020B0503020203020204" pitchFamily="34" charset="0"/>
-              </a:rPr>
-              <a:t> Framework. It provides an easier and faster way to set up, configure, and run applications.</a:t>
-            </a:r>
-            <a:br>
-              <a:rPr lang="en-US" sz="2800" dirty="0">
-                <a:latin typeface="ATT Aleck Sans" panose="020B0503020203020204" pitchFamily="34" charset="0"/>
-                <a:cs typeface="ATT Aleck Sans" panose="020B0503020203020204" pitchFamily="34" charset="0"/>
-              </a:rPr>
-            </a:br>
-            <a:endParaRPr lang="en-US" sz="2800" dirty="0">
-              <a:latin typeface="ATT Aleck Sans" panose="020B0503020203020204" pitchFamily="34" charset="0"/>
-              <a:cs typeface="ATT Aleck Sans" panose="020B0503020203020204" pitchFamily="34" charset="0"/>
-            </a:endParaRPr>
-          </a:p>
-          <a:p>
-            <a:pPr marL="400050"/>
-            <a:r>
-              <a:rPr lang="en-US" sz="2800" dirty="0">
-                <a:latin typeface="ATT Aleck Sans" panose="020B0503020203020204" pitchFamily="34" charset="0"/>
-                <a:cs typeface="ATT Aleck Sans" panose="020B0503020203020204" pitchFamily="34" charset="0"/>
-              </a:rPr>
-              <a:t>Spring Boot is based on the best practices and covers most use cases.</a:t>
-            </a:r>
-            <a:endParaRPr lang="ru-RU" sz="2800" dirty="0">
-              <a:cs typeface="ATT Aleck Sans" panose="020B0503020203020204" pitchFamily="34" charset="0"/>
-            </a:endParaRPr>
+              <a:t>MOTIVATION</a:t>
+            </a:r>
           </a:p>
         </p:txBody>
       </p:sp>
     </p:spTree>
     <p:extLst>
       <p:ext uri="{BB962C8B-B14F-4D97-AF65-F5344CB8AC3E}">
-        <p14:creationId xmlns:p14="http://schemas.microsoft.com/office/powerpoint/2010/main" val="3747451504"/>
+        <p14:creationId xmlns:p14="http://schemas.microsoft.com/office/powerpoint/2010/main" val="545037678"/>
       </p:ext>
     </p:extLst>
   </p:cSld>
@@ -9092,14 +10475,6 @@
 <file path=ppt/slides/slide6.xml><?xml version="1.0" encoding="utf-8"?>
 <p:sld xmlns:a="http://schemas.openxmlformats.org/drawingml/2006/main" xmlns:r="http://schemas.openxmlformats.org/officeDocument/2006/relationships" xmlns:p="http://schemas.openxmlformats.org/presentationml/2006/main">
   <p:cSld>
-    <p:bg>
-      <p:bgPr>
-        <a:solidFill>
-          <a:schemeClr val="bg2"/>
-        </a:solidFill>
-        <a:effectLst/>
-      </p:bgPr>
-    </p:bg>
     <p:spTree>
       <p:nvGrpSpPr>
         <p:cNvPr id="1" name=""/>
@@ -9116,13 +10491,7 @@
       </p:grpSpPr>
       <p:sp>
         <p:nvSpPr>
-          <p:cNvPr id="2" name="Title 1">
-            <a:extLst>
-              <a:ext uri="{FF2B5EF4-FFF2-40B4-BE49-F238E27FC236}">
-                <a16:creationId xmlns:a16="http://schemas.microsoft.com/office/drawing/2014/main" id="{8F5127E2-9264-E9CB-DD10-E00D462BFAF2}"/>
-              </a:ext>
-            </a:extLst>
-          </p:cNvPr>
+          <p:cNvPr id="2" name="Title 1"/>
           <p:cNvSpPr>
             <a:spLocks noGrp="1"/>
           </p:cNvSpPr>
@@ -9130,7 +10499,12 @@
             <p:ph type="title"/>
           </p:nvPr>
         </p:nvSpPr>
-        <p:spPr/>
+        <p:spPr>
+          <a:xfrm>
+            <a:off x="609600" y="365760"/>
+            <a:ext cx="10972800" cy="900000"/>
+          </a:xfrm>
+        </p:spPr>
         <p:txBody>
           <a:bodyPr>
             <a:normAutofit/>
@@ -9138,133 +10512,646 @@
           <a:lstStyle/>
           <a:p>
             <a:r>
-              <a:rPr lang="en-IL" b="1" dirty="0">
-                <a:latin typeface="ATT Aleck Sans" panose="020B0503020203020204" pitchFamily="34" charset="0"/>
-                <a:cs typeface="ATT Aleck Sans" panose="020B0503020203020204" pitchFamily="34" charset="0"/>
-              </a:rPr>
-              <a:t>Spring Boot</a:t>
-            </a:r>
-          </a:p>
-        </p:txBody>
-      </p:sp>
-      <p:sp>
-        <p:nvSpPr>
-          <p:cNvPr id="3" name="Content Placeholder 2">
-            <a:extLst>
-              <a:ext uri="{FF2B5EF4-FFF2-40B4-BE49-F238E27FC236}">
-                <a16:creationId xmlns:a16="http://schemas.microsoft.com/office/drawing/2014/main" id="{D0BDD530-32D2-007A-86C5-1583B831586C}"/>
-              </a:ext>
-            </a:extLst>
-          </p:cNvPr>
-          <p:cNvSpPr>
-            <a:spLocks noGrp="1"/>
-          </p:cNvSpPr>
-          <p:nvPr>
-            <p:ph idx="1"/>
-          </p:nvPr>
-        </p:nvSpPr>
+              <a:rPr lang="en-US" sz="3200" b="1"/>
+              <a:t>Why use a web framework?</a:t>
+            </a:r>
+          </a:p>
+        </p:txBody>
+      </p:sp>
+      <p:cxnSp>
+        <p:nvCxnSpPr>
+          <p:cNvPr id="11" name="Connector 11"/>
+          <p:cNvCxnSpPr/>
+          <p:nvPr/>
+        </p:nvCxnSpPr>
         <p:spPr>
           <a:xfrm>
-            <a:off x="666823" y="1477417"/>
-            <a:ext cx="8596668" cy="3880773"/>
+            <a:off x="3809600" y="2150000"/>
+            <a:ext cx="990400" cy="1500000"/>
           </a:xfrm>
+          <a:prstGeom prst="line">
+            <a:avLst/>
+          </a:prstGeom>
+          <a:ln w="19050" cap="rnd">
+            <a:solidFill>
+              <a:schemeClr val="accent2">
+                <a:alpha val="70000"/>
+              </a:schemeClr>
+            </a:solidFill>
+            <a:prstDash val="sysDot"/>
+          </a:ln>
         </p:spPr>
-        <p:txBody>
-          <a:bodyPr>
-            <a:noAutofit/>
+        <p:style>
+          <a:lnRef idx="1">
+            <a:schemeClr val="accent1"/>
+          </a:lnRef>
+          <a:fillRef idx="0">
+            <a:schemeClr val="accent1"/>
+          </a:fillRef>
+          <a:effectRef idx="0">
+            <a:schemeClr val="accent1"/>
+          </a:effectRef>
+          <a:fontRef idx="minor">
+            <a:schemeClr val="tx1"/>
+          </a:fontRef>
+        </p:style>
+      </p:cxnSp>
+      <p:cxnSp>
+        <p:nvCxnSpPr>
+          <p:cNvPr id="12" name="Connector 12"/>
+          <p:cNvCxnSpPr/>
+          <p:nvPr/>
+        </p:nvCxnSpPr>
+        <p:spPr>
+          <a:xfrm>
+            <a:off x="3809600" y="3650000"/>
+            <a:ext cx="990400" cy="0"/>
+          </a:xfrm>
+          <a:prstGeom prst="line">
+            <a:avLst/>
+          </a:prstGeom>
+          <a:ln w="19050" cap="rnd">
+            <a:solidFill>
+              <a:schemeClr val="accent1">
+                <a:alpha val="70000"/>
+              </a:schemeClr>
+            </a:solidFill>
+            <a:prstDash val="sysDot"/>
+          </a:ln>
+        </p:spPr>
+        <p:style>
+          <a:lnRef idx="1">
+            <a:schemeClr val="accent1"/>
+          </a:lnRef>
+          <a:fillRef idx="0">
+            <a:schemeClr val="accent1"/>
+          </a:fillRef>
+          <a:effectRef idx="0">
+            <a:schemeClr val="accent1"/>
+          </a:effectRef>
+          <a:fontRef idx="minor">
+            <a:schemeClr val="tx1"/>
+          </a:fontRef>
+        </p:style>
+      </p:cxnSp>
+      <p:cxnSp>
+        <p:nvCxnSpPr>
+          <p:cNvPr id="13" name="Connector 13"/>
+          <p:cNvCxnSpPr/>
+          <p:nvPr/>
+        </p:nvCxnSpPr>
+        <p:spPr>
+          <a:xfrm flipV="1">
+            <a:off x="3809600" y="3650000"/>
+            <a:ext cx="990400" cy="1500000"/>
+          </a:xfrm>
+          <a:prstGeom prst="line">
+            <a:avLst/>
+          </a:prstGeom>
+          <a:ln w="19050" cap="rnd">
+            <a:solidFill>
+              <a:schemeClr val="accent3">
+                <a:alpha val="70000"/>
+              </a:schemeClr>
+            </a:solidFill>
+            <a:prstDash val="sysDot"/>
+          </a:ln>
+        </p:spPr>
+        <p:style>
+          <a:lnRef idx="1">
+            <a:schemeClr val="accent1"/>
+          </a:lnRef>
+          <a:fillRef idx="0">
+            <a:schemeClr val="accent1"/>
+          </a:fillRef>
+          <a:effectRef idx="0">
+            <a:schemeClr val="accent1"/>
+          </a:effectRef>
+          <a:fontRef idx="minor">
+            <a:schemeClr val="tx1"/>
+          </a:fontRef>
+        </p:style>
+      </p:cxnSp>
+      <p:cxnSp>
+        <p:nvCxnSpPr>
+          <p:cNvPr id="14" name="Connector 14"/>
+          <p:cNvCxnSpPr/>
+          <p:nvPr/>
+        </p:nvCxnSpPr>
+        <p:spPr>
+          <a:xfrm flipV="1">
+            <a:off x="7392000" y="2150000"/>
+            <a:ext cx="990000" cy="1500000"/>
+          </a:xfrm>
+          <a:prstGeom prst="line">
+            <a:avLst/>
+          </a:prstGeom>
+          <a:ln w="19050" cap="rnd">
+            <a:solidFill>
+              <a:schemeClr val="accent4">
+                <a:alpha val="70000"/>
+              </a:schemeClr>
+            </a:solidFill>
+            <a:prstDash val="sysDot"/>
+          </a:ln>
+        </p:spPr>
+        <p:style>
+          <a:lnRef idx="1">
+            <a:schemeClr val="accent1"/>
+          </a:lnRef>
+          <a:fillRef idx="0">
+            <a:schemeClr val="accent1"/>
+          </a:fillRef>
+          <a:effectRef idx="0">
+            <a:schemeClr val="accent1"/>
+          </a:effectRef>
+          <a:fontRef idx="minor">
+            <a:schemeClr val="tx1"/>
+          </a:fontRef>
+        </p:style>
+      </p:cxnSp>
+      <p:cxnSp>
+        <p:nvCxnSpPr>
+          <p:cNvPr id="15" name="Connector 15"/>
+          <p:cNvCxnSpPr/>
+          <p:nvPr/>
+        </p:nvCxnSpPr>
+        <p:spPr>
+          <a:xfrm>
+            <a:off x="7392000" y="3650000"/>
+            <a:ext cx="990000" cy="0"/>
+          </a:xfrm>
+          <a:prstGeom prst="line">
+            <a:avLst/>
+          </a:prstGeom>
+          <a:ln w="19050" cap="rnd">
+            <a:solidFill>
+              <a:schemeClr val="accent5">
+                <a:alpha val="70000"/>
+              </a:schemeClr>
+            </a:solidFill>
+            <a:prstDash val="sysDot"/>
+          </a:ln>
+        </p:spPr>
+        <p:style>
+          <a:lnRef idx="1">
+            <a:schemeClr val="accent1"/>
+          </a:lnRef>
+          <a:fillRef idx="0">
+            <a:schemeClr val="accent1"/>
+          </a:fillRef>
+          <a:effectRef idx="0">
+            <a:schemeClr val="accent1"/>
+          </a:effectRef>
+          <a:fontRef idx="minor">
+            <a:schemeClr val="tx1"/>
+          </a:fontRef>
+        </p:style>
+      </p:cxnSp>
+      <p:cxnSp>
+        <p:nvCxnSpPr>
+          <p:cNvPr id="16" name="Connector 16"/>
+          <p:cNvCxnSpPr/>
+          <p:nvPr/>
+        </p:nvCxnSpPr>
+        <p:spPr>
+          <a:xfrm>
+            <a:off x="7392000" y="3650000"/>
+            <a:ext cx="990000" cy="1500000"/>
+          </a:xfrm>
+          <a:prstGeom prst="line">
+            <a:avLst/>
+          </a:prstGeom>
+          <a:ln w="19050" cap="rnd">
+            <a:solidFill>
+              <a:schemeClr val="accent6">
+                <a:alpha val="70000"/>
+              </a:schemeClr>
+            </a:solidFill>
+            <a:prstDash val="sysDot"/>
+          </a:ln>
+        </p:spPr>
+        <p:style>
+          <a:lnRef idx="1">
+            <a:schemeClr val="accent1"/>
+          </a:lnRef>
+          <a:fillRef idx="0">
+            <a:schemeClr val="accent1"/>
+          </a:fillRef>
+          <a:effectRef idx="0">
+            <a:schemeClr val="accent1"/>
+          </a:effectRef>
+          <a:fontRef idx="minor">
+            <a:schemeClr val="tx1"/>
+          </a:fontRef>
+        </p:style>
+      </p:cxnSp>
+      <p:sp>
+        <p:nvSpPr>
+          <p:cNvPr id="17" name="Hub"/>
+          <p:cNvSpPr/>
+          <p:nvPr/>
+        </p:nvSpPr>
+        <p:spPr>
+          <a:xfrm>
+            <a:off x="4800000" y="2900000"/>
+            <a:ext cx="2592000" cy="1500000"/>
+          </a:xfrm>
+          <a:prstGeom prst="roundRect">
+            <a:avLst>
+              <a:gd name="adj" fmla="val 20000"/>
+            </a:avLst>
+          </a:prstGeom>
+          <a:solidFill>
+            <a:schemeClr val="tx2"/>
+          </a:solidFill>
+          <a:ln w="28575">
+            <a:solidFill>
+              <a:schemeClr val="accent1"/>
+            </a:solidFill>
+          </a:ln>
+        </p:spPr>
+        <p:txBody>
+          <a:bodyPr lIns="91440" rIns="91440" anchor="ctr">
+            <a:normAutofit/>
           </a:bodyPr>
           <a:lstStyle/>
           <a:p>
-            <a:pPr marL="57150" indent="0">
-              <a:buNone/>
-            </a:pPr>
-            <a:r>
-              <a:rPr lang="en-US" sz="2800" i="1" dirty="0">
-                <a:latin typeface="ATT Aleck Sans" panose="020B0503020203020204" pitchFamily="34" charset="0"/>
-                <a:cs typeface="ATT Aleck Sans" panose="020B0503020203020204" pitchFamily="34" charset="0"/>
-              </a:rPr>
-              <a:t>Spring Boot </a:t>
-            </a:r>
-            <a:r>
-              <a:rPr lang="en-US" sz="2800" dirty="0">
-                <a:latin typeface="ATT Aleck Sans" panose="020B0503020203020204" pitchFamily="34" charset="0"/>
-                <a:cs typeface="ATT Aleck Sans" panose="020B0503020203020204" pitchFamily="34" charset="0"/>
-              </a:rPr>
-              <a:t>is used for creating a stand-alone </a:t>
-            </a:r>
-            <a:br>
-              <a:rPr lang="en-US" sz="2800" dirty="0">
-                <a:latin typeface="ATT Aleck Sans" panose="020B0503020203020204" pitchFamily="34" charset="0"/>
-                <a:cs typeface="ATT Aleck Sans" panose="020B0503020203020204" pitchFamily="34" charset="0"/>
-              </a:rPr>
-            </a:br>
-            <a:r>
-              <a:rPr lang="en-US" sz="2800" i="1" dirty="0">
-                <a:latin typeface="ATT Aleck Sans" panose="020B0503020203020204" pitchFamily="34" charset="0"/>
-                <a:cs typeface="ATT Aleck Sans" panose="020B0503020203020204" pitchFamily="34" charset="0"/>
-              </a:rPr>
-              <a:t>Spring</a:t>
-            </a:r>
-            <a:r>
-              <a:rPr lang="en-US" sz="2800" dirty="0">
-                <a:latin typeface="ATT Aleck Sans" panose="020B0503020203020204" pitchFamily="34" charset="0"/>
-                <a:cs typeface="ATT Aleck Sans" panose="020B0503020203020204" pitchFamily="34" charset="0"/>
-              </a:rPr>
-              <a:t>-based application that you can run easily because it requires minimal Spring configuration.</a:t>
-            </a:r>
-          </a:p>
-          <a:p>
-            <a:pPr lvl="2"/>
-            <a:r>
-              <a:rPr lang="en-US" sz="2400" dirty="0">
-                <a:latin typeface="ATT Aleck Sans" panose="020B0503020203020204" pitchFamily="34" charset="0"/>
-                <a:cs typeface="ATT Aleck Sans" panose="020B0503020203020204" pitchFamily="34" charset="0"/>
-              </a:rPr>
-              <a:t> No need for web servlets; it has Tomcat embedded.</a:t>
-            </a:r>
-          </a:p>
-          <a:p>
-            <a:pPr lvl="2"/>
-            <a:r>
-              <a:rPr lang="en-US" sz="2400" dirty="0">
-                <a:latin typeface="ATT Aleck Sans" panose="020B0503020203020204" pitchFamily="34" charset="0"/>
-                <a:cs typeface="ATT Aleck Sans" panose="020B0503020203020204" pitchFamily="34" charset="0"/>
-              </a:rPr>
-              <a:t> Configurations are pre-packaged;</a:t>
-            </a:r>
-          </a:p>
-          <a:p>
-            <a:pPr lvl="2"/>
-            <a:r>
-              <a:rPr lang="en-US" sz="2400" dirty="0">
-                <a:latin typeface="ATT Aleck Sans" panose="020B0503020203020204" pitchFamily="34" charset="0"/>
-                <a:cs typeface="ATT Aleck Sans" panose="020B0503020203020204" pitchFamily="34" charset="0"/>
-              </a:rPr>
-              <a:t> Just run it, and you have a server up </a:t>
-            </a:r>
-            <a:r>
-              <a:rPr lang="en-US" sz="2400">
-                <a:latin typeface="ATT Aleck Sans" panose="020B0503020203020204" pitchFamily="34" charset="0"/>
-                <a:cs typeface="ATT Aleck Sans" panose="020B0503020203020204" pitchFamily="34" charset="0"/>
-              </a:rPr>
-              <a:t>and running.</a:t>
-            </a:r>
-            <a:endParaRPr lang="en-US" sz="2400" dirty="0">
-              <a:latin typeface="ATT Aleck Sans" panose="020B0503020203020204" pitchFamily="34" charset="0"/>
-              <a:cs typeface="ATT Aleck Sans" panose="020B0503020203020204" pitchFamily="34" charset="0"/>
-            </a:endParaRPr>
+            <a:pPr algn="ctr"/>
+            <a:r>
+              <a:rPr lang="en-US" sz="1800" b="1">
+                <a:solidFill>
+                  <a:schemeClr val="bg1"/>
+                </a:solidFill>
+              </a:rPr>
+              <a:t>Web Framework</a:t>
+            </a:r>
+          </a:p>
+          <a:p>
+            <a:pPr algn="ctr"/>
+            <a:r>
+              <a:rPr lang="en-US" sz="1200">
+                <a:solidFill>
+                  <a:schemeClr val="accent1"/>
+                </a:solidFill>
+              </a:rPr>
+              <a:t>(Spring Boot)</a:t>
+            </a:r>
+          </a:p>
+        </p:txBody>
+      </p:sp>
+      <p:sp>
+        <p:nvSpPr>
+          <p:cNvPr id="18" name="Card Routing"/>
+          <p:cNvSpPr/>
+          <p:nvPr/>
+        </p:nvSpPr>
+        <p:spPr>
+          <a:xfrm>
+            <a:off x="609600" y="1550000"/>
+            <a:ext cx="3200000" cy="1200000"/>
+          </a:xfrm>
+          <a:prstGeom prst="roundRect">
+            <a:avLst>
+              <a:gd name="adj" fmla="val 12000"/>
+            </a:avLst>
+          </a:prstGeom>
+          <a:solidFill>
+            <a:schemeClr val="bg1"/>
+          </a:solidFill>
+          <a:ln w="25400">
+            <a:solidFill>
+              <a:schemeClr val="accent2"/>
+            </a:solidFill>
+          </a:ln>
+        </p:spPr>
+        <p:txBody>
+          <a:bodyPr lIns="182880" tIns="91440" rIns="137160" bIns="91440" anchor="ctr">
+            <a:normAutofit/>
+          </a:bodyPr>
+          <a:lstStyle/>
+          <a:p>
+            <a:r>
+              <a:rPr lang="en-US" sz="1400" b="1">
+                <a:solidFill>
+                  <a:schemeClr val="accent2"/>
+                </a:solidFill>
+              </a:rPr>
+              <a:t>Routing</a:t>
+            </a:r>
+          </a:p>
+          <a:p>
+            <a:r>
+              <a:rPr lang="en-US" sz="1050">
+                <a:solidFill>
+                  <a:schemeClr val="tx1"/>
+                </a:solidFill>
+              </a:rPr>
+              <a:t>Map URLs to handlers — no servlet plumbing</a:t>
+            </a:r>
+          </a:p>
+        </p:txBody>
+      </p:sp>
+      <p:sp>
+        <p:nvSpPr>
+          <p:cNvPr id="19" name="Card Dependency Injection"/>
+          <p:cNvSpPr/>
+          <p:nvPr/>
+        </p:nvSpPr>
+        <p:spPr>
+          <a:xfrm>
+            <a:off x="609600" y="3050000"/>
+            <a:ext cx="3200000" cy="1200000"/>
+          </a:xfrm>
+          <a:prstGeom prst="roundRect">
+            <a:avLst>
+              <a:gd name="adj" fmla="val 12000"/>
+            </a:avLst>
+          </a:prstGeom>
+          <a:solidFill>
+            <a:schemeClr val="bg1"/>
+          </a:solidFill>
+          <a:ln w="25400">
+            <a:solidFill>
+              <a:schemeClr val="accent1"/>
+            </a:solidFill>
+          </a:ln>
+        </p:spPr>
+        <p:txBody>
+          <a:bodyPr lIns="182880" tIns="91440" rIns="137160" bIns="91440" anchor="ctr">
+            <a:normAutofit/>
+          </a:bodyPr>
+          <a:lstStyle/>
+          <a:p>
+            <a:r>
+              <a:rPr lang="en-US" sz="1400" b="1">
+                <a:solidFill>
+                  <a:schemeClr val="accent1"/>
+                </a:solidFill>
+              </a:rPr>
+              <a:t>Dependency Injection</a:t>
+            </a:r>
+          </a:p>
+          <a:p>
+            <a:r>
+              <a:rPr lang="en-US" sz="1050">
+                <a:solidFill>
+                  <a:schemeClr val="tx1"/>
+                </a:solidFill>
+              </a:rPr>
+              <a:t>Wire components by contract, not by new()</a:t>
+            </a:r>
+          </a:p>
+        </p:txBody>
+      </p:sp>
+      <p:sp>
+        <p:nvSpPr>
+          <p:cNvPr id="20" name="Card Error Handling"/>
+          <p:cNvSpPr/>
+          <p:nvPr/>
+        </p:nvSpPr>
+        <p:spPr>
+          <a:xfrm>
+            <a:off x="609600" y="4550000"/>
+            <a:ext cx="3200000" cy="1200000"/>
+          </a:xfrm>
+          <a:prstGeom prst="roundRect">
+            <a:avLst>
+              <a:gd name="adj" fmla="val 12000"/>
+            </a:avLst>
+          </a:prstGeom>
+          <a:solidFill>
+            <a:schemeClr val="bg1"/>
+          </a:solidFill>
+          <a:ln w="25400">
+            <a:solidFill>
+              <a:schemeClr val="accent3"/>
+            </a:solidFill>
+          </a:ln>
+        </p:spPr>
+        <p:txBody>
+          <a:bodyPr lIns="182880" tIns="91440" rIns="137160" bIns="91440" anchor="ctr">
+            <a:normAutofit/>
+          </a:bodyPr>
+          <a:lstStyle/>
+          <a:p>
+            <a:r>
+              <a:rPr lang="en-US" sz="1400" b="1">
+                <a:solidFill>
+                  <a:schemeClr val="accent3"/>
+                </a:solidFill>
+              </a:rPr>
+              <a:t>Error Handling</a:t>
+            </a:r>
+          </a:p>
+          <a:p>
+            <a:r>
+              <a:rPr lang="en-US" sz="1050">
+                <a:solidFill>
+                  <a:schemeClr val="tx1"/>
+                </a:solidFill>
+              </a:rPr>
+              <a:t>One place for exceptions and HTTP responses</a:t>
+            </a:r>
+          </a:p>
+        </p:txBody>
+      </p:sp>
+      <p:sp>
+        <p:nvSpPr>
+          <p:cNvPr id="21" name="Card Configuration"/>
+          <p:cNvSpPr/>
+          <p:nvPr/>
+        </p:nvSpPr>
+        <p:spPr>
+          <a:xfrm>
+            <a:off x="8382000" y="1550000"/>
+            <a:ext cx="3200000" cy="1200000"/>
+          </a:xfrm>
+          <a:prstGeom prst="roundRect">
+            <a:avLst>
+              <a:gd name="adj" fmla="val 12000"/>
+            </a:avLst>
+          </a:prstGeom>
+          <a:solidFill>
+            <a:schemeClr val="bg1"/>
+          </a:solidFill>
+          <a:ln w="25400">
+            <a:solidFill>
+              <a:schemeClr val="accent4"/>
+            </a:solidFill>
+          </a:ln>
+        </p:spPr>
+        <p:txBody>
+          <a:bodyPr lIns="182880" tIns="91440" rIns="137160" bIns="91440" anchor="ctr">
+            <a:normAutofit/>
+          </a:bodyPr>
+          <a:lstStyle/>
+          <a:p>
+            <a:r>
+              <a:rPr lang="en-US" sz="1400" b="1">
+                <a:solidFill>
+                  <a:schemeClr val="accent4"/>
+                </a:solidFill>
+              </a:rPr>
+              <a:t>Configuration</a:t>
+            </a:r>
+          </a:p>
+          <a:p>
+            <a:r>
+              <a:rPr lang="en-US" sz="1050">
+                <a:solidFill>
+                  <a:schemeClr val="tx1"/>
+                </a:solidFill>
+              </a:rPr>
+              <a:t>Externalized settings and profiles per env</a:t>
+            </a:r>
+          </a:p>
+        </p:txBody>
+      </p:sp>
+      <p:sp>
+        <p:nvSpPr>
+          <p:cNvPr id="22" name="Card Security"/>
+          <p:cNvSpPr/>
+          <p:nvPr/>
+        </p:nvSpPr>
+        <p:spPr>
+          <a:xfrm>
+            <a:off x="8382000" y="3050000"/>
+            <a:ext cx="3200000" cy="1200000"/>
+          </a:xfrm>
+          <a:prstGeom prst="roundRect">
+            <a:avLst>
+              <a:gd name="adj" fmla="val 12000"/>
+            </a:avLst>
+          </a:prstGeom>
+          <a:solidFill>
+            <a:schemeClr val="bg1"/>
+          </a:solidFill>
+          <a:ln w="25400">
+            <a:solidFill>
+              <a:schemeClr val="accent5"/>
+            </a:solidFill>
+          </a:ln>
+        </p:spPr>
+        <p:txBody>
+          <a:bodyPr lIns="182880" tIns="91440" rIns="137160" bIns="91440" anchor="ctr">
+            <a:normAutofit/>
+          </a:bodyPr>
+          <a:lstStyle/>
+          <a:p>
+            <a:r>
+              <a:rPr lang="en-US" sz="1400" b="1">
+                <a:solidFill>
+                  <a:schemeClr val="accent5"/>
+                </a:solidFill>
+              </a:rPr>
+              <a:t>Security</a:t>
+            </a:r>
+          </a:p>
+          <a:p>
+            <a:r>
+              <a:rPr lang="en-US" sz="1050">
+                <a:solidFill>
+                  <a:schemeClr val="tx1"/>
+                </a:solidFill>
+              </a:rPr>
+              <a:t>Auth, roles and CSRF protection built in</a:t>
+            </a:r>
+          </a:p>
+        </p:txBody>
+      </p:sp>
+      <p:sp>
+        <p:nvSpPr>
+          <p:cNvPr id="23" name="Card Data &amp; Testing"/>
+          <p:cNvSpPr/>
+          <p:nvPr/>
+        </p:nvSpPr>
+        <p:spPr>
+          <a:xfrm>
+            <a:off x="8382000" y="4550000"/>
+            <a:ext cx="3200000" cy="1200000"/>
+          </a:xfrm>
+          <a:prstGeom prst="roundRect">
+            <a:avLst>
+              <a:gd name="adj" fmla="val 12000"/>
+            </a:avLst>
+          </a:prstGeom>
+          <a:solidFill>
+            <a:schemeClr val="bg1"/>
+          </a:solidFill>
+          <a:ln w="25400">
+            <a:solidFill>
+              <a:schemeClr val="accent6"/>
+            </a:solidFill>
+          </a:ln>
+        </p:spPr>
+        <p:txBody>
+          <a:bodyPr lIns="182880" tIns="91440" rIns="137160" bIns="91440" anchor="ctr">
+            <a:normAutofit/>
+          </a:bodyPr>
+          <a:lstStyle/>
+          <a:p>
+            <a:r>
+              <a:rPr lang="en-US" sz="1400" b="1">
+                <a:solidFill>
+                  <a:schemeClr val="accent6"/>
+                </a:solidFill>
+              </a:rPr>
+              <a:t>Data &amp; Testing</a:t>
+            </a:r>
+          </a:p>
+          <a:p>
+            <a:r>
+              <a:rPr lang="en-US" sz="1050">
+                <a:solidFill>
+                  <a:schemeClr val="tx1"/>
+                </a:solidFill>
+              </a:rPr>
+              <a:t>Repositories, transactions, test slices</a:t>
+            </a:r>
+          </a:p>
+        </p:txBody>
+      </p:sp>
+      <p:sp>
+        <p:nvSpPr>
+          <p:cNvPr id="90" name="Footnote"/>
+          <p:cNvSpPr/>
+          <p:nvPr/>
+        </p:nvSpPr>
+        <p:spPr>
+          <a:xfrm>
+            <a:off x="609600" y="6050000"/>
+            <a:ext cx="10972800" cy="400000"/>
+          </a:xfrm>
+          <a:prstGeom prst="rect">
+            <a:avLst/>
+          </a:prstGeom>
+          <a:noFill/>
+        </p:spPr>
+        <p:txBody>
+          <a:bodyPr anchor="ctr">
+            <a:normAutofit/>
+          </a:bodyPr>
+          <a:lstStyle/>
+          <a:p>
+            <a:pPr algn="ctr"/>
+            <a:r>
+              <a:rPr lang="en-US" sz="1200" i="1">
+                <a:solidFill>
+                  <a:schemeClr val="tx1">
+                    <a:alpha val="75000"/>
+                  </a:schemeClr>
+                </a:solidFill>
+              </a:rPr>
+              <a:t>Solved once by the framework - so you write business logic, not plumbing.</a:t>
+            </a:r>
           </a:p>
         </p:txBody>
       </p:sp>
     </p:spTree>
-    <p:extLst>
-      <p:ext uri="{BB962C8B-B14F-4D97-AF65-F5344CB8AC3E}">
-        <p14:creationId xmlns:p14="http://schemas.microsoft.com/office/powerpoint/2010/main" val="2701054565"/>
-      </p:ext>
-    </p:extLst>
   </p:cSld>
   <p:clrMapOvr>
-    <a:overrideClrMapping bg1="dk1" tx1="lt1" bg2="dk2" tx2="lt2" accent1="accent1" accent2="accent2" accent3="accent3" accent4="accent4" accent5="accent5" accent6="accent6" hlink="hlink" folHlink="folHlink"/>
+    <a:masterClrMapping/>
   </p:clrMapOvr>
 </p:sld>
 </file>
@@ -9299,7 +11186,7 @@
           <p:cNvPr id="2" name="Title 1">
             <a:extLst>
               <a:ext uri="{FF2B5EF4-FFF2-40B4-BE49-F238E27FC236}">
-                <a16:creationId xmlns:a16="http://schemas.microsoft.com/office/drawing/2014/main" id="{3D818256-1F68-1CA5-64C3-132D1FE721A4}"/>
+                <a16:creationId xmlns:a16="http://schemas.microsoft.com/office/drawing/2014/main" id="{8F5127E2-9264-E9CB-DD10-E00D462BFAF2}"/>
               </a:ext>
             </a:extLst>
           </p:cNvPr>
@@ -9322,8 +11209,26 @@
                 <a:latin typeface="ATT Aleck Sans" panose="020B0503020203020204" pitchFamily="34" charset="0"/>
                 <a:cs typeface="ATT Aleck Sans" panose="020B0503020203020204" pitchFamily="34" charset="0"/>
               </a:rPr>
-              <a:t>Inversion of Control (IoC)</a:t>
-            </a:r>
+              <a:t>What is </a:t>
+            </a:r>
+            <a:r>
+              <a:rPr lang="en-IL" b="1" dirty="0">
+                <a:latin typeface="ATT Aleck Sans" panose="020B0503020203020204" pitchFamily="34" charset="0"/>
+                <a:cs typeface="ATT Aleck Sans" panose="020B0503020203020204" pitchFamily="34" charset="0"/>
+              </a:rPr>
+              <a:t>Spring Boot</a:t>
+            </a:r>
+            <a:r>
+              <a:rPr lang="en-IL" b="1">
+                <a:latin typeface="ATT Aleck Sans" panose="020B0503020203020204" pitchFamily="34" charset="0"/>
+                <a:cs typeface="ATT Aleck Sans" panose="020B0503020203020204" pitchFamily="34" charset="0"/>
+              </a:rPr>
+              <a:t>?</a:t>
+            </a:r>
+            <a:endParaRPr lang="en-IL" b="1" dirty="0">
+              <a:latin typeface="ATT Aleck Sans" panose="020B0503020203020204" pitchFamily="34" charset="0"/>
+              <a:cs typeface="ATT Aleck Sans" panose="020B0503020203020204" pitchFamily="34" charset="0"/>
+            </a:endParaRPr>
           </a:p>
         </p:txBody>
       </p:sp>
@@ -9332,7 +11237,7 @@
           <p:cNvPr id="3" name="Content Placeholder 2">
             <a:extLst>
               <a:ext uri="{FF2B5EF4-FFF2-40B4-BE49-F238E27FC236}">
-                <a16:creationId xmlns:a16="http://schemas.microsoft.com/office/drawing/2014/main" id="{99E34243-09E5-8F02-1D25-313D3FFD8913}"/>
+                <a16:creationId xmlns:a16="http://schemas.microsoft.com/office/drawing/2014/main" id="{D0BDD530-32D2-007A-86C5-1583B831586C}"/>
               </a:ext>
             </a:extLst>
           </p:cNvPr>
@@ -9345,36 +11250,82 @@
         </p:nvSpPr>
         <p:spPr>
           <a:xfrm>
-            <a:off x="246410" y="1445886"/>
+            <a:off x="603761" y="1435375"/>
             <a:ext cx="8596668" cy="3880773"/>
           </a:xfrm>
         </p:spPr>
         <p:txBody>
           <a:bodyPr>
-            <a:normAutofit/>
+            <a:noAutofit/>
           </a:bodyPr>
           <a:lstStyle/>
           <a:p>
-            <a:pPr marL="457200" lvl="1" indent="0">
-              <a:lnSpc>
-                <a:spcPct val="150000"/>
-              </a:lnSpc>
-              <a:buNone/>
-            </a:pPr>
-            <a:r>
-              <a:rPr lang="en-US" sz="2800" dirty="0">
+            <a:pPr marL="400050"/>
+            <a:r>
+              <a:rPr lang="en-US" sz="2800" i="1" dirty="0">
                 <a:latin typeface="ATT Aleck Sans" panose="020B0503020203020204" pitchFamily="34" charset="0"/>
                 <a:cs typeface="ATT Aleck Sans" panose="020B0503020203020204" pitchFamily="34" charset="0"/>
               </a:rPr>
-              <a:t>Inversion of Control (IoC) is a design principle where the control of object creation and lifecycle management is transferred from the application code to a container or framework.</a:t>
-            </a:r>
+              <a:t>Spring</a:t>
+            </a:r>
+            <a:r>
+              <a:rPr lang="en-US" sz="2800" i="1">
+                <a:latin typeface="ATT Aleck Sans" panose="020B0503020203020204" pitchFamily="34" charset="0"/>
+                <a:cs typeface="ATT Aleck Sans" panose="020B0503020203020204" pitchFamily="34" charset="0"/>
+              </a:rPr>
+              <a:t> - an umbrella of projects that simplify common problems in day-to-day enterprise development.</a:t>
+            </a:r>
+          </a:p>
+          <a:p>
+            <a:pPr marL="400050"/>
+            <a:r>
+              <a:rPr lang="en-US" sz="2800" i="1" dirty="0">
+                <a:latin typeface="ATT Aleck Sans" panose="020B0503020203020204" pitchFamily="34" charset="0"/>
+                <a:cs typeface="ATT Aleck Sans" panose="020B0503020203020204" pitchFamily="34" charset="0"/>
+              </a:rPr>
+              <a:t>Spring Boot </a:t>
+            </a:r>
+            <a:r>
+              <a:rPr lang="en-US" sz="2800" i="1">
+                <a:latin typeface="ATT Aleck Sans" panose="020B0503020203020204" pitchFamily="34" charset="0"/>
+                <a:cs typeface="ATT Aleck Sans" panose="020B0503020203020204" pitchFamily="34" charset="0"/>
+              </a:rPr>
+              <a:t>- built on top of </a:t>
+            </a:r>
+            <a:r>
+              <a:rPr lang="en-US" sz="2800" i="1" dirty="0">
+                <a:latin typeface="ATT Aleck Sans" panose="020B0503020203020204" pitchFamily="34" charset="0"/>
+                <a:cs typeface="ATT Aleck Sans" panose="020B0503020203020204" pitchFamily="34" charset="0"/>
+              </a:rPr>
+              <a:t>Spring</a:t>
+            </a:r>
+            <a:r>
+              <a:rPr lang="en-US" sz="2800" i="1">
+                <a:latin typeface="ATT Aleck Sans" panose="020B0503020203020204" pitchFamily="34" charset="0"/>
+                <a:cs typeface="ATT Aleck Sans" panose="020B0503020203020204" pitchFamily="34" charset="0"/>
+              </a:rPr>
+              <a:t>: a faster, easier way to set up, configure and run applications.</a:t>
+            </a:r>
+          </a:p>
+          <a:p>
+            <a:pPr marL="400050"/>
+            <a:r>
+              <a:rPr lang="en-US" sz="2800" i="1">
+                <a:latin typeface="ATT Aleck Sans" panose="020B0503020203020204" pitchFamily="34" charset="0"/>
+                <a:cs typeface="ATT Aleck Sans" panose="020B0503020203020204" pitchFamily="34" charset="0"/>
+              </a:rPr>
+              <a:t>Opinionated by design: best practices baked in, covering most use cases.</a:t>
+            </a:r>
+            <a:endParaRPr lang="ru-RU" sz="2800" dirty="0">
+              <a:cs typeface="ATT Aleck Sans" panose="020B0503020203020204" pitchFamily="34" charset="0"/>
+            </a:endParaRPr>
           </a:p>
         </p:txBody>
       </p:sp>
     </p:spTree>
     <p:extLst>
       <p:ext uri="{BB962C8B-B14F-4D97-AF65-F5344CB8AC3E}">
-        <p14:creationId xmlns:p14="http://schemas.microsoft.com/office/powerpoint/2010/main" val="732303042"/>
+        <p14:creationId xmlns:p14="http://schemas.microsoft.com/office/powerpoint/2010/main" val="3747451504"/>
       </p:ext>
     </p:extLst>
   </p:cSld>
@@ -9414,7 +11365,7 @@
           <p:cNvPr id="2" name="Title 1">
             <a:extLst>
               <a:ext uri="{FF2B5EF4-FFF2-40B4-BE49-F238E27FC236}">
-                <a16:creationId xmlns:a16="http://schemas.microsoft.com/office/drawing/2014/main" id="{CC0DA605-5F54-5A7E-AFE2-FF24D8BBCE10}"/>
+                <a16:creationId xmlns:a16="http://schemas.microsoft.com/office/drawing/2014/main" id="{8F5127E2-9264-E9CB-DD10-E00D462BFAF2}"/>
               </a:ext>
             </a:extLst>
           </p:cNvPr>
@@ -9433,12 +11384,16 @@
           <a:lstStyle/>
           <a:p>
             <a:r>
-              <a:rPr lang="en-IL" b="1" dirty="0">
+              <a:rPr lang="en-IL" b="1">
                 <a:latin typeface="ATT Aleck Sans" panose="020B0503020203020204" pitchFamily="34" charset="0"/>
                 <a:cs typeface="ATT Aleck Sans" panose="020B0503020203020204" pitchFamily="34" charset="0"/>
               </a:rPr>
-              <a:t>Purposes of IoC</a:t>
-            </a:r>
+              <a:t>What you get out of the box</a:t>
+            </a:r>
+            <a:endParaRPr lang="en-IL" b="1" dirty="0">
+              <a:latin typeface="ATT Aleck Sans" panose="020B0503020203020204" pitchFamily="34" charset="0"/>
+              <a:cs typeface="ATT Aleck Sans" panose="020B0503020203020204" pitchFamily="34" charset="0"/>
+            </a:endParaRPr>
           </a:p>
         </p:txBody>
       </p:sp>
@@ -9447,7 +11402,7 @@
           <p:cNvPr id="3" name="Content Placeholder 2">
             <a:extLst>
               <a:ext uri="{FF2B5EF4-FFF2-40B4-BE49-F238E27FC236}">
-                <a16:creationId xmlns:a16="http://schemas.microsoft.com/office/drawing/2014/main" id="{BC5F8EC1-FE59-2C1C-561E-3C475AD57C09}"/>
+                <a16:creationId xmlns:a16="http://schemas.microsoft.com/office/drawing/2014/main" id="{D0BDD530-32D2-007A-86C5-1583B831586C}"/>
               </a:ext>
             </a:extLst>
           </p:cNvPr>
@@ -9460,7 +11415,7 @@
         </p:nvSpPr>
         <p:spPr>
           <a:xfrm>
-            <a:off x="561720" y="1372313"/>
+            <a:off x="666823" y="1477417"/>
             <a:ext cx="8596668" cy="3880773"/>
           </a:xfrm>
         </p:spPr>
@@ -9470,81 +11425,91 @@
           </a:bodyPr>
           <a:lstStyle/>
           <a:p>
-            <a:pPr>
-              <a:lnSpc>
-                <a:spcPct val="150000"/>
-              </a:lnSpc>
+            <a:pPr marL="57150" indent="0">
+              <a:buNone/>
             </a:pPr>
+            <a:r>
+              <a:rPr lang="en-US" sz="2800" i="1" dirty="0">
+                <a:latin typeface="ATT Aleck Sans" panose="020B0503020203020204" pitchFamily="34" charset="0"/>
+                <a:cs typeface="ATT Aleck Sans" panose="020B0503020203020204" pitchFamily="34" charset="0"/>
+              </a:rPr>
+              <a:t>Spring Boot </a:t>
+            </a:r>
+            <a:r>
+              <a:rPr lang="en-US" sz="2800" dirty="0">
+                <a:latin typeface="ATT Aleck Sans" panose="020B0503020203020204" pitchFamily="34" charset="0"/>
+                <a:cs typeface="ATT Aleck Sans" panose="020B0503020203020204" pitchFamily="34" charset="0"/>
+              </a:rPr>
+              <a:t>is used for creating a stand-alone </a:t>
+            </a:r>
+            <a:br>
+              <a:rPr lang="en-US" sz="2800" dirty="0">
+                <a:latin typeface="ATT Aleck Sans" panose="020B0503020203020204" pitchFamily="34" charset="0"/>
+                <a:cs typeface="ATT Aleck Sans" panose="020B0503020203020204" pitchFamily="34" charset="0"/>
+              </a:rPr>
+            </a:br>
+            <a:r>
+              <a:rPr lang="en-US" sz="2800" i="1" dirty="0">
+                <a:latin typeface="ATT Aleck Sans" panose="020B0503020203020204" pitchFamily="34" charset="0"/>
+                <a:cs typeface="ATT Aleck Sans" panose="020B0503020203020204" pitchFamily="34" charset="0"/>
+              </a:rPr>
+              <a:t>Spring</a:t>
+            </a:r>
+            <a:r>
+              <a:rPr lang="en-US" sz="2800" dirty="0">
+                <a:latin typeface="ATT Aleck Sans" panose="020B0503020203020204" pitchFamily="34" charset="0"/>
+                <a:cs typeface="ATT Aleck Sans" panose="020B0503020203020204" pitchFamily="34" charset="0"/>
+              </a:rPr>
+              <a:t>-based application that you can run easily because it requires minimal Spring configuration.</a:t>
+            </a:r>
+          </a:p>
+          <a:p>
+            <a:pPr lvl="2"/>
             <a:r>
               <a:rPr lang="en-US" sz="2400" dirty="0">
                 <a:latin typeface="ATT Aleck Sans" panose="020B0503020203020204" pitchFamily="34" charset="0"/>
                 <a:cs typeface="ATT Aleck Sans" panose="020B0503020203020204" pitchFamily="34" charset="0"/>
               </a:rPr>
-              <a:t>Focus a module on the task it is designed for</a:t>
-            </a:r>
-          </a:p>
-          <a:p>
-            <a:pPr>
-              <a:lnSpc>
-                <a:spcPct val="150000"/>
-              </a:lnSpc>
-            </a:pPr>
+              <a:t> No need for web servlets; it has Tomcat embedded.</a:t>
+            </a:r>
+          </a:p>
+          <a:p>
+            <a:pPr lvl="2"/>
             <a:r>
               <a:rPr lang="en-US" sz="2400" dirty="0">
                 <a:latin typeface="ATT Aleck Sans" panose="020B0503020203020204" pitchFamily="34" charset="0"/>
                 <a:cs typeface="ATT Aleck Sans" panose="020B0503020203020204" pitchFamily="34" charset="0"/>
               </a:rPr>
-              <a:t>Free modules from assumptions about how other systems do what they do, rely on contracts.</a:t>
-            </a:r>
-          </a:p>
-          <a:p>
-            <a:pPr>
-              <a:lnSpc>
-                <a:spcPct val="150000"/>
-              </a:lnSpc>
-            </a:pPr>
+              <a:t> Configurations are pre-packaged;</a:t>
+            </a:r>
+          </a:p>
+          <a:p>
+            <a:pPr lvl="2"/>
             <a:r>
               <a:rPr lang="en-US" sz="2400" dirty="0">
                 <a:latin typeface="ATT Aleck Sans" panose="020B0503020203020204" pitchFamily="34" charset="0"/>
                 <a:cs typeface="ATT Aleck Sans" panose="020B0503020203020204" pitchFamily="34" charset="0"/>
               </a:rPr>
-              <a:t>Decouple the execution of a task from its implementation</a:t>
-            </a:r>
-          </a:p>
-          <a:p>
-            <a:pPr>
-              <a:lnSpc>
-                <a:spcPct val="150000"/>
-              </a:lnSpc>
-            </a:pPr>
-            <a:r>
-              <a:rPr lang="en-US" sz="2400" dirty="0">
+              <a:t> Just run it, and you have a server up </a:t>
+            </a:r>
+            <a:r>
+              <a:rPr lang="en-US" sz="2400">
                 <a:latin typeface="ATT Aleck Sans" panose="020B0503020203020204" pitchFamily="34" charset="0"/>
                 <a:cs typeface="ATT Aleck Sans" panose="020B0503020203020204" pitchFamily="34" charset="0"/>
               </a:rPr>
-              <a:t>Achieve greater modularity in a program</a:t>
-            </a:r>
-          </a:p>
-          <a:p>
-            <a:pPr>
-              <a:lnSpc>
-                <a:spcPct val="150000"/>
-              </a:lnSpc>
-            </a:pPr>
-            <a:r>
-              <a:rPr lang="en-US" sz="2400" dirty="0">
-                <a:latin typeface="ATT Aleck Sans" panose="020B0503020203020204" pitchFamily="34" charset="0"/>
-                <a:cs typeface="ATT Aleck Sans" panose="020B0503020203020204" pitchFamily="34" charset="0"/>
-              </a:rPr>
-              <a:t>Make testing easier by isolating components or mocking their dependencies</a:t>
-            </a:r>
+              <a:t>and running.</a:t>
+            </a:r>
+            <a:endParaRPr lang="en-US" sz="2400" dirty="0">
+              <a:latin typeface="ATT Aleck Sans" panose="020B0503020203020204" pitchFamily="34" charset="0"/>
+              <a:cs typeface="ATT Aleck Sans" panose="020B0503020203020204" pitchFamily="34" charset="0"/>
+            </a:endParaRPr>
           </a:p>
         </p:txBody>
       </p:sp>
     </p:spTree>
     <p:extLst>
       <p:ext uri="{BB962C8B-B14F-4D97-AF65-F5344CB8AC3E}">
-        <p14:creationId xmlns:p14="http://schemas.microsoft.com/office/powerpoint/2010/main" val="1967367102"/>
+        <p14:creationId xmlns:p14="http://schemas.microsoft.com/office/powerpoint/2010/main" val="2701054565"/>
       </p:ext>
     </p:extLst>
   </p:cSld>
@@ -9558,9 +11523,12 @@
 <p:sld xmlns:a="http://schemas.openxmlformats.org/drawingml/2006/main" xmlns:r="http://schemas.openxmlformats.org/officeDocument/2006/relationships" xmlns:p="http://schemas.openxmlformats.org/presentationml/2006/main">
   <p:cSld>
     <p:bg>
-      <p:bgRef idx="1001">
-        <a:schemeClr val="bg2"/>
-      </p:bgRef>
+      <p:bgPr>
+        <a:solidFill>
+          <a:schemeClr val="bg2"/>
+        </a:solidFill>
+        <a:effectLst/>
+      </p:bgPr>
     </p:bg>
     <p:spTree>
       <p:nvGrpSpPr>
@@ -9581,7 +11549,7 @@
           <p:cNvPr id="2" name="Title 1">
             <a:extLst>
               <a:ext uri="{FF2B5EF4-FFF2-40B4-BE49-F238E27FC236}">
-                <a16:creationId xmlns:a16="http://schemas.microsoft.com/office/drawing/2014/main" id="{33613CEB-B33C-5604-02BC-3036BDA84F19}"/>
+                <a16:creationId xmlns:a16="http://schemas.microsoft.com/office/drawing/2014/main" id="{3D818256-1F68-1CA5-64C3-132D1FE721A4}"/>
               </a:ext>
             </a:extLst>
           </p:cNvPr>
@@ -9594,14 +11562,17 @@
         </p:nvSpPr>
         <p:spPr/>
         <p:txBody>
-          <a:bodyPr vert="horz" lIns="91440" tIns="45720" rIns="91440" bIns="45720" rtlCol="0" anchor="t">
+          <a:bodyPr>
             <a:normAutofit/>
           </a:bodyPr>
           <a:lstStyle/>
           <a:p>
             <a:r>
-              <a:rPr lang="en-US" b="1" dirty="0"/>
-              <a:t>Let’s create a class using the traditional OOP programming approach</a:t>
+              <a:rPr lang="en-IL" b="1">
+                <a:latin typeface="ATT Aleck Sans" panose="020B0503020203020204" pitchFamily="34" charset="0"/>
+                <a:cs typeface="ATT Aleck Sans" panose="020B0503020203020204" pitchFamily="34" charset="0"/>
+              </a:rPr>
+              <a:t>Inversion of Control (IoC)</a:t>
             </a:r>
           </a:p>
         </p:txBody>
@@ -9611,7 +11582,7 @@
           <p:cNvPr id="3" name="Content Placeholder 2">
             <a:extLst>
               <a:ext uri="{FF2B5EF4-FFF2-40B4-BE49-F238E27FC236}">
-                <a16:creationId xmlns:a16="http://schemas.microsoft.com/office/drawing/2014/main" id="{03CDAC2F-998A-9E7F-DD71-83F787124D43}"/>
+                <a16:creationId xmlns:a16="http://schemas.microsoft.com/office/drawing/2014/main" id="{99E34243-09E5-8F02-1D25-313D3FFD8913}"/>
               </a:ext>
             </a:extLst>
           </p:cNvPr>
@@ -9619,349 +11590,174 @@
             <a:spLocks noGrp="1"/>
           </p:cNvSpPr>
           <p:nvPr>
-            <p:ph sz="half" idx="1"/>
+            <p:ph idx="1"/>
           </p:nvPr>
         </p:nvSpPr>
         <p:spPr>
           <a:xfrm>
-            <a:off x="714702" y="1954925"/>
-            <a:ext cx="9732581" cy="4086438"/>
+            <a:off x="246410" y="1445886"/>
+            <a:ext cx="8596668" cy="2377440"/>
           </a:xfrm>
         </p:spPr>
         <p:txBody>
-          <a:bodyPr vert="horz" lIns="91440" tIns="45720" rIns="91440" bIns="45720" rtlCol="0">
+          <a:bodyPr>
+            <a:normAutofit fontScale="92500" lnSpcReduction="10000"/>
+          </a:bodyPr>
+          <a:lstStyle/>
+          <a:p>
+            <a:pPr marL="457200" lvl="1" indent="0">
+              <a:lnSpc>
+                <a:spcPct val="150000"/>
+              </a:lnSpc>
+              <a:buNone/>
+            </a:pPr>
+            <a:r>
+              <a:rPr lang="en-US" sz="2800" dirty="0">
+                <a:latin typeface="ATT Aleck Sans" panose="020B0503020203020204" pitchFamily="34" charset="0"/>
+                <a:cs typeface="ATT Aleck Sans" panose="020B0503020203020204" pitchFamily="34" charset="0"/>
+              </a:rPr>
+              <a:t>Inversion of Control (IoC) is a design principle where the control of object creation and lifecycle management is transferred from the application code to a container or framework.</a:t>
+            </a:r>
+          </a:p>
+        </p:txBody>
+      </p:sp>
+      <p:sp>
+        <p:nvSpPr>
+          <p:cNvPr id="60" name="Without IoC"/>
+          <p:cNvSpPr/>
+          <p:nvPr/>
+        </p:nvSpPr>
+        <p:spPr>
+          <a:xfrm>
+            <a:off x="1200000" y="4250000"/>
+            <a:ext cx="3800000" cy="1600000"/>
+          </a:xfrm>
+          <a:prstGeom prst="roundRect">
+            <a:avLst>
+              <a:gd name="adj" fmla="val 10000"/>
+            </a:avLst>
+          </a:prstGeom>
+          <a:solidFill>
+            <a:schemeClr val="bg1"/>
+          </a:solidFill>
+          <a:ln w="25400">
+            <a:solidFill>
+              <a:schemeClr val="accent5"/>
+            </a:solidFill>
+          </a:ln>
+        </p:spPr>
+        <p:txBody>
+          <a:bodyPr lIns="182880" tIns="91440" rIns="137160" bIns="91440" anchor="ctr">
             <a:normAutofit/>
           </a:bodyPr>
           <a:lstStyle/>
           <a:p>
-            <a:pPr marL="0" indent="0">
-              <a:buNone/>
-            </a:pPr>
-            <a:r>
-              <a:rPr lang="en-US" sz="2000" dirty="0">
+            <a:r>
+              <a:rPr lang="en-US" sz="1500" b="1">
                 <a:solidFill>
-                  <a:srgbClr val="FFFFFF"/>
+                  <a:schemeClr val="accent5"/>
                 </a:solidFill>
-                <a:latin typeface="ATT Aleck Sans" panose="020B0503020203020204" pitchFamily="34" charset="0"/>
-                <a:cs typeface="ATT Aleck Sans" panose="020B0503020203020204" pitchFamily="34" charset="0"/>
-              </a:rPr>
-              <a:t>In traditional OOP programming, when an object (e.g., a Computer) is created, it also instantiates its dependent classes (e.g., Processor, RAM instances):</a:t>
-            </a:r>
-          </a:p>
-          <a:p>
-            <a:pPr marL="0" indent="0"/>
-            <a:endParaRPr lang="en-US" sz="2000" dirty="0">
-              <a:solidFill>
-                <a:srgbClr val="FFFFFF"/>
-              </a:solidFill>
-              <a:latin typeface="ATT Aleck Sans" panose="020B0503020203020204" pitchFamily="34" charset="0"/>
-              <a:cs typeface="ATT Aleck Sans" panose="020B0503020203020204" pitchFamily="34" charset="0"/>
-            </a:endParaRPr>
-          </a:p>
-          <a:p>
-            <a:endParaRPr lang="en-US" sz="2000" dirty="0">
-              <a:solidFill>
-                <a:srgbClr val="FFFFFF"/>
-              </a:solidFill>
-              <a:latin typeface="ATT Aleck Sans" panose="020B0503020203020204" pitchFamily="34" charset="0"/>
-              <a:cs typeface="ATT Aleck Sans" panose="020B0503020203020204" pitchFamily="34" charset="0"/>
-            </a:endParaRPr>
-          </a:p>
-        </p:txBody>
-      </p:sp>
-      <p:sp>
-        <p:nvSpPr>
-          <p:cNvPr id="7" name="Content Placeholder 2">
-            <a:extLst>
-              <a:ext uri="{FF2B5EF4-FFF2-40B4-BE49-F238E27FC236}">
-                <a16:creationId xmlns:a16="http://schemas.microsoft.com/office/drawing/2014/main" id="{510CD3CA-7661-11B9-AF07-F39AF318C632}"/>
-              </a:ext>
-            </a:extLst>
-          </p:cNvPr>
-          <p:cNvSpPr txBox="1">
-            <a:spLocks/>
-          </p:cNvSpPr>
+              </a:rPr>
+              <a:t>Without IoC</a:t>
+            </a:r>
+          </a:p>
+          <a:p>
+            <a:r>
+              <a:rPr lang="en-US" sz="1100">
+                <a:solidFill>
+                  <a:schemeClr val="tx1"/>
+                </a:solidFill>
+              </a:rPr>
+              <a:t>Your code creates and owns its dependencies (new Processor(...)).</a:t>
+            </a:r>
+          </a:p>
+        </p:txBody>
+      </p:sp>
+      <p:sp>
+        <p:nvSpPr>
+          <p:cNvPr id="61" name="With IoC"/>
+          <p:cNvSpPr/>
           <p:nvPr/>
         </p:nvSpPr>
         <p:spPr>
           <a:xfrm>
-            <a:off x="677333" y="2821899"/>
-            <a:ext cx="4184035" cy="974035"/>
+            <a:off x="7100000" y="4250000"/>
+            <a:ext cx="3800000" cy="1600000"/>
           </a:xfrm>
-          <a:prstGeom prst="rect">
+          <a:prstGeom prst="roundRect">
+            <a:avLst>
+              <a:gd name="adj" fmla="val 10000"/>
+            </a:avLst>
+          </a:prstGeom>
+          <a:solidFill>
+            <a:schemeClr val="bg1"/>
+          </a:solidFill>
+          <a:ln w="25400">
+            <a:solidFill>
+              <a:schemeClr val="accent1"/>
+            </a:solidFill>
+          </a:ln>
+        </p:spPr>
+        <p:txBody>
+          <a:bodyPr lIns="182880" tIns="91440" rIns="137160" bIns="91440" anchor="ctr">
+            <a:normAutofit/>
+          </a:bodyPr>
+          <a:lstStyle/>
+          <a:p>
+            <a:r>
+              <a:rPr lang="en-US" sz="1500" b="1">
+                <a:solidFill>
+                  <a:schemeClr val="accent1"/>
+                </a:solidFill>
+              </a:rPr>
+              <a:t>With IoC</a:t>
+            </a:r>
+          </a:p>
+          <a:p>
+            <a:r>
+              <a:rPr lang="en-US" sz="1100">
+                <a:solidFill>
+                  <a:schemeClr val="tx1"/>
+                </a:solidFill>
+              </a:rPr>
+              <a:t>A container creates the objects and hands them to your code.</a:t>
+            </a:r>
+          </a:p>
+        </p:txBody>
+      </p:sp>
+      <p:sp>
+        <p:nvSpPr>
+          <p:cNvPr id="62" name="Arrow"/>
+          <p:cNvSpPr/>
+          <p:nvPr/>
+        </p:nvSpPr>
+        <p:spPr>
+          <a:xfrm>
+            <a:off x="5250000" y="4850000"/>
+            <a:ext cx="1600000" cy="400000"/>
+          </a:xfrm>
+          <a:prstGeom prst="rightArrow">
             <a:avLst/>
           </a:prstGeom>
+          <a:solidFill>
+            <a:schemeClr val="accent1"/>
+          </a:solidFill>
+          <a:ln>
+            <a:noFill/>
+          </a:ln>
         </p:spPr>
         <p:txBody>
-          <a:bodyPr vert="horz" lIns="91440" tIns="45720" rIns="91440" bIns="45720" rtlCol="0">
-            <a:normAutofit/>
-          </a:bodyPr>
-          <a:lstStyle>
-            <a:lvl1pPr marL="342900" indent="-342900" algn="l" defTabSz="457200" rtl="0" eaLnBrk="1" latinLnBrk="0" hangingPunct="1">
-              <a:spcBef>
-                <a:spcPts val="1000"/>
-              </a:spcBef>
-              <a:spcAft>
-                <a:spcPts val="0"/>
-              </a:spcAft>
-              <a:buClr>
-                <a:schemeClr val="accent1"/>
-              </a:buClr>
-              <a:buSzPct val="80000"/>
-              <a:buFont typeface="Wingdings 3" charset="2"/>
-              <a:buChar char=""/>
-              <a:defRPr sz="1800" kern="1200">
-                <a:solidFill>
-                  <a:schemeClr val="tx1">
-                    <a:lumMod val="75000"/>
-                    <a:lumOff val="25000"/>
-                  </a:schemeClr>
-                </a:solidFill>
-                <a:latin typeface="+mn-lt"/>
-                <a:ea typeface="+mn-ea"/>
-                <a:cs typeface="+mn-cs"/>
-              </a:defRPr>
-            </a:lvl1pPr>
-            <a:lvl2pPr marL="742950" indent="-285750" algn="l" defTabSz="457200" rtl="0" eaLnBrk="1" latinLnBrk="0" hangingPunct="1">
-              <a:spcBef>
-                <a:spcPts val="1000"/>
-              </a:spcBef>
-              <a:spcAft>
-                <a:spcPts val="0"/>
-              </a:spcAft>
-              <a:buClr>
-                <a:schemeClr val="accent1"/>
-              </a:buClr>
-              <a:buSzPct val="80000"/>
-              <a:buFont typeface="Wingdings 3" charset="2"/>
-              <a:buChar char=""/>
-              <a:defRPr sz="1600" kern="1200">
-                <a:solidFill>
-                  <a:schemeClr val="tx1">
-                    <a:lumMod val="75000"/>
-                    <a:lumOff val="25000"/>
-                  </a:schemeClr>
-                </a:solidFill>
-                <a:latin typeface="+mn-lt"/>
-                <a:ea typeface="+mn-ea"/>
-                <a:cs typeface="+mn-cs"/>
-              </a:defRPr>
-            </a:lvl2pPr>
-            <a:lvl3pPr marL="1143000" indent="-228600" algn="l" defTabSz="457200" rtl="0" eaLnBrk="1" latinLnBrk="0" hangingPunct="1">
-              <a:spcBef>
-                <a:spcPts val="1000"/>
-              </a:spcBef>
-              <a:spcAft>
-                <a:spcPts val="0"/>
-              </a:spcAft>
-              <a:buClr>
-                <a:schemeClr val="accent1"/>
-              </a:buClr>
-              <a:buSzPct val="80000"/>
-              <a:buFont typeface="Wingdings 3" charset="2"/>
-              <a:buChar char=""/>
-              <a:defRPr sz="1400" kern="1200">
-                <a:solidFill>
-                  <a:schemeClr val="tx1">
-                    <a:lumMod val="75000"/>
-                    <a:lumOff val="25000"/>
-                  </a:schemeClr>
-                </a:solidFill>
-                <a:latin typeface="+mn-lt"/>
-                <a:ea typeface="+mn-ea"/>
-                <a:cs typeface="+mn-cs"/>
-              </a:defRPr>
-            </a:lvl3pPr>
-            <a:lvl4pPr marL="1600200" indent="-228600" algn="l" defTabSz="457200" rtl="0" eaLnBrk="1" latinLnBrk="0" hangingPunct="1">
-              <a:spcBef>
-                <a:spcPts val="1000"/>
-              </a:spcBef>
-              <a:spcAft>
-                <a:spcPts val="0"/>
-              </a:spcAft>
-              <a:buClr>
-                <a:schemeClr val="accent1"/>
-              </a:buClr>
-              <a:buSzPct val="80000"/>
-              <a:buFont typeface="Wingdings 3" charset="2"/>
-              <a:buChar char=""/>
-              <a:defRPr sz="1200" kern="1200">
-                <a:solidFill>
-                  <a:schemeClr val="tx1">
-                    <a:lumMod val="75000"/>
-                    <a:lumOff val="25000"/>
-                  </a:schemeClr>
-                </a:solidFill>
-                <a:latin typeface="+mn-lt"/>
-                <a:ea typeface="+mn-ea"/>
-                <a:cs typeface="+mn-cs"/>
-              </a:defRPr>
-            </a:lvl4pPr>
-            <a:lvl5pPr marL="2057400" indent="-228600" algn="l" defTabSz="457200" rtl="0" eaLnBrk="1" latinLnBrk="0" hangingPunct="1">
-              <a:spcBef>
-                <a:spcPts val="1000"/>
-              </a:spcBef>
-              <a:spcAft>
-                <a:spcPts val="0"/>
-              </a:spcAft>
-              <a:buClr>
-                <a:schemeClr val="accent1"/>
-              </a:buClr>
-              <a:buSzPct val="80000"/>
-              <a:buFont typeface="Wingdings 3" charset="2"/>
-              <a:buChar char=""/>
-              <a:defRPr sz="1200" kern="1200">
-                <a:solidFill>
-                  <a:schemeClr val="tx1">
-                    <a:lumMod val="75000"/>
-                    <a:lumOff val="25000"/>
-                  </a:schemeClr>
-                </a:solidFill>
-                <a:latin typeface="+mn-lt"/>
-                <a:ea typeface="+mn-ea"/>
-                <a:cs typeface="+mn-cs"/>
-              </a:defRPr>
-            </a:lvl5pPr>
-            <a:lvl6pPr marL="2514600" indent="-228600" algn="l" defTabSz="457200" rtl="0" eaLnBrk="1" latinLnBrk="0" hangingPunct="1">
-              <a:spcBef>
-                <a:spcPts val="1000"/>
-              </a:spcBef>
-              <a:spcAft>
-                <a:spcPts val="0"/>
-              </a:spcAft>
-              <a:buClr>
-                <a:schemeClr val="accent1"/>
-              </a:buClr>
-              <a:buSzPct val="80000"/>
-              <a:buFont typeface="Wingdings 3" charset="2"/>
-              <a:buChar char=""/>
-              <a:defRPr sz="1200" kern="1200">
-                <a:solidFill>
-                  <a:schemeClr val="tx1">
-                    <a:lumMod val="75000"/>
-                    <a:lumOff val="25000"/>
-                  </a:schemeClr>
-                </a:solidFill>
-                <a:latin typeface="+mn-lt"/>
-                <a:ea typeface="+mn-ea"/>
-                <a:cs typeface="+mn-cs"/>
-              </a:defRPr>
-            </a:lvl6pPr>
-            <a:lvl7pPr marL="2971800" indent="-228600" algn="l" defTabSz="457200" rtl="0" eaLnBrk="1" latinLnBrk="0" hangingPunct="1">
-              <a:spcBef>
-                <a:spcPts val="1000"/>
-              </a:spcBef>
-              <a:spcAft>
-                <a:spcPts val="0"/>
-              </a:spcAft>
-              <a:buClr>
-                <a:schemeClr val="accent1"/>
-              </a:buClr>
-              <a:buSzPct val="80000"/>
-              <a:buFont typeface="Wingdings 3" charset="2"/>
-              <a:buChar char=""/>
-              <a:defRPr sz="1200" kern="1200">
-                <a:solidFill>
-                  <a:schemeClr val="tx1">
-                    <a:lumMod val="75000"/>
-                    <a:lumOff val="25000"/>
-                  </a:schemeClr>
-                </a:solidFill>
-                <a:latin typeface="+mn-lt"/>
-                <a:ea typeface="+mn-ea"/>
-                <a:cs typeface="+mn-cs"/>
-              </a:defRPr>
-            </a:lvl7pPr>
-            <a:lvl8pPr marL="3429000" indent="-228600" algn="l" defTabSz="457200" rtl="0" eaLnBrk="1" latinLnBrk="0" hangingPunct="1">
-              <a:spcBef>
-                <a:spcPts val="1000"/>
-              </a:spcBef>
-              <a:spcAft>
-                <a:spcPts val="0"/>
-              </a:spcAft>
-              <a:buClr>
-                <a:schemeClr val="accent1"/>
-              </a:buClr>
-              <a:buSzPct val="80000"/>
-              <a:buFont typeface="Wingdings 3" charset="2"/>
-              <a:buChar char=""/>
-              <a:defRPr sz="1200" kern="1200">
-                <a:solidFill>
-                  <a:schemeClr val="tx1">
-                    <a:lumMod val="75000"/>
-                    <a:lumOff val="25000"/>
-                  </a:schemeClr>
-                </a:solidFill>
-                <a:latin typeface="+mn-lt"/>
-                <a:ea typeface="+mn-ea"/>
-                <a:cs typeface="+mn-cs"/>
-              </a:defRPr>
-            </a:lvl8pPr>
-            <a:lvl9pPr marL="3886200" indent="-228600" algn="l" defTabSz="457200" rtl="0" eaLnBrk="1" latinLnBrk="0" hangingPunct="1">
-              <a:spcBef>
-                <a:spcPts val="1000"/>
-              </a:spcBef>
-              <a:spcAft>
-                <a:spcPts val="0"/>
-              </a:spcAft>
-              <a:buClr>
-                <a:schemeClr val="accent1"/>
-              </a:buClr>
-              <a:buSzPct val="80000"/>
-              <a:buFont typeface="Wingdings 3" charset="2"/>
-              <a:buChar char=""/>
-              <a:defRPr sz="1200" kern="1200">
-                <a:solidFill>
-                  <a:schemeClr val="tx1">
-                    <a:lumMod val="75000"/>
-                    <a:lumOff val="25000"/>
-                  </a:schemeClr>
-                </a:solidFill>
-                <a:latin typeface="+mn-lt"/>
-                <a:ea typeface="+mn-ea"/>
-                <a:cs typeface="+mn-cs"/>
-              </a:defRPr>
-            </a:lvl9pPr>
-          </a:lstStyle>
-          <a:p>
-            <a:endParaRPr lang="en-IL" dirty="0"/>
-          </a:p>
-        </p:txBody>
-      </p:sp>
-      <p:pic>
-        <p:nvPicPr>
-          <p:cNvPr id="4" name="Picture 3">
-            <a:extLst>
-              <a:ext uri="{FF2B5EF4-FFF2-40B4-BE49-F238E27FC236}">
-                <a16:creationId xmlns:a16="http://schemas.microsoft.com/office/drawing/2014/main" id="{3C1C26D4-78CB-FC76-B716-3912090A6456}"/>
-              </a:ext>
-            </a:extLst>
-          </p:cNvPr>
-          <p:cNvPicPr>
-            <a:picLocks noChangeAspect="1"/>
-          </p:cNvPicPr>
-          <p:nvPr/>
-        </p:nvPicPr>
-        <p:blipFill>
-          <a:blip r:embed="rId2"/>
-          <a:stretch>
-            <a:fillRect/>
-          </a:stretch>
-        </p:blipFill>
-        <p:spPr>
-          <a:xfrm>
-            <a:off x="780392" y="2901832"/>
-            <a:ext cx="8962697" cy="3494348"/>
-          </a:xfrm>
-          <a:prstGeom prst="rect">
-            <a:avLst/>
-          </a:prstGeom>
-        </p:spPr>
-      </p:pic>
+          <a:bodyPr anchor="ctr"/>
+          <a:lstStyle/>
+          <a:p>
+            <a:endParaRPr lang="en-US"/>
+          </a:p>
+        </p:txBody>
+      </p:sp>
     </p:spTree>
     <p:extLst>
       <p:ext uri="{BB962C8B-B14F-4D97-AF65-F5344CB8AC3E}">
-        <p14:creationId xmlns:p14="http://schemas.microsoft.com/office/powerpoint/2010/main" val="2255410467"/>
+        <p14:creationId xmlns:p14="http://schemas.microsoft.com/office/powerpoint/2010/main" val="732303042"/>
       </p:ext>
     </p:extLst>
   </p:cSld>
@@ -10524,6 +12320,15 @@
 </file>
 
 <file path=customXml/item1.xml><?xml version="1.0" encoding="utf-8"?>
+<?mso-contentType ?>
+<FormTemplates xmlns="http://schemas.microsoft.com/sharepoint/v3/contenttype/forms">
+  <Display>DocumentLibraryForm</Display>
+  <Edit>DocumentLibraryForm</Edit>
+  <New>DocumentLibraryForm</New>
+</FormTemplates>
+</file>
+
+<file path=customXml/item2.xml><?xml version="1.0" encoding="utf-8"?>
 <p:properties xmlns:p="http://schemas.microsoft.com/office/2006/metadata/properties" xmlns:xsi="http://www.w3.org/2001/XMLSchema-instance" xmlns:pc="http://schemas.microsoft.com/office/infopath/2007/PartnerControls">
   <documentManagement>
     <lcf76f155ced4ddcb4097134ff3c332f xmlns="858d5390-0f7b-4213-8bcd-0cd5cf778ba6">
@@ -10532,15 +12337,6 @@
     <TaxCatchAll xmlns="e5f39eeb-dc9c-40bf-a733-e74d7baf73b9" xsi:nil="true"/>
   </documentManagement>
 </p:properties>
-</file>
-
-<file path=customXml/item2.xml><?xml version="1.0" encoding="utf-8"?>
-<?mso-contentType ?>
-<FormTemplates xmlns="http://schemas.microsoft.com/sharepoint/v3/contenttype/forms">
-  <Display>DocumentLibraryForm</Display>
-  <Edit>DocumentLibraryForm</Edit>
-  <New>DocumentLibraryForm</New>
-</FormTemplates>
 </file>
 
 <file path=customXml/item3.xml><?xml version="1.0" encoding="utf-8"?>
@@ -10792,20 +12588,20 @@
 </file>
 
 <file path=customXml/itemProps1.xml><?xml version="1.0" encoding="utf-8"?>
+<ds:datastoreItem xmlns:ds="http://schemas.openxmlformats.org/officeDocument/2006/customXml" ds:itemID="{CAAF7FB3-E9ED-4EED-B8B3-D582CBAD96FA}">
+  <ds:schemaRefs>
+    <ds:schemaRef ds:uri="http://schemas.microsoft.com/sharepoint/v3/contenttype/forms"/>
+  </ds:schemaRefs>
+</ds:datastoreItem>
+</file>
+
+<file path=customXml/itemProps2.xml><?xml version="1.0" encoding="utf-8"?>
 <ds:datastoreItem xmlns:ds="http://schemas.openxmlformats.org/officeDocument/2006/customXml" ds:itemID="{2B532926-D782-41F9-BAB4-3CFD211C0FE2}">
   <ds:schemaRefs>
     <ds:schemaRef ds:uri="http://schemas.microsoft.com/office/2006/metadata/properties"/>
     <ds:schemaRef ds:uri="http://schemas.microsoft.com/office/infopath/2007/PartnerControls"/>
     <ds:schemaRef ds:uri="858d5390-0f7b-4213-8bcd-0cd5cf778ba6"/>
     <ds:schemaRef ds:uri="e5f39eeb-dc9c-40bf-a733-e74d7baf73b9"/>
-  </ds:schemaRefs>
-</ds:datastoreItem>
-</file>
-
-<file path=customXml/itemProps2.xml><?xml version="1.0" encoding="utf-8"?>
-<ds:datastoreItem xmlns:ds="http://schemas.openxmlformats.org/officeDocument/2006/customXml" ds:itemID="{CAAF7FB3-E9ED-4EED-B8B3-D582CBAD96FA}">
-  <ds:schemaRefs>
-    <ds:schemaRef ds:uri="http://schemas.microsoft.com/sharepoint/v3/contenttype/forms"/>
   </ds:schemaRefs>
 </ds:datastoreItem>
 </file>
